--- a/projeto/entregaveis/Apresentacao_PTL.pptx
+++ b/projeto/entregaveis/Apresentacao_PTL.pptx
@@ -25,9 +25,10 @@
     <p:sldId id="273" r:id="rId19"/>
     <p:sldId id="274" r:id="rId20"/>
     <p:sldId id="275" r:id="rId21"/>
+    <p:sldId id="276" r:id="rId22"/>
   </p:sldIdLst>
   <p:notesMasterIdLst>
-    <p:notesMasterId r:id="rId22"/>
+    <p:notesMasterId r:id="rId23"/>
   </p:notesMasterIdLst>
   <p:sldSz cx="12192000" cy="6858000"/>
   <p:notesSz cx="6858000" cy="12192000"/>
@@ -126,7 +127,7 @@
   <p:extLst>
     <p:ext uri="{521415D9-36F7-43E2-AB2F-B90AF26B5E84}">
       <p14:sectionLst xmlns:p14="http://schemas.microsoft.com/office/powerpoint/2010/main">
-        <p14:section name="Abertura" id="{953b322e-203f-2f24-fbc3-ffe2b5df6a22}">
+        <p14:section name="Abertura" id="{b2d9b1f1-22fa-bde3-f8b2-0adac9096441}">
           <p14:sldIdLst>
             <p14:sldId id="256"/>
             <p14:sldId id="257"/>
@@ -134,7 +135,7 @@
             <p14:sldId id="259"/>
           </p14:sldIdLst>
         </p14:section>
-        <p14:section name="Arquiteturas" id="{dd2c9928-35e9-e27e-aeee-34089a9cfb18}">
+        <p14:section name="Arquiteturas" id="{4645df77-651a-c04a-d833-d6c909fd6b99}">
           <p14:sldIdLst>
             <p14:sldId id="260"/>
             <p14:sldId id="261"/>
@@ -142,28 +143,29 @@
             <p14:sldId id="263"/>
           </p14:sldIdLst>
         </p14:section>
-        <p14:section name="A estação" id="{4a8de64a-2b46-51b1-5c01-29dfd9062c24}">
+        <p14:section name="A estação" id="{64617fa1-d537-cf73-62b1-e35a6f49e71a}">
           <p14:sldIdLst>
             <p14:sldId id="264"/>
             <p14:sldId id="265"/>
             <p14:sldId id="266"/>
             <p14:sldId id="267"/>
             <p14:sldId id="268"/>
+            <p14:sldId id="269"/>
           </p14:sldIdLst>
         </p14:section>
-        <p14:section name="Orçamento" id="{8964325b-1c0d-a3e8-bb3e-2d52d8da50e3}">
+        <p14:section name="Orçamento" id="{6c7c98f7-b4dc-df81-8f8d-eee63744bfa8}">
           <p14:sldIdLst>
-            <p14:sldId id="269"/>
             <p14:sldId id="270"/>
             <p14:sldId id="271"/>
+            <p14:sldId id="272"/>
           </p14:sldIdLst>
         </p14:section>
-        <p14:section name="Próximos passos" id="{8888cc92-cc6e-7d67-dfb5-5e150816c45d}">
+        <p14:section name="Próximos passos" id="{9b78558b-3e05-b09e-a027-6858d88e72a8}">
           <p14:sldIdLst>
-            <p14:sldId id="272"/>
             <p14:sldId id="273"/>
             <p14:sldId id="274"/>
             <p14:sldId id="275"/>
+            <p14:sldId id="276"/>
           </p14:sldIdLst>
         </p14:section>
       </p14:sectionLst>
@@ -945,7 +947,7 @@
           <a:p>
             <a:r>
               <a:rPr lang="en-US" dirty="0"/>
-              <a:t>Estação 05: 209 endereços. 49 de alto giro (29 com display próprio + 20 nos blocos dos andares 4-5) e 160 de baixo giro em 6 zonas. O tamanho da zona é parâmetro e será ajustado no piloto.</a:t>
+              <a:t>Planta conforme o desenho enviado pela operação. Lado esquerdo do corredor: prédios 020-031; lado direito: 032 até o último; prédio 015 (150-153) na cabeceira. Os blocos do baixo giro são de costas entre estações vizinhas. Medidas a confirmar com as fotos.</a:t>
             </a:r>
             <a:endParaRPr lang="en-US" dirty="0"/>
           </a:p>
@@ -1033,7 +1035,7 @@
           <a:p>
             <a:r>
               <a:rPr lang="en-US" dirty="0"/>
-              <a:t>O requisito central da operação é reduzir manutenção. Cada módulo se conecta por RJ45; o nó de coluna concentra os displays de um prédio.</a:t>
+              <a:t>A altura de cada endereço depende de quantos endereços o prédio tem. Estação 05: 209 endereços. 49 de alto giro (29 com display próprio + 20 nos blocos dos andares 4-5) e 160 de baixo giro em 6 zonas. O tamanho da zona é parâmetro e será ajustado no piloto.</a:t>
             </a:r>
             <a:endParaRPr lang="en-US" dirty="0"/>
           </a:p>
@@ -1121,7 +1123,7 @@
           <a:p>
             <a:r>
               <a:rPr lang="en-US" dirty="0"/>
-              <a:t>Telas do app A1. Com itens pendentes, a segunda leitura gera um alerta e exige nova leitura para fechar; a pendência fica registrada para a conferência.</a:t>
+              <a:t>O requisito central da operação é reduzir manutenção. Cada módulo se conecta por RJ45; o nó de coluna concentra os displays de um prédio.</a:t>
             </a:r>
             <a:endParaRPr lang="en-US" dirty="0"/>
           </a:p>
@@ -1209,7 +1211,7 @@
           <a:p>
             <a:r>
               <a:rPr lang="en-US" dirty="0"/>
-              <a:t>Para o arquiteto de software: o serviço lê os itens por views no Sybase para não acoplar ao modelo do WMS. Linguagem e hospedagem do serviço ficam para a decisão da arquitetura.</a:t>
+              <a:t>Telas do app A1. Com itens pendentes, a segunda leitura gera um alerta e exige nova leitura para fechar; a pendência fica registrada para a conferência.</a:t>
             </a:r>
             <a:endParaRPr lang="en-US" dirty="0"/>
           </a:p>
@@ -1297,7 +1299,7 @@
           <a:p>
             <a:r>
               <a:rPr lang="en-US" dirty="0"/>
-              <a:t/>
+              <a:t>Para o arquiteto de software: o serviço lê os itens por views no Sybase para não acoplar ao modelo do WMS. Linguagem e hospedagem do serviço ficam para a decisão da arquitetura.</a:t>
             </a:r>
             <a:endParaRPr lang="en-US" dirty="0"/>
           </a:p>
@@ -1385,7 +1387,7 @@
           <a:p>
             <a:r>
               <a:rPr lang="en-US" dirty="0"/>
-              <a:t>Fonte: Orcamento_PTL.xlsx. A placa própria (EMS) só se paga em escala por causa do projeto (≈ R$ 15 mil) e da importação. Todas as quantidades e preços são editáveis na planilha.</a:t>
+              <a:t/>
             </a:r>
             <a:endParaRPr lang="en-US" dirty="0"/>
           </a:p>
@@ -1473,7 +1475,7 @@
           <a:p>
             <a:r>
               <a:rPr lang="en-US" dirty="0"/>
-              <a:t>Valores com instalação. 12 V × 5 V: o custo de peças fica praticamente igual (R$ 187 mil × R$ 186 mil), mas 5 V exige mais pontos de alimentação e aumenta a manutenção — por isso a recomendação é 12 V.</a:t>
+              <a:t>Fonte: Orcamento_PTL.xlsx. A placa própria (EMS) só se paga em escala por causa do projeto (≈ R$ 15 mil) e da importação. Todas as quantidades e preços são editáveis na planilha.</a:t>
             </a:r>
             <a:endParaRPr lang="en-US" dirty="0"/>
           </a:p>
@@ -1561,7 +1563,7 @@
           <a:p>
             <a:r>
               <a:rPr lang="en-US" dirty="0"/>
-              <a:t>Prazos estimados; dependem da disponibilidade da equipe e da compra das peças.</a:t>
+              <a:t>Valores com instalação. 12 V × 5 V: o custo de peças fica praticamente igual (R$ 187 mil × R$ 186 mil), mas 5 V exige mais pontos de alimentação e aumenta a manutenção — por isso a recomendação é 12 V.</a:t>
             </a:r>
             <a:endParaRPr lang="en-US" dirty="0"/>
           </a:p>
@@ -1649,7 +1651,7 @@
           <a:p>
             <a:r>
               <a:rPr lang="en-US" dirty="0"/>
-              <a:t>Detalhes completos na seção 14 do documento técnico.</a:t>
+              <a:t>Prazos estimados; dependem da disponibilidade da equipe e da compra das peças.</a:t>
             </a:r>
             <a:endParaRPr lang="en-US" dirty="0"/>
           </a:p>
@@ -1737,7 +1739,7 @@
           <a:p>
             <a:r>
               <a:rPr lang="en-US" dirty="0"/>
-              <a:t>Abrir o simulador (repositório picking_to_light, pasta simulador-3d): python iniciar_3d.py. Usar a estação 05 com os 209 endereços reais.</a:t>
+              <a:t>Detalhes completos na seção 14 do documento técnico.</a:t>
             </a:r>
             <a:endParaRPr lang="en-US" dirty="0"/>
           </a:p>
@@ -1913,7 +1915,7 @@
           <a:p>
             <a:r>
               <a:rPr lang="en-US" dirty="0"/>
-              <a:t>Fechamento: as quatro decisões permitem iniciar o protótipo de bancada na próxima semana.</a:t>
+              <a:t>Abrir o simulador (repositório picking_to_light, pasta simulador-3d): python iniciar_3d.py. Usar a estação 05 com os 209 endereços reais.</a:t>
             </a:r>
             <a:endParaRPr lang="en-US" dirty="0"/>
           </a:p>
@@ -1937,6 +1939,94 @@
             <a:fld id="{F7021451-1387-4CA6-816F-3879F97B5CBC}" type="slidenum">
               <a:rPr lang="en-US"/>
               <a:t>20</a:t>
+            </a:fld>
+            <a:endParaRPr lang="en-US"/>
+          </a:p>
+        </p:txBody>
+      </p:sp>
+    </p:spTree>
+    <p:extLst>
+      <p:ext uri="{BB962C8B-B14F-4D97-AF65-F5344CB8AC3E}">
+        <p14:creationId xmlns:p14="http://schemas.microsoft.com/office/powerpoint/2010/main" val="1024086991"/>
+      </p:ext>
+    </p:extLst>
+  </p:cSld>
+  <p:clrMapOvr>
+    <a:masterClrMapping/>
+  </p:clrMapOvr>
+</p:notes>
+</file>
+
+<file path=ppt/notesSlides/notesSlide21.xml><?xml version="1.0" encoding="utf-8"?>
+<p:notes xmlns:a="http://schemas.openxmlformats.org/drawingml/2006/main" xmlns:r="http://schemas.openxmlformats.org/officeDocument/2006/relationships" xmlns:p="http://schemas.openxmlformats.org/presentationml/2006/main">
+  <p:cSld>
+    <p:spTree>
+      <p:nvGrpSpPr>
+        <p:cNvPr id="1" name=""/>
+        <p:cNvGrpSpPr/>
+        <p:nvPr/>
+      </p:nvGrpSpPr>
+      <p:grpSpPr>
+        <a:xfrm>
+          <a:off x="0" y="0"/>
+          <a:ext cx="0" cy="0"/>
+          <a:chOff x="0" y="0"/>
+          <a:chExt cx="0" cy="0"/>
+        </a:xfrm>
+      </p:grpSpPr>
+      <p:sp>
+        <p:nvSpPr>
+          <p:cNvPr id="2" name="Slide Image Placeholder 1"/>
+          <p:cNvSpPr>
+            <a:spLocks noGrp="1" noRot="1" noChangeAspect="1"/>
+          </p:cNvSpPr>
+          <p:nvPr>
+            <p:ph type="sldImg"/>
+          </p:nvPr>
+        </p:nvSpPr>
+        <p:spPr/>
+      </p:sp>
+      <p:sp>
+        <p:nvSpPr>
+          <p:cNvPr id="3" name="Notes Placeholder 2"/>
+          <p:cNvSpPr>
+            <a:spLocks noGrp="1"/>
+          </p:cNvSpPr>
+          <p:nvPr>
+            <p:ph type="body" idx="1"/>
+          </p:nvPr>
+        </p:nvSpPr>
+        <p:spPr/>
+        <p:txBody>
+          <a:bodyPr/>
+          <a:lstStyle/>
+          <a:p>
+            <a:r>
+              <a:rPr lang="en-US" dirty="0"/>
+              <a:t>Fechamento: as quatro decisões permitem iniciar o protótipo de bancada na próxima semana.</a:t>
+            </a:r>
+            <a:endParaRPr lang="en-US" dirty="0"/>
+          </a:p>
+        </p:txBody>
+      </p:sp>
+      <p:sp>
+        <p:nvSpPr>
+          <p:cNvPr id="4" name="Slide Number Placeholder 3"/>
+          <p:cNvSpPr>
+            <a:spLocks noGrp="1"/>
+          </p:cNvSpPr>
+          <p:nvPr>
+            <p:ph type="sldNum" sz="quarter" idx="10"/>
+          </p:nvPr>
+        </p:nvSpPr>
+        <p:spPr/>
+        <p:txBody>
+          <a:bodyPr/>
+          <a:lstStyle/>
+          <a:p>
+            <a:fld id="{F7021451-1387-4CA6-816F-3879F97B5CBC}" type="slidenum">
+              <a:rPr lang="en-US"/>
+              <a:t>21</a:t>
             </a:fld>
             <a:endParaRPr lang="en-US"/>
           </a:p>
@@ -3838,7 +3928,7 @@
                   <a:schemeClr val="tx1"/>
                 </a:solidFill>
               </a:rPr>
-              <a:t>Cada endereço de alto giro tem display; o baixo giro é atendido por zonas</a:t>
+              <a:t>A bacia entra pela transferência, é separada e volta à esteira</a:t>
             </a:r>
             <a:endParaRPr lang="en-US" sz="2600" dirty="0"/>
           </a:p>
@@ -3846,7 +3936,7 @@
       </p:sp>
       <p:pic>
         <p:nvPicPr>
-          <p:cNvPr id="3" name="Image 0" descr="/home/claude/ptl-projeto/diagramas/layout_estacao.png">    </p:cNvPr>
+          <p:cNvPr id="3" name="Image 0" descr="/home/claude/ptl-projeto/diagramas/planta_estacao.png">    </p:cNvPr>
           <p:cNvPicPr>
             <a:picLocks noChangeAspect="1"/>
           </p:cNvPicPr>
@@ -3860,230 +3950,14 @@
         </p:blipFill>
         <p:spPr>
           <a:xfrm>
-            <a:off x="1300942" y="1188720"/>
-            <a:ext cx="9559636" cy="4206240"/>
+            <a:off x="1280160" y="1143000"/>
+            <a:ext cx="9601200" cy="5120640"/>
           </a:xfrm>
           <a:prstGeom prst="rect">
             <a:avLst/>
           </a:prstGeom>
         </p:spPr>
       </p:pic>
-      <p:sp>
-        <p:nvSpPr>
-          <p:cNvPr id="4" name="Shape 1"/>
-          <p:cNvSpPr/>
-          <p:nvPr/>
-        </p:nvSpPr>
-        <p:spPr>
-          <a:xfrm>
-            <a:off x="548640" y="5623560"/>
-            <a:ext cx="256032" cy="256032"/>
-          </a:xfrm>
-          <a:prstGeom prst="ellipse">
-            <a:avLst/>
-          </a:prstGeom>
-          <a:solidFill>
-            <a:schemeClr val="accent2"/>
-          </a:solidFill>
-          <a:ln w="12700">
-            <a:solidFill>
-              <a:schemeClr val="accent2"/>
-            </a:solidFill>
-            <a:prstDash val="solid"/>
-          </a:ln>
-        </p:spPr>
-      </p:sp>
-      <p:sp>
-        <p:nvSpPr>
-          <p:cNvPr id="5" name="Text 2"/>
-          <p:cNvSpPr txBox="1"/>
-          <p:nvPr/>
-        </p:nvSpPr>
-        <p:spPr>
-          <a:xfrm>
-            <a:off x="914400" y="5486400"/>
-            <a:ext cx="3291840" cy="594360"/>
-          </a:xfrm>
-          <a:prstGeom prst="rect">
-            <a:avLst/>
-          </a:prstGeom>
-          <a:noFill/>
-          <a:ln/>
-        </p:spPr>
-        <p:txBody>
-          <a:bodyPr wrap="square" lIns="0" tIns="0" rIns="0" bIns="0" rtlCol="0" anchor="ctr"/>
-          <a:lstStyle/>
-          <a:p>
-            <a:pPr indent="0" marL="0">
-              <a:buNone/>
-            </a:pPr>
-            <a:r>
-              <a:rPr lang="en-US" sz="1200" b="1" dirty="0">
-                <a:solidFill>
-                  <a:schemeClr val="tx1"/>
-                </a:solidFill>
-              </a:rPr>
-              <a:t>Alto giro, andares 0-3: </a:t>
-            </a:r>
-            <a:pPr indent="0" marL="0">
-              <a:buNone/>
-            </a:pPr>
-            <a:r>
-              <a:rPr lang="en-US" sz="1200" dirty="0">
-                <a:solidFill>
-                  <a:schemeClr val="accent6"/>
-                </a:solidFill>
-              </a:rPr>
-              <a:t>1 display de quantidade por endereço (29 a 35 por estação)</a:t>
-            </a:r>
-            <a:endParaRPr lang="en-US" sz="1200" dirty="0"/>
-          </a:p>
-        </p:txBody>
-      </p:sp>
-      <p:sp>
-        <p:nvSpPr>
-          <p:cNvPr id="6" name="Shape 3"/>
-          <p:cNvSpPr/>
-          <p:nvPr/>
-        </p:nvSpPr>
-        <p:spPr>
-          <a:xfrm>
-            <a:off x="4297680" y="5623560"/>
-            <a:ext cx="256032" cy="256032"/>
-          </a:xfrm>
-          <a:prstGeom prst="ellipse">
-            <a:avLst/>
-          </a:prstGeom>
-          <a:solidFill>
-            <a:schemeClr val="accent3"/>
-          </a:solidFill>
-          <a:ln w="12700">
-            <a:solidFill>
-              <a:schemeClr val="accent3"/>
-            </a:solidFill>
-            <a:prstDash val="solid"/>
-          </a:ln>
-        </p:spPr>
-      </p:sp>
-      <p:sp>
-        <p:nvSpPr>
-          <p:cNvPr id="7" name="Text 4"/>
-          <p:cNvSpPr txBox="1"/>
-          <p:nvPr/>
-        </p:nvSpPr>
-        <p:spPr>
-          <a:xfrm>
-            <a:off x="4663440" y="5486400"/>
-            <a:ext cx="3291840" cy="594360"/>
-          </a:xfrm>
-          <a:prstGeom prst="rect">
-            <a:avLst/>
-          </a:prstGeom>
-          <a:noFill/>
-          <a:ln/>
-        </p:spPr>
-        <p:txBody>
-          <a:bodyPr wrap="square" lIns="0" tIns="0" rIns="0" bIns="0" rtlCol="0" anchor="ctr"/>
-          <a:lstStyle/>
-          <a:p>
-            <a:pPr indent="0" marL="0">
-              <a:buNone/>
-            </a:pPr>
-            <a:r>
-              <a:rPr lang="en-US" sz="1200" b="1" dirty="0">
-                <a:solidFill>
-                  <a:schemeClr val="tx1"/>
-                </a:solidFill>
-              </a:rPr>
-              <a:t>Alto giro, andares 4-5: </a:t>
-            </a:r>
-            <a:pPr indent="0" marL="0">
-              <a:buNone/>
-            </a:pPr>
-            <a:r>
-              <a:rPr lang="en-US" sz="1200" dirty="0">
-                <a:solidFill>
-                  <a:schemeClr val="accent6"/>
-                </a:solidFill>
-              </a:rPr>
-              <a:t>2 blocos por estação (esq./dir.) com endereço + quantidade</a:t>
-            </a:r>
-            <a:endParaRPr lang="en-US" sz="1200" dirty="0"/>
-          </a:p>
-        </p:txBody>
-      </p:sp>
-      <p:sp>
-        <p:nvSpPr>
-          <p:cNvPr id="8" name="Shape 5"/>
-          <p:cNvSpPr/>
-          <p:nvPr/>
-        </p:nvSpPr>
-        <p:spPr>
-          <a:xfrm>
-            <a:off x="8046720" y="5623560"/>
-            <a:ext cx="256032" cy="256032"/>
-          </a:xfrm>
-          <a:prstGeom prst="ellipse">
-            <a:avLst/>
-          </a:prstGeom>
-          <a:solidFill>
-            <a:schemeClr val="accent1"/>
-          </a:solidFill>
-          <a:ln w="12700">
-            <a:solidFill>
-              <a:schemeClr val="accent1"/>
-            </a:solidFill>
-            <a:prstDash val="solid"/>
-          </a:ln>
-        </p:spPr>
-      </p:sp>
-      <p:sp>
-        <p:nvSpPr>
-          <p:cNvPr id="9" name="Text 6"/>
-          <p:cNvSpPr txBox="1"/>
-          <p:nvPr/>
-        </p:nvSpPr>
-        <p:spPr>
-          <a:xfrm>
-            <a:off x="8412480" y="5486400"/>
-            <a:ext cx="3291840" cy="594360"/>
-          </a:xfrm>
-          <a:prstGeom prst="rect">
-            <a:avLst/>
-          </a:prstGeom>
-          <a:noFill/>
-          <a:ln/>
-        </p:spPr>
-        <p:txBody>
-          <a:bodyPr wrap="square" lIns="0" tIns="0" rIns="0" bIns="0" rtlCol="0" anchor="ctr"/>
-          <a:lstStyle/>
-          <a:p>
-            <a:pPr indent="0" marL="0">
-              <a:buNone/>
-            </a:pPr>
-            <a:r>
-              <a:rPr lang="en-US" sz="1200" b="1" dirty="0">
-                <a:solidFill>
-                  <a:schemeClr val="tx1"/>
-                </a:solidFill>
-              </a:rPr>
-              <a:t>Baixo giro: </a:t>
-            </a:r>
-            <a:pPr indent="0" marL="0">
-              <a:buNone/>
-            </a:pPr>
-            <a:r>
-              <a:rPr lang="en-US" sz="1200" dirty="0">
-                <a:solidFill>
-                  <a:schemeClr val="accent6"/>
-                </a:solidFill>
-              </a:rPr>
-              <a:t>1 display de endereço + quantidade a cada 4 prédios (6 a 9 zonas)</a:t>
-            </a:r>
-            <a:endParaRPr lang="en-US" sz="1200" dirty="0"/>
-          </a:p>
-        </p:txBody>
-      </p:sp>
       <p:sp>
         <p:nvSpPr>
           <p:cNvPr id="25" name="Slide Number Placeholder 0"/>
@@ -4186,7 +4060,7 @@
                   <a:schemeClr val="tx1"/>
                 </a:solidFill>
               </a:rPr>
-              <a:t>Conector em todos os trechos: display trocado em menos de 5 minutos</a:t>
+              <a:t>Andar 0 em cima; cada endereço de alto giro tem display e o baixo giro usa zonas</a:t>
             </a:r>
             <a:endParaRPr lang="en-US" sz="2600" dirty="0"/>
           </a:p>
@@ -4194,7 +4068,7 @@
       </p:sp>
       <p:pic>
         <p:nvPicPr>
-          <p:cNvPr id="3" name="Image 0" descr="/home/claude/ptl-projeto/diagramas/modulos.png">    </p:cNvPr>
+          <p:cNvPr id="3" name="Image 0" descr="/home/claude/ptl-projeto/diagramas/layout_estacao.png">    </p:cNvPr>
           <p:cNvPicPr>
             <a:picLocks noChangeAspect="1"/>
           </p:cNvPicPr>
@@ -4208,97 +4082,49 @@
         </p:blipFill>
         <p:spPr>
           <a:xfrm>
-            <a:off x="457200" y="1188720"/>
-            <a:ext cx="6766560" cy="2271631"/>
+            <a:off x="457200" y="1280160"/>
+            <a:ext cx="11247120" cy="3749040"/>
           </a:xfrm>
           <a:prstGeom prst="rect">
             <a:avLst/>
           </a:prstGeom>
         </p:spPr>
       </p:pic>
-      <p:pic>
-        <p:nvPicPr>
-          <p:cNvPr id="4" name="Image 1" descr="/home/claude/ptl-projeto/diagramas/cabeamento.png">    </p:cNvPr>
-          <p:cNvPicPr>
-            <a:picLocks noChangeAspect="1"/>
-          </p:cNvPicPr>
-          <p:nvPr/>
-        </p:nvPicPr>
-        <p:blipFill>
-          <a:blip r:embed="rId2"/>
-          <a:stretch>
-            <a:fillRect/>
-          </a:stretch>
-        </p:blipFill>
-        <p:spPr>
-          <a:xfrm>
-            <a:off x="640080" y="3611880"/>
-            <a:ext cx="6400800" cy="2743200"/>
-          </a:xfrm>
-          <a:prstGeom prst="rect">
-            <a:avLst/>
-          </a:prstGeom>
-        </p:spPr>
-      </p:pic>
-      <p:sp>
-        <p:nvSpPr>
-          <p:cNvPr id="5" name="Shape 1"/>
+      <p:sp>
+        <p:nvSpPr>
+          <p:cNvPr id="4" name="Shape 1"/>
           <p:cNvSpPr/>
           <p:nvPr/>
         </p:nvSpPr>
         <p:spPr>
           <a:xfrm>
-            <a:off x="7589520" y="1325880"/>
-            <a:ext cx="548640" cy="548640"/>
+            <a:off x="548640" y="5623560"/>
+            <a:ext cx="256032" cy="256032"/>
           </a:xfrm>
           <a:prstGeom prst="ellipse">
             <a:avLst/>
           </a:prstGeom>
           <a:solidFill>
-            <a:schemeClr val="tx1"/>
+            <a:schemeClr val="accent2"/>
           </a:solidFill>
           <a:ln w="12700">
             <a:solidFill>
-              <a:schemeClr val="tx1"/>
+              <a:schemeClr val="accent2"/>
             </a:solidFill>
             <a:prstDash val="solid"/>
           </a:ln>
         </p:spPr>
       </p:sp>
-      <p:pic>
-        <p:nvPicPr>
-          <p:cNvPr id="6" name="Image 2" descr="preencoded.png">    </p:cNvPr>
-          <p:cNvPicPr>
-            <a:picLocks noChangeAspect="1"/>
-          </p:cNvPicPr>
-          <p:nvPr/>
-        </p:nvPicPr>
-        <p:blipFill>
-          <a:blip r:embed="rId3"/>
-          <a:stretch>
-            <a:fillRect/>
-          </a:stretch>
-        </p:blipFill>
-        <p:spPr>
-          <a:xfrm>
-            <a:off x="7721194" y="1457554"/>
-            <a:ext cx="285293" cy="285293"/>
-          </a:xfrm>
-          <a:prstGeom prst="rect">
-            <a:avLst/>
-          </a:prstGeom>
-        </p:spPr>
-      </p:pic>
-      <p:sp>
-        <p:nvSpPr>
-          <p:cNvPr id="7" name="Text 2"/>
+      <p:sp>
+        <p:nvSpPr>
+          <p:cNvPr id="5" name="Text 2"/>
           <p:cNvSpPr txBox="1"/>
           <p:nvPr/>
         </p:nvSpPr>
         <p:spPr>
           <a:xfrm>
-            <a:off x="8275320" y="1280160"/>
-            <a:ext cx="3383280" cy="365760"/>
+            <a:off x="914400" y="5486400"/>
+            <a:ext cx="3291840" cy="594360"/>
           </a:xfrm>
           <a:prstGeom prst="rect">
             <a:avLst/>
@@ -4314,112 +4140,63 @@
               <a:buNone/>
             </a:pPr>
             <a:r>
-              <a:rPr lang="en-US" sz="1600" b="1" dirty="0">
+              <a:rPr lang="en-US" sz="1200" b="1" dirty="0">
                 <a:solidFill>
                   <a:schemeClr val="tx1"/>
                 </a:solidFill>
               </a:rPr>
-              <a:t>Cat5e com RJ45</a:t>
-            </a:r>
-            <a:endParaRPr lang="en-US" sz="1600" dirty="0"/>
-          </a:p>
-        </p:txBody>
-      </p:sp>
-      <p:sp>
-        <p:nvSpPr>
-          <p:cNvPr id="8" name="Text 3"/>
-          <p:cNvSpPr txBox="1"/>
-          <p:nvPr/>
-        </p:nvSpPr>
-        <p:spPr>
-          <a:xfrm>
-            <a:off x="8275320" y="1645920"/>
-            <a:ext cx="3383280" cy="777240"/>
-          </a:xfrm>
-          <a:prstGeom prst="rect">
-            <a:avLst/>
-          </a:prstGeom>
-          <a:noFill/>
-          <a:ln/>
-        </p:spPr>
-        <p:txBody>
-          <a:bodyPr wrap="square" lIns="0" tIns="0" rIns="0" bIns="0" rtlCol="0" anchor="t"/>
-          <a:lstStyle/>
-          <a:p>
+              <a:t>Alto giro, andares 0-3 (de cima): </a:t>
+            </a:r>
             <a:pPr indent="0" marL="0">
               <a:buNone/>
             </a:pPr>
             <a:r>
-              <a:rPr lang="en-US" sz="1300" dirty="0">
+              <a:rPr lang="en-US" sz="1200" dirty="0">
                 <a:solidFill>
                   <a:schemeClr val="accent6"/>
                 </a:solidFill>
               </a:rPr>
-              <a:t>RS-485 e 12 V no mesmo cabo; cada trecho é um cabo curto com conector.</a:t>
-            </a:r>
-            <a:endParaRPr lang="en-US" sz="1300" dirty="0"/>
-          </a:p>
-        </p:txBody>
-      </p:sp>
-      <p:sp>
-        <p:nvSpPr>
-          <p:cNvPr id="9" name="Shape 4"/>
+              <a:t>1 display de quantidade por endereço (29 a 35 por estação)</a:t>
+            </a:r>
+            <a:endParaRPr lang="en-US" sz="1200" dirty="0"/>
+          </a:p>
+        </p:txBody>
+      </p:sp>
+      <p:sp>
+        <p:nvSpPr>
+          <p:cNvPr id="6" name="Shape 3"/>
           <p:cNvSpPr/>
           <p:nvPr/>
         </p:nvSpPr>
         <p:spPr>
           <a:xfrm>
-            <a:off x="7589520" y="2560320"/>
-            <a:ext cx="548640" cy="548640"/>
+            <a:off x="4297680" y="5623560"/>
+            <a:ext cx="256032" cy="256032"/>
           </a:xfrm>
           <a:prstGeom prst="ellipse">
             <a:avLst/>
           </a:prstGeom>
           <a:solidFill>
-            <a:schemeClr val="tx1"/>
+            <a:schemeClr val="accent3"/>
           </a:solidFill>
           <a:ln w="12700">
             <a:solidFill>
-              <a:schemeClr val="tx1"/>
+              <a:schemeClr val="accent3"/>
             </a:solidFill>
             <a:prstDash val="solid"/>
           </a:ln>
         </p:spPr>
       </p:sp>
-      <p:pic>
-        <p:nvPicPr>
-          <p:cNvPr id="10" name="Image 3" descr="preencoded.png">    </p:cNvPr>
-          <p:cNvPicPr>
-            <a:picLocks noChangeAspect="1"/>
-          </p:cNvPicPr>
-          <p:nvPr/>
-        </p:nvPicPr>
-        <p:blipFill>
-          <a:blip r:embed="rId4"/>
-          <a:stretch>
-            <a:fillRect/>
-          </a:stretch>
-        </p:blipFill>
-        <p:spPr>
-          <a:xfrm>
-            <a:off x="7721194" y="2691994"/>
-            <a:ext cx="285293" cy="285293"/>
-          </a:xfrm>
-          <a:prstGeom prst="rect">
-            <a:avLst/>
-          </a:prstGeom>
-        </p:spPr>
-      </p:pic>
-      <p:sp>
-        <p:nvSpPr>
-          <p:cNvPr id="11" name="Text 5"/>
+      <p:sp>
+        <p:nvSpPr>
+          <p:cNvPr id="7" name="Text 4"/>
           <p:cNvSpPr txBox="1"/>
           <p:nvPr/>
         </p:nvSpPr>
         <p:spPr>
           <a:xfrm>
-            <a:off x="8275320" y="2514600"/>
-            <a:ext cx="3383280" cy="365760"/>
+            <a:off x="4663440" y="5486400"/>
+            <a:ext cx="3291840" cy="594360"/>
           </a:xfrm>
           <a:prstGeom prst="rect">
             <a:avLst/>
@@ -4435,63 +4212,38 @@
               <a:buNone/>
             </a:pPr>
             <a:r>
-              <a:rPr lang="en-US" sz="1600" b="1" dirty="0">
+              <a:rPr lang="en-US" sz="1200" b="1" dirty="0">
                 <a:solidFill>
                   <a:schemeClr val="tx1"/>
                 </a:solidFill>
               </a:rPr>
-              <a:t>Sem fio contínuo na canaleta</a:t>
-            </a:r>
-            <a:endParaRPr lang="en-US" sz="1600" dirty="0"/>
-          </a:p>
-        </p:txBody>
-      </p:sp>
-      <p:sp>
-        <p:nvSpPr>
-          <p:cNvPr id="12" name="Text 6"/>
-          <p:cNvSpPr txBox="1"/>
-          <p:nvPr/>
-        </p:nvSpPr>
-        <p:spPr>
-          <a:xfrm>
-            <a:off x="8275320" y="2880360"/>
-            <a:ext cx="3383280" cy="777240"/>
-          </a:xfrm>
-          <a:prstGeom prst="rect">
-            <a:avLst/>
-          </a:prstGeom>
-          <a:noFill/>
-          <a:ln/>
-        </p:spPr>
-        <p:txBody>
-          <a:bodyPr wrap="square" lIns="0" tIns="0" rIns="0" bIns="0" rtlCol="0" anchor="t"/>
-          <a:lstStyle/>
-          <a:p>
+              <a:t>Alto giro, andares 4-5: </a:t>
+            </a:r>
             <a:pPr indent="0" marL="0">
               <a:buNone/>
             </a:pPr>
             <a:r>
-              <a:rPr lang="en-US" sz="1300" dirty="0">
+              <a:rPr lang="en-US" sz="1200" dirty="0">
                 <a:solidFill>
                   <a:schemeClr val="accent6"/>
                 </a:solidFill>
               </a:rPr>
-              <a:t>Diferente do sistema anterior: o módulo com defeito sai sem abrir a canaleta.</a:t>
-            </a:r>
-            <a:endParaRPr lang="en-US" sz="1300" dirty="0"/>
-          </a:p>
-        </p:txBody>
-      </p:sp>
-      <p:sp>
-        <p:nvSpPr>
-          <p:cNvPr id="13" name="Shape 7"/>
+              <a:t>2 blocos por estação (esq./dir.) com endereço + quantidade</a:t>
+            </a:r>
+            <a:endParaRPr lang="en-US" sz="1200" dirty="0"/>
+          </a:p>
+        </p:txBody>
+      </p:sp>
+      <p:sp>
+        <p:nvSpPr>
+          <p:cNvPr id="8" name="Shape 5"/>
           <p:cNvSpPr/>
           <p:nvPr/>
         </p:nvSpPr>
         <p:spPr>
           <a:xfrm>
-            <a:off x="7589520" y="3794760"/>
-            <a:ext cx="548640" cy="548640"/>
+            <a:off x="8046720" y="5623560"/>
+            <a:ext cx="256032" cy="256032"/>
           </a:xfrm>
           <a:prstGeom prst="ellipse">
             <a:avLst/>
@@ -4507,40 +4259,16 @@
           </a:ln>
         </p:spPr>
       </p:sp>
-      <p:pic>
-        <p:nvPicPr>
-          <p:cNvPr id="14" name="Image 4" descr="preencoded.png">    </p:cNvPr>
-          <p:cNvPicPr>
-            <a:picLocks noChangeAspect="1"/>
-          </p:cNvPicPr>
-          <p:nvPr/>
-        </p:nvPicPr>
-        <p:blipFill>
-          <a:blip r:embed="rId5"/>
-          <a:stretch>
-            <a:fillRect/>
-          </a:stretch>
-        </p:blipFill>
-        <p:spPr>
-          <a:xfrm>
-            <a:off x="7721194" y="3926434"/>
-            <a:ext cx="285293" cy="285293"/>
-          </a:xfrm>
-          <a:prstGeom prst="rect">
-            <a:avLst/>
-          </a:prstGeom>
-        </p:spPr>
-      </p:pic>
-      <p:sp>
-        <p:nvSpPr>
-          <p:cNvPr id="15" name="Text 8"/>
+      <p:sp>
+        <p:nvSpPr>
+          <p:cNvPr id="9" name="Text 6"/>
           <p:cNvSpPr txBox="1"/>
           <p:nvPr/>
         </p:nvSpPr>
         <p:spPr>
           <a:xfrm>
-            <a:off x="8275320" y="3749040"/>
-            <a:ext cx="3383280" cy="365760"/>
+            <a:off x="8412480" y="5486400"/>
+            <a:ext cx="3291840" cy="594360"/>
           </a:xfrm>
           <a:prstGeom prst="rect">
             <a:avLst/>
@@ -4556,171 +4284,25 @@
               <a:buNone/>
             </a:pPr>
             <a:r>
-              <a:rPr lang="en-US" sz="1600" b="1" dirty="0">
+              <a:rPr lang="en-US" sz="1200" b="1" dirty="0">
                 <a:solidFill>
                   <a:schemeClr val="tx1"/>
                 </a:solidFill>
               </a:rPr>
-              <a:t>12 V em vez de 5 V</a:t>
-            </a:r>
-            <a:endParaRPr lang="en-US" sz="1600" dirty="0"/>
-          </a:p>
-        </p:txBody>
-      </p:sp>
-      <p:sp>
-        <p:nvSpPr>
-          <p:cNvPr id="16" name="Text 9"/>
-          <p:cNvSpPr txBox="1"/>
-          <p:nvPr/>
-        </p:nvSpPr>
-        <p:spPr>
-          <a:xfrm>
-            <a:off x="8275320" y="4114800"/>
-            <a:ext cx="3383280" cy="777240"/>
-          </a:xfrm>
-          <a:prstGeom prst="rect">
-            <a:avLst/>
-          </a:prstGeom>
-          <a:noFill/>
-          <a:ln/>
-        </p:spPr>
-        <p:txBody>
-          <a:bodyPr wrap="square" lIns="0" tIns="0" rIns="0" bIns="0" rtlCol="0" anchor="t"/>
-          <a:lstStyle/>
-          <a:p>
+              <a:t>Baixo giro: </a:t>
+            </a:r>
             <a:pPr indent="0" marL="0">
               <a:buNone/>
             </a:pPr>
             <a:r>
-              <a:rPr lang="en-US" sz="1300" dirty="0">
+              <a:rPr lang="en-US" sz="1200" dirty="0">
                 <a:solidFill>
                   <a:schemeClr val="accent6"/>
                 </a:solidFill>
               </a:rPr>
-              <a:t>Em 10 m de cabo a queda chega a 34% em 5 V e a 14% em 12 V, absorvida pelos reguladores locais.</a:t>
-            </a:r>
-            <a:endParaRPr lang="en-US" sz="1300" dirty="0"/>
-          </a:p>
-        </p:txBody>
-      </p:sp>
-      <p:sp>
-        <p:nvSpPr>
-          <p:cNvPr id="17" name="Shape 10"/>
-          <p:cNvSpPr/>
-          <p:nvPr/>
-        </p:nvSpPr>
-        <p:spPr>
-          <a:xfrm>
-            <a:off x="7589520" y="5029200"/>
-            <a:ext cx="548640" cy="548640"/>
-          </a:xfrm>
-          <a:prstGeom prst="ellipse">
-            <a:avLst/>
-          </a:prstGeom>
-          <a:solidFill>
-            <a:schemeClr val="tx1"/>
-          </a:solidFill>
-          <a:ln w="12700">
-            <a:solidFill>
-              <a:schemeClr val="tx1"/>
-            </a:solidFill>
-            <a:prstDash val="solid"/>
-          </a:ln>
-        </p:spPr>
-      </p:sp>
-      <p:pic>
-        <p:nvPicPr>
-          <p:cNvPr id="18" name="Image 5" descr="preencoded.png">    </p:cNvPr>
-          <p:cNvPicPr>
-            <a:picLocks noChangeAspect="1"/>
-          </p:cNvPicPr>
-          <p:nvPr/>
-        </p:nvPicPr>
-        <p:blipFill>
-          <a:blip r:embed="rId6"/>
-          <a:stretch>
-            <a:fillRect/>
-          </a:stretch>
-        </p:blipFill>
-        <p:spPr>
-          <a:xfrm>
-            <a:off x="7721194" y="5160874"/>
-            <a:ext cx="285293" cy="285293"/>
-          </a:xfrm>
-          <a:prstGeom prst="rect">
-            <a:avLst/>
-          </a:prstGeom>
-        </p:spPr>
-      </p:pic>
-      <p:sp>
-        <p:nvSpPr>
-          <p:cNvPr id="19" name="Text 11"/>
-          <p:cNvSpPr txBox="1"/>
-          <p:nvPr/>
-        </p:nvSpPr>
-        <p:spPr>
-          <a:xfrm>
-            <a:off x="8275320" y="4983480"/>
-            <a:ext cx="3383280" cy="365760"/>
-          </a:xfrm>
-          <a:prstGeom prst="rect">
-            <a:avLst/>
-          </a:prstGeom>
-          <a:noFill/>
-          <a:ln/>
-        </p:spPr>
-        <p:txBody>
-          <a:bodyPr wrap="square" lIns="0" tIns="0" rIns="0" bIns="0" rtlCol="0" anchor="ctr"/>
-          <a:lstStyle/>
-          <a:p>
-            <a:pPr indent="0" marL="0">
-              <a:buNone/>
-            </a:pPr>
-            <a:r>
-              <a:rPr lang="en-US" sz="1600" b="1" dirty="0">
-                <a:solidFill>
-                  <a:schemeClr val="tx1"/>
-                </a:solidFill>
-              </a:rPr>
-              <a:t>Gabinete ventilado</a:t>
-            </a:r>
-            <a:endParaRPr lang="en-US" sz="1600" dirty="0"/>
-          </a:p>
-        </p:txBody>
-      </p:sp>
-      <p:sp>
-        <p:nvSpPr>
-          <p:cNvPr id="20" name="Text 12"/>
-          <p:cNvSpPr txBox="1"/>
-          <p:nvPr/>
-        </p:nvSpPr>
-        <p:spPr>
-          <a:xfrm>
-            <a:off x="8275320" y="5349240"/>
-            <a:ext cx="3383280" cy="777240"/>
-          </a:xfrm>
-          <a:prstGeom prst="rect">
-            <a:avLst/>
-          </a:prstGeom>
-          <a:noFill/>
-          <a:ln/>
-        </p:spPr>
-        <p:txBody>
-          <a:bodyPr wrap="square" lIns="0" tIns="0" rIns="0" bIns="0" rtlCol="0" anchor="t"/>
-          <a:lstStyle/>
-          <a:p>
-            <a:pPr indent="0" marL="0">
-              <a:buNone/>
-            </a:pPr>
-            <a:r>
-              <a:rPr lang="en-US" sz="1300" dirty="0">
-                <a:solidFill>
-                  <a:schemeClr val="accent6"/>
-                </a:solidFill>
-              </a:rPr>
-              <a:t>Filtro e cooler contra poeira e calor; auto-teste diário dos displays.</a:t>
-            </a:r>
-            <a:endParaRPr lang="en-US" sz="1300" dirty="0"/>
+              <a:t>1 display de endereço + quantidade a cada 4 prédios (6 a 9 zonas)</a:t>
+            </a:r>
+            <a:endParaRPr lang="en-US" sz="1200" dirty="0"/>
           </a:p>
         </p:txBody>
       </p:sp>
@@ -4826,7 +4408,7 @@
                   <a:schemeClr val="tx1"/>
                 </a:solidFill>
               </a:rPr>
-              <a:t>No coletor, só o necessário: abrir, acompanhar e fechar</a:t>
+              <a:t>Conector em todos os trechos: display trocado em menos de 5 minutos</a:t>
             </a:r>
             <a:endParaRPr lang="en-US" sz="2600" dirty="0"/>
           </a:p>
@@ -4834,7 +4416,7 @@
       </p:sp>
       <p:pic>
         <p:nvPicPr>
-          <p:cNvPr id="3" name="Image 0" descr="/home/claude/ptl-projeto/diagramas/telas_coletor.png">    </p:cNvPr>
+          <p:cNvPr id="3" name="Image 0" descr="/home/claude/ptl-projeto/diagramas/modulos.png">    </p:cNvPr>
           <p:cNvPicPr>
             <a:picLocks noChangeAspect="1"/>
           </p:cNvPicPr>
@@ -4849,68 +4431,16 @@
         <p:spPr>
           <a:xfrm>
             <a:off x="457200" y="1188720"/>
-            <a:ext cx="7680960" cy="3621024"/>
+            <a:ext cx="6766560" cy="2271631"/>
           </a:xfrm>
           <a:prstGeom prst="rect">
             <a:avLst/>
           </a:prstGeom>
         </p:spPr>
       </p:pic>
-      <p:sp>
-        <p:nvSpPr>
-          <p:cNvPr id="4" name="Shape 1"/>
-          <p:cNvSpPr/>
-          <p:nvPr/>
-        </p:nvSpPr>
-        <p:spPr>
-          <a:xfrm>
-            <a:off x="8412480" y="1280160"/>
-            <a:ext cx="3246120" cy="4480560"/>
-          </a:xfrm>
-          <a:prstGeom prst="roundRect">
-            <a:avLst>
-              <a:gd name="adj" fmla="val 2817"/>
-            </a:avLst>
-          </a:prstGeom>
-          <a:solidFill>
-            <a:schemeClr val="bg2"/>
-          </a:solidFill>
-          <a:ln w="12700">
-            <a:solidFill>
-              <a:schemeClr val="bg2"/>
-            </a:solidFill>
-            <a:prstDash val="solid"/>
-          </a:ln>
-        </p:spPr>
-      </p:sp>
-      <p:sp>
-        <p:nvSpPr>
-          <p:cNvPr id="5" name="Shape 2"/>
-          <p:cNvSpPr/>
-          <p:nvPr/>
-        </p:nvSpPr>
-        <p:spPr>
-          <a:xfrm>
-            <a:off x="8641080" y="1463040"/>
-            <a:ext cx="548640" cy="548640"/>
-          </a:xfrm>
-          <a:prstGeom prst="ellipse">
-            <a:avLst/>
-          </a:prstGeom>
-          <a:solidFill>
-            <a:schemeClr val="accent3"/>
-          </a:solidFill>
-          <a:ln w="12700">
-            <a:solidFill>
-              <a:schemeClr val="accent3"/>
-            </a:solidFill>
-            <a:prstDash val="solid"/>
-          </a:ln>
-        </p:spPr>
-      </p:sp>
       <p:pic>
         <p:nvPicPr>
-          <p:cNvPr id="6" name="Image 1" descr="preencoded.png">    </p:cNvPr>
+          <p:cNvPr id="4" name="Image 1" descr="/home/claude/ptl-projeto/diagramas/cabeamento.png">    </p:cNvPr>
           <p:cNvPicPr>
             <a:picLocks noChangeAspect="1"/>
           </p:cNvPicPr>
@@ -4924,7 +4454,56 @@
         </p:blipFill>
         <p:spPr>
           <a:xfrm>
-            <a:off x="8772754" y="1594714"/>
+            <a:off x="640080" y="3611880"/>
+            <a:ext cx="6400800" cy="2743200"/>
+          </a:xfrm>
+          <a:prstGeom prst="rect">
+            <a:avLst/>
+          </a:prstGeom>
+        </p:spPr>
+      </p:pic>
+      <p:sp>
+        <p:nvSpPr>
+          <p:cNvPr id="5" name="Shape 1"/>
+          <p:cNvSpPr/>
+          <p:nvPr/>
+        </p:nvSpPr>
+        <p:spPr>
+          <a:xfrm>
+            <a:off x="7589520" y="1325880"/>
+            <a:ext cx="548640" cy="548640"/>
+          </a:xfrm>
+          <a:prstGeom prst="ellipse">
+            <a:avLst/>
+          </a:prstGeom>
+          <a:solidFill>
+            <a:schemeClr val="tx1"/>
+          </a:solidFill>
+          <a:ln w="12700">
+            <a:solidFill>
+              <a:schemeClr val="tx1"/>
+            </a:solidFill>
+            <a:prstDash val="solid"/>
+          </a:ln>
+        </p:spPr>
+      </p:sp>
+      <p:pic>
+        <p:nvPicPr>
+          <p:cNvPr id="6" name="Image 2" descr="preencoded.png">    </p:cNvPr>
+          <p:cNvPicPr>
+            <a:picLocks noChangeAspect="1"/>
+          </p:cNvPicPr>
+          <p:nvPr/>
+        </p:nvPicPr>
+        <p:blipFill>
+          <a:blip r:embed="rId3"/>
+          <a:stretch>
+            <a:fillRect/>
+          </a:stretch>
+        </p:blipFill>
+        <p:spPr>
+          <a:xfrm>
+            <a:off x="7721194" y="1457554"/>
             <a:ext cx="285293" cy="285293"/>
           </a:xfrm>
           <a:prstGeom prst="rect">
@@ -4934,14 +4513,14 @@
       </p:pic>
       <p:sp>
         <p:nvSpPr>
-          <p:cNvPr id="7" name="Text 3"/>
+          <p:cNvPr id="7" name="Text 2"/>
           <p:cNvSpPr txBox="1"/>
           <p:nvPr/>
         </p:nvSpPr>
         <p:spPr>
           <a:xfrm>
-            <a:off x="9281160" y="1508760"/>
-            <a:ext cx="2286000" cy="502920"/>
+            <a:off x="8275320" y="1280160"/>
+            <a:ext cx="3383280" cy="365760"/>
           </a:xfrm>
           <a:prstGeom prst="rect">
             <a:avLst/>
@@ -4957,27 +4536,27 @@
               <a:buNone/>
             </a:pPr>
             <a:r>
-              <a:rPr lang="en-US" sz="1500" b="1" dirty="0">
+              <a:rPr lang="en-US" sz="1600" b="1" dirty="0">
                 <a:solidFill>
                   <a:schemeClr val="tx1"/>
                 </a:solidFill>
               </a:rPr>
-              <a:t>Painel de monitoramento</a:t>
-            </a:r>
-            <a:endParaRPr lang="en-US" sz="1500" dirty="0"/>
-          </a:p>
-        </p:txBody>
-      </p:sp>
-      <p:sp>
-        <p:nvSpPr>
-          <p:cNvPr id="8" name="Text 4"/>
+              <a:t>Cat5e com RJ45</a:t>
+            </a:r>
+            <a:endParaRPr lang="en-US" sz="1600" dirty="0"/>
+          </a:p>
+        </p:txBody>
+      </p:sp>
+      <p:sp>
+        <p:nvSpPr>
+          <p:cNvPr id="8" name="Text 3"/>
           <p:cNvSpPr txBox="1"/>
           <p:nvPr/>
         </p:nvSpPr>
         <p:spPr>
           <a:xfrm>
-            <a:off x="8641080" y="2148840"/>
-            <a:ext cx="2880360" cy="3291840"/>
+            <a:off x="8275320" y="1645920"/>
+            <a:ext cx="3383280" cy="777240"/>
           </a:xfrm>
           <a:prstGeom prst="rect">
             <a:avLst/>
@@ -4986,79 +4565,384 @@
           <a:ln/>
         </p:spPr>
         <p:txBody>
-          <a:bodyPr wrap="square" rtlCol="0" anchor="t"/>
-          <a:lstStyle/>
-          <a:p>
-            <a:pPr marL="342900" indent="-342900">
-              <a:spcAft>
-                <a:spcPts val="800"/>
-              </a:spcAft>
-              <a:buSzPct val="100000"/>
-              <a:buChar char="•"/>
-            </a:pPr>
-            <a:r>
-              <a:rPr lang="en-US" sz="1400" dirty="0">
-                <a:solidFill>
-                  <a:schemeClr val="tx2"/>
-                </a:solidFill>
-              </a:rPr>
-              <a:t>Status das 40 estações em tempo real</a:t>
-            </a:r>
-            <a:endParaRPr lang="en-US" sz="1400" dirty="0"/>
-          </a:p>
-          <a:p>
-            <a:pPr marL="342900" indent="-342900">
-              <a:spcAft>
-                <a:spcPts val="800"/>
-              </a:spcAft>
-              <a:buSzPct val="100000"/>
-              <a:buChar char="•"/>
-            </a:pPr>
-            <a:r>
-              <a:rPr lang="en-US" sz="1400" dirty="0">
-                <a:solidFill>
-                  <a:schemeClr val="tx2"/>
-                </a:solidFill>
-              </a:rPr>
-              <a:t>Caixas/hora e tempo médio por caixa</a:t>
-            </a:r>
-            <a:endParaRPr lang="en-US" sz="1400" dirty="0"/>
-          </a:p>
-          <a:p>
-            <a:pPr marL="342900" indent="-342900">
-              <a:spcAft>
-                <a:spcPts val="800"/>
-              </a:spcAft>
-              <a:buSzPct val="100000"/>
-              <a:buChar char="•"/>
-            </a:pPr>
-            <a:r>
-              <a:rPr lang="en-US" sz="1400" dirty="0">
-                <a:solidFill>
-                  <a:schemeClr val="tx2"/>
-                </a:solidFill>
-              </a:rPr>
-              <a:t>Módulos e concentradores com falha</a:t>
-            </a:r>
-            <a:endParaRPr lang="en-US" sz="1400" dirty="0"/>
-          </a:p>
-          <a:p>
-            <a:pPr marL="342900" indent="-342900">
-              <a:spcAft>
-                <a:spcPts val="800"/>
-              </a:spcAft>
-              <a:buSzPct val="100000"/>
-              <a:buChar char="•"/>
-            </a:pPr>
-            <a:r>
-              <a:rPr lang="en-US" sz="1400" dirty="0">
-                <a:solidFill>
-                  <a:schemeClr val="tx2"/>
-                </a:solidFill>
-              </a:rPr>
-              <a:t>Para gestão da operação e TI</a:t>
-            </a:r>
-            <a:endParaRPr lang="en-US" sz="1400" dirty="0"/>
+          <a:bodyPr wrap="square" lIns="0" tIns="0" rIns="0" bIns="0" rtlCol="0" anchor="t"/>
+          <a:lstStyle/>
+          <a:p>
+            <a:pPr indent="0" marL="0">
+              <a:buNone/>
+            </a:pPr>
+            <a:r>
+              <a:rPr lang="en-US" sz="1300" dirty="0">
+                <a:solidFill>
+                  <a:schemeClr val="accent6"/>
+                </a:solidFill>
+              </a:rPr>
+              <a:t>RS-485 e 12 V no mesmo cabo; cada trecho é um cabo curto com conector.</a:t>
+            </a:r>
+            <a:endParaRPr lang="en-US" sz="1300" dirty="0"/>
+          </a:p>
+        </p:txBody>
+      </p:sp>
+      <p:sp>
+        <p:nvSpPr>
+          <p:cNvPr id="9" name="Shape 4"/>
+          <p:cNvSpPr/>
+          <p:nvPr/>
+        </p:nvSpPr>
+        <p:spPr>
+          <a:xfrm>
+            <a:off x="7589520" y="2560320"/>
+            <a:ext cx="548640" cy="548640"/>
+          </a:xfrm>
+          <a:prstGeom prst="ellipse">
+            <a:avLst/>
+          </a:prstGeom>
+          <a:solidFill>
+            <a:schemeClr val="tx1"/>
+          </a:solidFill>
+          <a:ln w="12700">
+            <a:solidFill>
+              <a:schemeClr val="tx1"/>
+            </a:solidFill>
+            <a:prstDash val="solid"/>
+          </a:ln>
+        </p:spPr>
+      </p:sp>
+      <p:pic>
+        <p:nvPicPr>
+          <p:cNvPr id="10" name="Image 3" descr="preencoded.png">    </p:cNvPr>
+          <p:cNvPicPr>
+            <a:picLocks noChangeAspect="1"/>
+          </p:cNvPicPr>
+          <p:nvPr/>
+        </p:nvPicPr>
+        <p:blipFill>
+          <a:blip r:embed="rId4"/>
+          <a:stretch>
+            <a:fillRect/>
+          </a:stretch>
+        </p:blipFill>
+        <p:spPr>
+          <a:xfrm>
+            <a:off x="7721194" y="2691994"/>
+            <a:ext cx="285293" cy="285293"/>
+          </a:xfrm>
+          <a:prstGeom prst="rect">
+            <a:avLst/>
+          </a:prstGeom>
+        </p:spPr>
+      </p:pic>
+      <p:sp>
+        <p:nvSpPr>
+          <p:cNvPr id="11" name="Text 5"/>
+          <p:cNvSpPr txBox="1"/>
+          <p:nvPr/>
+        </p:nvSpPr>
+        <p:spPr>
+          <a:xfrm>
+            <a:off x="8275320" y="2514600"/>
+            <a:ext cx="3383280" cy="365760"/>
+          </a:xfrm>
+          <a:prstGeom prst="rect">
+            <a:avLst/>
+          </a:prstGeom>
+          <a:noFill/>
+          <a:ln/>
+        </p:spPr>
+        <p:txBody>
+          <a:bodyPr wrap="square" lIns="0" tIns="0" rIns="0" bIns="0" rtlCol="0" anchor="ctr"/>
+          <a:lstStyle/>
+          <a:p>
+            <a:pPr indent="0" marL="0">
+              <a:buNone/>
+            </a:pPr>
+            <a:r>
+              <a:rPr lang="en-US" sz="1600" b="1" dirty="0">
+                <a:solidFill>
+                  <a:schemeClr val="tx1"/>
+                </a:solidFill>
+              </a:rPr>
+              <a:t>Sem fio contínuo na canaleta</a:t>
+            </a:r>
+            <a:endParaRPr lang="en-US" sz="1600" dirty="0"/>
+          </a:p>
+        </p:txBody>
+      </p:sp>
+      <p:sp>
+        <p:nvSpPr>
+          <p:cNvPr id="12" name="Text 6"/>
+          <p:cNvSpPr txBox="1"/>
+          <p:nvPr/>
+        </p:nvSpPr>
+        <p:spPr>
+          <a:xfrm>
+            <a:off x="8275320" y="2880360"/>
+            <a:ext cx="3383280" cy="777240"/>
+          </a:xfrm>
+          <a:prstGeom prst="rect">
+            <a:avLst/>
+          </a:prstGeom>
+          <a:noFill/>
+          <a:ln/>
+        </p:spPr>
+        <p:txBody>
+          <a:bodyPr wrap="square" lIns="0" tIns="0" rIns="0" bIns="0" rtlCol="0" anchor="t"/>
+          <a:lstStyle/>
+          <a:p>
+            <a:pPr indent="0" marL="0">
+              <a:buNone/>
+            </a:pPr>
+            <a:r>
+              <a:rPr lang="en-US" sz="1300" dirty="0">
+                <a:solidFill>
+                  <a:schemeClr val="accent6"/>
+                </a:solidFill>
+              </a:rPr>
+              <a:t>Diferente do sistema anterior: o módulo com defeito sai sem abrir a canaleta.</a:t>
+            </a:r>
+            <a:endParaRPr lang="en-US" sz="1300" dirty="0"/>
+          </a:p>
+        </p:txBody>
+      </p:sp>
+      <p:sp>
+        <p:nvSpPr>
+          <p:cNvPr id="13" name="Shape 7"/>
+          <p:cNvSpPr/>
+          <p:nvPr/>
+        </p:nvSpPr>
+        <p:spPr>
+          <a:xfrm>
+            <a:off x="7589520" y="3794760"/>
+            <a:ext cx="548640" cy="548640"/>
+          </a:xfrm>
+          <a:prstGeom prst="ellipse">
+            <a:avLst/>
+          </a:prstGeom>
+          <a:solidFill>
+            <a:schemeClr val="accent1"/>
+          </a:solidFill>
+          <a:ln w="12700">
+            <a:solidFill>
+              <a:schemeClr val="accent1"/>
+            </a:solidFill>
+            <a:prstDash val="solid"/>
+          </a:ln>
+        </p:spPr>
+      </p:sp>
+      <p:pic>
+        <p:nvPicPr>
+          <p:cNvPr id="14" name="Image 4" descr="preencoded.png">    </p:cNvPr>
+          <p:cNvPicPr>
+            <a:picLocks noChangeAspect="1"/>
+          </p:cNvPicPr>
+          <p:nvPr/>
+        </p:nvPicPr>
+        <p:blipFill>
+          <a:blip r:embed="rId5"/>
+          <a:stretch>
+            <a:fillRect/>
+          </a:stretch>
+        </p:blipFill>
+        <p:spPr>
+          <a:xfrm>
+            <a:off x="7721194" y="3926434"/>
+            <a:ext cx="285293" cy="285293"/>
+          </a:xfrm>
+          <a:prstGeom prst="rect">
+            <a:avLst/>
+          </a:prstGeom>
+        </p:spPr>
+      </p:pic>
+      <p:sp>
+        <p:nvSpPr>
+          <p:cNvPr id="15" name="Text 8"/>
+          <p:cNvSpPr txBox="1"/>
+          <p:nvPr/>
+        </p:nvSpPr>
+        <p:spPr>
+          <a:xfrm>
+            <a:off x="8275320" y="3749040"/>
+            <a:ext cx="3383280" cy="365760"/>
+          </a:xfrm>
+          <a:prstGeom prst="rect">
+            <a:avLst/>
+          </a:prstGeom>
+          <a:noFill/>
+          <a:ln/>
+        </p:spPr>
+        <p:txBody>
+          <a:bodyPr wrap="square" lIns="0" tIns="0" rIns="0" bIns="0" rtlCol="0" anchor="ctr"/>
+          <a:lstStyle/>
+          <a:p>
+            <a:pPr indent="0" marL="0">
+              <a:buNone/>
+            </a:pPr>
+            <a:r>
+              <a:rPr lang="en-US" sz="1600" b="1" dirty="0">
+                <a:solidFill>
+                  <a:schemeClr val="tx1"/>
+                </a:solidFill>
+              </a:rPr>
+              <a:t>12 V em vez de 5 V</a:t>
+            </a:r>
+            <a:endParaRPr lang="en-US" sz="1600" dirty="0"/>
+          </a:p>
+        </p:txBody>
+      </p:sp>
+      <p:sp>
+        <p:nvSpPr>
+          <p:cNvPr id="16" name="Text 9"/>
+          <p:cNvSpPr txBox="1"/>
+          <p:nvPr/>
+        </p:nvSpPr>
+        <p:spPr>
+          <a:xfrm>
+            <a:off x="8275320" y="4114800"/>
+            <a:ext cx="3383280" cy="777240"/>
+          </a:xfrm>
+          <a:prstGeom prst="rect">
+            <a:avLst/>
+          </a:prstGeom>
+          <a:noFill/>
+          <a:ln/>
+        </p:spPr>
+        <p:txBody>
+          <a:bodyPr wrap="square" lIns="0" tIns="0" rIns="0" bIns="0" rtlCol="0" anchor="t"/>
+          <a:lstStyle/>
+          <a:p>
+            <a:pPr indent="0" marL="0">
+              <a:buNone/>
+            </a:pPr>
+            <a:r>
+              <a:rPr lang="en-US" sz="1300" dirty="0">
+                <a:solidFill>
+                  <a:schemeClr val="accent6"/>
+                </a:solidFill>
+              </a:rPr>
+              <a:t>Em 10 m de cabo a queda chega a 34% em 5 V e a 14% em 12 V, absorvida pelos reguladores locais.</a:t>
+            </a:r>
+            <a:endParaRPr lang="en-US" sz="1300" dirty="0"/>
+          </a:p>
+        </p:txBody>
+      </p:sp>
+      <p:sp>
+        <p:nvSpPr>
+          <p:cNvPr id="17" name="Shape 10"/>
+          <p:cNvSpPr/>
+          <p:nvPr/>
+        </p:nvSpPr>
+        <p:spPr>
+          <a:xfrm>
+            <a:off x="7589520" y="5029200"/>
+            <a:ext cx="548640" cy="548640"/>
+          </a:xfrm>
+          <a:prstGeom prst="ellipse">
+            <a:avLst/>
+          </a:prstGeom>
+          <a:solidFill>
+            <a:schemeClr val="tx1"/>
+          </a:solidFill>
+          <a:ln w="12700">
+            <a:solidFill>
+              <a:schemeClr val="tx1"/>
+            </a:solidFill>
+            <a:prstDash val="solid"/>
+          </a:ln>
+        </p:spPr>
+      </p:sp>
+      <p:pic>
+        <p:nvPicPr>
+          <p:cNvPr id="18" name="Image 5" descr="preencoded.png">    </p:cNvPr>
+          <p:cNvPicPr>
+            <a:picLocks noChangeAspect="1"/>
+          </p:cNvPicPr>
+          <p:nvPr/>
+        </p:nvPicPr>
+        <p:blipFill>
+          <a:blip r:embed="rId6"/>
+          <a:stretch>
+            <a:fillRect/>
+          </a:stretch>
+        </p:blipFill>
+        <p:spPr>
+          <a:xfrm>
+            <a:off x="7721194" y="5160874"/>
+            <a:ext cx="285293" cy="285293"/>
+          </a:xfrm>
+          <a:prstGeom prst="rect">
+            <a:avLst/>
+          </a:prstGeom>
+        </p:spPr>
+      </p:pic>
+      <p:sp>
+        <p:nvSpPr>
+          <p:cNvPr id="19" name="Text 11"/>
+          <p:cNvSpPr txBox="1"/>
+          <p:nvPr/>
+        </p:nvSpPr>
+        <p:spPr>
+          <a:xfrm>
+            <a:off x="8275320" y="4983480"/>
+            <a:ext cx="3383280" cy="365760"/>
+          </a:xfrm>
+          <a:prstGeom prst="rect">
+            <a:avLst/>
+          </a:prstGeom>
+          <a:noFill/>
+          <a:ln/>
+        </p:spPr>
+        <p:txBody>
+          <a:bodyPr wrap="square" lIns="0" tIns="0" rIns="0" bIns="0" rtlCol="0" anchor="ctr"/>
+          <a:lstStyle/>
+          <a:p>
+            <a:pPr indent="0" marL="0">
+              <a:buNone/>
+            </a:pPr>
+            <a:r>
+              <a:rPr lang="en-US" sz="1600" b="1" dirty="0">
+                <a:solidFill>
+                  <a:schemeClr val="tx1"/>
+                </a:solidFill>
+              </a:rPr>
+              <a:t>Gabinete ventilado</a:t>
+            </a:r>
+            <a:endParaRPr lang="en-US" sz="1600" dirty="0"/>
+          </a:p>
+        </p:txBody>
+      </p:sp>
+      <p:sp>
+        <p:nvSpPr>
+          <p:cNvPr id="20" name="Text 12"/>
+          <p:cNvSpPr txBox="1"/>
+          <p:nvPr/>
+        </p:nvSpPr>
+        <p:spPr>
+          <a:xfrm>
+            <a:off x="8275320" y="5349240"/>
+            <a:ext cx="3383280" cy="777240"/>
+          </a:xfrm>
+          <a:prstGeom prst="rect">
+            <a:avLst/>
+          </a:prstGeom>
+          <a:noFill/>
+          <a:ln/>
+        </p:spPr>
+        <p:txBody>
+          <a:bodyPr wrap="square" lIns="0" tIns="0" rIns="0" bIns="0" rtlCol="0" anchor="t"/>
+          <a:lstStyle/>
+          <a:p>
+            <a:pPr indent="0" marL="0">
+              <a:buNone/>
+            </a:pPr>
+            <a:r>
+              <a:rPr lang="en-US" sz="1300" dirty="0">
+                <a:solidFill>
+                  <a:schemeClr val="accent6"/>
+                </a:solidFill>
+              </a:rPr>
+              <a:t>Filtro e cooler contra poeira e calor; auto-teste diário dos displays.</a:t>
+            </a:r>
+            <a:endParaRPr lang="en-US" sz="1300" dirty="0"/>
           </a:p>
         </p:txBody>
       </p:sp>
@@ -5164,7 +5048,7 @@
                   <a:schemeClr val="tx1"/>
                 </a:solidFill>
               </a:rPr>
-              <a:t>Integração: o Serviço PTL fala com o Sybase, a API do BHT e os concentradores</a:t>
+              <a:t>No coletor, só o necessário: abrir, acompanhar e fechar</a:t>
             </a:r>
             <a:endParaRPr lang="en-US" sz="2600" dirty="0"/>
           </a:p>
@@ -5172,7 +5056,7 @@
       </p:sp>
       <p:pic>
         <p:nvPicPr>
-          <p:cNvPr id="3" name="Image 0" descr="/home/claude/ptl-projeto/diagramas/sequencia.png">    </p:cNvPr>
+          <p:cNvPr id="3" name="Image 0" descr="/home/claude/ptl-projeto/diagramas/telas_coletor.png">    </p:cNvPr>
           <p:cNvPicPr>
             <a:picLocks noChangeAspect="1"/>
           </p:cNvPicPr>
@@ -5187,7 +5071,7 @@
         <p:spPr>
           <a:xfrm>
             <a:off x="457200" y="1188720"/>
-            <a:ext cx="7863840" cy="4605963"/>
+            <a:ext cx="7680960" cy="3621024"/>
           </a:xfrm>
           <a:prstGeom prst="rect">
             <a:avLst/>
@@ -5196,14 +5080,90 @@
       </p:pic>
       <p:sp>
         <p:nvSpPr>
-          <p:cNvPr id="4" name="Text 1"/>
+          <p:cNvPr id="4" name="Shape 1"/>
+          <p:cNvSpPr/>
+          <p:nvPr/>
+        </p:nvSpPr>
+        <p:spPr>
+          <a:xfrm>
+            <a:off x="8412480" y="1280160"/>
+            <a:ext cx="3246120" cy="4480560"/>
+          </a:xfrm>
+          <a:prstGeom prst="roundRect">
+            <a:avLst>
+              <a:gd name="adj" fmla="val 2817"/>
+            </a:avLst>
+          </a:prstGeom>
+          <a:solidFill>
+            <a:schemeClr val="bg2"/>
+          </a:solidFill>
+          <a:ln w="12700">
+            <a:solidFill>
+              <a:schemeClr val="bg2"/>
+            </a:solidFill>
+            <a:prstDash val="solid"/>
+          </a:ln>
+        </p:spPr>
+      </p:sp>
+      <p:sp>
+        <p:nvSpPr>
+          <p:cNvPr id="5" name="Shape 2"/>
+          <p:cNvSpPr/>
+          <p:nvPr/>
+        </p:nvSpPr>
+        <p:spPr>
+          <a:xfrm>
+            <a:off x="8641080" y="1463040"/>
+            <a:ext cx="548640" cy="548640"/>
+          </a:xfrm>
+          <a:prstGeom prst="ellipse">
+            <a:avLst/>
+          </a:prstGeom>
+          <a:solidFill>
+            <a:schemeClr val="accent3"/>
+          </a:solidFill>
+          <a:ln w="12700">
+            <a:solidFill>
+              <a:schemeClr val="accent3"/>
+            </a:solidFill>
+            <a:prstDash val="solid"/>
+          </a:ln>
+        </p:spPr>
+      </p:sp>
+      <p:pic>
+        <p:nvPicPr>
+          <p:cNvPr id="6" name="Image 1" descr="preencoded.png">    </p:cNvPr>
+          <p:cNvPicPr>
+            <a:picLocks noChangeAspect="1"/>
+          </p:cNvPicPr>
+          <p:nvPr/>
+        </p:nvPicPr>
+        <p:blipFill>
+          <a:blip r:embed="rId2"/>
+          <a:stretch>
+            <a:fillRect/>
+          </a:stretch>
+        </p:blipFill>
+        <p:spPr>
+          <a:xfrm>
+            <a:off x="8772754" y="1594714"/>
+            <a:ext cx="285293" cy="285293"/>
+          </a:xfrm>
+          <a:prstGeom prst="rect">
+            <a:avLst/>
+          </a:prstGeom>
+        </p:spPr>
+      </p:pic>
+      <p:sp>
+        <p:nvSpPr>
+          <p:cNvPr id="7" name="Text 3"/>
           <p:cNvSpPr txBox="1"/>
           <p:nvPr/>
         </p:nvSpPr>
         <p:spPr>
           <a:xfrm>
-            <a:off x="8549640" y="1325880"/>
-            <a:ext cx="3108960" cy="365760"/>
+            <a:off x="9281160" y="1508760"/>
+            <a:ext cx="2286000" cy="502920"/>
           </a:xfrm>
           <a:prstGeom prst="rect">
             <a:avLst/>
@@ -5219,27 +5179,27 @@
               <a:buNone/>
             </a:pPr>
             <a:r>
-              <a:rPr lang="en-US" sz="1600" b="1" dirty="0">
+              <a:rPr lang="en-US" sz="1500" b="1" dirty="0">
                 <a:solidFill>
                   <a:schemeClr val="tx1"/>
                 </a:solidFill>
               </a:rPr>
-              <a:t>Sybase ASE</a:t>
-            </a:r>
-            <a:endParaRPr lang="en-US" sz="1600" dirty="0"/>
-          </a:p>
-        </p:txBody>
-      </p:sp>
-      <p:sp>
-        <p:nvSpPr>
-          <p:cNvPr id="5" name="Text 2"/>
+              <a:t>Painel de monitoramento</a:t>
+            </a:r>
+            <a:endParaRPr lang="en-US" sz="1500" dirty="0"/>
+          </a:p>
+        </p:txBody>
+      </p:sp>
+      <p:sp>
+        <p:nvSpPr>
+          <p:cNvPr id="8" name="Text 4"/>
           <p:cNvSpPr txBox="1"/>
           <p:nvPr/>
         </p:nvSpPr>
         <p:spPr>
           <a:xfrm>
-            <a:off x="8549640" y="1691640"/>
-            <a:ext cx="3108960" cy="731520"/>
+            <a:off x="8641080" y="2148840"/>
+            <a:ext cx="2880360" cy="3291840"/>
           </a:xfrm>
           <a:prstGeom prst="rect">
             <a:avLst/>
@@ -5248,237 +5208,79 @@
           <a:ln/>
         </p:spPr>
         <p:txBody>
-          <a:bodyPr wrap="square" lIns="0" tIns="0" rIns="0" bIns="0" rtlCol="0" anchor="t"/>
-          <a:lstStyle/>
-          <a:p>
-            <a:pPr indent="0" marL="0">
-              <a:buNone/>
-            </a:pPr>
-            <a:r>
-              <a:rPr lang="en-US" sz="1300" dirty="0">
-                <a:solidFill>
-                  <a:schemeClr val="accent6"/>
-                </a:solidFill>
-              </a:rPr>
-              <a:t>Tabelas PTL (sessões, eventos, mapa) e views dos itens da caixa</a:t>
-            </a:r>
-            <a:endParaRPr lang="en-US" sz="1300" dirty="0"/>
-          </a:p>
-        </p:txBody>
-      </p:sp>
-      <p:sp>
-        <p:nvSpPr>
-          <p:cNvPr id="6" name="Text 3"/>
-          <p:cNvSpPr txBox="1"/>
-          <p:nvPr/>
-        </p:nvSpPr>
-        <p:spPr>
-          <a:xfrm>
-            <a:off x="8549640" y="2514600"/>
-            <a:ext cx="3108960" cy="365760"/>
-          </a:xfrm>
-          <a:prstGeom prst="rect">
-            <a:avLst/>
-          </a:prstGeom>
-          <a:noFill/>
-          <a:ln/>
-        </p:spPr>
-        <p:txBody>
-          <a:bodyPr wrap="square" lIns="0" tIns="0" rIns="0" bIns="0" rtlCol="0" anchor="ctr"/>
-          <a:lstStyle/>
-          <a:p>
-            <a:pPr indent="0" marL="0">
-              <a:buNone/>
-            </a:pPr>
-            <a:r>
-              <a:rPr lang="en-US" sz="1600" b="1" dirty="0">
-                <a:solidFill>
-                  <a:schemeClr val="tx1"/>
-                </a:solidFill>
-              </a:rPr>
-              <a:t>API do BHT</a:t>
-            </a:r>
-            <a:endParaRPr lang="en-US" sz="1600" dirty="0"/>
-          </a:p>
-        </p:txBody>
-      </p:sp>
-      <p:sp>
-        <p:nvSpPr>
-          <p:cNvPr id="7" name="Text 4"/>
-          <p:cNvSpPr txBox="1"/>
-          <p:nvPr/>
-        </p:nvSpPr>
-        <p:spPr>
-          <a:xfrm>
-            <a:off x="8549640" y="2880360"/>
-            <a:ext cx="3108960" cy="731520"/>
-          </a:xfrm>
-          <a:prstGeom prst="rect">
-            <a:avLst/>
-          </a:prstGeom>
-          <a:noFill/>
-          <a:ln/>
-        </p:spPr>
-        <p:txBody>
-          <a:bodyPr wrap="square" lIns="0" tIns="0" rIns="0" bIns="0" rtlCol="0" anchor="t"/>
-          <a:lstStyle/>
-          <a:p>
-            <a:pPr indent="0" marL="0">
-              <a:buNone/>
-            </a:pPr>
-            <a:r>
-              <a:rPr lang="en-US" sz="1300" dirty="0">
-                <a:solidFill>
-                  <a:schemeClr val="accent6"/>
-                </a:solidFill>
-              </a:rPr>
-              <a:t>Dados da caixa; aviso de conclusão a validar com o fornecedor</a:t>
-            </a:r>
-            <a:endParaRPr lang="en-US" sz="1300" dirty="0"/>
-          </a:p>
-        </p:txBody>
-      </p:sp>
-      <p:sp>
-        <p:nvSpPr>
-          <p:cNvPr id="8" name="Text 5"/>
-          <p:cNvSpPr txBox="1"/>
-          <p:nvPr/>
-        </p:nvSpPr>
-        <p:spPr>
-          <a:xfrm>
-            <a:off x="8549640" y="3703320"/>
-            <a:ext cx="3108960" cy="365760"/>
-          </a:xfrm>
-          <a:prstGeom prst="rect">
-            <a:avLst/>
-          </a:prstGeom>
-          <a:noFill/>
-          <a:ln/>
-        </p:spPr>
-        <p:txBody>
-          <a:bodyPr wrap="square" lIns="0" tIns="0" rIns="0" bIns="0" rtlCol="0" anchor="ctr"/>
-          <a:lstStyle/>
-          <a:p>
-            <a:pPr indent="0" marL="0">
-              <a:buNone/>
-            </a:pPr>
-            <a:r>
-              <a:rPr lang="en-US" sz="1600" b="1" dirty="0">
-                <a:solidFill>
-                  <a:schemeClr val="tx1"/>
-                </a:solidFill>
-              </a:rPr>
-              <a:t>MQTT</a:t>
-            </a:r>
-            <a:endParaRPr lang="en-US" sz="1600" dirty="0"/>
-          </a:p>
-        </p:txBody>
-      </p:sp>
-      <p:sp>
-        <p:nvSpPr>
-          <p:cNvPr id="9" name="Text 6"/>
-          <p:cNvSpPr txBox="1"/>
-          <p:nvPr/>
-        </p:nvSpPr>
-        <p:spPr>
-          <a:xfrm>
-            <a:off x="8549640" y="4069080"/>
-            <a:ext cx="3108960" cy="731520"/>
-          </a:xfrm>
-          <a:prstGeom prst="rect">
-            <a:avLst/>
-          </a:prstGeom>
-          <a:noFill/>
-          <a:ln/>
-        </p:spPr>
-        <p:txBody>
-          <a:bodyPr wrap="square" lIns="0" tIns="0" rIns="0" bIns="0" rtlCol="0" anchor="t"/>
-          <a:lstStyle/>
-          <a:p>
-            <a:pPr indent="0" marL="0">
-              <a:buNone/>
-            </a:pPr>
-            <a:r>
-              <a:rPr lang="en-US" sz="1300" dirty="0">
-                <a:solidFill>
-                  <a:schemeClr val="accent6"/>
-                </a:solidFill>
-              </a:rPr>
-              <a:t>Comandos e eventos por estação, com usuário e ACL próprios</a:t>
-            </a:r>
-            <a:endParaRPr lang="en-US" sz="1300" dirty="0"/>
-          </a:p>
-        </p:txBody>
-      </p:sp>
-      <p:sp>
-        <p:nvSpPr>
-          <p:cNvPr id="10" name="Text 7"/>
-          <p:cNvSpPr txBox="1"/>
-          <p:nvPr/>
-        </p:nvSpPr>
-        <p:spPr>
-          <a:xfrm>
-            <a:off x="8549640" y="4892040"/>
-            <a:ext cx="3108960" cy="365760"/>
-          </a:xfrm>
-          <a:prstGeom prst="rect">
-            <a:avLst/>
-          </a:prstGeom>
-          <a:noFill/>
-          <a:ln/>
-        </p:spPr>
-        <p:txBody>
-          <a:bodyPr wrap="square" lIns="0" tIns="0" rIns="0" bIns="0" rtlCol="0" anchor="ctr"/>
-          <a:lstStyle/>
-          <a:p>
-            <a:pPr indent="0" marL="0">
-              <a:buNone/>
-            </a:pPr>
-            <a:r>
-              <a:rPr lang="en-US" sz="1600" b="1" dirty="0">
-                <a:solidFill>
-                  <a:schemeClr val="tx1"/>
-                </a:solidFill>
-              </a:rPr>
-              <a:t>Rede</a:t>
-            </a:r>
-            <a:endParaRPr lang="en-US" sz="1600" dirty="0"/>
-          </a:p>
-        </p:txBody>
-      </p:sp>
-      <p:sp>
-        <p:nvSpPr>
-          <p:cNvPr id="11" name="Text 8"/>
-          <p:cNvSpPr txBox="1"/>
-          <p:nvPr/>
-        </p:nvSpPr>
-        <p:spPr>
-          <a:xfrm>
-            <a:off x="8549640" y="5257800"/>
-            <a:ext cx="3108960" cy="731520"/>
-          </a:xfrm>
-          <a:prstGeom prst="rect">
-            <a:avLst/>
-          </a:prstGeom>
-          <a:noFill/>
-          <a:ln/>
-        </p:spPr>
-        <p:txBody>
-          <a:bodyPr wrap="square" lIns="0" tIns="0" rIns="0" bIns="0" rtlCol="0" anchor="t"/>
-          <a:lstStyle/>
-          <a:p>
-            <a:pPr indent="0" marL="0">
-              <a:buNone/>
-            </a:pPr>
-            <a:r>
-              <a:rPr lang="en-US" sz="1300" dirty="0">
-                <a:solidFill>
-                  <a:schemeClr val="accent6"/>
-                </a:solidFill>
-              </a:rPr>
-              <a:t>VLAN dedicada; coletores no Wi-Fi existente</a:t>
-            </a:r>
-            <a:endParaRPr lang="en-US" sz="1300" dirty="0"/>
+          <a:bodyPr wrap="square" rtlCol="0" anchor="t"/>
+          <a:lstStyle/>
+          <a:p>
+            <a:pPr marL="342900" indent="-342900">
+              <a:spcAft>
+                <a:spcPts val="800"/>
+              </a:spcAft>
+              <a:buSzPct val="100000"/>
+              <a:buChar char="•"/>
+            </a:pPr>
+            <a:r>
+              <a:rPr lang="en-US" sz="1400" dirty="0">
+                <a:solidFill>
+                  <a:schemeClr val="tx2"/>
+                </a:solidFill>
+              </a:rPr>
+              <a:t>Status das 40 estações em tempo real</a:t>
+            </a:r>
+            <a:endParaRPr lang="en-US" sz="1400" dirty="0"/>
+          </a:p>
+          <a:p>
+            <a:pPr marL="342900" indent="-342900">
+              <a:spcAft>
+                <a:spcPts val="800"/>
+              </a:spcAft>
+              <a:buSzPct val="100000"/>
+              <a:buChar char="•"/>
+            </a:pPr>
+            <a:r>
+              <a:rPr lang="en-US" sz="1400" dirty="0">
+                <a:solidFill>
+                  <a:schemeClr val="tx2"/>
+                </a:solidFill>
+              </a:rPr>
+              <a:t>Caixas/hora e tempo médio por caixa</a:t>
+            </a:r>
+            <a:endParaRPr lang="en-US" sz="1400" dirty="0"/>
+          </a:p>
+          <a:p>
+            <a:pPr marL="342900" indent="-342900">
+              <a:spcAft>
+                <a:spcPts val="800"/>
+              </a:spcAft>
+              <a:buSzPct val="100000"/>
+              <a:buChar char="•"/>
+            </a:pPr>
+            <a:r>
+              <a:rPr lang="en-US" sz="1400" dirty="0">
+                <a:solidFill>
+                  <a:schemeClr val="tx2"/>
+                </a:solidFill>
+              </a:rPr>
+              <a:t>Módulos e concentradores com falha</a:t>
+            </a:r>
+            <a:endParaRPr lang="en-US" sz="1400" dirty="0"/>
+          </a:p>
+          <a:p>
+            <a:pPr marL="342900" indent="-342900">
+              <a:spcAft>
+                <a:spcPts val="800"/>
+              </a:spcAft>
+              <a:buSzPct val="100000"/>
+              <a:buChar char="•"/>
+            </a:pPr>
+            <a:r>
+              <a:rPr lang="en-US" sz="1400" dirty="0">
+                <a:solidFill>
+                  <a:schemeClr val="tx2"/>
+                </a:solidFill>
+              </a:rPr>
+              <a:t>Para gestão da operação e TI</a:t>
+            </a:r>
+            <a:endParaRPr lang="en-US" sz="1400" dirty="0"/>
           </a:p>
         </p:txBody>
       </p:sp>
@@ -5562,8 +5364,8 @@
         </p:nvSpPr>
         <p:spPr>
           <a:xfrm>
-            <a:off x="731520" y="1737360"/>
-            <a:ext cx="10515600" cy="1828800"/>
+            <a:off x="548640" y="274320"/>
+            <a:ext cx="11064240" cy="777240"/>
           </a:xfrm>
           <a:prstGeom prst="rect">
             <a:avLst/>
@@ -5572,36 +5374,58 @@
           <a:ln/>
         </p:spPr>
         <p:txBody>
-          <a:bodyPr wrap="square" lIns="0" tIns="0" rIns="0" bIns="0" rtlCol="0" anchor="b"/>
+          <a:bodyPr wrap="square" lIns="0" tIns="0" rIns="0" bIns="0" rtlCol="0" anchor="ctr"/>
           <a:lstStyle/>
           <a:p>
             <a:pPr algn="l" indent="0" marL="0">
               <a:buNone/>
             </a:pPr>
             <a:r>
-              <a:rPr lang="en-US" sz="4000" b="1" dirty="0">
-                <a:solidFill>
-                  <a:schemeClr val="bg1"/>
-                </a:solidFill>
-              </a:rPr>
-              <a:t>Orçamento e caminhos de produção</a:t>
-            </a:r>
-            <a:endParaRPr lang="en-US" sz="4000" dirty="0"/>
-          </a:p>
-        </p:txBody>
-      </p:sp>
-      <p:sp>
-        <p:nvSpPr>
-          <p:cNvPr id="3" name="Text 0"/>
-          <p:cNvSpPr/>
-          <p:nvPr>
-            <p:ph idx="101" type="body" hasCustomPrompt="1"/>
-          </p:nvPr>
-        </p:nvSpPr>
-        <p:spPr>
-          <a:xfrm>
-            <a:off x="731520" y="3794760"/>
-            <a:ext cx="10515600" cy="822960"/>
+              <a:rPr lang="en-US" sz="2600" b="1" dirty="0">
+                <a:solidFill>
+                  <a:schemeClr val="tx1"/>
+                </a:solidFill>
+              </a:rPr>
+              <a:t>Integração: o Serviço PTL fala com o Sybase, a API do BHT e os concentradores</a:t>
+            </a:r>
+            <a:endParaRPr lang="en-US" sz="2600" dirty="0"/>
+          </a:p>
+        </p:txBody>
+      </p:sp>
+      <p:pic>
+        <p:nvPicPr>
+          <p:cNvPr id="3" name="Image 0" descr="/home/claude/ptl-projeto/diagramas/sequencia.png">    </p:cNvPr>
+          <p:cNvPicPr>
+            <a:picLocks noChangeAspect="1"/>
+          </p:cNvPicPr>
+          <p:nvPr/>
+        </p:nvPicPr>
+        <p:blipFill>
+          <a:blip r:embed="rId1"/>
+          <a:stretch>
+            <a:fillRect/>
+          </a:stretch>
+        </p:blipFill>
+        <p:spPr>
+          <a:xfrm>
+            <a:off x="457200" y="1188720"/>
+            <a:ext cx="7863840" cy="4605963"/>
+          </a:xfrm>
+          <a:prstGeom prst="rect">
+            <a:avLst/>
+          </a:prstGeom>
+        </p:spPr>
+      </p:pic>
+      <p:sp>
+        <p:nvSpPr>
+          <p:cNvPr id="4" name="Text 1"/>
+          <p:cNvSpPr txBox="1"/>
+          <p:nvPr/>
+        </p:nvSpPr>
+        <p:spPr>
+          <a:xfrm>
+            <a:off x="8549640" y="1325880"/>
+            <a:ext cx="3108960" cy="365760"/>
           </a:xfrm>
           <a:prstGeom prst="rect">
             <a:avLst/>
@@ -5610,21 +5434,273 @@
           <a:ln/>
         </p:spPr>
         <p:txBody>
+          <a:bodyPr wrap="square" lIns="0" tIns="0" rIns="0" bIns="0" rtlCol="0" anchor="ctr"/>
+          <a:lstStyle/>
+          <a:p>
+            <a:pPr indent="0" marL="0">
+              <a:buNone/>
+            </a:pPr>
+            <a:r>
+              <a:rPr lang="en-US" sz="1600" b="1" dirty="0">
+                <a:solidFill>
+                  <a:schemeClr val="tx1"/>
+                </a:solidFill>
+              </a:rPr>
+              <a:t>Sybase ASE</a:t>
+            </a:r>
+            <a:endParaRPr lang="en-US" sz="1600" dirty="0"/>
+          </a:p>
+        </p:txBody>
+      </p:sp>
+      <p:sp>
+        <p:nvSpPr>
+          <p:cNvPr id="5" name="Text 2"/>
+          <p:cNvSpPr txBox="1"/>
+          <p:nvPr/>
+        </p:nvSpPr>
+        <p:spPr>
+          <a:xfrm>
+            <a:off x="8549640" y="1691640"/>
+            <a:ext cx="3108960" cy="731520"/>
+          </a:xfrm>
+          <a:prstGeom prst="rect">
+            <a:avLst/>
+          </a:prstGeom>
+          <a:noFill/>
+          <a:ln/>
+        </p:spPr>
+        <p:txBody>
           <a:bodyPr wrap="square" lIns="0" tIns="0" rIns="0" bIns="0" rtlCol="0" anchor="t"/>
           <a:lstStyle/>
           <a:p>
-            <a:pPr algn="l" indent="0" marL="0">
+            <a:pPr indent="0" marL="0">
               <a:buNone/>
             </a:pPr>
             <a:r>
-              <a:rPr lang="en-US" sz="1800" dirty="0">
-                <a:solidFill>
-                  <a:srgbClr val="C9D3E0"/>
-                </a:solidFill>
-              </a:rPr>
-              <a:t>Preços cotados em lojas brasileiras em 23/10/2026; estimativas marcadas na planilha</a:t>
-            </a:r>
-            <a:endParaRPr lang="en-US" sz="1800" dirty="0"/>
+              <a:rPr lang="en-US" sz="1300" dirty="0">
+                <a:solidFill>
+                  <a:schemeClr val="accent6"/>
+                </a:solidFill>
+              </a:rPr>
+              <a:t>Tabelas PTL (sessões, eventos, mapa) e views dos itens da caixa</a:t>
+            </a:r>
+            <a:endParaRPr lang="en-US" sz="1300" dirty="0"/>
+          </a:p>
+        </p:txBody>
+      </p:sp>
+      <p:sp>
+        <p:nvSpPr>
+          <p:cNvPr id="6" name="Text 3"/>
+          <p:cNvSpPr txBox="1"/>
+          <p:nvPr/>
+        </p:nvSpPr>
+        <p:spPr>
+          <a:xfrm>
+            <a:off x="8549640" y="2514600"/>
+            <a:ext cx="3108960" cy="365760"/>
+          </a:xfrm>
+          <a:prstGeom prst="rect">
+            <a:avLst/>
+          </a:prstGeom>
+          <a:noFill/>
+          <a:ln/>
+        </p:spPr>
+        <p:txBody>
+          <a:bodyPr wrap="square" lIns="0" tIns="0" rIns="0" bIns="0" rtlCol="0" anchor="ctr"/>
+          <a:lstStyle/>
+          <a:p>
+            <a:pPr indent="0" marL="0">
+              <a:buNone/>
+            </a:pPr>
+            <a:r>
+              <a:rPr lang="en-US" sz="1600" b="1" dirty="0">
+                <a:solidFill>
+                  <a:schemeClr val="tx1"/>
+                </a:solidFill>
+              </a:rPr>
+              <a:t>API do BHT</a:t>
+            </a:r>
+            <a:endParaRPr lang="en-US" sz="1600" dirty="0"/>
+          </a:p>
+        </p:txBody>
+      </p:sp>
+      <p:sp>
+        <p:nvSpPr>
+          <p:cNvPr id="7" name="Text 4"/>
+          <p:cNvSpPr txBox="1"/>
+          <p:nvPr/>
+        </p:nvSpPr>
+        <p:spPr>
+          <a:xfrm>
+            <a:off x="8549640" y="2880360"/>
+            <a:ext cx="3108960" cy="731520"/>
+          </a:xfrm>
+          <a:prstGeom prst="rect">
+            <a:avLst/>
+          </a:prstGeom>
+          <a:noFill/>
+          <a:ln/>
+        </p:spPr>
+        <p:txBody>
+          <a:bodyPr wrap="square" lIns="0" tIns="0" rIns="0" bIns="0" rtlCol="0" anchor="t"/>
+          <a:lstStyle/>
+          <a:p>
+            <a:pPr indent="0" marL="0">
+              <a:buNone/>
+            </a:pPr>
+            <a:r>
+              <a:rPr lang="en-US" sz="1300" dirty="0">
+                <a:solidFill>
+                  <a:schemeClr val="accent6"/>
+                </a:solidFill>
+              </a:rPr>
+              <a:t>Dados da caixa; aviso de conclusão a validar com o fornecedor</a:t>
+            </a:r>
+            <a:endParaRPr lang="en-US" sz="1300" dirty="0"/>
+          </a:p>
+        </p:txBody>
+      </p:sp>
+      <p:sp>
+        <p:nvSpPr>
+          <p:cNvPr id="8" name="Text 5"/>
+          <p:cNvSpPr txBox="1"/>
+          <p:nvPr/>
+        </p:nvSpPr>
+        <p:spPr>
+          <a:xfrm>
+            <a:off x="8549640" y="3703320"/>
+            <a:ext cx="3108960" cy="365760"/>
+          </a:xfrm>
+          <a:prstGeom prst="rect">
+            <a:avLst/>
+          </a:prstGeom>
+          <a:noFill/>
+          <a:ln/>
+        </p:spPr>
+        <p:txBody>
+          <a:bodyPr wrap="square" lIns="0" tIns="0" rIns="0" bIns="0" rtlCol="0" anchor="ctr"/>
+          <a:lstStyle/>
+          <a:p>
+            <a:pPr indent="0" marL="0">
+              <a:buNone/>
+            </a:pPr>
+            <a:r>
+              <a:rPr lang="en-US" sz="1600" b="1" dirty="0">
+                <a:solidFill>
+                  <a:schemeClr val="tx1"/>
+                </a:solidFill>
+              </a:rPr>
+              <a:t>MQTT</a:t>
+            </a:r>
+            <a:endParaRPr lang="en-US" sz="1600" dirty="0"/>
+          </a:p>
+        </p:txBody>
+      </p:sp>
+      <p:sp>
+        <p:nvSpPr>
+          <p:cNvPr id="9" name="Text 6"/>
+          <p:cNvSpPr txBox="1"/>
+          <p:nvPr/>
+        </p:nvSpPr>
+        <p:spPr>
+          <a:xfrm>
+            <a:off x="8549640" y="4069080"/>
+            <a:ext cx="3108960" cy="731520"/>
+          </a:xfrm>
+          <a:prstGeom prst="rect">
+            <a:avLst/>
+          </a:prstGeom>
+          <a:noFill/>
+          <a:ln/>
+        </p:spPr>
+        <p:txBody>
+          <a:bodyPr wrap="square" lIns="0" tIns="0" rIns="0" bIns="0" rtlCol="0" anchor="t"/>
+          <a:lstStyle/>
+          <a:p>
+            <a:pPr indent="0" marL="0">
+              <a:buNone/>
+            </a:pPr>
+            <a:r>
+              <a:rPr lang="en-US" sz="1300" dirty="0">
+                <a:solidFill>
+                  <a:schemeClr val="accent6"/>
+                </a:solidFill>
+              </a:rPr>
+              <a:t>Comandos e eventos por estação, com usuário e ACL próprios</a:t>
+            </a:r>
+            <a:endParaRPr lang="en-US" sz="1300" dirty="0"/>
+          </a:p>
+        </p:txBody>
+      </p:sp>
+      <p:sp>
+        <p:nvSpPr>
+          <p:cNvPr id="10" name="Text 7"/>
+          <p:cNvSpPr txBox="1"/>
+          <p:nvPr/>
+        </p:nvSpPr>
+        <p:spPr>
+          <a:xfrm>
+            <a:off x="8549640" y="4892040"/>
+            <a:ext cx="3108960" cy="365760"/>
+          </a:xfrm>
+          <a:prstGeom prst="rect">
+            <a:avLst/>
+          </a:prstGeom>
+          <a:noFill/>
+          <a:ln/>
+        </p:spPr>
+        <p:txBody>
+          <a:bodyPr wrap="square" lIns="0" tIns="0" rIns="0" bIns="0" rtlCol="0" anchor="ctr"/>
+          <a:lstStyle/>
+          <a:p>
+            <a:pPr indent="0" marL="0">
+              <a:buNone/>
+            </a:pPr>
+            <a:r>
+              <a:rPr lang="en-US" sz="1600" b="1" dirty="0">
+                <a:solidFill>
+                  <a:schemeClr val="tx1"/>
+                </a:solidFill>
+              </a:rPr>
+              <a:t>Rede</a:t>
+            </a:r>
+            <a:endParaRPr lang="en-US" sz="1600" dirty="0"/>
+          </a:p>
+        </p:txBody>
+      </p:sp>
+      <p:sp>
+        <p:nvSpPr>
+          <p:cNvPr id="11" name="Text 8"/>
+          <p:cNvSpPr txBox="1"/>
+          <p:nvPr/>
+        </p:nvSpPr>
+        <p:spPr>
+          <a:xfrm>
+            <a:off x="8549640" y="5257800"/>
+            <a:ext cx="3108960" cy="731520"/>
+          </a:xfrm>
+          <a:prstGeom prst="rect">
+            <a:avLst/>
+          </a:prstGeom>
+          <a:noFill/>
+          <a:ln/>
+        </p:spPr>
+        <p:txBody>
+          <a:bodyPr wrap="square" lIns="0" tIns="0" rIns="0" bIns="0" rtlCol="0" anchor="t"/>
+          <a:lstStyle/>
+          <a:p>
+            <a:pPr indent="0" marL="0">
+              <a:buNone/>
+            </a:pPr>
+            <a:r>
+              <a:rPr lang="en-US" sz="1300" dirty="0">
+                <a:solidFill>
+                  <a:schemeClr val="accent6"/>
+                </a:solidFill>
+              </a:rPr>
+              <a:t>VLAN dedicada; coletores no Wi-Fi existente</a:t>
+            </a:r>
+            <a:endParaRPr lang="en-US" sz="1300" dirty="0"/>
           </a:p>
         </p:txBody>
       </p:sp>
@@ -5708,6 +5784,152 @@
         </p:nvSpPr>
         <p:spPr>
           <a:xfrm>
+            <a:off x="731520" y="1737360"/>
+            <a:ext cx="10515600" cy="1828800"/>
+          </a:xfrm>
+          <a:prstGeom prst="rect">
+            <a:avLst/>
+          </a:prstGeom>
+          <a:noFill/>
+          <a:ln/>
+        </p:spPr>
+        <p:txBody>
+          <a:bodyPr wrap="square" lIns="0" tIns="0" rIns="0" bIns="0" rtlCol="0" anchor="b"/>
+          <a:lstStyle/>
+          <a:p>
+            <a:pPr algn="l" indent="0" marL="0">
+              <a:buNone/>
+            </a:pPr>
+            <a:r>
+              <a:rPr lang="en-US" sz="4000" b="1" dirty="0">
+                <a:solidFill>
+                  <a:schemeClr val="bg1"/>
+                </a:solidFill>
+              </a:rPr>
+              <a:t>Orçamento e caminhos de produção</a:t>
+            </a:r>
+            <a:endParaRPr lang="en-US" sz="4000" dirty="0"/>
+          </a:p>
+        </p:txBody>
+      </p:sp>
+      <p:sp>
+        <p:nvSpPr>
+          <p:cNvPr id="3" name="Text 0"/>
+          <p:cNvSpPr/>
+          <p:nvPr>
+            <p:ph idx="101" type="body" hasCustomPrompt="1"/>
+          </p:nvPr>
+        </p:nvSpPr>
+        <p:spPr>
+          <a:xfrm>
+            <a:off x="731520" y="3794760"/>
+            <a:ext cx="10515600" cy="822960"/>
+          </a:xfrm>
+          <a:prstGeom prst="rect">
+            <a:avLst/>
+          </a:prstGeom>
+          <a:noFill/>
+          <a:ln/>
+        </p:spPr>
+        <p:txBody>
+          <a:bodyPr wrap="square" lIns="0" tIns="0" rIns="0" bIns="0" rtlCol="0" anchor="t"/>
+          <a:lstStyle/>
+          <a:p>
+            <a:pPr algn="l" indent="0" marL="0">
+              <a:buNone/>
+            </a:pPr>
+            <a:r>
+              <a:rPr lang="en-US" sz="1800" dirty="0">
+                <a:solidFill>
+                  <a:srgbClr val="C9D3E0"/>
+                </a:solidFill>
+              </a:rPr>
+              <a:t>Preços cotados em lojas brasileiras em 23/10/2026; estimativas marcadas na planilha</a:t>
+            </a:r>
+            <a:endParaRPr lang="en-US" sz="1800" dirty="0"/>
+          </a:p>
+        </p:txBody>
+      </p:sp>
+      <p:sp>
+        <p:nvSpPr>
+          <p:cNvPr id="25" name="Slide Number Placeholder 0"/>
+          <p:cNvSpPr>
+            <a:spLocks noGrp="1"/>
+          </p:cNvSpPr>
+          <p:nvPr>
+            <p:ph type="sldNum" sz="quarter" idx="4294967295"/>
+          </p:nvPr>
+        </p:nvSpPr>
+        <p:spPr>
+          <a:xfrm>
+            <a:off x="11338560" y="6355080"/>
+            <a:ext cx="548640" cy="274320"/>
+          </a:xfrm>
+          <a:prstGeom prst="rect">
+            <a:avLst/>
+          </a:prstGeom>
+          <a:extLst>
+            <a:ext uri="{C572A759-6A51-4108-AA02-DFA0A04FC94B}">
+              <ma14:wrappingTextBoxFlag xmlns:ma14="http://schemas.microsoft.com/office/mac/drawingml/2011/main" val="0"/>
+            </a:ext>
+          </a:extLst>
+        </p:spPr>
+        <p:txBody>
+          <a:bodyPr/>
+          <a:lstStyle>
+            <a:lvl1pPr>
+              <a:defRPr sz="1000">
+                <a:solidFill>
+                  <a:srgbClr val="8A97AB"/>
+                </a:solidFill>
+              </a:defRPr>
+            </a:lvl1pPr>
+          </a:lstStyle>
+          <a:p>
+            <a:pPr algn="l"/>
+            <a:fld id="{F7021451-1387-4CA6-816F-3879F97B5CBC}" type="slidenum">
+              <a:rPr b="0" lang="en-US"/>
+              <a:t>15</a:t>
+            </a:fld>
+            <a:endParaRPr lang="en-US"/>
+          </a:p>
+        </p:txBody>
+      </p:sp>
+    </p:spTree>
+  </p:cSld>
+  <p:clrMapOvr>
+    <a:masterClrMapping/>
+  </p:clrMapOvr>
+</p:sld>
+</file>
+
+<file path=ppt/slides/slide16.xml><?xml version="1.0" encoding="utf-8"?>
+<p:sld xmlns:a="http://schemas.openxmlformats.org/drawingml/2006/main" xmlns:r="http://schemas.openxmlformats.org/officeDocument/2006/relationships" xmlns:p="http://schemas.openxmlformats.org/presentationml/2006/main">
+  <p:cSld name="Slide 16">
+    <p:spTree>
+      <p:nvGrpSpPr>
+        <p:cNvPr id="1" name=""/>
+        <p:cNvGrpSpPr/>
+        <p:nvPr/>
+      </p:nvGrpSpPr>
+      <p:grpSpPr>
+        <a:xfrm>
+          <a:off x="0" y="0"/>
+          <a:ext cx="0" cy="0"/>
+          <a:chOff x="0" y="0"/>
+          <a:chExt cx="0" cy="0"/>
+        </a:xfrm>
+      </p:grpSpPr>
+      <p:sp>
+        <p:nvSpPr>
+          <p:cNvPr id="2" name="Text 0"/>
+          <p:cNvSpPr/>
+          <p:nvPr>
+            <p:ph idx="100" type="title" hasCustomPrompt="1"/>
+          </p:nvPr>
+        </p:nvSpPr>
+        <p:spPr>
+          <a:xfrm>
             <a:off x="548640" y="274320"/>
             <a:ext cx="11064240" cy="777240"/>
           </a:xfrm>
@@ -5754,7 +5976,7 @@
       </p:graphicFrame>
       <p:graphicFrame>
         <p:nvGraphicFramePr>
-          <p:cNvPr id="16" name="Table 0"/>
+          <p:cNvPr id="17" name="Table 0"/>
           <p:cNvGraphicFramePr>
             <a:graphicFrameLocks noGrp="1"/>
           </p:cNvGraphicFramePr>
@@ -6571,897 +6793,6 @@
             <a:pPr algn="l"/>
             <a:fld id="{F7021451-1387-4CA6-816F-3879F97B5CBC}" type="slidenum">
               <a:rPr b="0" lang="en-US"/>
-              <a:t>15</a:t>
-            </a:fld>
-            <a:endParaRPr lang="en-US"/>
-          </a:p>
-        </p:txBody>
-      </p:sp>
-    </p:spTree>
-  </p:cSld>
-  <p:clrMapOvr>
-    <a:masterClrMapping/>
-  </p:clrMapOvr>
-</p:sld>
-</file>
-
-<file path=ppt/slides/slide16.xml><?xml version="1.0" encoding="utf-8"?>
-<p:sld xmlns:a="http://schemas.openxmlformats.org/drawingml/2006/main" xmlns:r="http://schemas.openxmlformats.org/officeDocument/2006/relationships" xmlns:p="http://schemas.openxmlformats.org/presentationml/2006/main">
-  <p:cSld name="Slide 16">
-    <p:spTree>
-      <p:nvGrpSpPr>
-        <p:cNvPr id="1" name=""/>
-        <p:cNvGrpSpPr/>
-        <p:nvPr/>
-      </p:nvGrpSpPr>
-      <p:grpSpPr>
-        <a:xfrm>
-          <a:off x="0" y="0"/>
-          <a:ext cx="0" cy="0"/>
-          <a:chOff x="0" y="0"/>
-          <a:chExt cx="0" cy="0"/>
-        </a:xfrm>
-      </p:grpSpPr>
-      <p:sp>
-        <p:nvSpPr>
-          <p:cNvPr id="2" name="Text 0"/>
-          <p:cNvSpPr/>
-          <p:nvPr>
-            <p:ph idx="100" type="title" hasCustomPrompt="1"/>
-          </p:nvPr>
-        </p:nvSpPr>
-        <p:spPr>
-          <a:xfrm>
-            <a:off x="548640" y="274320"/>
-            <a:ext cx="11064240" cy="777240"/>
-          </a:xfrm>
-          <a:prstGeom prst="rect">
-            <a:avLst/>
-          </a:prstGeom>
-          <a:noFill/>
-          <a:ln/>
-        </p:spPr>
-        <p:txBody>
-          <a:bodyPr wrap="square" lIns="0" tIns="0" rIns="0" bIns="0" rtlCol="0" anchor="ctr"/>
-          <a:lstStyle/>
-          <a:p>
-            <a:pPr algn="l" indent="0" marL="0">
-              <a:buNone/>
-            </a:pPr>
-            <a:r>
-              <a:rPr lang="en-US" sz="2600" b="1" dirty="0">
-                <a:solidFill>
-                  <a:schemeClr val="tx1"/>
-                </a:solidFill>
-              </a:rPr>
-              <a:t>Interno no piloto; placa própria como opção de escala</a:t>
-            </a:r>
-            <a:endParaRPr lang="en-US" sz="2600" dirty="0"/>
-          </a:p>
-        </p:txBody>
-      </p:sp>
-      <p:sp>
-        <p:nvSpPr>
-          <p:cNvPr id="3" name="Shape 1"/>
-          <p:cNvSpPr/>
-          <p:nvPr/>
-        </p:nvSpPr>
-        <p:spPr>
-          <a:xfrm>
-            <a:off x="548640" y="1371600"/>
-            <a:ext cx="3520440" cy="4389120"/>
-          </a:xfrm>
-          <a:prstGeom prst="roundRect">
-            <a:avLst>
-              <a:gd name="adj" fmla="val 2597"/>
-            </a:avLst>
-          </a:prstGeom>
-          <a:solidFill>
-            <a:schemeClr val="bg1"/>
-          </a:solidFill>
-          <a:ln w="12700">
-            <a:solidFill>
-              <a:srgbClr val="D5DBE3"/>
-            </a:solidFill>
-            <a:prstDash val="solid"/>
-          </a:ln>
-          <a:effectLst>
-            <a:outerShdw sx="100000" sy="100000" kx="0" ky="0" algn="bl" rotWithShape="0" blurRad="76200" dist="25400" dir="5400000">
-              <a:srgbClr val="000000">
-                <a:alpha val="12000"/>
-              </a:srgbClr>
-            </a:outerShdw>
-          </a:effectLst>
-        </p:spPr>
-      </p:sp>
-      <p:sp>
-        <p:nvSpPr>
-          <p:cNvPr id="4" name="Shape 2"/>
-          <p:cNvSpPr/>
-          <p:nvPr/>
-        </p:nvSpPr>
-        <p:spPr>
-          <a:xfrm>
-            <a:off x="822960" y="1645920"/>
-            <a:ext cx="292608" cy="292608"/>
-          </a:xfrm>
-          <a:prstGeom prst="ellipse">
-            <a:avLst/>
-          </a:prstGeom>
-          <a:solidFill>
-            <a:schemeClr val="accent2"/>
-          </a:solidFill>
-          <a:ln w="12700">
-            <a:solidFill>
-              <a:schemeClr val="accent2"/>
-            </a:solidFill>
-            <a:prstDash val="solid"/>
-          </a:ln>
-        </p:spPr>
-      </p:sp>
-      <p:sp>
-        <p:nvSpPr>
-          <p:cNvPr id="5" name="Text 3"/>
-          <p:cNvSpPr txBox="1"/>
-          <p:nvPr/>
-        </p:nvSpPr>
-        <p:spPr>
-          <a:xfrm>
-            <a:off x="1234440" y="1572768"/>
-            <a:ext cx="2651760" cy="457200"/>
-          </a:xfrm>
-          <a:prstGeom prst="rect">
-            <a:avLst/>
-          </a:prstGeom>
-          <a:noFill/>
-          <a:ln/>
-        </p:spPr>
-        <p:txBody>
-          <a:bodyPr wrap="square" lIns="0" tIns="0" rIns="0" bIns="0" rtlCol="0" anchor="ctr"/>
-          <a:lstStyle/>
-          <a:p>
-            <a:pPr indent="0" marL="0">
-              <a:buNone/>
-            </a:pPr>
-            <a:r>
-              <a:rPr lang="en-US" sz="1800" b="1" dirty="0">
-                <a:solidFill>
-                  <a:schemeClr val="tx1"/>
-                </a:solidFill>
-              </a:rPr>
-              <a:t>Produção interna</a:t>
-            </a:r>
-            <a:endParaRPr lang="en-US" sz="1800" dirty="0"/>
-          </a:p>
-        </p:txBody>
-      </p:sp>
-      <p:sp>
-        <p:nvSpPr>
-          <p:cNvPr id="6" name="Text 4"/>
-          <p:cNvSpPr txBox="1"/>
-          <p:nvPr/>
-        </p:nvSpPr>
-        <p:spPr>
-          <a:xfrm>
-            <a:off x="822960" y="2148840"/>
-            <a:ext cx="3017520" cy="731520"/>
-          </a:xfrm>
-          <a:prstGeom prst="rect">
-            <a:avLst/>
-          </a:prstGeom>
-          <a:noFill/>
-          <a:ln/>
-        </p:spPr>
-        <p:txBody>
-          <a:bodyPr wrap="square" lIns="0" tIns="0" rIns="0" bIns="0" rtlCol="0" anchor="ctr"/>
-          <a:lstStyle/>
-          <a:p>
-            <a:pPr indent="0" marL="0">
-              <a:buNone/>
-            </a:pPr>
-            <a:r>
-              <a:rPr lang="en-US" sz="3000" b="1" dirty="0">
-                <a:solidFill>
-                  <a:schemeClr val="accent2"/>
-                </a:solidFill>
-              </a:rPr>
-              <a:t>R$ 255 mil</a:t>
-            </a:r>
-            <a:endParaRPr lang="en-US" sz="3000" dirty="0"/>
-          </a:p>
-        </p:txBody>
-      </p:sp>
-      <p:sp>
-        <p:nvSpPr>
-          <p:cNvPr id="7" name="Text 5"/>
-          <p:cNvSpPr txBox="1"/>
-          <p:nvPr/>
-        </p:nvSpPr>
-        <p:spPr>
-          <a:xfrm>
-            <a:off x="822960" y="2834640"/>
-            <a:ext cx="3017520" cy="320040"/>
-          </a:xfrm>
-          <a:prstGeom prst="rect">
-            <a:avLst/>
-          </a:prstGeom>
-          <a:noFill/>
-          <a:ln/>
-        </p:spPr>
-        <p:txBody>
-          <a:bodyPr wrap="square" lIns="0" tIns="0" rIns="0" bIns="0" rtlCol="0" anchor="ctr"/>
-          <a:lstStyle/>
-          <a:p>
-            <a:pPr indent="0" marL="0">
-              <a:buNone/>
-            </a:pPr>
-            <a:r>
-              <a:rPr lang="en-US" sz="1200" dirty="0">
-                <a:solidFill>
-                  <a:schemeClr val="accent6"/>
-                </a:solidFill>
-              </a:rPr>
-              <a:t>operação completa</a:t>
-            </a:r>
-            <a:endParaRPr lang="en-US" sz="1200" dirty="0"/>
-          </a:p>
-        </p:txBody>
-      </p:sp>
-      <p:sp>
-        <p:nvSpPr>
-          <p:cNvPr id="8" name="Text 6"/>
-          <p:cNvSpPr txBox="1"/>
-          <p:nvPr/>
-        </p:nvSpPr>
-        <p:spPr>
-          <a:xfrm>
-            <a:off x="822960" y="3291840"/>
-            <a:ext cx="3063240" cy="2286000"/>
-          </a:xfrm>
-          <a:prstGeom prst="rect">
-            <a:avLst/>
-          </a:prstGeom>
-          <a:noFill/>
-          <a:ln/>
-        </p:spPr>
-        <p:txBody>
-          <a:bodyPr wrap="square" rtlCol="0" anchor="t"/>
-          <a:lstStyle/>
-          <a:p>
-            <a:pPr marL="342900" indent="-342900">
-              <a:spcAft>
-                <a:spcPts val="600"/>
-              </a:spcAft>
-              <a:buSzPct val="100000"/>
-              <a:buChar char="•"/>
-            </a:pPr>
-            <a:r>
-              <a:rPr lang="en-US" sz="1400" dirty="0">
-                <a:solidFill>
-                  <a:schemeClr val="tx2"/>
-                </a:solidFill>
-              </a:rPr>
-              <a:t>Displays e placas comprados no Brasil</a:t>
-            </a:r>
-            <a:endParaRPr lang="en-US" sz="1400" dirty="0"/>
-          </a:p>
-          <a:p>
-            <a:pPr marL="342900" indent="-342900">
-              <a:spcAft>
-                <a:spcPts val="600"/>
-              </a:spcAft>
-              <a:buSzPct val="100000"/>
-              <a:buChar char="•"/>
-            </a:pPr>
-            <a:r>
-              <a:rPr lang="en-US" sz="1400" dirty="0">
-                <a:solidFill>
-                  <a:schemeClr val="tx2"/>
-                </a:solidFill>
-              </a:rPr>
-              <a:t>Montagem e manutenção pela equipe</a:t>
-            </a:r>
-            <a:endParaRPr lang="en-US" sz="1400" dirty="0"/>
-          </a:p>
-          <a:p>
-            <a:pPr marL="342900" indent="-342900">
-              <a:spcAft>
-                <a:spcPts val="600"/>
-              </a:spcAft>
-              <a:buSzPct val="100000"/>
-              <a:buChar char="•"/>
-            </a:pPr>
-            <a:r>
-              <a:rPr lang="en-US" sz="1400" dirty="0">
-                <a:solidFill>
-                  <a:schemeClr val="tx2"/>
-                </a:solidFill>
-              </a:rPr>
-              <a:t>Reposição imediata, domínio total</a:t>
-            </a:r>
-            <a:endParaRPr lang="en-US" sz="1400" dirty="0"/>
-          </a:p>
-          <a:p>
-            <a:pPr marL="342900" indent="-342900">
-              <a:spcAft>
-                <a:spcPts val="600"/>
-              </a:spcAft>
-              <a:buSzPct val="100000"/>
-              <a:buChar char="•"/>
-            </a:pPr>
-            <a:r>
-              <a:rPr lang="en-US" sz="1400" dirty="0">
-                <a:solidFill>
-                  <a:schemeClr val="tx2"/>
-                </a:solidFill>
-              </a:rPr>
-              <a:t>Exige técnico de eletrônica</a:t>
-            </a:r>
-            <a:endParaRPr lang="en-US" sz="1400" dirty="0"/>
-          </a:p>
-        </p:txBody>
-      </p:sp>
-      <p:sp>
-        <p:nvSpPr>
-          <p:cNvPr id="9" name="Shape 7"/>
-          <p:cNvSpPr/>
-          <p:nvPr/>
-        </p:nvSpPr>
-        <p:spPr>
-          <a:xfrm>
-            <a:off x="4297680" y="1371600"/>
-            <a:ext cx="3520440" cy="4389120"/>
-          </a:xfrm>
-          <a:prstGeom prst="roundRect">
-            <a:avLst>
-              <a:gd name="adj" fmla="val 2597"/>
-            </a:avLst>
-          </a:prstGeom>
-          <a:solidFill>
-            <a:schemeClr val="bg1"/>
-          </a:solidFill>
-          <a:ln w="12700">
-            <a:solidFill>
-              <a:srgbClr val="D5DBE3"/>
-            </a:solidFill>
-            <a:prstDash val="solid"/>
-          </a:ln>
-          <a:effectLst>
-            <a:outerShdw sx="100000" sy="100000" kx="0" ky="0" algn="bl" rotWithShape="0" blurRad="76200" dist="25400" dir="5400000">
-              <a:srgbClr val="000000">
-                <a:alpha val="12000"/>
-              </a:srgbClr>
-            </a:outerShdw>
-          </a:effectLst>
-        </p:spPr>
-      </p:sp>
-      <p:sp>
-        <p:nvSpPr>
-          <p:cNvPr id="10" name="Shape 8"/>
-          <p:cNvSpPr/>
-          <p:nvPr/>
-        </p:nvSpPr>
-        <p:spPr>
-          <a:xfrm>
-            <a:off x="4572000" y="1645920"/>
-            <a:ext cx="292608" cy="292608"/>
-          </a:xfrm>
-          <a:prstGeom prst="ellipse">
-            <a:avLst/>
-          </a:prstGeom>
-          <a:solidFill>
-            <a:schemeClr val="accent3"/>
-          </a:solidFill>
-          <a:ln w="12700">
-            <a:solidFill>
-              <a:schemeClr val="accent3"/>
-            </a:solidFill>
-            <a:prstDash val="solid"/>
-          </a:ln>
-        </p:spPr>
-      </p:sp>
-      <p:sp>
-        <p:nvSpPr>
-          <p:cNvPr id="11" name="Text 9"/>
-          <p:cNvSpPr txBox="1"/>
-          <p:nvPr/>
-        </p:nvSpPr>
-        <p:spPr>
-          <a:xfrm>
-            <a:off x="4983480" y="1572768"/>
-            <a:ext cx="2651760" cy="457200"/>
-          </a:xfrm>
-          <a:prstGeom prst="rect">
-            <a:avLst/>
-          </a:prstGeom>
-          <a:noFill/>
-          <a:ln/>
-        </p:spPr>
-        <p:txBody>
-          <a:bodyPr wrap="square" lIns="0" tIns="0" rIns="0" bIns="0" rtlCol="0" anchor="ctr"/>
-          <a:lstStyle/>
-          <a:p>
-            <a:pPr indent="0" marL="0">
-              <a:buNone/>
-            </a:pPr>
-            <a:r>
-              <a:rPr lang="en-US" sz="1800" b="1" dirty="0">
-                <a:solidFill>
-                  <a:schemeClr val="tx1"/>
-                </a:solidFill>
-              </a:rPr>
-              <a:t>Placa própria (EMS)</a:t>
-            </a:r>
-            <a:endParaRPr lang="en-US" sz="1800" dirty="0"/>
-          </a:p>
-        </p:txBody>
-      </p:sp>
-      <p:sp>
-        <p:nvSpPr>
-          <p:cNvPr id="12" name="Text 10"/>
-          <p:cNvSpPr txBox="1"/>
-          <p:nvPr/>
-        </p:nvSpPr>
-        <p:spPr>
-          <a:xfrm>
-            <a:off x="4572000" y="2148840"/>
-            <a:ext cx="3017520" cy="731520"/>
-          </a:xfrm>
-          <a:prstGeom prst="rect">
-            <a:avLst/>
-          </a:prstGeom>
-          <a:noFill/>
-          <a:ln/>
-        </p:spPr>
-        <p:txBody>
-          <a:bodyPr wrap="square" lIns="0" tIns="0" rIns="0" bIns="0" rtlCol="0" anchor="ctr"/>
-          <a:lstStyle/>
-          <a:p>
-            <a:pPr indent="0" marL="0">
-              <a:buNone/>
-            </a:pPr>
-            <a:r>
-              <a:rPr lang="en-US" sz="3000" b="1" dirty="0">
-                <a:solidFill>
-                  <a:schemeClr val="accent3"/>
-                </a:solidFill>
-              </a:rPr>
-              <a:t>R$ 326 mil</a:t>
-            </a:r>
-            <a:endParaRPr lang="en-US" sz="3000" dirty="0"/>
-          </a:p>
-        </p:txBody>
-      </p:sp>
-      <p:sp>
-        <p:nvSpPr>
-          <p:cNvPr id="13" name="Text 11"/>
-          <p:cNvSpPr txBox="1"/>
-          <p:nvPr/>
-        </p:nvSpPr>
-        <p:spPr>
-          <a:xfrm>
-            <a:off x="4572000" y="2834640"/>
-            <a:ext cx="3017520" cy="320040"/>
-          </a:xfrm>
-          <a:prstGeom prst="rect">
-            <a:avLst/>
-          </a:prstGeom>
-          <a:noFill/>
-          <a:ln/>
-        </p:spPr>
-        <p:txBody>
-          <a:bodyPr wrap="square" lIns="0" tIns="0" rIns="0" bIns="0" rtlCol="0" anchor="ctr"/>
-          <a:lstStyle/>
-          <a:p>
-            <a:pPr indent="0" marL="0">
-              <a:buNone/>
-            </a:pPr>
-            <a:r>
-              <a:rPr lang="en-US" sz="1200" dirty="0">
-                <a:solidFill>
-                  <a:schemeClr val="accent6"/>
-                </a:solidFill>
-              </a:rPr>
-              <a:t>operação completa</a:t>
-            </a:r>
-            <a:endParaRPr lang="en-US" sz="1200" dirty="0"/>
-          </a:p>
-        </p:txBody>
-      </p:sp>
-      <p:sp>
-        <p:nvSpPr>
-          <p:cNvPr id="14" name="Text 12"/>
-          <p:cNvSpPr txBox="1"/>
-          <p:nvPr/>
-        </p:nvSpPr>
-        <p:spPr>
-          <a:xfrm>
-            <a:off x="4572000" y="3291840"/>
-            <a:ext cx="3063240" cy="2286000"/>
-          </a:xfrm>
-          <a:prstGeom prst="rect">
-            <a:avLst/>
-          </a:prstGeom>
-          <a:noFill/>
-          <a:ln/>
-        </p:spPr>
-        <p:txBody>
-          <a:bodyPr wrap="square" rtlCol="0" anchor="t"/>
-          <a:lstStyle/>
-          <a:p>
-            <a:pPr marL="342900" indent="-342900">
-              <a:spcAft>
-                <a:spcPts val="600"/>
-              </a:spcAft>
-              <a:buSzPct val="100000"/>
-              <a:buChar char="•"/>
-            </a:pPr>
-            <a:r>
-              <a:rPr lang="en-US" sz="1400" dirty="0">
-                <a:solidFill>
-                  <a:schemeClr val="tx2"/>
-                </a:solidFill>
-              </a:rPr>
-              <a:t>Projeto da placa ≈ R$ 15 mil</a:t>
-            </a:r>
-            <a:endParaRPr lang="en-US" sz="1400" dirty="0"/>
-          </a:p>
-          <a:p>
-            <a:pPr marL="342900" indent="-342900">
-              <a:spcAft>
-                <a:spcPts val="600"/>
-              </a:spcAft>
-              <a:buSzPct val="100000"/>
-              <a:buChar char="•"/>
-            </a:pPr>
-            <a:r>
-              <a:rPr lang="en-US" sz="1400" dirty="0">
-                <a:solidFill>
-                  <a:schemeClr val="tx2"/>
-                </a:solidFill>
-              </a:rPr>
-              <a:t>Fabricação e montagem industrial</a:t>
-            </a:r>
-            <a:endParaRPr lang="en-US" sz="1400" dirty="0"/>
-          </a:p>
-          <a:p>
-            <a:pPr marL="342900" indent="-342900">
-              <a:spcAft>
-                <a:spcPts val="600"/>
-              </a:spcAft>
-              <a:buSzPct val="100000"/>
-              <a:buChar char="•"/>
-            </a:pPr>
-            <a:r>
-              <a:rPr lang="en-US" sz="1400" dirty="0">
-                <a:solidFill>
-                  <a:schemeClr val="tx2"/>
-                </a:solidFill>
-              </a:rPr>
-              <a:t>Qualidade e repetibilidade</a:t>
-            </a:r>
-            <a:endParaRPr lang="en-US" sz="1400" dirty="0"/>
-          </a:p>
-          <a:p>
-            <a:pPr marL="342900" indent="-342900">
-              <a:spcAft>
-                <a:spcPts val="600"/>
-              </a:spcAft>
-              <a:buSzPct val="100000"/>
-              <a:buChar char="•"/>
-            </a:pPr>
-            <a:r>
-              <a:rPr lang="en-US" sz="1400" dirty="0">
-                <a:solidFill>
-                  <a:schemeClr val="tx2"/>
-                </a:solidFill>
-              </a:rPr>
-              <a:t>Importação e prazo maiores</a:t>
-            </a:r>
-            <a:endParaRPr lang="en-US" sz="1400" dirty="0"/>
-          </a:p>
-        </p:txBody>
-      </p:sp>
-      <p:sp>
-        <p:nvSpPr>
-          <p:cNvPr id="15" name="Shape 13"/>
-          <p:cNvSpPr/>
-          <p:nvPr/>
-        </p:nvSpPr>
-        <p:spPr>
-          <a:xfrm>
-            <a:off x="8046720" y="1371600"/>
-            <a:ext cx="3520440" cy="4389120"/>
-          </a:xfrm>
-          <a:prstGeom prst="roundRect">
-            <a:avLst>
-              <a:gd name="adj" fmla="val 2597"/>
-            </a:avLst>
-          </a:prstGeom>
-          <a:solidFill>
-            <a:schemeClr val="bg1"/>
-          </a:solidFill>
-          <a:ln w="12700">
-            <a:solidFill>
-              <a:srgbClr val="D5DBE3"/>
-            </a:solidFill>
-            <a:prstDash val="solid"/>
-          </a:ln>
-          <a:effectLst>
-            <a:outerShdw sx="100000" sy="100000" kx="0" ky="0" algn="bl" rotWithShape="0" blurRad="76200" dist="25400" dir="5400000">
-              <a:srgbClr val="000000">
-                <a:alpha val="12000"/>
-              </a:srgbClr>
-            </a:outerShdw>
-          </a:effectLst>
-        </p:spPr>
-      </p:sp>
-      <p:sp>
-        <p:nvSpPr>
-          <p:cNvPr id="16" name="Shape 14"/>
-          <p:cNvSpPr/>
-          <p:nvPr/>
-        </p:nvSpPr>
-        <p:spPr>
-          <a:xfrm>
-            <a:off x="8321040" y="1645920"/>
-            <a:ext cx="292608" cy="292608"/>
-          </a:xfrm>
-          <a:prstGeom prst="ellipse">
-            <a:avLst/>
-          </a:prstGeom>
-          <a:solidFill>
-            <a:schemeClr val="accent5"/>
-          </a:solidFill>
-          <a:ln w="12700">
-            <a:solidFill>
-              <a:schemeClr val="accent5"/>
-            </a:solidFill>
-            <a:prstDash val="solid"/>
-          </a:ln>
-        </p:spPr>
-      </p:sp>
-      <p:sp>
-        <p:nvSpPr>
-          <p:cNvPr id="17" name="Text 15"/>
-          <p:cNvSpPr txBox="1"/>
-          <p:nvPr/>
-        </p:nvSpPr>
-        <p:spPr>
-          <a:xfrm>
-            <a:off x="8732520" y="1572768"/>
-            <a:ext cx="2651760" cy="457200"/>
-          </a:xfrm>
-          <a:prstGeom prst="rect">
-            <a:avLst/>
-          </a:prstGeom>
-          <a:noFill/>
-          <a:ln/>
-        </p:spPr>
-        <p:txBody>
-          <a:bodyPr wrap="square" lIns="0" tIns="0" rIns="0" bIns="0" rtlCol="0" anchor="ctr"/>
-          <a:lstStyle/>
-          <a:p>
-            <a:pPr indent="0" marL="0">
-              <a:buNone/>
-            </a:pPr>
-            <a:r>
-              <a:rPr lang="en-US" sz="1800" b="1" dirty="0">
-                <a:solidFill>
-                  <a:schemeClr val="tx1"/>
-                </a:solidFill>
-              </a:rPr>
-              <a:t>PTL comercial</a:t>
-            </a:r>
-            <a:endParaRPr lang="en-US" sz="1800" dirty="0"/>
-          </a:p>
-        </p:txBody>
-      </p:sp>
-      <p:sp>
-        <p:nvSpPr>
-          <p:cNvPr id="18" name="Text 16"/>
-          <p:cNvSpPr txBox="1"/>
-          <p:nvPr/>
-        </p:nvSpPr>
-        <p:spPr>
-          <a:xfrm>
-            <a:off x="8321040" y="2148840"/>
-            <a:ext cx="3017520" cy="731520"/>
-          </a:xfrm>
-          <a:prstGeom prst="rect">
-            <a:avLst/>
-          </a:prstGeom>
-          <a:noFill/>
-          <a:ln/>
-        </p:spPr>
-        <p:txBody>
-          <a:bodyPr wrap="square" lIns="0" tIns="0" rIns="0" bIns="0" rtlCol="0" anchor="ctr"/>
-          <a:lstStyle/>
-          <a:p>
-            <a:pPr indent="0" marL="0">
-              <a:buNone/>
-            </a:pPr>
-            <a:r>
-              <a:rPr lang="en-US" sz="3000" b="1" dirty="0">
-                <a:solidFill>
-                  <a:schemeClr val="accent5"/>
-                </a:solidFill>
-              </a:rPr>
-              <a:t>R$ 796 mil</a:t>
-            </a:r>
-            <a:endParaRPr lang="en-US" sz="3000" dirty="0"/>
-          </a:p>
-        </p:txBody>
-      </p:sp>
-      <p:sp>
-        <p:nvSpPr>
-          <p:cNvPr id="19" name="Text 17"/>
-          <p:cNvSpPr txBox="1"/>
-          <p:nvPr/>
-        </p:nvSpPr>
-        <p:spPr>
-          <a:xfrm>
-            <a:off x="8321040" y="2834640"/>
-            <a:ext cx="3017520" cy="320040"/>
-          </a:xfrm>
-          <a:prstGeom prst="rect">
-            <a:avLst/>
-          </a:prstGeom>
-          <a:noFill/>
-          <a:ln/>
-        </p:spPr>
-        <p:txBody>
-          <a:bodyPr wrap="square" lIns="0" tIns="0" rIns="0" bIns="0" rtlCol="0" anchor="ctr"/>
-          <a:lstStyle/>
-          <a:p>
-            <a:pPr indent="0" marL="0">
-              <a:buNone/>
-            </a:pPr>
-            <a:r>
-              <a:rPr lang="en-US" sz="1200" dirty="0">
-                <a:solidFill>
-                  <a:schemeClr val="accent6"/>
-                </a:solidFill>
-              </a:rPr>
-              <a:t>operação completa</a:t>
-            </a:r>
-            <a:endParaRPr lang="en-US" sz="1200" dirty="0"/>
-          </a:p>
-        </p:txBody>
-      </p:sp>
-      <p:sp>
-        <p:nvSpPr>
-          <p:cNvPr id="20" name="Text 18"/>
-          <p:cNvSpPr txBox="1"/>
-          <p:nvPr/>
-        </p:nvSpPr>
-        <p:spPr>
-          <a:xfrm>
-            <a:off x="8321040" y="3291840"/>
-            <a:ext cx="3063240" cy="2286000"/>
-          </a:xfrm>
-          <a:prstGeom prst="rect">
-            <a:avLst/>
-          </a:prstGeom>
-          <a:noFill/>
-          <a:ln/>
-        </p:spPr>
-        <p:txBody>
-          <a:bodyPr wrap="square" rtlCol="0" anchor="t"/>
-          <a:lstStyle/>
-          <a:p>
-            <a:pPr marL="342900" indent="-342900">
-              <a:spcAft>
-                <a:spcPts val="600"/>
-              </a:spcAft>
-              <a:buSzPct val="100000"/>
-              <a:buChar char="•"/>
-            </a:pPr>
-            <a:r>
-              <a:rPr lang="en-US" sz="1400" dirty="0">
-                <a:solidFill>
-                  <a:schemeClr val="tx2"/>
-                </a:solidFill>
-              </a:rPr>
-              <a:t>Produto pronto e com garantia</a:t>
-            </a:r>
-            <a:endParaRPr lang="en-US" sz="1400" dirty="0"/>
-          </a:p>
-          <a:p>
-            <a:pPr marL="342900" indent="-342900">
-              <a:spcAft>
-                <a:spcPts val="600"/>
-              </a:spcAft>
-              <a:buSzPct val="100000"/>
-              <a:buChar char="•"/>
-            </a:pPr>
-            <a:r>
-              <a:rPr lang="en-US" sz="1400" dirty="0">
-                <a:solidFill>
-                  <a:schemeClr val="tx2"/>
-                </a:solidFill>
-              </a:rPr>
-              <a:t>≈ 3× o custo da produção interna</a:t>
-            </a:r>
-            <a:endParaRPr lang="en-US" sz="1400" dirty="0"/>
-          </a:p>
-          <a:p>
-            <a:pPr marL="342900" indent="-342900">
-              <a:spcAft>
-                <a:spcPts val="600"/>
-              </a:spcAft>
-              <a:buSzPct val="100000"/>
-              <a:buChar char="•"/>
-            </a:pPr>
-            <a:r>
-              <a:rPr lang="en-US" sz="1400" dirty="0">
-                <a:solidFill>
-                  <a:schemeClr val="tx2"/>
-                </a:solidFill>
-              </a:rPr>
-              <a:t>Dependência do fornecedor</a:t>
-            </a:r>
-            <a:endParaRPr lang="en-US" sz="1400" dirty="0"/>
-          </a:p>
-          <a:p>
-            <a:pPr marL="342900" indent="-342900">
-              <a:spcAft>
-                <a:spcPts val="600"/>
-              </a:spcAft>
-              <a:buSzPct val="100000"/>
-              <a:buChar char="•"/>
-            </a:pPr>
-            <a:r>
-              <a:rPr lang="en-US" sz="1400" dirty="0">
-                <a:solidFill>
-                  <a:schemeClr val="tx2"/>
-                </a:solidFill>
-              </a:rPr>
-              <a:t>Cotação formal necessária</a:t>
-            </a:r>
-            <a:endParaRPr lang="en-US" sz="1400" dirty="0"/>
-          </a:p>
-        </p:txBody>
-      </p:sp>
-      <p:sp>
-        <p:nvSpPr>
-          <p:cNvPr id="25" name="Slide Number Placeholder 0"/>
-          <p:cNvSpPr>
-            <a:spLocks noGrp="1"/>
-          </p:cNvSpPr>
-          <p:nvPr>
-            <p:ph type="sldNum" sz="quarter" idx="4294967295"/>
-          </p:nvPr>
-        </p:nvSpPr>
-        <p:spPr>
-          <a:xfrm>
-            <a:off x="11338560" y="6355080"/>
-            <a:ext cx="548640" cy="274320"/>
-          </a:xfrm>
-          <a:prstGeom prst="rect">
-            <a:avLst/>
-          </a:prstGeom>
-          <a:extLst>
-            <a:ext uri="{C572A759-6A51-4108-AA02-DFA0A04FC94B}">
-              <ma14:wrappingTextBoxFlag xmlns:ma14="http://schemas.microsoft.com/office/mac/drawingml/2011/main" val="0"/>
-            </a:ext>
-          </a:extLst>
-        </p:spPr>
-        <p:txBody>
-          <a:bodyPr/>
-          <a:lstStyle>
-            <a:lvl1pPr>
-              <a:defRPr sz="1000">
-                <a:solidFill>
-                  <a:srgbClr val="8A97AB"/>
-                </a:solidFill>
-              </a:defRPr>
-            </a:lvl1pPr>
-          </a:lstStyle>
-          <a:p>
-            <a:pPr algn="l"/>
-            <a:fld id="{F7021451-1387-4CA6-816F-3879F97B5CBC}" type="slidenum">
-              <a:rPr b="0" lang="en-US"/>
               <a:t>16</a:t>
             </a:fld>
             <a:endParaRPr lang="en-US"/>
@@ -7525,7 +6856,7 @@
                   <a:schemeClr val="tx1"/>
                 </a:solidFill>
               </a:rPr>
-              <a:t>Piloto em cerca de 10 semanas, expansão por esteira</a:t>
+              <a:t>Interno no piloto; placa própria como opção de escala</a:t>
             </a:r>
             <a:endParaRPr lang="en-US" sz="2600" dirty="0"/>
           </a:p>
@@ -7539,19 +6870,30 @@
         </p:nvSpPr>
         <p:spPr>
           <a:xfrm>
-            <a:off x="822960" y="2331720"/>
-            <a:ext cx="10607040" cy="0"/>
-          </a:xfrm>
-          <a:prstGeom prst="line">
-            <a:avLst/>
-          </a:prstGeom>
-          <a:noFill/>
-          <a:ln w="38100">
+            <a:off x="548640" y="1371600"/>
+            <a:ext cx="3520440" cy="4389120"/>
+          </a:xfrm>
+          <a:prstGeom prst="roundRect">
+            <a:avLst>
+              <a:gd name="adj" fmla="val 2597"/>
+            </a:avLst>
+          </a:prstGeom>
+          <a:solidFill>
+            <a:schemeClr val="bg1"/>
+          </a:solidFill>
+          <a:ln w="12700">
             <a:solidFill>
-              <a:srgbClr val="C9D1DC"/>
+              <a:srgbClr val="D5DBE3"/>
             </a:solidFill>
             <a:prstDash val="solid"/>
           </a:ln>
+          <a:effectLst>
+            <a:outerShdw sx="100000" sy="100000" kx="0" ky="0" algn="bl" rotWithShape="0" blurRad="76200" dist="25400" dir="5400000">
+              <a:srgbClr val="000000">
+                <a:alpha val="12000"/>
+              </a:srgbClr>
+            </a:outerShdw>
+          </a:effectLst>
         </p:spPr>
       </p:sp>
       <p:sp>
@@ -7562,18 +6904,18 @@
         </p:nvSpPr>
         <p:spPr>
           <a:xfrm>
-            <a:off x="685800" y="2130552"/>
-            <a:ext cx="402336" cy="402336"/>
+            <a:off x="822960" y="1645920"/>
+            <a:ext cx="292608" cy="292608"/>
           </a:xfrm>
           <a:prstGeom prst="ellipse">
             <a:avLst/>
           </a:prstGeom>
           <a:solidFill>
-            <a:schemeClr val="tx1"/>
+            <a:schemeClr val="accent2"/>
           </a:solidFill>
-          <a:ln w="25400">
+          <a:ln w="12700">
             <a:solidFill>
-              <a:schemeClr val="bg1"/>
+              <a:schemeClr val="accent2"/>
             </a:solidFill>
             <a:prstDash val="solid"/>
           </a:ln>
@@ -7587,8 +6929,8 @@
         </p:nvSpPr>
         <p:spPr>
           <a:xfrm>
-            <a:off x="685800" y="2130552"/>
-            <a:ext cx="402336" cy="402336"/>
+            <a:off x="1234440" y="1572768"/>
+            <a:ext cx="2651760" cy="457200"/>
           </a:xfrm>
           <a:prstGeom prst="rect">
             <a:avLst/>
@@ -7600,18 +6942,18 @@
           <a:bodyPr wrap="square" lIns="0" tIns="0" rIns="0" bIns="0" rtlCol="0" anchor="ctr"/>
           <a:lstStyle/>
           <a:p>
-            <a:pPr algn="ctr" indent="0" marL="0">
+            <a:pPr indent="0" marL="0">
               <a:buNone/>
             </a:pPr>
             <a:r>
-              <a:rPr lang="en-US" sz="1400" b="1" dirty="0">
-                <a:solidFill>
-                  <a:schemeClr val="bg1"/>
-                </a:solidFill>
-              </a:rPr>
-              <a:t>1</a:t>
-            </a:r>
-            <a:endParaRPr lang="en-US" sz="1400" dirty="0"/>
+              <a:rPr lang="en-US" sz="1800" b="1" dirty="0">
+                <a:solidFill>
+                  <a:schemeClr val="tx1"/>
+                </a:solidFill>
+              </a:rPr>
+              <a:t>Produção interna</a:t>
+            </a:r>
+            <a:endParaRPr lang="en-US" sz="1800" dirty="0"/>
           </a:p>
         </p:txBody>
       </p:sp>
@@ -7623,8 +6965,8 @@
         </p:nvSpPr>
         <p:spPr>
           <a:xfrm>
-            <a:off x="548640" y="1508760"/>
-            <a:ext cx="2103120" cy="411480"/>
+            <a:off x="822960" y="2148840"/>
+            <a:ext cx="3017520" cy="731520"/>
           </a:xfrm>
           <a:prstGeom prst="rect">
             <a:avLst/>
@@ -7640,14 +6982,14 @@
               <a:buNone/>
             </a:pPr>
             <a:r>
-              <a:rPr lang="en-US" sz="1400" b="1" dirty="0">
-                <a:solidFill>
-                  <a:schemeClr val="accent6"/>
-                </a:solidFill>
-              </a:rPr>
-              <a:t>3-4 sem.</a:t>
-            </a:r>
-            <a:endParaRPr lang="en-US" sz="1400" dirty="0"/>
+              <a:rPr lang="en-US" sz="3000" b="1" dirty="0">
+                <a:solidFill>
+                  <a:schemeClr val="accent2"/>
+                </a:solidFill>
+              </a:rPr>
+              <a:t>R$ 255 mil</a:t>
+            </a:r>
+            <a:endParaRPr lang="en-US" sz="3000" dirty="0"/>
           </a:p>
         </p:txBody>
       </p:sp>
@@ -7659,8 +7001,8 @@
         </p:nvSpPr>
         <p:spPr>
           <a:xfrm>
-            <a:off x="548640" y="2743200"/>
-            <a:ext cx="2103120" cy="457200"/>
+            <a:off x="822960" y="2834640"/>
+            <a:ext cx="3017520" cy="320040"/>
           </a:xfrm>
           <a:prstGeom prst="rect">
             <a:avLst/>
@@ -7676,14 +7018,14 @@
               <a:buNone/>
             </a:pPr>
             <a:r>
-              <a:rPr lang="en-US" sz="1700" b="1" dirty="0">
-                <a:solidFill>
-                  <a:schemeClr val="tx1"/>
-                </a:solidFill>
-              </a:rPr>
-              <a:t>Protótipo de bancada</a:t>
-            </a:r>
-            <a:endParaRPr lang="en-US" sz="1700" dirty="0"/>
+              <a:rPr lang="en-US" sz="1200" dirty="0">
+                <a:solidFill>
+                  <a:schemeClr val="accent6"/>
+                </a:solidFill>
+              </a:rPr>
+              <a:t>operação completa</a:t>
+            </a:r>
+            <a:endParaRPr lang="en-US" sz="1200" dirty="0"/>
           </a:p>
         </p:txBody>
       </p:sp>
@@ -7695,8 +7037,8 @@
         </p:nvSpPr>
         <p:spPr>
           <a:xfrm>
-            <a:off x="548640" y="3200400"/>
-            <a:ext cx="2057400" cy="1463040"/>
+            <a:off x="822960" y="3291840"/>
+            <a:ext cx="3063240" cy="2286000"/>
           </a:xfrm>
           <a:prstGeom prst="rect">
             <a:avLst/>
@@ -7705,21 +7047,79 @@
           <a:ln/>
         </p:spPr>
         <p:txBody>
-          <a:bodyPr wrap="square" lIns="0" tIns="0" rIns="0" bIns="0" rtlCol="0" anchor="t"/>
-          <a:lstStyle/>
-          <a:p>
-            <a:pPr indent="0" marL="0">
-              <a:buNone/>
-            </a:pPr>
-            <a:r>
-              <a:rPr lang="en-US" sz="1300" dirty="0">
-                <a:solidFill>
-                  <a:schemeClr val="accent6"/>
-                </a:solidFill>
-              </a:rPr>
-              <a:t>1 concentrador, 1 nó, displays, Serviço PTL mínimo</a:t>
-            </a:r>
-            <a:endParaRPr lang="en-US" sz="1300" dirty="0"/>
+          <a:bodyPr wrap="square" rtlCol="0" anchor="t"/>
+          <a:lstStyle/>
+          <a:p>
+            <a:pPr marL="342900" indent="-342900">
+              <a:spcAft>
+                <a:spcPts val="600"/>
+              </a:spcAft>
+              <a:buSzPct val="100000"/>
+              <a:buChar char="•"/>
+            </a:pPr>
+            <a:r>
+              <a:rPr lang="en-US" sz="1400" dirty="0">
+                <a:solidFill>
+                  <a:schemeClr val="tx2"/>
+                </a:solidFill>
+              </a:rPr>
+              <a:t>Displays e placas comprados no Brasil</a:t>
+            </a:r>
+            <a:endParaRPr lang="en-US" sz="1400" dirty="0"/>
+          </a:p>
+          <a:p>
+            <a:pPr marL="342900" indent="-342900">
+              <a:spcAft>
+                <a:spcPts val="600"/>
+              </a:spcAft>
+              <a:buSzPct val="100000"/>
+              <a:buChar char="•"/>
+            </a:pPr>
+            <a:r>
+              <a:rPr lang="en-US" sz="1400" dirty="0">
+                <a:solidFill>
+                  <a:schemeClr val="tx2"/>
+                </a:solidFill>
+              </a:rPr>
+              <a:t>Montagem e manutenção pela equipe</a:t>
+            </a:r>
+            <a:endParaRPr lang="en-US" sz="1400" dirty="0"/>
+          </a:p>
+          <a:p>
+            <a:pPr marL="342900" indent="-342900">
+              <a:spcAft>
+                <a:spcPts val="600"/>
+              </a:spcAft>
+              <a:buSzPct val="100000"/>
+              <a:buChar char="•"/>
+            </a:pPr>
+            <a:r>
+              <a:rPr lang="en-US" sz="1400" dirty="0">
+                <a:solidFill>
+                  <a:schemeClr val="tx2"/>
+                </a:solidFill>
+              </a:rPr>
+              <a:t>Reposição imediata, domínio total</a:t>
+            </a:r>
+            <a:endParaRPr lang="en-US" sz="1400" dirty="0"/>
+          </a:p>
+          <a:p>
+            <a:pPr marL="342900" indent="-342900">
+              <a:spcAft>
+                <a:spcPts val="600"/>
+              </a:spcAft>
+              <a:buSzPct val="100000"/>
+              <a:buChar char="•"/>
+            </a:pPr>
+            <a:r>
+              <a:rPr lang="en-US" sz="1400" dirty="0">
+                <a:solidFill>
+                  <a:schemeClr val="tx2"/>
+                </a:solidFill>
+              </a:rPr>
+              <a:t>Exige técnico de eletrônica</a:t>
+            </a:r>
+            <a:endParaRPr lang="en-US" sz="1400" dirty="0"/>
           </a:p>
         </p:txBody>
       </p:sp>
@@ -7731,187 +7131,52 @@
         </p:nvSpPr>
         <p:spPr>
           <a:xfrm>
-            <a:off x="2926080" y="2130552"/>
-            <a:ext cx="402336" cy="402336"/>
-          </a:xfrm>
-          <a:prstGeom prst="ellipse">
-            <a:avLst/>
+            <a:off x="4297680" y="1371600"/>
+            <a:ext cx="3520440" cy="4389120"/>
+          </a:xfrm>
+          <a:prstGeom prst="roundRect">
+            <a:avLst>
+              <a:gd name="adj" fmla="val 2597"/>
+            </a:avLst>
           </a:prstGeom>
           <a:solidFill>
-            <a:schemeClr val="accent1"/>
+            <a:schemeClr val="bg1"/>
           </a:solidFill>
-          <a:ln w="25400">
+          <a:ln w="12700">
             <a:solidFill>
-              <a:schemeClr val="bg1"/>
+              <a:srgbClr val="D5DBE3"/>
             </a:solidFill>
             <a:prstDash val="solid"/>
           </a:ln>
-        </p:spPr>
-      </p:sp>
-      <p:sp>
-        <p:nvSpPr>
-          <p:cNvPr id="10" name="Text 8"/>
-          <p:cNvSpPr txBox="1"/>
-          <p:nvPr/>
-        </p:nvSpPr>
-        <p:spPr>
-          <a:xfrm>
-            <a:off x="2926080" y="2130552"/>
-            <a:ext cx="402336" cy="402336"/>
-          </a:xfrm>
-          <a:prstGeom prst="rect">
-            <a:avLst/>
-          </a:prstGeom>
-          <a:noFill/>
-          <a:ln/>
-        </p:spPr>
-        <p:txBody>
-          <a:bodyPr wrap="square" lIns="0" tIns="0" rIns="0" bIns="0" rtlCol="0" anchor="ctr"/>
-          <a:lstStyle/>
-          <a:p>
-            <a:pPr algn="ctr" indent="0" marL="0">
-              <a:buNone/>
-            </a:pPr>
-            <a:r>
-              <a:rPr lang="en-US" sz="1400" b="1" dirty="0">
-                <a:solidFill>
-                  <a:schemeClr val="bg1"/>
-                </a:solidFill>
-              </a:rPr>
-              <a:t>2</a:t>
-            </a:r>
-            <a:endParaRPr lang="en-US" sz="1400" dirty="0"/>
-          </a:p>
-        </p:txBody>
-      </p:sp>
-      <p:sp>
-        <p:nvSpPr>
-          <p:cNvPr id="11" name="Text 9"/>
-          <p:cNvSpPr txBox="1"/>
-          <p:nvPr/>
-        </p:nvSpPr>
-        <p:spPr>
-          <a:xfrm>
-            <a:off x="2788920" y="1508760"/>
-            <a:ext cx="2103120" cy="411480"/>
-          </a:xfrm>
-          <a:prstGeom prst="rect">
-            <a:avLst/>
-          </a:prstGeom>
-          <a:noFill/>
-          <a:ln/>
-        </p:spPr>
-        <p:txBody>
-          <a:bodyPr wrap="square" lIns="0" tIns="0" rIns="0" bIns="0" rtlCol="0" anchor="ctr"/>
-          <a:lstStyle/>
-          <a:p>
-            <a:pPr indent="0" marL="0">
-              <a:buNone/>
-            </a:pPr>
-            <a:r>
-              <a:rPr lang="en-US" sz="1400" b="1" dirty="0">
-                <a:solidFill>
-                  <a:schemeClr val="accent1"/>
-                </a:solidFill>
-              </a:rPr>
-              <a:t>6-8 sem.</a:t>
-            </a:r>
-            <a:endParaRPr lang="en-US" sz="1400" dirty="0"/>
-          </a:p>
-        </p:txBody>
-      </p:sp>
-      <p:sp>
-        <p:nvSpPr>
-          <p:cNvPr id="12" name="Text 10"/>
-          <p:cNvSpPr txBox="1"/>
-          <p:nvPr/>
-        </p:nvSpPr>
-        <p:spPr>
-          <a:xfrm>
-            <a:off x="2788920" y="2743200"/>
-            <a:ext cx="2103120" cy="457200"/>
-          </a:xfrm>
-          <a:prstGeom prst="rect">
-            <a:avLst/>
-          </a:prstGeom>
-          <a:noFill/>
-          <a:ln/>
-        </p:spPr>
-        <p:txBody>
-          <a:bodyPr wrap="square" lIns="0" tIns="0" rIns="0" bIns="0" rtlCol="0" anchor="ctr"/>
-          <a:lstStyle/>
-          <a:p>
-            <a:pPr indent="0" marL="0">
-              <a:buNone/>
-            </a:pPr>
-            <a:r>
-              <a:rPr lang="en-US" sz="1700" b="1" dirty="0">
-                <a:solidFill>
-                  <a:schemeClr val="tx1"/>
-                </a:solidFill>
-              </a:rPr>
-              <a:t>Piloto 05 e 27</a:t>
-            </a:r>
-            <a:endParaRPr lang="en-US" sz="1700" dirty="0"/>
-          </a:p>
-        </p:txBody>
-      </p:sp>
-      <p:sp>
-        <p:nvSpPr>
-          <p:cNvPr id="13" name="Text 11"/>
-          <p:cNvSpPr txBox="1"/>
-          <p:nvPr/>
-        </p:nvSpPr>
-        <p:spPr>
-          <a:xfrm>
-            <a:off x="2788920" y="3200400"/>
-            <a:ext cx="2057400" cy="1463040"/>
-          </a:xfrm>
-          <a:prstGeom prst="rect">
-            <a:avLst/>
-          </a:prstGeom>
-          <a:noFill/>
-          <a:ln/>
-        </p:spPr>
-        <p:txBody>
-          <a:bodyPr wrap="square" lIns="0" tIns="0" rIns="0" bIns="0" rtlCol="0" anchor="t"/>
-          <a:lstStyle/>
-          <a:p>
-            <a:pPr indent="0" marL="0">
-              <a:buNone/>
-            </a:pPr>
-            <a:r>
-              <a:rPr lang="en-US" sz="1300" dirty="0">
-                <a:solidFill>
-                  <a:schemeClr val="accent6"/>
-                </a:solidFill>
-              </a:rPr>
-              <a:t>Estações completas, app do coletor, painel, medição antes/depois</a:t>
-            </a:r>
-            <a:endParaRPr lang="en-US" sz="1300" dirty="0"/>
-          </a:p>
-        </p:txBody>
-      </p:sp>
-      <p:sp>
-        <p:nvSpPr>
-          <p:cNvPr id="14" name="Shape 12"/>
+          <a:effectLst>
+            <a:outerShdw sx="100000" sy="100000" kx="0" ky="0" algn="bl" rotWithShape="0" blurRad="76200" dist="25400" dir="5400000">
+              <a:srgbClr val="000000">
+                <a:alpha val="12000"/>
+              </a:srgbClr>
+            </a:outerShdw>
+          </a:effectLst>
+        </p:spPr>
+      </p:sp>
+      <p:sp>
+        <p:nvSpPr>
+          <p:cNvPr id="10" name="Shape 8"/>
           <p:cNvSpPr/>
           <p:nvPr/>
         </p:nvSpPr>
         <p:spPr>
           <a:xfrm>
-            <a:off x="5166360" y="2130552"/>
-            <a:ext cx="402336" cy="402336"/>
+            <a:off x="4572000" y="1645920"/>
+            <a:ext cx="292608" cy="292608"/>
           </a:xfrm>
           <a:prstGeom prst="ellipse">
             <a:avLst/>
           </a:prstGeom>
           <a:solidFill>
-            <a:schemeClr val="tx1"/>
+            <a:schemeClr val="accent3"/>
           </a:solidFill>
-          <a:ln w="25400">
+          <a:ln w="12700">
             <a:solidFill>
-              <a:schemeClr val="bg1"/>
+              <a:schemeClr val="accent3"/>
             </a:solidFill>
             <a:prstDash val="solid"/>
           </a:ln>
@@ -7919,14 +7184,14 @@
       </p:sp>
       <p:sp>
         <p:nvSpPr>
-          <p:cNvPr id="15" name="Text 13"/>
+          <p:cNvPr id="11" name="Text 9"/>
           <p:cNvSpPr txBox="1"/>
           <p:nvPr/>
         </p:nvSpPr>
         <p:spPr>
           <a:xfrm>
-            <a:off x="5166360" y="2130552"/>
-            <a:ext cx="402336" cy="402336"/>
+            <a:off x="4983480" y="1572768"/>
+            <a:ext cx="2651760" cy="457200"/>
           </a:xfrm>
           <a:prstGeom prst="rect">
             <a:avLst/>
@@ -7938,31 +7203,31 @@
           <a:bodyPr wrap="square" lIns="0" tIns="0" rIns="0" bIns="0" rtlCol="0" anchor="ctr"/>
           <a:lstStyle/>
           <a:p>
-            <a:pPr algn="ctr" indent="0" marL="0">
+            <a:pPr indent="0" marL="0">
               <a:buNone/>
             </a:pPr>
             <a:r>
-              <a:rPr lang="en-US" sz="1400" b="1" dirty="0">
-                <a:solidFill>
-                  <a:schemeClr val="bg1"/>
-                </a:solidFill>
-              </a:rPr>
-              <a:t>3</a:t>
-            </a:r>
-            <a:endParaRPr lang="en-US" sz="1400" dirty="0"/>
-          </a:p>
-        </p:txBody>
-      </p:sp>
-      <p:sp>
-        <p:nvSpPr>
-          <p:cNvPr id="16" name="Text 14"/>
+              <a:rPr lang="en-US" sz="1800" b="1" dirty="0">
+                <a:solidFill>
+                  <a:schemeClr val="tx1"/>
+                </a:solidFill>
+              </a:rPr>
+              <a:t>Placa própria (EMS)</a:t>
+            </a:r>
+            <a:endParaRPr lang="en-US" sz="1800" dirty="0"/>
+          </a:p>
+        </p:txBody>
+      </p:sp>
+      <p:sp>
+        <p:nvSpPr>
+          <p:cNvPr id="12" name="Text 10"/>
           <p:cNvSpPr txBox="1"/>
           <p:nvPr/>
         </p:nvSpPr>
         <p:spPr>
           <a:xfrm>
-            <a:off x="5029200" y="1508760"/>
-            <a:ext cx="2103120" cy="411480"/>
+            <a:off x="4572000" y="2148840"/>
+            <a:ext cx="3017520" cy="731520"/>
           </a:xfrm>
           <a:prstGeom prst="rect">
             <a:avLst/>
@@ -7978,27 +7243,27 @@
               <a:buNone/>
             </a:pPr>
             <a:r>
-              <a:rPr lang="en-US" sz="1400" b="1" dirty="0">
-                <a:solidFill>
-                  <a:schemeClr val="accent6"/>
-                </a:solidFill>
-              </a:rPr>
-              <a:t>2 sem.</a:t>
-            </a:r>
-            <a:endParaRPr lang="en-US" sz="1400" dirty="0"/>
-          </a:p>
-        </p:txBody>
-      </p:sp>
-      <p:sp>
-        <p:nvSpPr>
-          <p:cNvPr id="17" name="Text 15"/>
+              <a:rPr lang="en-US" sz="3000" b="1" dirty="0">
+                <a:solidFill>
+                  <a:schemeClr val="accent3"/>
+                </a:solidFill>
+              </a:rPr>
+              <a:t>R$ 326 mil</a:t>
+            </a:r>
+            <a:endParaRPr lang="en-US" sz="3000" dirty="0"/>
+          </a:p>
+        </p:txBody>
+      </p:sp>
+      <p:sp>
+        <p:nvSpPr>
+          <p:cNvPr id="13" name="Text 11"/>
           <p:cNvSpPr txBox="1"/>
           <p:nvPr/>
         </p:nvSpPr>
         <p:spPr>
           <a:xfrm>
-            <a:off x="5029200" y="2743200"/>
-            <a:ext cx="2103120" cy="457200"/>
+            <a:off x="4572000" y="2834640"/>
+            <a:ext cx="3017520" cy="320040"/>
           </a:xfrm>
           <a:prstGeom prst="rect">
             <a:avLst/>
@@ -8014,27 +7279,27 @@
               <a:buNone/>
             </a:pPr>
             <a:r>
-              <a:rPr lang="en-US" sz="1700" b="1" dirty="0">
-                <a:solidFill>
-                  <a:schemeClr val="tx1"/>
-                </a:solidFill>
-              </a:rPr>
-              <a:t>Avaliação</a:t>
-            </a:r>
-            <a:endParaRPr lang="en-US" sz="1700" dirty="0"/>
-          </a:p>
-        </p:txBody>
-      </p:sp>
-      <p:sp>
-        <p:nvSpPr>
-          <p:cNvPr id="18" name="Text 16"/>
+              <a:rPr lang="en-US" sz="1200" dirty="0">
+                <a:solidFill>
+                  <a:schemeClr val="accent6"/>
+                </a:solidFill>
+              </a:rPr>
+              <a:t>operação completa</a:t>
+            </a:r>
+            <a:endParaRPr lang="en-US" sz="1200" dirty="0"/>
+          </a:p>
+        </p:txBody>
+      </p:sp>
+      <p:sp>
+        <p:nvSpPr>
+          <p:cNvPr id="14" name="Text 12"/>
           <p:cNvSpPr txBox="1"/>
           <p:nvPr/>
         </p:nvSpPr>
         <p:spPr>
           <a:xfrm>
-            <a:off x="5029200" y="3200400"/>
-            <a:ext cx="2057400" cy="1463040"/>
+            <a:off x="4572000" y="3291840"/>
+            <a:ext cx="3063240" cy="2286000"/>
           </a:xfrm>
           <a:prstGeom prst="rect">
             <a:avLst/>
@@ -8043,213 +7308,136 @@
           <a:ln/>
         </p:spPr>
         <p:txBody>
-          <a:bodyPr wrap="square" lIns="0" tIns="0" rIns="0" bIns="0" rtlCol="0" anchor="t"/>
-          <a:lstStyle/>
-          <a:p>
-            <a:pPr indent="0" marL="0">
-              <a:buNone/>
-            </a:pPr>
-            <a:r>
-              <a:rPr lang="en-US" sz="1300" dirty="0">
-                <a:solidFill>
-                  <a:schemeClr val="accent6"/>
-                </a:solidFill>
-              </a:rPr>
-              <a:t>Indicadores, ajuste das zonas, decisão A/B e produção</a:t>
-            </a:r>
-            <a:endParaRPr lang="en-US" sz="1300" dirty="0"/>
-          </a:p>
-        </p:txBody>
-      </p:sp>
-      <p:sp>
-        <p:nvSpPr>
-          <p:cNvPr id="19" name="Shape 17"/>
+          <a:bodyPr wrap="square" rtlCol="0" anchor="t"/>
+          <a:lstStyle/>
+          <a:p>
+            <a:pPr marL="342900" indent="-342900">
+              <a:spcAft>
+                <a:spcPts val="600"/>
+              </a:spcAft>
+              <a:buSzPct val="100000"/>
+              <a:buChar char="•"/>
+            </a:pPr>
+            <a:r>
+              <a:rPr lang="en-US" sz="1400" dirty="0">
+                <a:solidFill>
+                  <a:schemeClr val="tx2"/>
+                </a:solidFill>
+              </a:rPr>
+              <a:t>Projeto da placa ≈ R$ 15 mil</a:t>
+            </a:r>
+            <a:endParaRPr lang="en-US" sz="1400" dirty="0"/>
+          </a:p>
+          <a:p>
+            <a:pPr marL="342900" indent="-342900">
+              <a:spcAft>
+                <a:spcPts val="600"/>
+              </a:spcAft>
+              <a:buSzPct val="100000"/>
+              <a:buChar char="•"/>
+            </a:pPr>
+            <a:r>
+              <a:rPr lang="en-US" sz="1400" dirty="0">
+                <a:solidFill>
+                  <a:schemeClr val="tx2"/>
+                </a:solidFill>
+              </a:rPr>
+              <a:t>Fabricação e montagem industrial</a:t>
+            </a:r>
+            <a:endParaRPr lang="en-US" sz="1400" dirty="0"/>
+          </a:p>
+          <a:p>
+            <a:pPr marL="342900" indent="-342900">
+              <a:spcAft>
+                <a:spcPts val="600"/>
+              </a:spcAft>
+              <a:buSzPct val="100000"/>
+              <a:buChar char="•"/>
+            </a:pPr>
+            <a:r>
+              <a:rPr lang="en-US" sz="1400" dirty="0">
+                <a:solidFill>
+                  <a:schemeClr val="tx2"/>
+                </a:solidFill>
+              </a:rPr>
+              <a:t>Qualidade e repetibilidade</a:t>
+            </a:r>
+            <a:endParaRPr lang="en-US" sz="1400" dirty="0"/>
+          </a:p>
+          <a:p>
+            <a:pPr marL="342900" indent="-342900">
+              <a:spcAft>
+                <a:spcPts val="600"/>
+              </a:spcAft>
+              <a:buSzPct val="100000"/>
+              <a:buChar char="•"/>
+            </a:pPr>
+            <a:r>
+              <a:rPr lang="en-US" sz="1400" dirty="0">
+                <a:solidFill>
+                  <a:schemeClr val="tx2"/>
+                </a:solidFill>
+              </a:rPr>
+              <a:t>Importação e prazo maiores</a:t>
+            </a:r>
+            <a:endParaRPr lang="en-US" sz="1400" dirty="0"/>
+          </a:p>
+        </p:txBody>
+      </p:sp>
+      <p:sp>
+        <p:nvSpPr>
+          <p:cNvPr id="15" name="Shape 13"/>
           <p:cNvSpPr/>
           <p:nvPr/>
         </p:nvSpPr>
         <p:spPr>
           <a:xfrm>
-            <a:off x="7406640" y="2130552"/>
-            <a:ext cx="402336" cy="402336"/>
-          </a:xfrm>
-          <a:prstGeom prst="ellipse">
-            <a:avLst/>
+            <a:off x="8046720" y="1371600"/>
+            <a:ext cx="3520440" cy="4389120"/>
+          </a:xfrm>
+          <a:prstGeom prst="roundRect">
+            <a:avLst>
+              <a:gd name="adj" fmla="val 2597"/>
+            </a:avLst>
           </a:prstGeom>
           <a:solidFill>
-            <a:schemeClr val="tx1"/>
+            <a:schemeClr val="bg1"/>
           </a:solidFill>
-          <a:ln w="25400">
+          <a:ln w="12700">
             <a:solidFill>
-              <a:schemeClr val="bg1"/>
+              <a:srgbClr val="D5DBE3"/>
             </a:solidFill>
             <a:prstDash val="solid"/>
           </a:ln>
-        </p:spPr>
-      </p:sp>
-      <p:sp>
-        <p:nvSpPr>
-          <p:cNvPr id="20" name="Text 18"/>
-          <p:cNvSpPr txBox="1"/>
-          <p:nvPr/>
-        </p:nvSpPr>
-        <p:spPr>
-          <a:xfrm>
-            <a:off x="7406640" y="2130552"/>
-            <a:ext cx="402336" cy="402336"/>
-          </a:xfrm>
-          <a:prstGeom prst="rect">
-            <a:avLst/>
-          </a:prstGeom>
-          <a:noFill/>
-          <a:ln/>
-        </p:spPr>
-        <p:txBody>
-          <a:bodyPr wrap="square" lIns="0" tIns="0" rIns="0" bIns="0" rtlCol="0" anchor="ctr"/>
-          <a:lstStyle/>
-          <a:p>
-            <a:pPr algn="ctr" indent="0" marL="0">
-              <a:buNone/>
-            </a:pPr>
-            <a:r>
-              <a:rPr lang="en-US" sz="1400" b="1" dirty="0">
-                <a:solidFill>
-                  <a:schemeClr val="bg1"/>
-                </a:solidFill>
-              </a:rPr>
-              <a:t>4</a:t>
-            </a:r>
-            <a:endParaRPr lang="en-US" sz="1400" dirty="0"/>
-          </a:p>
-        </p:txBody>
-      </p:sp>
-      <p:sp>
-        <p:nvSpPr>
-          <p:cNvPr id="21" name="Text 19"/>
-          <p:cNvSpPr txBox="1"/>
-          <p:nvPr/>
-        </p:nvSpPr>
-        <p:spPr>
-          <a:xfrm>
-            <a:off x="7269480" y="1508760"/>
-            <a:ext cx="2103120" cy="411480"/>
-          </a:xfrm>
-          <a:prstGeom prst="rect">
-            <a:avLst/>
-          </a:prstGeom>
-          <a:noFill/>
-          <a:ln/>
-        </p:spPr>
-        <p:txBody>
-          <a:bodyPr wrap="square" lIns="0" tIns="0" rIns="0" bIns="0" rtlCol="0" anchor="ctr"/>
-          <a:lstStyle/>
-          <a:p>
-            <a:pPr indent="0" marL="0">
-              <a:buNone/>
-            </a:pPr>
-            <a:r>
-              <a:rPr lang="en-US" sz="1400" b="1" dirty="0">
-                <a:solidFill>
-                  <a:schemeClr val="accent6"/>
-                </a:solidFill>
-              </a:rPr>
-              <a:t>10-14 sem.</a:t>
-            </a:r>
-            <a:endParaRPr lang="en-US" sz="1400" dirty="0"/>
-          </a:p>
-        </p:txBody>
-      </p:sp>
-      <p:sp>
-        <p:nvSpPr>
-          <p:cNvPr id="22" name="Text 20"/>
-          <p:cNvSpPr txBox="1"/>
-          <p:nvPr/>
-        </p:nvSpPr>
-        <p:spPr>
-          <a:xfrm>
-            <a:off x="7269480" y="2743200"/>
-            <a:ext cx="2103120" cy="457200"/>
-          </a:xfrm>
-          <a:prstGeom prst="rect">
-            <a:avLst/>
-          </a:prstGeom>
-          <a:noFill/>
-          <a:ln/>
-        </p:spPr>
-        <p:txBody>
-          <a:bodyPr wrap="square" lIns="0" tIns="0" rIns="0" bIns="0" rtlCol="0" anchor="ctr"/>
-          <a:lstStyle/>
-          <a:p>
-            <a:pPr indent="0" marL="0">
-              <a:buNone/>
-            </a:pPr>
-            <a:r>
-              <a:rPr lang="en-US" sz="1700" b="1" dirty="0">
-                <a:solidFill>
-                  <a:schemeClr val="tx1"/>
-                </a:solidFill>
-              </a:rPr>
-              <a:t>Expansão</a:t>
-            </a:r>
-            <a:endParaRPr lang="en-US" sz="1700" dirty="0"/>
-          </a:p>
-        </p:txBody>
-      </p:sp>
-      <p:sp>
-        <p:nvSpPr>
-          <p:cNvPr id="23" name="Text 21"/>
-          <p:cNvSpPr txBox="1"/>
-          <p:nvPr/>
-        </p:nvSpPr>
-        <p:spPr>
-          <a:xfrm>
-            <a:off x="7269480" y="3200400"/>
-            <a:ext cx="2057400" cy="1463040"/>
-          </a:xfrm>
-          <a:prstGeom prst="rect">
-            <a:avLst/>
-          </a:prstGeom>
-          <a:noFill/>
-          <a:ln/>
-        </p:spPr>
-        <p:txBody>
-          <a:bodyPr wrap="square" lIns="0" tIns="0" rIns="0" bIns="0" rtlCol="0" anchor="t"/>
-          <a:lstStyle/>
-          <a:p>
-            <a:pPr indent="0" marL="0">
-              <a:buNone/>
-            </a:pPr>
-            <a:r>
-              <a:rPr lang="en-US" sz="1300" dirty="0">
-                <a:solidFill>
-                  <a:schemeClr val="accent6"/>
-                </a:solidFill>
-              </a:rPr>
-              <a:t>Medicamento e depois Perfumaria, em lotes de 5 estações</a:t>
-            </a:r>
-            <a:endParaRPr lang="en-US" sz="1300" dirty="0"/>
-          </a:p>
-        </p:txBody>
-      </p:sp>
-      <p:sp>
-        <p:nvSpPr>
-          <p:cNvPr id="24" name="Shape 22"/>
+          <a:effectLst>
+            <a:outerShdw sx="100000" sy="100000" kx="0" ky="0" algn="bl" rotWithShape="0" blurRad="76200" dist="25400" dir="5400000">
+              <a:srgbClr val="000000">
+                <a:alpha val="12000"/>
+              </a:srgbClr>
+            </a:outerShdw>
+          </a:effectLst>
+        </p:spPr>
+      </p:sp>
+      <p:sp>
+        <p:nvSpPr>
+          <p:cNvPr id="16" name="Shape 14"/>
           <p:cNvSpPr/>
           <p:nvPr/>
         </p:nvSpPr>
         <p:spPr>
           <a:xfrm>
-            <a:off x="9646920" y="2130552"/>
-            <a:ext cx="402336" cy="402336"/>
+            <a:off x="8321040" y="1645920"/>
+            <a:ext cx="292608" cy="292608"/>
           </a:xfrm>
           <a:prstGeom prst="ellipse">
             <a:avLst/>
           </a:prstGeom>
           <a:solidFill>
-            <a:schemeClr val="tx1"/>
+            <a:schemeClr val="accent5"/>
           </a:solidFill>
-          <a:ln w="25400">
+          <a:ln w="12700">
             <a:solidFill>
-              <a:schemeClr val="bg1"/>
+              <a:schemeClr val="accent5"/>
             </a:solidFill>
             <a:prstDash val="solid"/>
           </a:ln>
@@ -8257,14 +7445,14 @@
       </p:sp>
       <p:sp>
         <p:nvSpPr>
-          <p:cNvPr id="25" name="Text 23"/>
+          <p:cNvPr id="17" name="Text 15"/>
           <p:cNvSpPr txBox="1"/>
           <p:nvPr/>
         </p:nvSpPr>
         <p:spPr>
           <a:xfrm>
-            <a:off x="9646920" y="2130552"/>
-            <a:ext cx="402336" cy="402336"/>
+            <a:off x="8732520" y="1572768"/>
+            <a:ext cx="2651760" cy="457200"/>
           </a:xfrm>
           <a:prstGeom prst="rect">
             <a:avLst/>
@@ -8276,31 +7464,31 @@
           <a:bodyPr wrap="square" lIns="0" tIns="0" rIns="0" bIns="0" rtlCol="0" anchor="ctr"/>
           <a:lstStyle/>
           <a:p>
-            <a:pPr algn="ctr" indent="0" marL="0">
+            <a:pPr indent="0" marL="0">
               <a:buNone/>
             </a:pPr>
             <a:r>
-              <a:rPr lang="en-US" sz="1400" b="1" dirty="0">
-                <a:solidFill>
-                  <a:schemeClr val="bg1"/>
-                </a:solidFill>
-              </a:rPr>
-              <a:t>5</a:t>
-            </a:r>
-            <a:endParaRPr lang="en-US" sz="1400" dirty="0"/>
-          </a:p>
-        </p:txBody>
-      </p:sp>
-      <p:sp>
-        <p:nvSpPr>
-          <p:cNvPr id="26" name="Text 24"/>
+              <a:rPr lang="en-US" sz="1800" b="1" dirty="0">
+                <a:solidFill>
+                  <a:schemeClr val="tx1"/>
+                </a:solidFill>
+              </a:rPr>
+              <a:t>PTL comercial</a:t>
+            </a:r>
+            <a:endParaRPr lang="en-US" sz="1800" dirty="0"/>
+          </a:p>
+        </p:txBody>
+      </p:sp>
+      <p:sp>
+        <p:nvSpPr>
+          <p:cNvPr id="18" name="Text 16"/>
           <p:cNvSpPr txBox="1"/>
           <p:nvPr/>
         </p:nvSpPr>
         <p:spPr>
           <a:xfrm>
-            <a:off x="9509760" y="1508760"/>
-            <a:ext cx="2103120" cy="411480"/>
+            <a:off x="8321040" y="2148840"/>
+            <a:ext cx="3017520" cy="731520"/>
           </a:xfrm>
           <a:prstGeom prst="rect">
             <a:avLst/>
@@ -8316,27 +7504,27 @@
               <a:buNone/>
             </a:pPr>
             <a:r>
-              <a:rPr lang="en-US" sz="1400" b="1" dirty="0">
-                <a:solidFill>
-                  <a:schemeClr val="accent6"/>
-                </a:solidFill>
-              </a:rPr>
-              <a:t>4 sem.</a:t>
-            </a:r>
-            <a:endParaRPr lang="en-US" sz="1400" dirty="0"/>
-          </a:p>
-        </p:txBody>
-      </p:sp>
-      <p:sp>
-        <p:nvSpPr>
-          <p:cNvPr id="27" name="Text 25"/>
+              <a:rPr lang="en-US" sz="3000" b="1" dirty="0">
+                <a:solidFill>
+                  <a:schemeClr val="accent5"/>
+                </a:solidFill>
+              </a:rPr>
+              <a:t>R$ 796 mil</a:t>
+            </a:r>
+            <a:endParaRPr lang="en-US" sz="3000" dirty="0"/>
+          </a:p>
+        </p:txBody>
+      </p:sp>
+      <p:sp>
+        <p:nvSpPr>
+          <p:cNvPr id="19" name="Text 17"/>
           <p:cNvSpPr txBox="1"/>
           <p:nvPr/>
         </p:nvSpPr>
         <p:spPr>
           <a:xfrm>
-            <a:off x="9509760" y="2743200"/>
-            <a:ext cx="2103120" cy="457200"/>
+            <a:off x="8321040" y="2834640"/>
+            <a:ext cx="3017520" cy="320040"/>
           </a:xfrm>
           <a:prstGeom prst="rect">
             <a:avLst/>
@@ -8352,27 +7540,27 @@
               <a:buNone/>
             </a:pPr>
             <a:r>
-              <a:rPr lang="en-US" sz="1700" b="1" dirty="0">
-                <a:solidFill>
-                  <a:schemeClr val="tx1"/>
-                </a:solidFill>
-              </a:rPr>
-              <a:t>Estabilização</a:t>
-            </a:r>
-            <a:endParaRPr lang="en-US" sz="1700" dirty="0"/>
-          </a:p>
-        </p:txBody>
-      </p:sp>
-      <p:sp>
-        <p:nvSpPr>
-          <p:cNvPr id="28" name="Text 26"/>
+              <a:rPr lang="en-US" sz="1200" dirty="0">
+                <a:solidFill>
+                  <a:schemeClr val="accent6"/>
+                </a:solidFill>
+              </a:rPr>
+              <a:t>operação completa</a:t>
+            </a:r>
+            <a:endParaRPr lang="en-US" sz="1200" dirty="0"/>
+          </a:p>
+        </p:txBody>
+      </p:sp>
+      <p:sp>
+        <p:nvSpPr>
+          <p:cNvPr id="20" name="Text 18"/>
           <p:cNvSpPr txBox="1"/>
           <p:nvPr/>
         </p:nvSpPr>
         <p:spPr>
           <a:xfrm>
-            <a:off x="9509760" y="3200400"/>
-            <a:ext cx="2057400" cy="1463040"/>
+            <a:off x="8321040" y="3291840"/>
+            <a:ext cx="3063240" cy="2286000"/>
           </a:xfrm>
           <a:prstGeom prst="rect">
             <a:avLst/>
@@ -8381,95 +7569,79 @@
           <a:ln/>
         </p:spPr>
         <p:txBody>
-          <a:bodyPr wrap="square" lIns="0" tIns="0" rIns="0" bIns="0" rtlCol="0" anchor="t"/>
-          <a:lstStyle/>
-          <a:p>
-            <a:pPr indent="0" marL="0">
-              <a:buNone/>
-            </a:pPr>
-            <a:r>
-              <a:rPr lang="en-US" sz="1300" dirty="0">
-                <a:solidFill>
-                  <a:schemeClr val="accent6"/>
-                </a:solidFill>
-              </a:rPr>
-              <a:t>Ajustes finais e passagem para a sustentação</a:t>
-            </a:r>
-            <a:endParaRPr lang="en-US" sz="1300" dirty="0"/>
-          </a:p>
-        </p:txBody>
-      </p:sp>
-      <p:sp>
-        <p:nvSpPr>
-          <p:cNvPr id="29" name="Shape 27"/>
-          <p:cNvSpPr/>
-          <p:nvPr/>
-        </p:nvSpPr>
-        <p:spPr>
-          <a:xfrm>
-            <a:off x="548640" y="4892040"/>
-            <a:ext cx="11064240" cy="1051560"/>
-          </a:xfrm>
-          <a:prstGeom prst="roundRect">
-            <a:avLst>
-              <a:gd name="adj" fmla="val 6957"/>
-            </a:avLst>
-          </a:prstGeom>
-          <a:solidFill>
-            <a:schemeClr val="bg2"/>
-          </a:solidFill>
-          <a:ln w="12700">
-            <a:solidFill>
-              <a:schemeClr val="bg2"/>
-            </a:solidFill>
-            <a:prstDash val="solid"/>
-          </a:ln>
-        </p:spPr>
-      </p:sp>
-      <p:sp>
-        <p:nvSpPr>
-          <p:cNvPr id="30" name="Text 28"/>
-          <p:cNvSpPr txBox="1"/>
-          <p:nvPr/>
-        </p:nvSpPr>
-        <p:spPr>
-          <a:xfrm>
-            <a:off x="777240" y="4983480"/>
-            <a:ext cx="10607040" cy="868680"/>
-          </a:xfrm>
-          <a:prstGeom prst="rect">
-            <a:avLst/>
-          </a:prstGeom>
-          <a:noFill/>
-          <a:ln/>
-        </p:spPr>
-        <p:txBody>
-          <a:bodyPr wrap="square" lIns="0" tIns="0" rIns="0" bIns="0" rtlCol="0" anchor="ctr"/>
-          <a:lstStyle/>
-          <a:p>
-            <a:pPr indent="0" marL="0">
-              <a:buNone/>
-            </a:pPr>
-            <a:r>
-              <a:rPr lang="en-US" sz="1500" b="1" dirty="0">
-                <a:solidFill>
-                  <a:schemeClr val="tx1"/>
-                </a:solidFill>
-              </a:rPr>
-              <a:t>Para começar: </a:t>
-            </a:r>
-            <a:pPr indent="0" marL="0">
-              <a:buNone/>
-            </a:pPr>
-            <a:r>
-              <a:rPr lang="en-US" sz="1500" dirty="0">
+          <a:bodyPr wrap="square" rtlCol="0" anchor="t"/>
+          <a:lstStyle/>
+          <a:p>
+            <a:pPr marL="342900" indent="-342900">
+              <a:spcAft>
+                <a:spcPts val="600"/>
+              </a:spcAft>
+              <a:buSzPct val="100000"/>
+              <a:buChar char="•"/>
+            </a:pPr>
+            <a:r>
+              <a:rPr lang="en-US" sz="1400" dirty="0">
                 <a:solidFill>
                   <a:schemeClr val="tx2"/>
                 </a:solidFill>
               </a:rPr>
-              <a:t>fotos e medidas das estações, média de itens por caixa, acesso à API do BHT e às tabelas de pedido no Sybase, e definição da linguagem do Serviço PTL.</a:t>
-            </a:r>
-            <a:endParaRPr lang="en-US" sz="1500" dirty="0"/>
+              <a:t>Produto pronto e com garantia</a:t>
+            </a:r>
+            <a:endParaRPr lang="en-US" sz="1400" dirty="0"/>
+          </a:p>
+          <a:p>
+            <a:pPr marL="342900" indent="-342900">
+              <a:spcAft>
+                <a:spcPts val="600"/>
+              </a:spcAft>
+              <a:buSzPct val="100000"/>
+              <a:buChar char="•"/>
+            </a:pPr>
+            <a:r>
+              <a:rPr lang="en-US" sz="1400" dirty="0">
+                <a:solidFill>
+                  <a:schemeClr val="tx2"/>
+                </a:solidFill>
+              </a:rPr>
+              <a:t>≈ 3× o custo da produção interna</a:t>
+            </a:r>
+            <a:endParaRPr lang="en-US" sz="1400" dirty="0"/>
+          </a:p>
+          <a:p>
+            <a:pPr marL="342900" indent="-342900">
+              <a:spcAft>
+                <a:spcPts val="600"/>
+              </a:spcAft>
+              <a:buSzPct val="100000"/>
+              <a:buChar char="•"/>
+            </a:pPr>
+            <a:r>
+              <a:rPr lang="en-US" sz="1400" dirty="0">
+                <a:solidFill>
+                  <a:schemeClr val="tx2"/>
+                </a:solidFill>
+              </a:rPr>
+              <a:t>Dependência do fornecedor</a:t>
+            </a:r>
+            <a:endParaRPr lang="en-US" sz="1400" dirty="0"/>
+          </a:p>
+          <a:p>
+            <a:pPr marL="342900" indent="-342900">
+              <a:spcAft>
+                <a:spcPts val="600"/>
+              </a:spcAft>
+              <a:buSzPct val="100000"/>
+              <a:buChar char="•"/>
+            </a:pPr>
+            <a:r>
+              <a:rPr lang="en-US" sz="1400" dirty="0">
+                <a:solidFill>
+                  <a:schemeClr val="tx2"/>
+                </a:solidFill>
+              </a:rPr>
+              <a:t>Cotação formal necessária</a:t>
+            </a:r>
+            <a:endParaRPr lang="en-US" sz="1400" dirty="0"/>
           </a:p>
         </p:txBody>
       </p:sp>
@@ -8575,7 +7747,7 @@
                   <a:schemeClr val="tx1"/>
                 </a:solidFill>
               </a:rPr>
-              <a:t>Riscos conhecidos já têm mitigação no desenho</a:t>
+              <a:t>Piloto em cerca de 10 semanas, expansão por esteira</a:t>
             </a:r>
             <a:endParaRPr lang="en-US" sz="2600" dirty="0"/>
           </a:p>
@@ -8589,12 +7761,880 @@
         </p:nvSpPr>
         <p:spPr>
           <a:xfrm>
-            <a:off x="548640" y="1325880"/>
-            <a:ext cx="5440680" cy="1325880"/>
+            <a:off x="822960" y="2331720"/>
+            <a:ext cx="10607040" cy="0"/>
+          </a:xfrm>
+          <a:prstGeom prst="line">
+            <a:avLst/>
+          </a:prstGeom>
+          <a:noFill/>
+          <a:ln w="38100">
+            <a:solidFill>
+              <a:srgbClr val="C9D1DC"/>
+            </a:solidFill>
+            <a:prstDash val="solid"/>
+          </a:ln>
+        </p:spPr>
+      </p:sp>
+      <p:sp>
+        <p:nvSpPr>
+          <p:cNvPr id="4" name="Shape 2"/>
+          <p:cNvSpPr/>
+          <p:nvPr/>
+        </p:nvSpPr>
+        <p:spPr>
+          <a:xfrm>
+            <a:off x="685800" y="2130552"/>
+            <a:ext cx="402336" cy="402336"/>
+          </a:xfrm>
+          <a:prstGeom prst="ellipse">
+            <a:avLst/>
+          </a:prstGeom>
+          <a:solidFill>
+            <a:schemeClr val="tx1"/>
+          </a:solidFill>
+          <a:ln w="25400">
+            <a:solidFill>
+              <a:schemeClr val="bg1"/>
+            </a:solidFill>
+            <a:prstDash val="solid"/>
+          </a:ln>
+        </p:spPr>
+      </p:sp>
+      <p:sp>
+        <p:nvSpPr>
+          <p:cNvPr id="5" name="Text 3"/>
+          <p:cNvSpPr txBox="1"/>
+          <p:nvPr/>
+        </p:nvSpPr>
+        <p:spPr>
+          <a:xfrm>
+            <a:off x="685800" y="2130552"/>
+            <a:ext cx="402336" cy="402336"/>
+          </a:xfrm>
+          <a:prstGeom prst="rect">
+            <a:avLst/>
+          </a:prstGeom>
+          <a:noFill/>
+          <a:ln/>
+        </p:spPr>
+        <p:txBody>
+          <a:bodyPr wrap="square" lIns="0" tIns="0" rIns="0" bIns="0" rtlCol="0" anchor="ctr"/>
+          <a:lstStyle/>
+          <a:p>
+            <a:pPr algn="ctr" indent="0" marL="0">
+              <a:buNone/>
+            </a:pPr>
+            <a:r>
+              <a:rPr lang="en-US" sz="1400" b="1" dirty="0">
+                <a:solidFill>
+                  <a:schemeClr val="bg1"/>
+                </a:solidFill>
+              </a:rPr>
+              <a:t>1</a:t>
+            </a:r>
+            <a:endParaRPr lang="en-US" sz="1400" dirty="0"/>
+          </a:p>
+        </p:txBody>
+      </p:sp>
+      <p:sp>
+        <p:nvSpPr>
+          <p:cNvPr id="6" name="Text 4"/>
+          <p:cNvSpPr txBox="1"/>
+          <p:nvPr/>
+        </p:nvSpPr>
+        <p:spPr>
+          <a:xfrm>
+            <a:off x="548640" y="1508760"/>
+            <a:ext cx="2103120" cy="411480"/>
+          </a:xfrm>
+          <a:prstGeom prst="rect">
+            <a:avLst/>
+          </a:prstGeom>
+          <a:noFill/>
+          <a:ln/>
+        </p:spPr>
+        <p:txBody>
+          <a:bodyPr wrap="square" lIns="0" tIns="0" rIns="0" bIns="0" rtlCol="0" anchor="ctr"/>
+          <a:lstStyle/>
+          <a:p>
+            <a:pPr indent="0" marL="0">
+              <a:buNone/>
+            </a:pPr>
+            <a:r>
+              <a:rPr lang="en-US" sz="1400" b="1" dirty="0">
+                <a:solidFill>
+                  <a:schemeClr val="accent6"/>
+                </a:solidFill>
+              </a:rPr>
+              <a:t>3-4 sem.</a:t>
+            </a:r>
+            <a:endParaRPr lang="en-US" sz="1400" dirty="0"/>
+          </a:p>
+        </p:txBody>
+      </p:sp>
+      <p:sp>
+        <p:nvSpPr>
+          <p:cNvPr id="7" name="Text 5"/>
+          <p:cNvSpPr txBox="1"/>
+          <p:nvPr/>
+        </p:nvSpPr>
+        <p:spPr>
+          <a:xfrm>
+            <a:off x="548640" y="2743200"/>
+            <a:ext cx="2103120" cy="457200"/>
+          </a:xfrm>
+          <a:prstGeom prst="rect">
+            <a:avLst/>
+          </a:prstGeom>
+          <a:noFill/>
+          <a:ln/>
+        </p:spPr>
+        <p:txBody>
+          <a:bodyPr wrap="square" lIns="0" tIns="0" rIns="0" bIns="0" rtlCol="0" anchor="ctr"/>
+          <a:lstStyle/>
+          <a:p>
+            <a:pPr indent="0" marL="0">
+              <a:buNone/>
+            </a:pPr>
+            <a:r>
+              <a:rPr lang="en-US" sz="1700" b="1" dirty="0">
+                <a:solidFill>
+                  <a:schemeClr val="tx1"/>
+                </a:solidFill>
+              </a:rPr>
+              <a:t>Protótipo de bancada</a:t>
+            </a:r>
+            <a:endParaRPr lang="en-US" sz="1700" dirty="0"/>
+          </a:p>
+        </p:txBody>
+      </p:sp>
+      <p:sp>
+        <p:nvSpPr>
+          <p:cNvPr id="8" name="Text 6"/>
+          <p:cNvSpPr txBox="1"/>
+          <p:nvPr/>
+        </p:nvSpPr>
+        <p:spPr>
+          <a:xfrm>
+            <a:off x="548640" y="3200400"/>
+            <a:ext cx="2057400" cy="1463040"/>
+          </a:xfrm>
+          <a:prstGeom prst="rect">
+            <a:avLst/>
+          </a:prstGeom>
+          <a:noFill/>
+          <a:ln/>
+        </p:spPr>
+        <p:txBody>
+          <a:bodyPr wrap="square" lIns="0" tIns="0" rIns="0" bIns="0" rtlCol="0" anchor="t"/>
+          <a:lstStyle/>
+          <a:p>
+            <a:pPr indent="0" marL="0">
+              <a:buNone/>
+            </a:pPr>
+            <a:r>
+              <a:rPr lang="en-US" sz="1300" dirty="0">
+                <a:solidFill>
+                  <a:schemeClr val="accent6"/>
+                </a:solidFill>
+              </a:rPr>
+              <a:t>1 concentrador, 1 nó, displays, Serviço PTL mínimo</a:t>
+            </a:r>
+            <a:endParaRPr lang="en-US" sz="1300" dirty="0"/>
+          </a:p>
+        </p:txBody>
+      </p:sp>
+      <p:sp>
+        <p:nvSpPr>
+          <p:cNvPr id="9" name="Shape 7"/>
+          <p:cNvSpPr/>
+          <p:nvPr/>
+        </p:nvSpPr>
+        <p:spPr>
+          <a:xfrm>
+            <a:off x="2926080" y="2130552"/>
+            <a:ext cx="402336" cy="402336"/>
+          </a:xfrm>
+          <a:prstGeom prst="ellipse">
+            <a:avLst/>
+          </a:prstGeom>
+          <a:solidFill>
+            <a:schemeClr val="accent1"/>
+          </a:solidFill>
+          <a:ln w="25400">
+            <a:solidFill>
+              <a:schemeClr val="bg1"/>
+            </a:solidFill>
+            <a:prstDash val="solid"/>
+          </a:ln>
+        </p:spPr>
+      </p:sp>
+      <p:sp>
+        <p:nvSpPr>
+          <p:cNvPr id="10" name="Text 8"/>
+          <p:cNvSpPr txBox="1"/>
+          <p:nvPr/>
+        </p:nvSpPr>
+        <p:spPr>
+          <a:xfrm>
+            <a:off x="2926080" y="2130552"/>
+            <a:ext cx="402336" cy="402336"/>
+          </a:xfrm>
+          <a:prstGeom prst="rect">
+            <a:avLst/>
+          </a:prstGeom>
+          <a:noFill/>
+          <a:ln/>
+        </p:spPr>
+        <p:txBody>
+          <a:bodyPr wrap="square" lIns="0" tIns="0" rIns="0" bIns="0" rtlCol="0" anchor="ctr"/>
+          <a:lstStyle/>
+          <a:p>
+            <a:pPr algn="ctr" indent="0" marL="0">
+              <a:buNone/>
+            </a:pPr>
+            <a:r>
+              <a:rPr lang="en-US" sz="1400" b="1" dirty="0">
+                <a:solidFill>
+                  <a:schemeClr val="bg1"/>
+                </a:solidFill>
+              </a:rPr>
+              <a:t>2</a:t>
+            </a:r>
+            <a:endParaRPr lang="en-US" sz="1400" dirty="0"/>
+          </a:p>
+        </p:txBody>
+      </p:sp>
+      <p:sp>
+        <p:nvSpPr>
+          <p:cNvPr id="11" name="Text 9"/>
+          <p:cNvSpPr txBox="1"/>
+          <p:nvPr/>
+        </p:nvSpPr>
+        <p:spPr>
+          <a:xfrm>
+            <a:off x="2788920" y="1508760"/>
+            <a:ext cx="2103120" cy="411480"/>
+          </a:xfrm>
+          <a:prstGeom prst="rect">
+            <a:avLst/>
+          </a:prstGeom>
+          <a:noFill/>
+          <a:ln/>
+        </p:spPr>
+        <p:txBody>
+          <a:bodyPr wrap="square" lIns="0" tIns="0" rIns="0" bIns="0" rtlCol="0" anchor="ctr"/>
+          <a:lstStyle/>
+          <a:p>
+            <a:pPr indent="0" marL="0">
+              <a:buNone/>
+            </a:pPr>
+            <a:r>
+              <a:rPr lang="en-US" sz="1400" b="1" dirty="0">
+                <a:solidFill>
+                  <a:schemeClr val="accent1"/>
+                </a:solidFill>
+              </a:rPr>
+              <a:t>6-8 sem.</a:t>
+            </a:r>
+            <a:endParaRPr lang="en-US" sz="1400" dirty="0"/>
+          </a:p>
+        </p:txBody>
+      </p:sp>
+      <p:sp>
+        <p:nvSpPr>
+          <p:cNvPr id="12" name="Text 10"/>
+          <p:cNvSpPr txBox="1"/>
+          <p:nvPr/>
+        </p:nvSpPr>
+        <p:spPr>
+          <a:xfrm>
+            <a:off x="2788920" y="2743200"/>
+            <a:ext cx="2103120" cy="457200"/>
+          </a:xfrm>
+          <a:prstGeom prst="rect">
+            <a:avLst/>
+          </a:prstGeom>
+          <a:noFill/>
+          <a:ln/>
+        </p:spPr>
+        <p:txBody>
+          <a:bodyPr wrap="square" lIns="0" tIns="0" rIns="0" bIns="0" rtlCol="0" anchor="ctr"/>
+          <a:lstStyle/>
+          <a:p>
+            <a:pPr indent="0" marL="0">
+              <a:buNone/>
+            </a:pPr>
+            <a:r>
+              <a:rPr lang="en-US" sz="1700" b="1" dirty="0">
+                <a:solidFill>
+                  <a:schemeClr val="tx1"/>
+                </a:solidFill>
+              </a:rPr>
+              <a:t>Piloto 05 e 27</a:t>
+            </a:r>
+            <a:endParaRPr lang="en-US" sz="1700" dirty="0"/>
+          </a:p>
+        </p:txBody>
+      </p:sp>
+      <p:sp>
+        <p:nvSpPr>
+          <p:cNvPr id="13" name="Text 11"/>
+          <p:cNvSpPr txBox="1"/>
+          <p:nvPr/>
+        </p:nvSpPr>
+        <p:spPr>
+          <a:xfrm>
+            <a:off x="2788920" y="3200400"/>
+            <a:ext cx="2057400" cy="1463040"/>
+          </a:xfrm>
+          <a:prstGeom prst="rect">
+            <a:avLst/>
+          </a:prstGeom>
+          <a:noFill/>
+          <a:ln/>
+        </p:spPr>
+        <p:txBody>
+          <a:bodyPr wrap="square" lIns="0" tIns="0" rIns="0" bIns="0" rtlCol="0" anchor="t"/>
+          <a:lstStyle/>
+          <a:p>
+            <a:pPr indent="0" marL="0">
+              <a:buNone/>
+            </a:pPr>
+            <a:r>
+              <a:rPr lang="en-US" sz="1300" dirty="0">
+                <a:solidFill>
+                  <a:schemeClr val="accent6"/>
+                </a:solidFill>
+              </a:rPr>
+              <a:t>Estações completas, app do coletor, painel, medição antes/depois</a:t>
+            </a:r>
+            <a:endParaRPr lang="en-US" sz="1300" dirty="0"/>
+          </a:p>
+        </p:txBody>
+      </p:sp>
+      <p:sp>
+        <p:nvSpPr>
+          <p:cNvPr id="14" name="Shape 12"/>
+          <p:cNvSpPr/>
+          <p:nvPr/>
+        </p:nvSpPr>
+        <p:spPr>
+          <a:xfrm>
+            <a:off x="5166360" y="2130552"/>
+            <a:ext cx="402336" cy="402336"/>
+          </a:xfrm>
+          <a:prstGeom prst="ellipse">
+            <a:avLst/>
+          </a:prstGeom>
+          <a:solidFill>
+            <a:schemeClr val="tx1"/>
+          </a:solidFill>
+          <a:ln w="25400">
+            <a:solidFill>
+              <a:schemeClr val="bg1"/>
+            </a:solidFill>
+            <a:prstDash val="solid"/>
+          </a:ln>
+        </p:spPr>
+      </p:sp>
+      <p:sp>
+        <p:nvSpPr>
+          <p:cNvPr id="15" name="Text 13"/>
+          <p:cNvSpPr txBox="1"/>
+          <p:nvPr/>
+        </p:nvSpPr>
+        <p:spPr>
+          <a:xfrm>
+            <a:off x="5166360" y="2130552"/>
+            <a:ext cx="402336" cy="402336"/>
+          </a:xfrm>
+          <a:prstGeom prst="rect">
+            <a:avLst/>
+          </a:prstGeom>
+          <a:noFill/>
+          <a:ln/>
+        </p:spPr>
+        <p:txBody>
+          <a:bodyPr wrap="square" lIns="0" tIns="0" rIns="0" bIns="0" rtlCol="0" anchor="ctr"/>
+          <a:lstStyle/>
+          <a:p>
+            <a:pPr algn="ctr" indent="0" marL="0">
+              <a:buNone/>
+            </a:pPr>
+            <a:r>
+              <a:rPr lang="en-US" sz="1400" b="1" dirty="0">
+                <a:solidFill>
+                  <a:schemeClr val="bg1"/>
+                </a:solidFill>
+              </a:rPr>
+              <a:t>3</a:t>
+            </a:r>
+            <a:endParaRPr lang="en-US" sz="1400" dirty="0"/>
+          </a:p>
+        </p:txBody>
+      </p:sp>
+      <p:sp>
+        <p:nvSpPr>
+          <p:cNvPr id="16" name="Text 14"/>
+          <p:cNvSpPr txBox="1"/>
+          <p:nvPr/>
+        </p:nvSpPr>
+        <p:spPr>
+          <a:xfrm>
+            <a:off x="5029200" y="1508760"/>
+            <a:ext cx="2103120" cy="411480"/>
+          </a:xfrm>
+          <a:prstGeom prst="rect">
+            <a:avLst/>
+          </a:prstGeom>
+          <a:noFill/>
+          <a:ln/>
+        </p:spPr>
+        <p:txBody>
+          <a:bodyPr wrap="square" lIns="0" tIns="0" rIns="0" bIns="0" rtlCol="0" anchor="ctr"/>
+          <a:lstStyle/>
+          <a:p>
+            <a:pPr indent="0" marL="0">
+              <a:buNone/>
+            </a:pPr>
+            <a:r>
+              <a:rPr lang="en-US" sz="1400" b="1" dirty="0">
+                <a:solidFill>
+                  <a:schemeClr val="accent6"/>
+                </a:solidFill>
+              </a:rPr>
+              <a:t>2 sem.</a:t>
+            </a:r>
+            <a:endParaRPr lang="en-US" sz="1400" dirty="0"/>
+          </a:p>
+        </p:txBody>
+      </p:sp>
+      <p:sp>
+        <p:nvSpPr>
+          <p:cNvPr id="17" name="Text 15"/>
+          <p:cNvSpPr txBox="1"/>
+          <p:nvPr/>
+        </p:nvSpPr>
+        <p:spPr>
+          <a:xfrm>
+            <a:off x="5029200" y="2743200"/>
+            <a:ext cx="2103120" cy="457200"/>
+          </a:xfrm>
+          <a:prstGeom prst="rect">
+            <a:avLst/>
+          </a:prstGeom>
+          <a:noFill/>
+          <a:ln/>
+        </p:spPr>
+        <p:txBody>
+          <a:bodyPr wrap="square" lIns="0" tIns="0" rIns="0" bIns="0" rtlCol="0" anchor="ctr"/>
+          <a:lstStyle/>
+          <a:p>
+            <a:pPr indent="0" marL="0">
+              <a:buNone/>
+            </a:pPr>
+            <a:r>
+              <a:rPr lang="en-US" sz="1700" b="1" dirty="0">
+                <a:solidFill>
+                  <a:schemeClr val="tx1"/>
+                </a:solidFill>
+              </a:rPr>
+              <a:t>Avaliação</a:t>
+            </a:r>
+            <a:endParaRPr lang="en-US" sz="1700" dirty="0"/>
+          </a:p>
+        </p:txBody>
+      </p:sp>
+      <p:sp>
+        <p:nvSpPr>
+          <p:cNvPr id="18" name="Text 16"/>
+          <p:cNvSpPr txBox="1"/>
+          <p:nvPr/>
+        </p:nvSpPr>
+        <p:spPr>
+          <a:xfrm>
+            <a:off x="5029200" y="3200400"/>
+            <a:ext cx="2057400" cy="1463040"/>
+          </a:xfrm>
+          <a:prstGeom prst="rect">
+            <a:avLst/>
+          </a:prstGeom>
+          <a:noFill/>
+          <a:ln/>
+        </p:spPr>
+        <p:txBody>
+          <a:bodyPr wrap="square" lIns="0" tIns="0" rIns="0" bIns="0" rtlCol="0" anchor="t"/>
+          <a:lstStyle/>
+          <a:p>
+            <a:pPr indent="0" marL="0">
+              <a:buNone/>
+            </a:pPr>
+            <a:r>
+              <a:rPr lang="en-US" sz="1300" dirty="0">
+                <a:solidFill>
+                  <a:schemeClr val="accent6"/>
+                </a:solidFill>
+              </a:rPr>
+              <a:t>Indicadores, ajuste das zonas, decisão A/B e produção</a:t>
+            </a:r>
+            <a:endParaRPr lang="en-US" sz="1300" dirty="0"/>
+          </a:p>
+        </p:txBody>
+      </p:sp>
+      <p:sp>
+        <p:nvSpPr>
+          <p:cNvPr id="19" name="Shape 17"/>
+          <p:cNvSpPr/>
+          <p:nvPr/>
+        </p:nvSpPr>
+        <p:spPr>
+          <a:xfrm>
+            <a:off x="7406640" y="2130552"/>
+            <a:ext cx="402336" cy="402336"/>
+          </a:xfrm>
+          <a:prstGeom prst="ellipse">
+            <a:avLst/>
+          </a:prstGeom>
+          <a:solidFill>
+            <a:schemeClr val="tx1"/>
+          </a:solidFill>
+          <a:ln w="25400">
+            <a:solidFill>
+              <a:schemeClr val="bg1"/>
+            </a:solidFill>
+            <a:prstDash val="solid"/>
+          </a:ln>
+        </p:spPr>
+      </p:sp>
+      <p:sp>
+        <p:nvSpPr>
+          <p:cNvPr id="20" name="Text 18"/>
+          <p:cNvSpPr txBox="1"/>
+          <p:nvPr/>
+        </p:nvSpPr>
+        <p:spPr>
+          <a:xfrm>
+            <a:off x="7406640" y="2130552"/>
+            <a:ext cx="402336" cy="402336"/>
+          </a:xfrm>
+          <a:prstGeom prst="rect">
+            <a:avLst/>
+          </a:prstGeom>
+          <a:noFill/>
+          <a:ln/>
+        </p:spPr>
+        <p:txBody>
+          <a:bodyPr wrap="square" lIns="0" tIns="0" rIns="0" bIns="0" rtlCol="0" anchor="ctr"/>
+          <a:lstStyle/>
+          <a:p>
+            <a:pPr algn="ctr" indent="0" marL="0">
+              <a:buNone/>
+            </a:pPr>
+            <a:r>
+              <a:rPr lang="en-US" sz="1400" b="1" dirty="0">
+                <a:solidFill>
+                  <a:schemeClr val="bg1"/>
+                </a:solidFill>
+              </a:rPr>
+              <a:t>4</a:t>
+            </a:r>
+            <a:endParaRPr lang="en-US" sz="1400" dirty="0"/>
+          </a:p>
+        </p:txBody>
+      </p:sp>
+      <p:sp>
+        <p:nvSpPr>
+          <p:cNvPr id="21" name="Text 19"/>
+          <p:cNvSpPr txBox="1"/>
+          <p:nvPr/>
+        </p:nvSpPr>
+        <p:spPr>
+          <a:xfrm>
+            <a:off x="7269480" y="1508760"/>
+            <a:ext cx="2103120" cy="411480"/>
+          </a:xfrm>
+          <a:prstGeom prst="rect">
+            <a:avLst/>
+          </a:prstGeom>
+          <a:noFill/>
+          <a:ln/>
+        </p:spPr>
+        <p:txBody>
+          <a:bodyPr wrap="square" lIns="0" tIns="0" rIns="0" bIns="0" rtlCol="0" anchor="ctr"/>
+          <a:lstStyle/>
+          <a:p>
+            <a:pPr indent="0" marL="0">
+              <a:buNone/>
+            </a:pPr>
+            <a:r>
+              <a:rPr lang="en-US" sz="1400" b="1" dirty="0">
+                <a:solidFill>
+                  <a:schemeClr val="accent6"/>
+                </a:solidFill>
+              </a:rPr>
+              <a:t>10-14 sem.</a:t>
+            </a:r>
+            <a:endParaRPr lang="en-US" sz="1400" dirty="0"/>
+          </a:p>
+        </p:txBody>
+      </p:sp>
+      <p:sp>
+        <p:nvSpPr>
+          <p:cNvPr id="22" name="Text 20"/>
+          <p:cNvSpPr txBox="1"/>
+          <p:nvPr/>
+        </p:nvSpPr>
+        <p:spPr>
+          <a:xfrm>
+            <a:off x="7269480" y="2743200"/>
+            <a:ext cx="2103120" cy="457200"/>
+          </a:xfrm>
+          <a:prstGeom prst="rect">
+            <a:avLst/>
+          </a:prstGeom>
+          <a:noFill/>
+          <a:ln/>
+        </p:spPr>
+        <p:txBody>
+          <a:bodyPr wrap="square" lIns="0" tIns="0" rIns="0" bIns="0" rtlCol="0" anchor="ctr"/>
+          <a:lstStyle/>
+          <a:p>
+            <a:pPr indent="0" marL="0">
+              <a:buNone/>
+            </a:pPr>
+            <a:r>
+              <a:rPr lang="en-US" sz="1700" b="1" dirty="0">
+                <a:solidFill>
+                  <a:schemeClr val="tx1"/>
+                </a:solidFill>
+              </a:rPr>
+              <a:t>Expansão</a:t>
+            </a:r>
+            <a:endParaRPr lang="en-US" sz="1700" dirty="0"/>
+          </a:p>
+        </p:txBody>
+      </p:sp>
+      <p:sp>
+        <p:nvSpPr>
+          <p:cNvPr id="23" name="Text 21"/>
+          <p:cNvSpPr txBox="1"/>
+          <p:nvPr/>
+        </p:nvSpPr>
+        <p:spPr>
+          <a:xfrm>
+            <a:off x="7269480" y="3200400"/>
+            <a:ext cx="2057400" cy="1463040"/>
+          </a:xfrm>
+          <a:prstGeom prst="rect">
+            <a:avLst/>
+          </a:prstGeom>
+          <a:noFill/>
+          <a:ln/>
+        </p:spPr>
+        <p:txBody>
+          <a:bodyPr wrap="square" lIns="0" tIns="0" rIns="0" bIns="0" rtlCol="0" anchor="t"/>
+          <a:lstStyle/>
+          <a:p>
+            <a:pPr indent="0" marL="0">
+              <a:buNone/>
+            </a:pPr>
+            <a:r>
+              <a:rPr lang="en-US" sz="1300" dirty="0">
+                <a:solidFill>
+                  <a:schemeClr val="accent6"/>
+                </a:solidFill>
+              </a:rPr>
+              <a:t>Medicamento e depois Perfumaria, em lotes de 5 estações</a:t>
+            </a:r>
+            <a:endParaRPr lang="en-US" sz="1300" dirty="0"/>
+          </a:p>
+        </p:txBody>
+      </p:sp>
+      <p:sp>
+        <p:nvSpPr>
+          <p:cNvPr id="24" name="Shape 22"/>
+          <p:cNvSpPr/>
+          <p:nvPr/>
+        </p:nvSpPr>
+        <p:spPr>
+          <a:xfrm>
+            <a:off x="9646920" y="2130552"/>
+            <a:ext cx="402336" cy="402336"/>
+          </a:xfrm>
+          <a:prstGeom prst="ellipse">
+            <a:avLst/>
+          </a:prstGeom>
+          <a:solidFill>
+            <a:schemeClr val="tx1"/>
+          </a:solidFill>
+          <a:ln w="25400">
+            <a:solidFill>
+              <a:schemeClr val="bg1"/>
+            </a:solidFill>
+            <a:prstDash val="solid"/>
+          </a:ln>
+        </p:spPr>
+      </p:sp>
+      <p:sp>
+        <p:nvSpPr>
+          <p:cNvPr id="25" name="Text 23"/>
+          <p:cNvSpPr txBox="1"/>
+          <p:nvPr/>
+        </p:nvSpPr>
+        <p:spPr>
+          <a:xfrm>
+            <a:off x="9646920" y="2130552"/>
+            <a:ext cx="402336" cy="402336"/>
+          </a:xfrm>
+          <a:prstGeom prst="rect">
+            <a:avLst/>
+          </a:prstGeom>
+          <a:noFill/>
+          <a:ln/>
+        </p:spPr>
+        <p:txBody>
+          <a:bodyPr wrap="square" lIns="0" tIns="0" rIns="0" bIns="0" rtlCol="0" anchor="ctr"/>
+          <a:lstStyle/>
+          <a:p>
+            <a:pPr algn="ctr" indent="0" marL="0">
+              <a:buNone/>
+            </a:pPr>
+            <a:r>
+              <a:rPr lang="en-US" sz="1400" b="1" dirty="0">
+                <a:solidFill>
+                  <a:schemeClr val="bg1"/>
+                </a:solidFill>
+              </a:rPr>
+              <a:t>5</a:t>
+            </a:r>
+            <a:endParaRPr lang="en-US" sz="1400" dirty="0"/>
+          </a:p>
+        </p:txBody>
+      </p:sp>
+      <p:sp>
+        <p:nvSpPr>
+          <p:cNvPr id="26" name="Text 24"/>
+          <p:cNvSpPr txBox="1"/>
+          <p:nvPr/>
+        </p:nvSpPr>
+        <p:spPr>
+          <a:xfrm>
+            <a:off x="9509760" y="1508760"/>
+            <a:ext cx="2103120" cy="411480"/>
+          </a:xfrm>
+          <a:prstGeom prst="rect">
+            <a:avLst/>
+          </a:prstGeom>
+          <a:noFill/>
+          <a:ln/>
+        </p:spPr>
+        <p:txBody>
+          <a:bodyPr wrap="square" lIns="0" tIns="0" rIns="0" bIns="0" rtlCol="0" anchor="ctr"/>
+          <a:lstStyle/>
+          <a:p>
+            <a:pPr indent="0" marL="0">
+              <a:buNone/>
+            </a:pPr>
+            <a:r>
+              <a:rPr lang="en-US" sz="1400" b="1" dirty="0">
+                <a:solidFill>
+                  <a:schemeClr val="accent6"/>
+                </a:solidFill>
+              </a:rPr>
+              <a:t>4 sem.</a:t>
+            </a:r>
+            <a:endParaRPr lang="en-US" sz="1400" dirty="0"/>
+          </a:p>
+        </p:txBody>
+      </p:sp>
+      <p:sp>
+        <p:nvSpPr>
+          <p:cNvPr id="27" name="Text 25"/>
+          <p:cNvSpPr txBox="1"/>
+          <p:nvPr/>
+        </p:nvSpPr>
+        <p:spPr>
+          <a:xfrm>
+            <a:off x="9509760" y="2743200"/>
+            <a:ext cx="2103120" cy="457200"/>
+          </a:xfrm>
+          <a:prstGeom prst="rect">
+            <a:avLst/>
+          </a:prstGeom>
+          <a:noFill/>
+          <a:ln/>
+        </p:spPr>
+        <p:txBody>
+          <a:bodyPr wrap="square" lIns="0" tIns="0" rIns="0" bIns="0" rtlCol="0" anchor="ctr"/>
+          <a:lstStyle/>
+          <a:p>
+            <a:pPr indent="0" marL="0">
+              <a:buNone/>
+            </a:pPr>
+            <a:r>
+              <a:rPr lang="en-US" sz="1700" b="1" dirty="0">
+                <a:solidFill>
+                  <a:schemeClr val="tx1"/>
+                </a:solidFill>
+              </a:rPr>
+              <a:t>Estabilização</a:t>
+            </a:r>
+            <a:endParaRPr lang="en-US" sz="1700" dirty="0"/>
+          </a:p>
+        </p:txBody>
+      </p:sp>
+      <p:sp>
+        <p:nvSpPr>
+          <p:cNvPr id="28" name="Text 26"/>
+          <p:cNvSpPr txBox="1"/>
+          <p:nvPr/>
+        </p:nvSpPr>
+        <p:spPr>
+          <a:xfrm>
+            <a:off x="9509760" y="3200400"/>
+            <a:ext cx="2057400" cy="1463040"/>
+          </a:xfrm>
+          <a:prstGeom prst="rect">
+            <a:avLst/>
+          </a:prstGeom>
+          <a:noFill/>
+          <a:ln/>
+        </p:spPr>
+        <p:txBody>
+          <a:bodyPr wrap="square" lIns="0" tIns="0" rIns="0" bIns="0" rtlCol="0" anchor="t"/>
+          <a:lstStyle/>
+          <a:p>
+            <a:pPr indent="0" marL="0">
+              <a:buNone/>
+            </a:pPr>
+            <a:r>
+              <a:rPr lang="en-US" sz="1300" dirty="0">
+                <a:solidFill>
+                  <a:schemeClr val="accent6"/>
+                </a:solidFill>
+              </a:rPr>
+              <a:t>Ajustes finais e passagem para a sustentação</a:t>
+            </a:r>
+            <a:endParaRPr lang="en-US" sz="1300" dirty="0"/>
+          </a:p>
+        </p:txBody>
+      </p:sp>
+      <p:sp>
+        <p:nvSpPr>
+          <p:cNvPr id="29" name="Shape 27"/>
+          <p:cNvSpPr/>
+          <p:nvPr/>
+        </p:nvSpPr>
+        <p:spPr>
+          <a:xfrm>
+            <a:off x="548640" y="4892040"/>
+            <a:ext cx="11064240" cy="1051560"/>
           </a:xfrm>
           <a:prstGeom prst="roundRect">
             <a:avLst>
-              <a:gd name="adj" fmla="val 5517"/>
+              <a:gd name="adj" fmla="val 6957"/>
             </a:avLst>
           </a:prstGeom>
           <a:solidFill>
@@ -8610,63 +8650,14 @@
       </p:sp>
       <p:sp>
         <p:nvSpPr>
-          <p:cNvPr id="4" name="Shape 2"/>
-          <p:cNvSpPr/>
-          <p:nvPr/>
-        </p:nvSpPr>
-        <p:spPr>
-          <a:xfrm>
-            <a:off x="777240" y="1554480"/>
-            <a:ext cx="502920" cy="502920"/>
-          </a:xfrm>
-          <a:prstGeom prst="ellipse">
-            <a:avLst/>
-          </a:prstGeom>
-          <a:solidFill>
-            <a:schemeClr val="accent1"/>
-          </a:solidFill>
-          <a:ln w="12700">
-            <a:solidFill>
-              <a:schemeClr val="accent1"/>
-            </a:solidFill>
-            <a:prstDash val="solid"/>
-          </a:ln>
-        </p:spPr>
-      </p:sp>
-      <p:pic>
-        <p:nvPicPr>
-          <p:cNvPr id="5" name="Image 0" descr="preencoded.png">    </p:cNvPr>
-          <p:cNvPicPr>
-            <a:picLocks noChangeAspect="1"/>
-          </p:cNvPicPr>
-          <p:nvPr/>
-        </p:nvPicPr>
-        <p:blipFill>
-          <a:blip r:embed="rId1"/>
-          <a:stretch>
-            <a:fillRect/>
-          </a:stretch>
-        </p:blipFill>
-        <p:spPr>
-          <a:xfrm>
-            <a:off x="897941" y="1675181"/>
-            <a:ext cx="261518" cy="261518"/>
-          </a:xfrm>
-          <a:prstGeom prst="rect">
-            <a:avLst/>
-          </a:prstGeom>
-        </p:spPr>
-      </p:pic>
-      <p:sp>
-        <p:nvSpPr>
-          <p:cNvPr id="6" name="Text 3"/>
+          <p:cNvPr id="30" name="Text 28"/>
           <p:cNvSpPr txBox="1"/>
           <p:nvPr/>
         </p:nvSpPr>
         <p:spPr>
           <a:xfrm>
-            <a:off x="1463040" y="1490472"/>
-            <a:ext cx="4343400" cy="411480"/>
+            <a:off x="777240" y="4983480"/>
+            <a:ext cx="10607040" cy="868680"/>
           </a:xfrm>
           <a:prstGeom prst="rect">
             <a:avLst/>
@@ -8682,790 +8673,25 @@
               <a:buNone/>
             </a:pPr>
             <a:r>
-              <a:rPr lang="en-US" sz="1600" b="1" dirty="0">
+              <a:rPr lang="en-US" sz="1500" b="1" dirty="0">
                 <a:solidFill>
                   <a:schemeClr val="tx1"/>
                 </a:solidFill>
               </a:rPr>
-              <a:t>Dados da caixa na API do BHT</a:t>
-            </a:r>
-            <a:endParaRPr lang="en-US" sz="1600" dirty="0"/>
-          </a:p>
-        </p:txBody>
-      </p:sp>
-      <p:sp>
-        <p:nvSpPr>
-          <p:cNvPr id="7" name="Text 4"/>
-          <p:cNvSpPr txBox="1"/>
-          <p:nvPr/>
-        </p:nvSpPr>
-        <p:spPr>
-          <a:xfrm>
-            <a:off x="1463040" y="1892808"/>
-            <a:ext cx="4343400" cy="640080"/>
-          </a:xfrm>
-          <a:prstGeom prst="rect">
-            <a:avLst/>
-          </a:prstGeom>
-          <a:noFill/>
-          <a:ln/>
-        </p:spPr>
-        <p:txBody>
-          <a:bodyPr wrap="square" lIns="0" tIns="0" rIns="0" bIns="0" rtlCol="0" anchor="t"/>
-          <a:lstStyle/>
-          <a:p>
+              <a:t>Para começar: </a:t>
+            </a:r>
             <a:pPr indent="0" marL="0">
               <a:buNone/>
             </a:pPr>
             <a:r>
-              <a:rPr lang="en-US" sz="1300" dirty="0">
-                <a:solidFill>
-                  <a:schemeClr val="accent6"/>
-                </a:solidFill>
-              </a:rPr>
-              <a:t>Validar no protótipo; alternativa por views no Sybase</a:t>
-            </a:r>
-            <a:endParaRPr lang="en-US" sz="1300" dirty="0"/>
-          </a:p>
-        </p:txBody>
-      </p:sp>
-      <p:sp>
-        <p:nvSpPr>
-          <p:cNvPr id="8" name="Shape 5"/>
-          <p:cNvSpPr/>
-          <p:nvPr/>
-        </p:nvSpPr>
-        <p:spPr>
-          <a:xfrm>
-            <a:off x="6172200" y="1325880"/>
-            <a:ext cx="5440680" cy="1325880"/>
-          </a:xfrm>
-          <a:prstGeom prst="roundRect">
-            <a:avLst>
-              <a:gd name="adj" fmla="val 5517"/>
-            </a:avLst>
-          </a:prstGeom>
-          <a:solidFill>
-            <a:schemeClr val="bg2"/>
-          </a:solidFill>
-          <a:ln w="12700">
-            <a:solidFill>
-              <a:schemeClr val="bg2"/>
-            </a:solidFill>
-            <a:prstDash val="solid"/>
-          </a:ln>
-        </p:spPr>
-      </p:sp>
-      <p:sp>
-        <p:nvSpPr>
-          <p:cNvPr id="9" name="Shape 6"/>
-          <p:cNvSpPr/>
-          <p:nvPr/>
-        </p:nvSpPr>
-        <p:spPr>
-          <a:xfrm>
-            <a:off x="6400800" y="1554480"/>
-            <a:ext cx="502920" cy="502920"/>
-          </a:xfrm>
-          <a:prstGeom prst="ellipse">
-            <a:avLst/>
-          </a:prstGeom>
-          <a:solidFill>
-            <a:schemeClr val="accent1"/>
-          </a:solidFill>
-          <a:ln w="12700">
-            <a:solidFill>
-              <a:schemeClr val="accent1"/>
-            </a:solidFill>
-            <a:prstDash val="solid"/>
-          </a:ln>
-        </p:spPr>
-      </p:sp>
-      <p:pic>
-        <p:nvPicPr>
-          <p:cNvPr id="10" name="Image 1" descr="preencoded.png">    </p:cNvPr>
-          <p:cNvPicPr>
-            <a:picLocks noChangeAspect="1"/>
-          </p:cNvPicPr>
-          <p:nvPr/>
-        </p:nvPicPr>
-        <p:blipFill>
-          <a:blip r:embed="rId2"/>
-          <a:stretch>
-            <a:fillRect/>
-          </a:stretch>
-        </p:blipFill>
-        <p:spPr>
-          <a:xfrm>
-            <a:off x="6521501" y="1675181"/>
-            <a:ext cx="261518" cy="261518"/>
-          </a:xfrm>
-          <a:prstGeom prst="rect">
-            <a:avLst/>
-          </a:prstGeom>
-        </p:spPr>
-      </p:pic>
-      <p:sp>
-        <p:nvSpPr>
-          <p:cNvPr id="11" name="Text 7"/>
-          <p:cNvSpPr txBox="1"/>
-          <p:nvPr/>
-        </p:nvSpPr>
-        <p:spPr>
-          <a:xfrm>
-            <a:off x="7086600" y="1490472"/>
-            <a:ext cx="4343400" cy="411480"/>
-          </a:xfrm>
-          <a:prstGeom prst="rect">
-            <a:avLst/>
-          </a:prstGeom>
-          <a:noFill/>
-          <a:ln/>
-        </p:spPr>
-        <p:txBody>
-          <a:bodyPr wrap="square" lIns="0" tIns="0" rIns="0" bIns="0" rtlCol="0" anchor="ctr"/>
-          <a:lstStyle/>
-          <a:p>
-            <a:pPr indent="0" marL="0">
-              <a:buNone/>
-            </a:pPr>
-            <a:r>
-              <a:rPr lang="en-US" sz="1600" b="1" dirty="0">
-                <a:solidFill>
-                  <a:schemeClr val="tx1"/>
-                </a:solidFill>
-              </a:rPr>
-              <a:t>Manutenção alta (experiência anterior)</a:t>
-            </a:r>
-            <a:endParaRPr lang="en-US" sz="1600" dirty="0"/>
-          </a:p>
-        </p:txBody>
-      </p:sp>
-      <p:sp>
-        <p:nvSpPr>
-          <p:cNvPr id="12" name="Text 8"/>
-          <p:cNvSpPr txBox="1"/>
-          <p:nvPr/>
-        </p:nvSpPr>
-        <p:spPr>
-          <a:xfrm>
-            <a:off x="7086600" y="1892808"/>
-            <a:ext cx="4343400" cy="640080"/>
-          </a:xfrm>
-          <a:prstGeom prst="rect">
-            <a:avLst/>
-          </a:prstGeom>
-          <a:noFill/>
-          <a:ln/>
-        </p:spPr>
-        <p:txBody>
-          <a:bodyPr wrap="square" lIns="0" tIns="0" rIns="0" bIns="0" rtlCol="0" anchor="t"/>
-          <a:lstStyle/>
-          <a:p>
-            <a:pPr indent="0" marL="0">
-              <a:buNone/>
-            </a:pPr>
-            <a:r>
-              <a:rPr lang="en-US" sz="1300" dirty="0">
-                <a:solidFill>
-                  <a:schemeClr val="accent6"/>
-                </a:solidFill>
-              </a:rPr>
-              <a:t>RJ45 em todos os trechos, módulos de troca rápida, auto-teste diário</a:t>
-            </a:r>
-            <a:endParaRPr lang="en-US" sz="1300" dirty="0"/>
-          </a:p>
-        </p:txBody>
-      </p:sp>
-      <p:sp>
-        <p:nvSpPr>
-          <p:cNvPr id="13" name="Shape 9"/>
-          <p:cNvSpPr/>
-          <p:nvPr/>
-        </p:nvSpPr>
-        <p:spPr>
-          <a:xfrm>
-            <a:off x="548640" y="2834640"/>
-            <a:ext cx="5440680" cy="1325880"/>
-          </a:xfrm>
-          <a:prstGeom prst="roundRect">
-            <a:avLst>
-              <a:gd name="adj" fmla="val 5517"/>
-            </a:avLst>
-          </a:prstGeom>
-          <a:solidFill>
-            <a:schemeClr val="bg2"/>
-          </a:solidFill>
-          <a:ln w="12700">
-            <a:solidFill>
-              <a:schemeClr val="bg2"/>
-            </a:solidFill>
-            <a:prstDash val="solid"/>
-          </a:ln>
-        </p:spPr>
-      </p:sp>
-      <p:sp>
-        <p:nvSpPr>
-          <p:cNvPr id="14" name="Shape 10"/>
-          <p:cNvSpPr/>
-          <p:nvPr/>
-        </p:nvSpPr>
-        <p:spPr>
-          <a:xfrm>
-            <a:off x="777240" y="3063240"/>
-            <a:ext cx="502920" cy="502920"/>
-          </a:xfrm>
-          <a:prstGeom prst="ellipse">
-            <a:avLst/>
-          </a:prstGeom>
-          <a:solidFill>
-            <a:schemeClr val="accent1"/>
-          </a:solidFill>
-          <a:ln w="12700">
-            <a:solidFill>
-              <a:schemeClr val="accent1"/>
-            </a:solidFill>
-            <a:prstDash val="solid"/>
-          </a:ln>
-        </p:spPr>
-      </p:sp>
-      <p:pic>
-        <p:nvPicPr>
-          <p:cNvPr id="15" name="Image 2" descr="preencoded.png">    </p:cNvPr>
-          <p:cNvPicPr>
-            <a:picLocks noChangeAspect="1"/>
-          </p:cNvPicPr>
-          <p:nvPr/>
-        </p:nvPicPr>
-        <p:blipFill>
-          <a:blip r:embed="rId3"/>
-          <a:stretch>
-            <a:fillRect/>
-          </a:stretch>
-        </p:blipFill>
-        <p:spPr>
-          <a:xfrm>
-            <a:off x="897941" y="3183941"/>
-            <a:ext cx="261518" cy="261518"/>
-          </a:xfrm>
-          <a:prstGeom prst="rect">
-            <a:avLst/>
-          </a:prstGeom>
-        </p:spPr>
-      </p:pic>
-      <p:sp>
-        <p:nvSpPr>
-          <p:cNvPr id="16" name="Text 11"/>
-          <p:cNvSpPr txBox="1"/>
-          <p:nvPr/>
-        </p:nvSpPr>
-        <p:spPr>
-          <a:xfrm>
-            <a:off x="1463040" y="2999232"/>
-            <a:ext cx="4343400" cy="411480"/>
-          </a:xfrm>
-          <a:prstGeom prst="rect">
-            <a:avLst/>
-          </a:prstGeom>
-          <a:noFill/>
-          <a:ln/>
-        </p:spPr>
-        <p:txBody>
-          <a:bodyPr wrap="square" lIns="0" tIns="0" rIns="0" bIns="0" rtlCol="0" anchor="ctr"/>
-          <a:lstStyle/>
-          <a:p>
-            <a:pPr indent="0" marL="0">
-              <a:buNone/>
-            </a:pPr>
-            <a:r>
-              <a:rPr lang="en-US" sz="1600" b="1" dirty="0">
-                <a:solidFill>
-                  <a:schemeClr val="tx1"/>
-                </a:solidFill>
-              </a:rPr>
-              <a:t>Poeira e calor</a:t>
-            </a:r>
-            <a:endParaRPr lang="en-US" sz="1600" dirty="0"/>
-          </a:p>
-        </p:txBody>
-      </p:sp>
-      <p:sp>
-        <p:nvSpPr>
-          <p:cNvPr id="17" name="Text 12"/>
-          <p:cNvSpPr txBox="1"/>
-          <p:nvPr/>
-        </p:nvSpPr>
-        <p:spPr>
-          <a:xfrm>
-            <a:off x="1463040" y="3401568"/>
-            <a:ext cx="4343400" cy="640080"/>
-          </a:xfrm>
-          <a:prstGeom prst="rect">
-            <a:avLst/>
-          </a:prstGeom>
-          <a:noFill/>
-          <a:ln/>
-        </p:spPr>
-        <p:txBody>
-          <a:bodyPr wrap="square" lIns="0" tIns="0" rIns="0" bIns="0" rtlCol="0" anchor="t"/>
-          <a:lstStyle/>
-          <a:p>
-            <a:pPr indent="0" marL="0">
-              <a:buNone/>
-            </a:pPr>
-            <a:r>
-              <a:rPr lang="en-US" sz="1300" dirty="0">
-                <a:solidFill>
-                  <a:schemeClr val="accent6"/>
-                </a:solidFill>
-              </a:rPr>
-              <a:t>Gabinete com filtro e cooler; componentes para 0-50 °C</a:t>
-            </a:r>
-            <a:endParaRPr lang="en-US" sz="1300" dirty="0"/>
-          </a:p>
-        </p:txBody>
-      </p:sp>
-      <p:sp>
-        <p:nvSpPr>
-          <p:cNvPr id="18" name="Shape 13"/>
-          <p:cNvSpPr/>
-          <p:nvPr/>
-        </p:nvSpPr>
-        <p:spPr>
-          <a:xfrm>
-            <a:off x="6172200" y="2834640"/>
-            <a:ext cx="5440680" cy="1325880"/>
-          </a:xfrm>
-          <a:prstGeom prst="roundRect">
-            <a:avLst>
-              <a:gd name="adj" fmla="val 5517"/>
-            </a:avLst>
-          </a:prstGeom>
-          <a:solidFill>
-            <a:schemeClr val="bg2"/>
-          </a:solidFill>
-          <a:ln w="12700">
-            <a:solidFill>
-              <a:schemeClr val="bg2"/>
-            </a:solidFill>
-            <a:prstDash val="solid"/>
-          </a:ln>
-        </p:spPr>
-      </p:sp>
-      <p:sp>
-        <p:nvSpPr>
-          <p:cNvPr id="19" name="Shape 14"/>
-          <p:cNvSpPr/>
-          <p:nvPr/>
-        </p:nvSpPr>
-        <p:spPr>
-          <a:xfrm>
-            <a:off x="6400800" y="3063240"/>
-            <a:ext cx="502920" cy="502920"/>
-          </a:xfrm>
-          <a:prstGeom prst="ellipse">
-            <a:avLst/>
-          </a:prstGeom>
-          <a:solidFill>
-            <a:schemeClr val="accent1"/>
-          </a:solidFill>
-          <a:ln w="12700">
-            <a:solidFill>
-              <a:schemeClr val="accent1"/>
-            </a:solidFill>
-            <a:prstDash val="solid"/>
-          </a:ln>
-        </p:spPr>
-      </p:sp>
-      <p:pic>
-        <p:nvPicPr>
-          <p:cNvPr id="20" name="Image 3" descr="preencoded.png">    </p:cNvPr>
-          <p:cNvPicPr>
-            <a:picLocks noChangeAspect="1"/>
-          </p:cNvPicPr>
-          <p:nvPr/>
-        </p:nvPicPr>
-        <p:blipFill>
-          <a:blip r:embed="rId4"/>
-          <a:stretch>
-            <a:fillRect/>
-          </a:stretch>
-        </p:blipFill>
-        <p:spPr>
-          <a:xfrm>
-            <a:off x="6521501" y="3183941"/>
-            <a:ext cx="261518" cy="261518"/>
-          </a:xfrm>
-          <a:prstGeom prst="rect">
-            <a:avLst/>
-          </a:prstGeom>
-        </p:spPr>
-      </p:pic>
-      <p:sp>
-        <p:nvSpPr>
-          <p:cNvPr id="21" name="Text 15"/>
-          <p:cNvSpPr txBox="1"/>
-          <p:nvPr/>
-        </p:nvSpPr>
-        <p:spPr>
-          <a:xfrm>
-            <a:off x="7086600" y="2999232"/>
-            <a:ext cx="4343400" cy="411480"/>
-          </a:xfrm>
-          <a:prstGeom prst="rect">
-            <a:avLst/>
-          </a:prstGeom>
-          <a:noFill/>
-          <a:ln/>
-        </p:spPr>
-        <p:txBody>
-          <a:bodyPr wrap="square" lIns="0" tIns="0" rIns="0" bIns="0" rtlCol="0" anchor="ctr"/>
-          <a:lstStyle/>
-          <a:p>
-            <a:pPr indent="0" marL="0">
-              <a:buNone/>
-            </a:pPr>
-            <a:r>
-              <a:rPr lang="en-US" sz="1600" b="1" dirty="0">
-                <a:solidFill>
-                  <a:schemeClr val="tx1"/>
-                </a:solidFill>
-              </a:rPr>
-              <a:t>Itens por caixa fora do esperado</a:t>
-            </a:r>
-            <a:endParaRPr lang="en-US" sz="1600" dirty="0"/>
-          </a:p>
-        </p:txBody>
-      </p:sp>
-      <p:sp>
-        <p:nvSpPr>
-          <p:cNvPr id="22" name="Text 16"/>
-          <p:cNvSpPr txBox="1"/>
-          <p:nvPr/>
-        </p:nvSpPr>
-        <p:spPr>
-          <a:xfrm>
-            <a:off x="7086600" y="3401568"/>
-            <a:ext cx="4343400" cy="640080"/>
-          </a:xfrm>
-          <a:prstGeom prst="rect">
-            <a:avLst/>
-          </a:prstGeom>
-          <a:noFill/>
-          <a:ln/>
-        </p:spPr>
-        <p:txBody>
-          <a:bodyPr wrap="square" lIns="0" tIns="0" rIns="0" bIns="0" rtlCol="0" anchor="t"/>
-          <a:lstStyle/>
-          <a:p>
-            <a:pPr indent="0" marL="0">
-              <a:buNone/>
-            </a:pPr>
-            <a:r>
-              <a:rPr lang="en-US" sz="1300" dirty="0">
-                <a:solidFill>
-                  <a:schemeClr val="accent6"/>
-                </a:solidFill>
-              </a:rPr>
-              <a:t>Medir no piloto e ajustar o tamanho das zonas</a:t>
-            </a:r>
-            <a:endParaRPr lang="en-US" sz="1300" dirty="0"/>
-          </a:p>
-        </p:txBody>
-      </p:sp>
-      <p:sp>
-        <p:nvSpPr>
-          <p:cNvPr id="23" name="Shape 17"/>
-          <p:cNvSpPr/>
-          <p:nvPr/>
-        </p:nvSpPr>
-        <p:spPr>
-          <a:xfrm>
-            <a:off x="548640" y="4343400"/>
-            <a:ext cx="5440680" cy="1325880"/>
-          </a:xfrm>
-          <a:prstGeom prst="roundRect">
-            <a:avLst>
-              <a:gd name="adj" fmla="val 5517"/>
-            </a:avLst>
-          </a:prstGeom>
-          <a:solidFill>
-            <a:schemeClr val="bg2"/>
-          </a:solidFill>
-          <a:ln w="12700">
-            <a:solidFill>
-              <a:schemeClr val="bg2"/>
-            </a:solidFill>
-            <a:prstDash val="solid"/>
-          </a:ln>
-        </p:spPr>
-      </p:sp>
-      <p:sp>
-        <p:nvSpPr>
-          <p:cNvPr id="24" name="Shape 18"/>
-          <p:cNvSpPr/>
-          <p:nvPr/>
-        </p:nvSpPr>
-        <p:spPr>
-          <a:xfrm>
-            <a:off x="777240" y="4572000"/>
-            <a:ext cx="502920" cy="502920"/>
-          </a:xfrm>
-          <a:prstGeom prst="ellipse">
-            <a:avLst/>
-          </a:prstGeom>
-          <a:solidFill>
-            <a:schemeClr val="accent1"/>
-          </a:solidFill>
-          <a:ln w="12700">
-            <a:solidFill>
-              <a:schemeClr val="accent1"/>
-            </a:solidFill>
-            <a:prstDash val="solid"/>
-          </a:ln>
-        </p:spPr>
-      </p:sp>
-      <p:pic>
-        <p:nvPicPr>
-          <p:cNvPr id="25" name="Image 4" descr="preencoded.png">    </p:cNvPr>
-          <p:cNvPicPr>
-            <a:picLocks noChangeAspect="1"/>
-          </p:cNvPicPr>
-          <p:nvPr/>
-        </p:nvPicPr>
-        <p:blipFill>
-          <a:blip r:embed="rId5"/>
-          <a:stretch>
-            <a:fillRect/>
-          </a:stretch>
-        </p:blipFill>
-        <p:spPr>
-          <a:xfrm>
-            <a:off x="897941" y="4692701"/>
-            <a:ext cx="261518" cy="261518"/>
-          </a:xfrm>
-          <a:prstGeom prst="rect">
-            <a:avLst/>
-          </a:prstGeom>
-        </p:spPr>
-      </p:pic>
-      <p:sp>
-        <p:nvSpPr>
-          <p:cNvPr id="26" name="Text 19"/>
-          <p:cNvSpPr txBox="1"/>
-          <p:nvPr/>
-        </p:nvSpPr>
-        <p:spPr>
-          <a:xfrm>
-            <a:off x="1463040" y="4507992"/>
-            <a:ext cx="4343400" cy="411480"/>
-          </a:xfrm>
-          <a:prstGeom prst="rect">
-            <a:avLst/>
-          </a:prstGeom>
-          <a:noFill/>
-          <a:ln/>
-        </p:spPr>
-        <p:txBody>
-          <a:bodyPr wrap="square" lIns="0" tIns="0" rIns="0" bIns="0" rtlCol="0" anchor="ctr"/>
-          <a:lstStyle/>
-          <a:p>
-            <a:pPr indent="0" marL="0">
-              <a:buNone/>
-            </a:pPr>
-            <a:r>
-              <a:rPr lang="en-US" sz="1600" b="1" dirty="0">
-                <a:solidFill>
-                  <a:schemeClr val="tx1"/>
-                </a:solidFill>
-              </a:rPr>
-              <a:t>Dependência de um técnico</a:t>
-            </a:r>
-            <a:endParaRPr lang="en-US" sz="1600" dirty="0"/>
-          </a:p>
-        </p:txBody>
-      </p:sp>
-      <p:sp>
-        <p:nvSpPr>
-          <p:cNvPr id="27" name="Text 20"/>
-          <p:cNvSpPr txBox="1"/>
-          <p:nvPr/>
-        </p:nvSpPr>
-        <p:spPr>
-          <a:xfrm>
-            <a:off x="1463040" y="4910328"/>
-            <a:ext cx="4343400" cy="640080"/>
-          </a:xfrm>
-          <a:prstGeom prst="rect">
-            <a:avLst/>
-          </a:prstGeom>
-          <a:noFill/>
-          <a:ln/>
-        </p:spPr>
-        <p:txBody>
-          <a:bodyPr wrap="square" lIns="0" tIns="0" rIns="0" bIns="0" rtlCol="0" anchor="t"/>
-          <a:lstStyle/>
-          <a:p>
-            <a:pPr indent="0" marL="0">
-              <a:buNone/>
-            </a:pPr>
-            <a:r>
-              <a:rPr lang="en-US" sz="1300" dirty="0">
-                <a:solidFill>
-                  <a:schemeClr val="accent6"/>
-                </a:solidFill>
-              </a:rPr>
-              <a:t>Documentação, kits de reserva e opção de placa própria</a:t>
-            </a:r>
-            <a:endParaRPr lang="en-US" sz="1300" dirty="0"/>
-          </a:p>
-        </p:txBody>
-      </p:sp>
-      <p:sp>
-        <p:nvSpPr>
-          <p:cNvPr id="28" name="Shape 21"/>
-          <p:cNvSpPr/>
-          <p:nvPr/>
-        </p:nvSpPr>
-        <p:spPr>
-          <a:xfrm>
-            <a:off x="6172200" y="4343400"/>
-            <a:ext cx="5440680" cy="1325880"/>
-          </a:xfrm>
-          <a:prstGeom prst="roundRect">
-            <a:avLst>
-              <a:gd name="adj" fmla="val 5517"/>
-            </a:avLst>
-          </a:prstGeom>
-          <a:solidFill>
-            <a:schemeClr val="bg2"/>
-          </a:solidFill>
-          <a:ln w="12700">
-            <a:solidFill>
-              <a:schemeClr val="bg2"/>
-            </a:solidFill>
-            <a:prstDash val="solid"/>
-          </a:ln>
-        </p:spPr>
-      </p:sp>
-      <p:sp>
-        <p:nvSpPr>
-          <p:cNvPr id="29" name="Shape 22"/>
-          <p:cNvSpPr/>
-          <p:nvPr/>
-        </p:nvSpPr>
-        <p:spPr>
-          <a:xfrm>
-            <a:off x="6400800" y="4572000"/>
-            <a:ext cx="502920" cy="502920"/>
-          </a:xfrm>
-          <a:prstGeom prst="ellipse">
-            <a:avLst/>
-          </a:prstGeom>
-          <a:solidFill>
-            <a:schemeClr val="accent1"/>
-          </a:solidFill>
-          <a:ln w="12700">
-            <a:solidFill>
-              <a:schemeClr val="accent1"/>
-            </a:solidFill>
-            <a:prstDash val="solid"/>
-          </a:ln>
-        </p:spPr>
-      </p:sp>
-      <p:pic>
-        <p:nvPicPr>
-          <p:cNvPr id="30" name="Image 5" descr="preencoded.png">    </p:cNvPr>
-          <p:cNvPicPr>
-            <a:picLocks noChangeAspect="1"/>
-          </p:cNvPicPr>
-          <p:nvPr/>
-        </p:nvPicPr>
-        <p:blipFill>
-          <a:blip r:embed="rId6"/>
-          <a:stretch>
-            <a:fillRect/>
-          </a:stretch>
-        </p:blipFill>
-        <p:spPr>
-          <a:xfrm>
-            <a:off x="6521501" y="4692701"/>
-            <a:ext cx="261518" cy="261518"/>
-          </a:xfrm>
-          <a:prstGeom prst="rect">
-            <a:avLst/>
-          </a:prstGeom>
-        </p:spPr>
-      </p:pic>
-      <p:sp>
-        <p:nvSpPr>
-          <p:cNvPr id="31" name="Text 23"/>
-          <p:cNvSpPr txBox="1"/>
-          <p:nvPr/>
-        </p:nvSpPr>
-        <p:spPr>
-          <a:xfrm>
-            <a:off x="7086600" y="4507992"/>
-            <a:ext cx="4343400" cy="411480"/>
-          </a:xfrm>
-          <a:prstGeom prst="rect">
-            <a:avLst/>
-          </a:prstGeom>
-          <a:noFill/>
-          <a:ln/>
-        </p:spPr>
-        <p:txBody>
-          <a:bodyPr wrap="square" lIns="0" tIns="0" rIns="0" bIns="0" rtlCol="0" anchor="ctr"/>
-          <a:lstStyle/>
-          <a:p>
-            <a:pPr indent="0" marL="0">
-              <a:buNone/>
-            </a:pPr>
-            <a:r>
-              <a:rPr lang="en-US" sz="1600" b="1" dirty="0">
-                <a:solidFill>
-                  <a:schemeClr val="tx1"/>
-                </a:solidFill>
-              </a:rPr>
-              <a:t>Adoção pelos operadores</a:t>
-            </a:r>
-            <a:endParaRPr lang="en-US" sz="1600" dirty="0"/>
-          </a:p>
-        </p:txBody>
-      </p:sp>
-      <p:sp>
-        <p:nvSpPr>
-          <p:cNvPr id="32" name="Text 24"/>
-          <p:cNvSpPr txBox="1"/>
-          <p:nvPr/>
-        </p:nvSpPr>
-        <p:spPr>
-          <a:xfrm>
-            <a:off x="7086600" y="4910328"/>
-            <a:ext cx="4343400" cy="640080"/>
-          </a:xfrm>
-          <a:prstGeom prst="rect">
-            <a:avLst/>
-          </a:prstGeom>
-          <a:noFill/>
-          <a:ln/>
-        </p:spPr>
-        <p:txBody>
-          <a:bodyPr wrap="square" lIns="0" tIns="0" rIns="0" bIns="0" rtlCol="0" anchor="t"/>
-          <a:lstStyle/>
-          <a:p>
-            <a:pPr indent="0" marL="0">
-              <a:buNone/>
-            </a:pPr>
-            <a:r>
-              <a:rPr lang="en-US" sz="1300" dirty="0">
-                <a:solidFill>
-                  <a:schemeClr val="accent6"/>
-                </a:solidFill>
-              </a:rPr>
-              <a:t>Piloto com operadores-chave e treinamento de 30 min</a:t>
-            </a:r>
-            <a:endParaRPr lang="en-US" sz="1300" dirty="0"/>
+              <a:rPr lang="en-US" sz="1500" dirty="0">
+                <a:solidFill>
+                  <a:schemeClr val="tx2"/>
+                </a:solidFill>
+              </a:rPr>
+              <a:t>fotos e medidas das estações, média de itens por caixa, acesso à API do BHT e às tabelas de pedido no Sybase, e definição da linguagem do Serviço PTL.</a:t>
+            </a:r>
+            <a:endParaRPr lang="en-US" sz="1500" dirty="0"/>
           </a:p>
         </p:txBody>
       </p:sp>
@@ -9571,46 +8797,49 @@
                   <a:schemeClr val="tx1"/>
                 </a:solidFill>
               </a:rPr>
-              <a:t>Demonstração: a estação 05 em 3D, com o fluxo completo</a:t>
+              <a:t>Riscos conhecidos já têm mitigação no desenho</a:t>
             </a:r>
             <a:endParaRPr lang="en-US" sz="2600" dirty="0"/>
           </a:p>
         </p:txBody>
       </p:sp>
-      <p:pic>
-        <p:nvPicPr>
-          <p:cNvPr id="3" name="Image 0" descr="/home/claude/ptl-projeto/diagramas/simulador_3d.png">    </p:cNvPr>
-          <p:cNvPicPr>
-            <a:picLocks noChangeAspect="1"/>
-          </p:cNvPicPr>
-          <p:nvPr/>
-        </p:nvPicPr>
-        <p:blipFill>
-          <a:blip r:embed="rId1"/>
-          <a:stretch>
-            <a:fillRect/>
-          </a:stretch>
-        </p:blipFill>
-        <p:spPr>
-          <a:xfrm>
-            <a:off x="457200" y="1188720"/>
-            <a:ext cx="7863840" cy="4423410"/>
-          </a:xfrm>
-          <a:prstGeom prst="rect">
-            <a:avLst/>
-          </a:prstGeom>
-        </p:spPr>
-      </p:pic>
-      <p:sp>
-        <p:nvSpPr>
-          <p:cNvPr id="4" name="Shape 1"/>
+      <p:sp>
+        <p:nvSpPr>
+          <p:cNvPr id="3" name="Shape 1"/>
           <p:cNvSpPr/>
           <p:nvPr/>
         </p:nvSpPr>
         <p:spPr>
           <a:xfrm>
-            <a:off x="8595360" y="1280160"/>
-            <a:ext cx="548640" cy="548640"/>
+            <a:off x="548640" y="1325880"/>
+            <a:ext cx="5440680" cy="1325880"/>
+          </a:xfrm>
+          <a:prstGeom prst="roundRect">
+            <a:avLst>
+              <a:gd name="adj" fmla="val 5517"/>
+            </a:avLst>
+          </a:prstGeom>
+          <a:solidFill>
+            <a:schemeClr val="bg2"/>
+          </a:solidFill>
+          <a:ln w="12700">
+            <a:solidFill>
+              <a:schemeClr val="bg2"/>
+            </a:solidFill>
+            <a:prstDash val="solid"/>
+          </a:ln>
+        </p:spPr>
+      </p:sp>
+      <p:sp>
+        <p:nvSpPr>
+          <p:cNvPr id="4" name="Shape 2"/>
+          <p:cNvSpPr/>
+          <p:nvPr/>
+        </p:nvSpPr>
+        <p:spPr>
+          <a:xfrm>
+            <a:off x="777240" y="1554480"/>
+            <a:ext cx="502920" cy="502920"/>
           </a:xfrm>
           <a:prstGeom prst="ellipse">
             <a:avLst/>
@@ -9628,7 +8857,155 @@
       </p:sp>
       <p:pic>
         <p:nvPicPr>
-          <p:cNvPr id="5" name="Image 1" descr="preencoded.png">    </p:cNvPr>
+          <p:cNvPr id="5" name="Image 0" descr="preencoded.png">    </p:cNvPr>
+          <p:cNvPicPr>
+            <a:picLocks noChangeAspect="1"/>
+          </p:cNvPicPr>
+          <p:nvPr/>
+        </p:nvPicPr>
+        <p:blipFill>
+          <a:blip r:embed="rId1"/>
+          <a:stretch>
+            <a:fillRect/>
+          </a:stretch>
+        </p:blipFill>
+        <p:spPr>
+          <a:xfrm>
+            <a:off x="897941" y="1675181"/>
+            <a:ext cx="261518" cy="261518"/>
+          </a:xfrm>
+          <a:prstGeom prst="rect">
+            <a:avLst/>
+          </a:prstGeom>
+        </p:spPr>
+      </p:pic>
+      <p:sp>
+        <p:nvSpPr>
+          <p:cNvPr id="6" name="Text 3"/>
+          <p:cNvSpPr txBox="1"/>
+          <p:nvPr/>
+        </p:nvSpPr>
+        <p:spPr>
+          <a:xfrm>
+            <a:off x="1463040" y="1490472"/>
+            <a:ext cx="4343400" cy="411480"/>
+          </a:xfrm>
+          <a:prstGeom prst="rect">
+            <a:avLst/>
+          </a:prstGeom>
+          <a:noFill/>
+          <a:ln/>
+        </p:spPr>
+        <p:txBody>
+          <a:bodyPr wrap="square" lIns="0" tIns="0" rIns="0" bIns="0" rtlCol="0" anchor="ctr"/>
+          <a:lstStyle/>
+          <a:p>
+            <a:pPr indent="0" marL="0">
+              <a:buNone/>
+            </a:pPr>
+            <a:r>
+              <a:rPr lang="en-US" sz="1600" b="1" dirty="0">
+                <a:solidFill>
+                  <a:schemeClr val="tx1"/>
+                </a:solidFill>
+              </a:rPr>
+              <a:t>Dados da caixa na API do BHT</a:t>
+            </a:r>
+            <a:endParaRPr lang="en-US" sz="1600" dirty="0"/>
+          </a:p>
+        </p:txBody>
+      </p:sp>
+      <p:sp>
+        <p:nvSpPr>
+          <p:cNvPr id="7" name="Text 4"/>
+          <p:cNvSpPr txBox="1"/>
+          <p:nvPr/>
+        </p:nvSpPr>
+        <p:spPr>
+          <a:xfrm>
+            <a:off x="1463040" y="1892808"/>
+            <a:ext cx="4343400" cy="640080"/>
+          </a:xfrm>
+          <a:prstGeom prst="rect">
+            <a:avLst/>
+          </a:prstGeom>
+          <a:noFill/>
+          <a:ln/>
+        </p:spPr>
+        <p:txBody>
+          <a:bodyPr wrap="square" lIns="0" tIns="0" rIns="0" bIns="0" rtlCol="0" anchor="t"/>
+          <a:lstStyle/>
+          <a:p>
+            <a:pPr indent="0" marL="0">
+              <a:buNone/>
+            </a:pPr>
+            <a:r>
+              <a:rPr lang="en-US" sz="1300" dirty="0">
+                <a:solidFill>
+                  <a:schemeClr val="accent6"/>
+                </a:solidFill>
+              </a:rPr>
+              <a:t>Validar no protótipo; alternativa por views no Sybase</a:t>
+            </a:r>
+            <a:endParaRPr lang="en-US" sz="1300" dirty="0"/>
+          </a:p>
+        </p:txBody>
+      </p:sp>
+      <p:sp>
+        <p:nvSpPr>
+          <p:cNvPr id="8" name="Shape 5"/>
+          <p:cNvSpPr/>
+          <p:nvPr/>
+        </p:nvSpPr>
+        <p:spPr>
+          <a:xfrm>
+            <a:off x="6172200" y="1325880"/>
+            <a:ext cx="5440680" cy="1325880"/>
+          </a:xfrm>
+          <a:prstGeom prst="roundRect">
+            <a:avLst>
+              <a:gd name="adj" fmla="val 5517"/>
+            </a:avLst>
+          </a:prstGeom>
+          <a:solidFill>
+            <a:schemeClr val="bg2"/>
+          </a:solidFill>
+          <a:ln w="12700">
+            <a:solidFill>
+              <a:schemeClr val="bg2"/>
+            </a:solidFill>
+            <a:prstDash val="solid"/>
+          </a:ln>
+        </p:spPr>
+      </p:sp>
+      <p:sp>
+        <p:nvSpPr>
+          <p:cNvPr id="9" name="Shape 6"/>
+          <p:cNvSpPr/>
+          <p:nvPr/>
+        </p:nvSpPr>
+        <p:spPr>
+          <a:xfrm>
+            <a:off x="6400800" y="1554480"/>
+            <a:ext cx="502920" cy="502920"/>
+          </a:xfrm>
+          <a:prstGeom prst="ellipse">
+            <a:avLst/>
+          </a:prstGeom>
+          <a:solidFill>
+            <a:schemeClr val="accent1"/>
+          </a:solidFill>
+          <a:ln w="12700">
+            <a:solidFill>
+              <a:schemeClr val="accent1"/>
+            </a:solidFill>
+            <a:prstDash val="solid"/>
+          </a:ln>
+        </p:spPr>
+      </p:sp>
+      <p:pic>
+        <p:nvPicPr>
+          <p:cNvPr id="10" name="Image 1" descr="preencoded.png">    </p:cNvPr>
           <p:cNvPicPr>
             <a:picLocks noChangeAspect="1"/>
           </p:cNvPicPr>
@@ -9642,8 +9019,8 @@
         </p:blipFill>
         <p:spPr>
           <a:xfrm>
-            <a:off x="8727034" y="1411834"/>
-            <a:ext cx="285293" cy="285293"/>
+            <a:off x="6521501" y="1675181"/>
+            <a:ext cx="261518" cy="261518"/>
           </a:xfrm>
           <a:prstGeom prst="rect">
             <a:avLst/>
@@ -9652,14 +9029,14 @@
       </p:pic>
       <p:sp>
         <p:nvSpPr>
-          <p:cNvPr id="6" name="Text 2"/>
+          <p:cNvPr id="11" name="Text 7"/>
           <p:cNvSpPr txBox="1"/>
           <p:nvPr/>
         </p:nvSpPr>
         <p:spPr>
           <a:xfrm>
-            <a:off x="9235440" y="1325880"/>
-            <a:ext cx="2377440" cy="457200"/>
+            <a:off x="7086600" y="1490472"/>
+            <a:ext cx="4343400" cy="411480"/>
           </a:xfrm>
           <a:prstGeom prst="rect">
             <a:avLst/>
@@ -9680,7 +9057,7 @@
                   <a:schemeClr val="tx1"/>
                 </a:solidFill>
               </a:rPr>
-              <a:t>Roteiro (≈ 5 min)</a:t>
+              <a:t>Manutenção alta (experiência anterior)</a:t>
             </a:r>
             <a:endParaRPr lang="en-US" sz="1600" dirty="0"/>
           </a:p>
@@ -9688,14 +9065,14 @@
       </p:sp>
       <p:sp>
         <p:nvSpPr>
-          <p:cNvPr id="7" name="Text 3"/>
+          <p:cNvPr id="12" name="Text 8"/>
           <p:cNvSpPr txBox="1"/>
           <p:nvPr/>
         </p:nvSpPr>
         <p:spPr>
           <a:xfrm>
-            <a:off x="8595360" y="2011680"/>
-            <a:ext cx="3108960" cy="3840480"/>
+            <a:off x="7086600" y="1892808"/>
+            <a:ext cx="4343400" cy="640080"/>
           </a:xfrm>
           <a:prstGeom prst="rect">
             <a:avLst/>
@@ -9704,121 +9081,613 @@
           <a:ln/>
         </p:spPr>
         <p:txBody>
-          <a:bodyPr wrap="square" rtlCol="0" anchor="t"/>
-          <a:lstStyle/>
-          <a:p>
-            <a:pPr marL="342900" indent="-342900">
-              <a:spcAft>
-                <a:spcPts val="800"/>
-              </a:spcAft>
-              <a:buSzPct val="100000"/>
-              <a:buFont typeface="+mj-lt"/>
-              <a:buAutoNum type="arabicPeriod" startAt="1"/>
-            </a:pPr>
-            <a:r>
-              <a:rPr lang="en-US" sz="1400" dirty="0">
-                <a:solidFill>
-                  <a:schemeClr val="tx2"/>
-                </a:solidFill>
-              </a:rPr>
-              <a:t>Caixa chega pela esteira</a:t>
-            </a:r>
-            <a:endParaRPr lang="en-US" sz="1400" dirty="0"/>
-          </a:p>
-          <a:p>
-            <a:pPr marL="342900" indent="-342900">
-              <a:spcAft>
-                <a:spcPts val="800"/>
-              </a:spcAft>
-              <a:buSzPct val="100000"/>
-              <a:buFont typeface="+mj-lt"/>
-              <a:buAutoNum type="arabicPeriod" startAt="1"/>
-            </a:pPr>
-            <a:r>
-              <a:rPr lang="en-US" sz="1400" dirty="0">
-                <a:solidFill>
-                  <a:schemeClr val="tx2"/>
-                </a:solidFill>
-              </a:rPr>
-              <a:t>Leitura no coletor virtual (ou modo RFID)</a:t>
-            </a:r>
-            <a:endParaRPr lang="en-US" sz="1400" dirty="0"/>
-          </a:p>
-          <a:p>
-            <a:pPr marL="342900" indent="-342900">
-              <a:spcAft>
-                <a:spcPts val="800"/>
-              </a:spcAft>
-              <a:buSzPct val="100000"/>
-              <a:buFont typeface="+mj-lt"/>
-              <a:buAutoNum type="arabicPeriod" startAt="1"/>
-            </a:pPr>
-            <a:r>
-              <a:rPr lang="en-US" sz="1400" dirty="0">
-                <a:solidFill>
-                  <a:schemeClr val="tx2"/>
-                </a:solidFill>
-              </a:rPr>
-              <a:t>Frente e fundo acendem com os endereços reais</a:t>
-            </a:r>
-            <a:endParaRPr lang="en-US" sz="1400" dirty="0"/>
-          </a:p>
-          <a:p>
-            <a:pPr marL="342900" indent="-342900">
-              <a:spcAft>
-                <a:spcPts val="800"/>
-              </a:spcAft>
-              <a:buSzPct val="100000"/>
-              <a:buFont typeface="+mj-lt"/>
-              <a:buAutoNum type="arabicPeriod" startAt="1"/>
-            </a:pPr>
-            <a:r>
-              <a:rPr lang="en-US" sz="1400" dirty="0">
-                <a:solidFill>
-                  <a:schemeClr val="tx2"/>
-                </a:solidFill>
-              </a:rPr>
-              <a:t>Confirmação nos botões; zonas avançam</a:t>
-            </a:r>
-            <a:endParaRPr lang="en-US" sz="1400" dirty="0"/>
-          </a:p>
-          <a:p>
-            <a:pPr marL="342900" indent="-342900">
-              <a:spcAft>
-                <a:spcPts val="800"/>
-              </a:spcAft>
-              <a:buSzPct val="100000"/>
-              <a:buFont typeface="+mj-lt"/>
-              <a:buAutoNum type="arabicPeriod" startAt="1"/>
-            </a:pPr>
-            <a:r>
-              <a:rPr lang="en-US" sz="1400" dirty="0">
-                <a:solidFill>
-                  <a:schemeClr val="tx2"/>
-                </a:solidFill>
-              </a:rPr>
-              <a:t>Nova leitura fecha a caixa</a:t>
-            </a:r>
-            <a:endParaRPr lang="en-US" sz="1400" dirty="0"/>
-          </a:p>
-          <a:p>
-            <a:pPr marL="342900" indent="-342900">
-              <a:spcAft>
-                <a:spcPts val="800"/>
-              </a:spcAft>
-              <a:buSzPct val="100000"/>
-              <a:buFont typeface="+mj-lt"/>
-              <a:buAutoNum type="arabicPeriod" startAt="1"/>
-            </a:pPr>
-            <a:r>
-              <a:rPr lang="en-US" sz="1400" dirty="0">
-                <a:solidFill>
-                  <a:schemeClr val="tx2"/>
-                </a:solidFill>
-              </a:rPr>
-              <a:t>Painel mostra tempo e produtividade</a:t>
-            </a:r>
-            <a:endParaRPr lang="en-US" sz="1400" dirty="0"/>
+          <a:bodyPr wrap="square" lIns="0" tIns="0" rIns="0" bIns="0" rtlCol="0" anchor="t"/>
+          <a:lstStyle/>
+          <a:p>
+            <a:pPr indent="0" marL="0">
+              <a:buNone/>
+            </a:pPr>
+            <a:r>
+              <a:rPr lang="en-US" sz="1300" dirty="0">
+                <a:solidFill>
+                  <a:schemeClr val="accent6"/>
+                </a:solidFill>
+              </a:rPr>
+              <a:t>RJ45 em todos os trechos, módulos de troca rápida, auto-teste diário</a:t>
+            </a:r>
+            <a:endParaRPr lang="en-US" sz="1300" dirty="0"/>
+          </a:p>
+        </p:txBody>
+      </p:sp>
+      <p:sp>
+        <p:nvSpPr>
+          <p:cNvPr id="13" name="Shape 9"/>
+          <p:cNvSpPr/>
+          <p:nvPr/>
+        </p:nvSpPr>
+        <p:spPr>
+          <a:xfrm>
+            <a:off x="548640" y="2834640"/>
+            <a:ext cx="5440680" cy="1325880"/>
+          </a:xfrm>
+          <a:prstGeom prst="roundRect">
+            <a:avLst>
+              <a:gd name="adj" fmla="val 5517"/>
+            </a:avLst>
+          </a:prstGeom>
+          <a:solidFill>
+            <a:schemeClr val="bg2"/>
+          </a:solidFill>
+          <a:ln w="12700">
+            <a:solidFill>
+              <a:schemeClr val="bg2"/>
+            </a:solidFill>
+            <a:prstDash val="solid"/>
+          </a:ln>
+        </p:spPr>
+      </p:sp>
+      <p:sp>
+        <p:nvSpPr>
+          <p:cNvPr id="14" name="Shape 10"/>
+          <p:cNvSpPr/>
+          <p:nvPr/>
+        </p:nvSpPr>
+        <p:spPr>
+          <a:xfrm>
+            <a:off x="777240" y="3063240"/>
+            <a:ext cx="502920" cy="502920"/>
+          </a:xfrm>
+          <a:prstGeom prst="ellipse">
+            <a:avLst/>
+          </a:prstGeom>
+          <a:solidFill>
+            <a:schemeClr val="accent1"/>
+          </a:solidFill>
+          <a:ln w="12700">
+            <a:solidFill>
+              <a:schemeClr val="accent1"/>
+            </a:solidFill>
+            <a:prstDash val="solid"/>
+          </a:ln>
+        </p:spPr>
+      </p:sp>
+      <p:pic>
+        <p:nvPicPr>
+          <p:cNvPr id="15" name="Image 2" descr="preencoded.png">    </p:cNvPr>
+          <p:cNvPicPr>
+            <a:picLocks noChangeAspect="1"/>
+          </p:cNvPicPr>
+          <p:nvPr/>
+        </p:nvPicPr>
+        <p:blipFill>
+          <a:blip r:embed="rId3"/>
+          <a:stretch>
+            <a:fillRect/>
+          </a:stretch>
+        </p:blipFill>
+        <p:spPr>
+          <a:xfrm>
+            <a:off x="897941" y="3183941"/>
+            <a:ext cx="261518" cy="261518"/>
+          </a:xfrm>
+          <a:prstGeom prst="rect">
+            <a:avLst/>
+          </a:prstGeom>
+        </p:spPr>
+      </p:pic>
+      <p:sp>
+        <p:nvSpPr>
+          <p:cNvPr id="16" name="Text 11"/>
+          <p:cNvSpPr txBox="1"/>
+          <p:nvPr/>
+        </p:nvSpPr>
+        <p:spPr>
+          <a:xfrm>
+            <a:off x="1463040" y="2999232"/>
+            <a:ext cx="4343400" cy="411480"/>
+          </a:xfrm>
+          <a:prstGeom prst="rect">
+            <a:avLst/>
+          </a:prstGeom>
+          <a:noFill/>
+          <a:ln/>
+        </p:spPr>
+        <p:txBody>
+          <a:bodyPr wrap="square" lIns="0" tIns="0" rIns="0" bIns="0" rtlCol="0" anchor="ctr"/>
+          <a:lstStyle/>
+          <a:p>
+            <a:pPr indent="0" marL="0">
+              <a:buNone/>
+            </a:pPr>
+            <a:r>
+              <a:rPr lang="en-US" sz="1600" b="1" dirty="0">
+                <a:solidFill>
+                  <a:schemeClr val="tx1"/>
+                </a:solidFill>
+              </a:rPr>
+              <a:t>Poeira e calor</a:t>
+            </a:r>
+            <a:endParaRPr lang="en-US" sz="1600" dirty="0"/>
+          </a:p>
+        </p:txBody>
+      </p:sp>
+      <p:sp>
+        <p:nvSpPr>
+          <p:cNvPr id="17" name="Text 12"/>
+          <p:cNvSpPr txBox="1"/>
+          <p:nvPr/>
+        </p:nvSpPr>
+        <p:spPr>
+          <a:xfrm>
+            <a:off x="1463040" y="3401568"/>
+            <a:ext cx="4343400" cy="640080"/>
+          </a:xfrm>
+          <a:prstGeom prst="rect">
+            <a:avLst/>
+          </a:prstGeom>
+          <a:noFill/>
+          <a:ln/>
+        </p:spPr>
+        <p:txBody>
+          <a:bodyPr wrap="square" lIns="0" tIns="0" rIns="0" bIns="0" rtlCol="0" anchor="t"/>
+          <a:lstStyle/>
+          <a:p>
+            <a:pPr indent="0" marL="0">
+              <a:buNone/>
+            </a:pPr>
+            <a:r>
+              <a:rPr lang="en-US" sz="1300" dirty="0">
+                <a:solidFill>
+                  <a:schemeClr val="accent6"/>
+                </a:solidFill>
+              </a:rPr>
+              <a:t>Gabinete com filtro e cooler; componentes para 0-50 °C</a:t>
+            </a:r>
+            <a:endParaRPr lang="en-US" sz="1300" dirty="0"/>
+          </a:p>
+        </p:txBody>
+      </p:sp>
+      <p:sp>
+        <p:nvSpPr>
+          <p:cNvPr id="18" name="Shape 13"/>
+          <p:cNvSpPr/>
+          <p:nvPr/>
+        </p:nvSpPr>
+        <p:spPr>
+          <a:xfrm>
+            <a:off x="6172200" y="2834640"/>
+            <a:ext cx="5440680" cy="1325880"/>
+          </a:xfrm>
+          <a:prstGeom prst="roundRect">
+            <a:avLst>
+              <a:gd name="adj" fmla="val 5517"/>
+            </a:avLst>
+          </a:prstGeom>
+          <a:solidFill>
+            <a:schemeClr val="bg2"/>
+          </a:solidFill>
+          <a:ln w="12700">
+            <a:solidFill>
+              <a:schemeClr val="bg2"/>
+            </a:solidFill>
+            <a:prstDash val="solid"/>
+          </a:ln>
+        </p:spPr>
+      </p:sp>
+      <p:sp>
+        <p:nvSpPr>
+          <p:cNvPr id="19" name="Shape 14"/>
+          <p:cNvSpPr/>
+          <p:nvPr/>
+        </p:nvSpPr>
+        <p:spPr>
+          <a:xfrm>
+            <a:off x="6400800" y="3063240"/>
+            <a:ext cx="502920" cy="502920"/>
+          </a:xfrm>
+          <a:prstGeom prst="ellipse">
+            <a:avLst/>
+          </a:prstGeom>
+          <a:solidFill>
+            <a:schemeClr val="accent1"/>
+          </a:solidFill>
+          <a:ln w="12700">
+            <a:solidFill>
+              <a:schemeClr val="accent1"/>
+            </a:solidFill>
+            <a:prstDash val="solid"/>
+          </a:ln>
+        </p:spPr>
+      </p:sp>
+      <p:pic>
+        <p:nvPicPr>
+          <p:cNvPr id="20" name="Image 3" descr="preencoded.png">    </p:cNvPr>
+          <p:cNvPicPr>
+            <a:picLocks noChangeAspect="1"/>
+          </p:cNvPicPr>
+          <p:nvPr/>
+        </p:nvPicPr>
+        <p:blipFill>
+          <a:blip r:embed="rId4"/>
+          <a:stretch>
+            <a:fillRect/>
+          </a:stretch>
+        </p:blipFill>
+        <p:spPr>
+          <a:xfrm>
+            <a:off x="6521501" y="3183941"/>
+            <a:ext cx="261518" cy="261518"/>
+          </a:xfrm>
+          <a:prstGeom prst="rect">
+            <a:avLst/>
+          </a:prstGeom>
+        </p:spPr>
+      </p:pic>
+      <p:sp>
+        <p:nvSpPr>
+          <p:cNvPr id="21" name="Text 15"/>
+          <p:cNvSpPr txBox="1"/>
+          <p:nvPr/>
+        </p:nvSpPr>
+        <p:spPr>
+          <a:xfrm>
+            <a:off x="7086600" y="2999232"/>
+            <a:ext cx="4343400" cy="411480"/>
+          </a:xfrm>
+          <a:prstGeom prst="rect">
+            <a:avLst/>
+          </a:prstGeom>
+          <a:noFill/>
+          <a:ln/>
+        </p:spPr>
+        <p:txBody>
+          <a:bodyPr wrap="square" lIns="0" tIns="0" rIns="0" bIns="0" rtlCol="0" anchor="ctr"/>
+          <a:lstStyle/>
+          <a:p>
+            <a:pPr indent="0" marL="0">
+              <a:buNone/>
+            </a:pPr>
+            <a:r>
+              <a:rPr lang="en-US" sz="1600" b="1" dirty="0">
+                <a:solidFill>
+                  <a:schemeClr val="tx1"/>
+                </a:solidFill>
+              </a:rPr>
+              <a:t>Itens por caixa fora do esperado</a:t>
+            </a:r>
+            <a:endParaRPr lang="en-US" sz="1600" dirty="0"/>
+          </a:p>
+        </p:txBody>
+      </p:sp>
+      <p:sp>
+        <p:nvSpPr>
+          <p:cNvPr id="22" name="Text 16"/>
+          <p:cNvSpPr txBox="1"/>
+          <p:nvPr/>
+        </p:nvSpPr>
+        <p:spPr>
+          <a:xfrm>
+            <a:off x="7086600" y="3401568"/>
+            <a:ext cx="4343400" cy="640080"/>
+          </a:xfrm>
+          <a:prstGeom prst="rect">
+            <a:avLst/>
+          </a:prstGeom>
+          <a:noFill/>
+          <a:ln/>
+        </p:spPr>
+        <p:txBody>
+          <a:bodyPr wrap="square" lIns="0" tIns="0" rIns="0" bIns="0" rtlCol="0" anchor="t"/>
+          <a:lstStyle/>
+          <a:p>
+            <a:pPr indent="0" marL="0">
+              <a:buNone/>
+            </a:pPr>
+            <a:r>
+              <a:rPr lang="en-US" sz="1300" dirty="0">
+                <a:solidFill>
+                  <a:schemeClr val="accent6"/>
+                </a:solidFill>
+              </a:rPr>
+              <a:t>Medir no piloto e ajustar o tamanho das zonas</a:t>
+            </a:r>
+            <a:endParaRPr lang="en-US" sz="1300" dirty="0"/>
+          </a:p>
+        </p:txBody>
+      </p:sp>
+      <p:sp>
+        <p:nvSpPr>
+          <p:cNvPr id="23" name="Shape 17"/>
+          <p:cNvSpPr/>
+          <p:nvPr/>
+        </p:nvSpPr>
+        <p:spPr>
+          <a:xfrm>
+            <a:off x="548640" y="4343400"/>
+            <a:ext cx="5440680" cy="1325880"/>
+          </a:xfrm>
+          <a:prstGeom prst="roundRect">
+            <a:avLst>
+              <a:gd name="adj" fmla="val 5517"/>
+            </a:avLst>
+          </a:prstGeom>
+          <a:solidFill>
+            <a:schemeClr val="bg2"/>
+          </a:solidFill>
+          <a:ln w="12700">
+            <a:solidFill>
+              <a:schemeClr val="bg2"/>
+            </a:solidFill>
+            <a:prstDash val="solid"/>
+          </a:ln>
+        </p:spPr>
+      </p:sp>
+      <p:sp>
+        <p:nvSpPr>
+          <p:cNvPr id="24" name="Shape 18"/>
+          <p:cNvSpPr/>
+          <p:nvPr/>
+        </p:nvSpPr>
+        <p:spPr>
+          <a:xfrm>
+            <a:off x="777240" y="4572000"/>
+            <a:ext cx="502920" cy="502920"/>
+          </a:xfrm>
+          <a:prstGeom prst="ellipse">
+            <a:avLst/>
+          </a:prstGeom>
+          <a:solidFill>
+            <a:schemeClr val="accent1"/>
+          </a:solidFill>
+          <a:ln w="12700">
+            <a:solidFill>
+              <a:schemeClr val="accent1"/>
+            </a:solidFill>
+            <a:prstDash val="solid"/>
+          </a:ln>
+        </p:spPr>
+      </p:sp>
+      <p:pic>
+        <p:nvPicPr>
+          <p:cNvPr id="25" name="Image 4" descr="preencoded.png">    </p:cNvPr>
+          <p:cNvPicPr>
+            <a:picLocks noChangeAspect="1"/>
+          </p:cNvPicPr>
+          <p:nvPr/>
+        </p:nvPicPr>
+        <p:blipFill>
+          <a:blip r:embed="rId5"/>
+          <a:stretch>
+            <a:fillRect/>
+          </a:stretch>
+        </p:blipFill>
+        <p:spPr>
+          <a:xfrm>
+            <a:off x="897941" y="4692701"/>
+            <a:ext cx="261518" cy="261518"/>
+          </a:xfrm>
+          <a:prstGeom prst="rect">
+            <a:avLst/>
+          </a:prstGeom>
+        </p:spPr>
+      </p:pic>
+      <p:sp>
+        <p:nvSpPr>
+          <p:cNvPr id="26" name="Text 19"/>
+          <p:cNvSpPr txBox="1"/>
+          <p:nvPr/>
+        </p:nvSpPr>
+        <p:spPr>
+          <a:xfrm>
+            <a:off x="1463040" y="4507992"/>
+            <a:ext cx="4343400" cy="411480"/>
+          </a:xfrm>
+          <a:prstGeom prst="rect">
+            <a:avLst/>
+          </a:prstGeom>
+          <a:noFill/>
+          <a:ln/>
+        </p:spPr>
+        <p:txBody>
+          <a:bodyPr wrap="square" lIns="0" tIns="0" rIns="0" bIns="0" rtlCol="0" anchor="ctr"/>
+          <a:lstStyle/>
+          <a:p>
+            <a:pPr indent="0" marL="0">
+              <a:buNone/>
+            </a:pPr>
+            <a:r>
+              <a:rPr lang="en-US" sz="1600" b="1" dirty="0">
+                <a:solidFill>
+                  <a:schemeClr val="tx1"/>
+                </a:solidFill>
+              </a:rPr>
+              <a:t>Dependência de um técnico</a:t>
+            </a:r>
+            <a:endParaRPr lang="en-US" sz="1600" dirty="0"/>
+          </a:p>
+        </p:txBody>
+      </p:sp>
+      <p:sp>
+        <p:nvSpPr>
+          <p:cNvPr id="27" name="Text 20"/>
+          <p:cNvSpPr txBox="1"/>
+          <p:nvPr/>
+        </p:nvSpPr>
+        <p:spPr>
+          <a:xfrm>
+            <a:off x="1463040" y="4910328"/>
+            <a:ext cx="4343400" cy="640080"/>
+          </a:xfrm>
+          <a:prstGeom prst="rect">
+            <a:avLst/>
+          </a:prstGeom>
+          <a:noFill/>
+          <a:ln/>
+        </p:spPr>
+        <p:txBody>
+          <a:bodyPr wrap="square" lIns="0" tIns="0" rIns="0" bIns="0" rtlCol="0" anchor="t"/>
+          <a:lstStyle/>
+          <a:p>
+            <a:pPr indent="0" marL="0">
+              <a:buNone/>
+            </a:pPr>
+            <a:r>
+              <a:rPr lang="en-US" sz="1300" dirty="0">
+                <a:solidFill>
+                  <a:schemeClr val="accent6"/>
+                </a:solidFill>
+              </a:rPr>
+              <a:t>Documentação, kits de reserva e opção de placa própria</a:t>
+            </a:r>
+            <a:endParaRPr lang="en-US" sz="1300" dirty="0"/>
+          </a:p>
+        </p:txBody>
+      </p:sp>
+      <p:sp>
+        <p:nvSpPr>
+          <p:cNvPr id="28" name="Shape 21"/>
+          <p:cNvSpPr/>
+          <p:nvPr/>
+        </p:nvSpPr>
+        <p:spPr>
+          <a:xfrm>
+            <a:off x="6172200" y="4343400"/>
+            <a:ext cx="5440680" cy="1325880"/>
+          </a:xfrm>
+          <a:prstGeom prst="roundRect">
+            <a:avLst>
+              <a:gd name="adj" fmla="val 5517"/>
+            </a:avLst>
+          </a:prstGeom>
+          <a:solidFill>
+            <a:schemeClr val="bg2"/>
+          </a:solidFill>
+          <a:ln w="12700">
+            <a:solidFill>
+              <a:schemeClr val="bg2"/>
+            </a:solidFill>
+            <a:prstDash val="solid"/>
+          </a:ln>
+        </p:spPr>
+      </p:sp>
+      <p:sp>
+        <p:nvSpPr>
+          <p:cNvPr id="29" name="Shape 22"/>
+          <p:cNvSpPr/>
+          <p:nvPr/>
+        </p:nvSpPr>
+        <p:spPr>
+          <a:xfrm>
+            <a:off x="6400800" y="4572000"/>
+            <a:ext cx="502920" cy="502920"/>
+          </a:xfrm>
+          <a:prstGeom prst="ellipse">
+            <a:avLst/>
+          </a:prstGeom>
+          <a:solidFill>
+            <a:schemeClr val="accent1"/>
+          </a:solidFill>
+          <a:ln w="12700">
+            <a:solidFill>
+              <a:schemeClr val="accent1"/>
+            </a:solidFill>
+            <a:prstDash val="solid"/>
+          </a:ln>
+        </p:spPr>
+      </p:sp>
+      <p:pic>
+        <p:nvPicPr>
+          <p:cNvPr id="30" name="Image 5" descr="preencoded.png">    </p:cNvPr>
+          <p:cNvPicPr>
+            <a:picLocks noChangeAspect="1"/>
+          </p:cNvPicPr>
+          <p:nvPr/>
+        </p:nvPicPr>
+        <p:blipFill>
+          <a:blip r:embed="rId6"/>
+          <a:stretch>
+            <a:fillRect/>
+          </a:stretch>
+        </p:blipFill>
+        <p:spPr>
+          <a:xfrm>
+            <a:off x="6521501" y="4692701"/>
+            <a:ext cx="261518" cy="261518"/>
+          </a:xfrm>
+          <a:prstGeom prst="rect">
+            <a:avLst/>
+          </a:prstGeom>
+        </p:spPr>
+      </p:pic>
+      <p:sp>
+        <p:nvSpPr>
+          <p:cNvPr id="31" name="Text 23"/>
+          <p:cNvSpPr txBox="1"/>
+          <p:nvPr/>
+        </p:nvSpPr>
+        <p:spPr>
+          <a:xfrm>
+            <a:off x="7086600" y="4507992"/>
+            <a:ext cx="4343400" cy="411480"/>
+          </a:xfrm>
+          <a:prstGeom prst="rect">
+            <a:avLst/>
+          </a:prstGeom>
+          <a:noFill/>
+          <a:ln/>
+        </p:spPr>
+        <p:txBody>
+          <a:bodyPr wrap="square" lIns="0" tIns="0" rIns="0" bIns="0" rtlCol="0" anchor="ctr"/>
+          <a:lstStyle/>
+          <a:p>
+            <a:pPr indent="0" marL="0">
+              <a:buNone/>
+            </a:pPr>
+            <a:r>
+              <a:rPr lang="en-US" sz="1600" b="1" dirty="0">
+                <a:solidFill>
+                  <a:schemeClr val="tx1"/>
+                </a:solidFill>
+              </a:rPr>
+              <a:t>Adoção pelos operadores</a:t>
+            </a:r>
+            <a:endParaRPr lang="en-US" sz="1600" dirty="0"/>
+          </a:p>
+        </p:txBody>
+      </p:sp>
+      <p:sp>
+        <p:nvSpPr>
+          <p:cNvPr id="32" name="Text 24"/>
+          <p:cNvSpPr txBox="1"/>
+          <p:nvPr/>
+        </p:nvSpPr>
+        <p:spPr>
+          <a:xfrm>
+            <a:off x="7086600" y="4910328"/>
+            <a:ext cx="4343400" cy="640080"/>
+          </a:xfrm>
+          <a:prstGeom prst="rect">
+            <a:avLst/>
+          </a:prstGeom>
+          <a:noFill/>
+          <a:ln/>
+        </p:spPr>
+        <p:txBody>
+          <a:bodyPr wrap="square" lIns="0" tIns="0" rIns="0" bIns="0" rtlCol="0" anchor="t"/>
+          <a:lstStyle/>
+          <a:p>
+            <a:pPr indent="0" marL="0">
+              <a:buNone/>
+            </a:pPr>
+            <a:r>
+              <a:rPr lang="en-US" sz="1300" dirty="0">
+                <a:solidFill>
+                  <a:schemeClr val="accent6"/>
+                </a:solidFill>
+              </a:rPr>
+              <a:t>Piloto com operadores-chave e treinamento de 30 min</a:t>
+            </a:r>
+            <a:endParaRPr lang="en-US" sz="1300" dirty="0"/>
           </a:p>
         </p:txBody>
       </p:sp>
@@ -10694,6 +10563,359 @@
         </p:nvSpPr>
         <p:spPr>
           <a:xfrm>
+            <a:off x="548640" y="274320"/>
+            <a:ext cx="11064240" cy="777240"/>
+          </a:xfrm>
+          <a:prstGeom prst="rect">
+            <a:avLst/>
+          </a:prstGeom>
+          <a:noFill/>
+          <a:ln/>
+        </p:spPr>
+        <p:txBody>
+          <a:bodyPr wrap="square" lIns="0" tIns="0" rIns="0" bIns="0" rtlCol="0" anchor="ctr"/>
+          <a:lstStyle/>
+          <a:p>
+            <a:pPr algn="l" indent="0" marL="0">
+              <a:buNone/>
+            </a:pPr>
+            <a:r>
+              <a:rPr lang="en-US" sz="2600" b="1" dirty="0">
+                <a:solidFill>
+                  <a:schemeClr val="tx1"/>
+                </a:solidFill>
+              </a:rPr>
+              <a:t>Demonstração: a estação 05 em 3D, com o fluxo completo</a:t>
+            </a:r>
+            <a:endParaRPr lang="en-US" sz="2600" dirty="0"/>
+          </a:p>
+        </p:txBody>
+      </p:sp>
+      <p:pic>
+        <p:nvPicPr>
+          <p:cNvPr id="3" name="Image 0" descr="/home/claude/ptl-projeto/diagramas/simulador_3d.png">    </p:cNvPr>
+          <p:cNvPicPr>
+            <a:picLocks noChangeAspect="1"/>
+          </p:cNvPicPr>
+          <p:nvPr/>
+        </p:nvPicPr>
+        <p:blipFill>
+          <a:blip r:embed="rId1"/>
+          <a:stretch>
+            <a:fillRect/>
+          </a:stretch>
+        </p:blipFill>
+        <p:spPr>
+          <a:xfrm>
+            <a:off x="457200" y="1188720"/>
+            <a:ext cx="7863840" cy="4423410"/>
+          </a:xfrm>
+          <a:prstGeom prst="rect">
+            <a:avLst/>
+          </a:prstGeom>
+        </p:spPr>
+      </p:pic>
+      <p:sp>
+        <p:nvSpPr>
+          <p:cNvPr id="4" name="Shape 1"/>
+          <p:cNvSpPr/>
+          <p:nvPr/>
+        </p:nvSpPr>
+        <p:spPr>
+          <a:xfrm>
+            <a:off x="8595360" y="1280160"/>
+            <a:ext cx="548640" cy="548640"/>
+          </a:xfrm>
+          <a:prstGeom prst="ellipse">
+            <a:avLst/>
+          </a:prstGeom>
+          <a:solidFill>
+            <a:schemeClr val="accent1"/>
+          </a:solidFill>
+          <a:ln w="12700">
+            <a:solidFill>
+              <a:schemeClr val="accent1"/>
+            </a:solidFill>
+            <a:prstDash val="solid"/>
+          </a:ln>
+        </p:spPr>
+      </p:sp>
+      <p:pic>
+        <p:nvPicPr>
+          <p:cNvPr id="5" name="Image 1" descr="preencoded.png">    </p:cNvPr>
+          <p:cNvPicPr>
+            <a:picLocks noChangeAspect="1"/>
+          </p:cNvPicPr>
+          <p:nvPr/>
+        </p:nvPicPr>
+        <p:blipFill>
+          <a:blip r:embed="rId2"/>
+          <a:stretch>
+            <a:fillRect/>
+          </a:stretch>
+        </p:blipFill>
+        <p:spPr>
+          <a:xfrm>
+            <a:off x="8727034" y="1411834"/>
+            <a:ext cx="285293" cy="285293"/>
+          </a:xfrm>
+          <a:prstGeom prst="rect">
+            <a:avLst/>
+          </a:prstGeom>
+        </p:spPr>
+      </p:pic>
+      <p:sp>
+        <p:nvSpPr>
+          <p:cNvPr id="6" name="Text 2"/>
+          <p:cNvSpPr txBox="1"/>
+          <p:nvPr/>
+        </p:nvSpPr>
+        <p:spPr>
+          <a:xfrm>
+            <a:off x="9235440" y="1325880"/>
+            <a:ext cx="2377440" cy="457200"/>
+          </a:xfrm>
+          <a:prstGeom prst="rect">
+            <a:avLst/>
+          </a:prstGeom>
+          <a:noFill/>
+          <a:ln/>
+        </p:spPr>
+        <p:txBody>
+          <a:bodyPr wrap="square" lIns="0" tIns="0" rIns="0" bIns="0" rtlCol="0" anchor="ctr"/>
+          <a:lstStyle/>
+          <a:p>
+            <a:pPr indent="0" marL="0">
+              <a:buNone/>
+            </a:pPr>
+            <a:r>
+              <a:rPr lang="en-US" sz="1600" b="1" dirty="0">
+                <a:solidFill>
+                  <a:schemeClr val="tx1"/>
+                </a:solidFill>
+              </a:rPr>
+              <a:t>Roteiro (≈ 5 min)</a:t>
+            </a:r>
+            <a:endParaRPr lang="en-US" sz="1600" dirty="0"/>
+          </a:p>
+        </p:txBody>
+      </p:sp>
+      <p:sp>
+        <p:nvSpPr>
+          <p:cNvPr id="7" name="Text 3"/>
+          <p:cNvSpPr txBox="1"/>
+          <p:nvPr/>
+        </p:nvSpPr>
+        <p:spPr>
+          <a:xfrm>
+            <a:off x="8595360" y="2011680"/>
+            <a:ext cx="3108960" cy="3840480"/>
+          </a:xfrm>
+          <a:prstGeom prst="rect">
+            <a:avLst/>
+          </a:prstGeom>
+          <a:noFill/>
+          <a:ln/>
+        </p:spPr>
+        <p:txBody>
+          <a:bodyPr wrap="square" rtlCol="0" anchor="t"/>
+          <a:lstStyle/>
+          <a:p>
+            <a:pPr marL="342900" indent="-342900">
+              <a:spcAft>
+                <a:spcPts val="800"/>
+              </a:spcAft>
+              <a:buSzPct val="100000"/>
+              <a:buFont typeface="+mj-lt"/>
+              <a:buAutoNum type="arabicPeriod" startAt="1"/>
+            </a:pPr>
+            <a:r>
+              <a:rPr lang="en-US" sz="1400" dirty="0">
+                <a:solidFill>
+                  <a:schemeClr val="tx2"/>
+                </a:solidFill>
+              </a:rPr>
+              <a:t>Bacia entra pela transferência</a:t>
+            </a:r>
+            <a:endParaRPr lang="en-US" sz="1400" dirty="0"/>
+          </a:p>
+          <a:p>
+            <a:pPr marL="342900" indent="-342900">
+              <a:spcAft>
+                <a:spcPts val="800"/>
+              </a:spcAft>
+              <a:buSzPct val="100000"/>
+              <a:buFont typeface="+mj-lt"/>
+              <a:buAutoNum type="arabicPeriod" startAt="1"/>
+            </a:pPr>
+            <a:r>
+              <a:rPr lang="en-US" sz="1400" dirty="0">
+                <a:solidFill>
+                  <a:schemeClr val="tx2"/>
+                </a:solidFill>
+              </a:rPr>
+              <a:t>Leitura no coletor virtual (ou modo RFID)</a:t>
+            </a:r>
+            <a:endParaRPr lang="en-US" sz="1400" dirty="0"/>
+          </a:p>
+          <a:p>
+            <a:pPr marL="342900" indent="-342900">
+              <a:spcAft>
+                <a:spcPts val="800"/>
+              </a:spcAft>
+              <a:buSzPct val="100000"/>
+              <a:buFont typeface="+mj-lt"/>
+              <a:buAutoNum type="arabicPeriod" startAt="1"/>
+            </a:pPr>
+            <a:r>
+              <a:rPr lang="en-US" sz="1400" dirty="0">
+                <a:solidFill>
+                  <a:schemeClr val="tx2"/>
+                </a:solidFill>
+              </a:rPr>
+              <a:t>Alto giro e zonas acendem (endereços reais)</a:t>
+            </a:r>
+            <a:endParaRPr lang="en-US" sz="1400" dirty="0"/>
+          </a:p>
+          <a:p>
+            <a:pPr marL="342900" indent="-342900">
+              <a:spcAft>
+                <a:spcPts val="800"/>
+              </a:spcAft>
+              <a:buSzPct val="100000"/>
+              <a:buFont typeface="+mj-lt"/>
+              <a:buAutoNum type="arabicPeriod" startAt="1"/>
+            </a:pPr>
+            <a:r>
+              <a:rPr lang="en-US" sz="1400" dirty="0">
+                <a:solidFill>
+                  <a:schemeClr val="tx2"/>
+                </a:solidFill>
+              </a:rPr>
+              <a:t>Confirmação nos botões; zonas avançam</a:t>
+            </a:r>
+            <a:endParaRPr lang="en-US" sz="1400" dirty="0"/>
+          </a:p>
+          <a:p>
+            <a:pPr marL="342900" indent="-342900">
+              <a:spcAft>
+                <a:spcPts val="800"/>
+              </a:spcAft>
+              <a:buSzPct val="100000"/>
+              <a:buFont typeface="+mj-lt"/>
+              <a:buAutoNum type="arabicPeriod" startAt="1"/>
+            </a:pPr>
+            <a:r>
+              <a:rPr lang="en-US" sz="1400" dirty="0">
+                <a:solidFill>
+                  <a:schemeClr val="tx2"/>
+                </a:solidFill>
+              </a:rPr>
+              <a:t>Nova leitura fecha; bacia volta à esteira</a:t>
+            </a:r>
+            <a:endParaRPr lang="en-US" sz="1400" dirty="0"/>
+          </a:p>
+          <a:p>
+            <a:pPr marL="342900" indent="-342900">
+              <a:spcAft>
+                <a:spcPts val="800"/>
+              </a:spcAft>
+              <a:buSzPct val="100000"/>
+              <a:buFont typeface="+mj-lt"/>
+              <a:buAutoNum type="arabicPeriod" startAt="1"/>
+            </a:pPr>
+            <a:r>
+              <a:rPr lang="en-US" sz="1400" dirty="0">
+                <a:solidFill>
+                  <a:schemeClr val="tx2"/>
+                </a:solidFill>
+              </a:rPr>
+              <a:t>Painel mostra tempo e produtividade</a:t>
+            </a:r>
+            <a:endParaRPr lang="en-US" sz="1400" dirty="0"/>
+          </a:p>
+        </p:txBody>
+      </p:sp>
+      <p:sp>
+        <p:nvSpPr>
+          <p:cNvPr id="25" name="Slide Number Placeholder 0"/>
+          <p:cNvSpPr>
+            <a:spLocks noGrp="1"/>
+          </p:cNvSpPr>
+          <p:nvPr>
+            <p:ph type="sldNum" sz="quarter" idx="4294967295"/>
+          </p:nvPr>
+        </p:nvSpPr>
+        <p:spPr>
+          <a:xfrm>
+            <a:off x="11338560" y="6355080"/>
+            <a:ext cx="548640" cy="274320"/>
+          </a:xfrm>
+          <a:prstGeom prst="rect">
+            <a:avLst/>
+          </a:prstGeom>
+          <a:extLst>
+            <a:ext uri="{C572A759-6A51-4108-AA02-DFA0A04FC94B}">
+              <ma14:wrappingTextBoxFlag xmlns:ma14="http://schemas.microsoft.com/office/mac/drawingml/2011/main" val="0"/>
+            </a:ext>
+          </a:extLst>
+        </p:spPr>
+        <p:txBody>
+          <a:bodyPr/>
+          <a:lstStyle>
+            <a:lvl1pPr>
+              <a:defRPr sz="1000">
+                <a:solidFill>
+                  <a:srgbClr val="8A97AB"/>
+                </a:solidFill>
+              </a:defRPr>
+            </a:lvl1pPr>
+          </a:lstStyle>
+          <a:p>
+            <a:pPr algn="l"/>
+            <a:fld id="{F7021451-1387-4CA6-816F-3879F97B5CBC}" type="slidenum">
+              <a:rPr b="0" lang="en-US"/>
+              <a:t>20</a:t>
+            </a:fld>
+            <a:endParaRPr lang="en-US"/>
+          </a:p>
+        </p:txBody>
+      </p:sp>
+    </p:spTree>
+  </p:cSld>
+  <p:clrMapOvr>
+    <a:masterClrMapping/>
+  </p:clrMapOvr>
+</p:sld>
+</file>
+
+<file path=ppt/slides/slide21.xml><?xml version="1.0" encoding="utf-8"?>
+<p:sld xmlns:a="http://schemas.openxmlformats.org/drawingml/2006/main" xmlns:r="http://schemas.openxmlformats.org/officeDocument/2006/relationships" xmlns:p="http://schemas.openxmlformats.org/presentationml/2006/main">
+  <p:cSld name="Slide 21">
+    <p:spTree>
+      <p:nvGrpSpPr>
+        <p:cNvPr id="1" name=""/>
+        <p:cNvGrpSpPr/>
+        <p:nvPr/>
+      </p:nvGrpSpPr>
+      <p:grpSpPr>
+        <a:xfrm>
+          <a:off x="0" y="0"/>
+          <a:ext cx="0" cy="0"/>
+          <a:chOff x="0" y="0"/>
+          <a:chExt cx="0" cy="0"/>
+        </a:xfrm>
+      </p:grpSpPr>
+      <p:sp>
+        <p:nvSpPr>
+          <p:cNvPr id="2" name="Text 0"/>
+          <p:cNvSpPr/>
+          <p:nvPr>
+            <p:ph idx="100" type="title" hasCustomPrompt="1"/>
+          </p:nvPr>
+        </p:nvSpPr>
+        <p:spPr>
+          <a:xfrm>
             <a:off x="731520" y="2103120"/>
             <a:ext cx="10515600" cy="1463040"/>
           </a:xfrm>
@@ -12173,7 +12395,7 @@
                   <a:schemeClr val="accent6"/>
                 </a:solidFill>
               </a:rPr>
-              <a:t>Com todos apagados, nova leitura fecha a caixa, registra no Sybase e ela segue.</a:t>
+              <a:t>Com todos apagados, nova leitura fecha, registra no Sybase e a bacia volta à esteira.</a:t>
             </a:r>
             <a:endParaRPr lang="en-US" sz="1400" dirty="0"/>
           </a:p>
@@ -14891,7 +15113,7 @@
                   <a:schemeClr val="bg1"/>
                 </a:solidFill>
               </a:rPr>
-              <a:t>A estação: frente de alto giro e fundo de baixo giro</a:t>
+              <a:t>A estação: alto giro na esteira, baixo giro no corredor</a:t>
             </a:r>
             <a:endParaRPr lang="en-US" sz="4000" dirty="0"/>
           </a:p>
@@ -14929,7 +15151,7 @@
                   <a:srgbClr val="C9D3E0"/>
                 </a:solidFill>
               </a:rPr>
-              <a:t>Layout desenhado com os endereços reais da tabela wms_endereco</a:t>
+              <a:t>Layout conforme o desenho da operação, com os endereços reais da tabela wms_endereco</a:t>
             </a:r>
             <a:endParaRPr lang="en-US" sz="1800" dirty="0"/>
           </a:p>

--- a/projeto/entregaveis/Apresentacao_PTL.pptx
+++ b/projeto/entregaveis/Apresentacao_PTL.pptx
@@ -127,7 +127,7 @@
   <p:extLst>
     <p:ext uri="{521415D9-36F7-43E2-AB2F-B90AF26B5E84}">
       <p14:sectionLst xmlns:p14="http://schemas.microsoft.com/office/powerpoint/2010/main">
-        <p14:section name="Abertura" id="{b2d9b1f1-22fa-bde3-f8b2-0adac9096441}">
+        <p14:section name="Abertura" id="{21b622cd-559b-16c0-3bc3-0f1ea520c719}">
           <p14:sldIdLst>
             <p14:sldId id="256"/>
             <p14:sldId id="257"/>
@@ -135,7 +135,7 @@
             <p14:sldId id="259"/>
           </p14:sldIdLst>
         </p14:section>
-        <p14:section name="Arquiteturas" id="{4645df77-651a-c04a-d833-d6c909fd6b99}">
+        <p14:section name="Arquiteturas" id="{8fe82bec-6a1a-ebf0-ed7f-99891ddcd189}">
           <p14:sldIdLst>
             <p14:sldId id="260"/>
             <p14:sldId id="261"/>
@@ -143,7 +143,7 @@
             <p14:sldId id="263"/>
           </p14:sldIdLst>
         </p14:section>
-        <p14:section name="A estação" id="{64617fa1-d537-cf73-62b1-e35a6f49e71a}">
+        <p14:section name="A estação" id="{a47bcbd5-cc95-b6ab-270e-29db21cb77e2}">
           <p14:sldIdLst>
             <p14:sldId id="264"/>
             <p14:sldId id="265"/>
@@ -153,14 +153,14 @@
             <p14:sldId id="269"/>
           </p14:sldIdLst>
         </p14:section>
-        <p14:section name="Orçamento" id="{6c7c98f7-b4dc-df81-8f8d-eee63744bfa8}">
+        <p14:section name="Orçamento" id="{98810e4d-940d-2222-90bb-de06af1ad29d}">
           <p14:sldIdLst>
             <p14:sldId id="270"/>
             <p14:sldId id="271"/>
             <p14:sldId id="272"/>
           </p14:sldIdLst>
         </p14:section>
-        <p14:section name="Próximos passos" id="{9b78558b-3e05-b09e-a027-6858d88e72a8}">
+        <p14:section name="Próximos passos" id="{1bffa95f-2526-a345-a749-8f153bc31690}">
           <p14:sldIdLst>
             <p14:sldId id="273"/>
             <p14:sldId id="274"/>
@@ -298,22 +298,22 @@
                 <c:formatCode>General</c:formatCode>
                 <c:ptCount val="6"/>
                 <c:pt idx="0">
-                  <c:v>187</c:v>
+                  <c:v>199</c:v>
                 </c:pt>
                 <c:pt idx="1">
-                  <c:v>255</c:v>
+                  <c:v>270</c:v>
                 </c:pt>
                 <c:pt idx="2">
-                  <c:v>278</c:v>
+                  <c:v>293</c:v>
                 </c:pt>
                 <c:pt idx="3">
-                  <c:v>279</c:v>
+                  <c:v>294</c:v>
                 </c:pt>
                 <c:pt idx="4">
-                  <c:v>326</c:v>
+                  <c:v>348</c:v>
                 </c:pt>
                 <c:pt idx="5">
-                  <c:v>796</c:v>
+                  <c:v>852</c:v>
                 </c:pt>
               </c:numCache>
             </c:numRef>
@@ -947,7 +947,7 @@
           <a:p>
             <a:r>
               <a:rPr lang="en-US" dirty="0"/>
-              <a:t>Planta conforme o desenho enviado pela operação. Lado esquerdo do corredor: prédios 020-031; lado direito: 032 até o último; prédio 015 (150-153) na cabeceira. Os blocos do baixo giro são de costas entre estações vizinhas. Medidas a confirmar com as fotos.</a:t>
+              <a:t>Esteira de transporte e de separação lado a lado (≈ 20 cm). A transferência passa a bacia para a separação e o rolete direcionador manda para 2 estações à esquerda ou 2 à direita (ex.: entre 11 e 12 atende 10 a 13; na ponta, entre 3 e 4 atende 3, 4 e 5). A bacia só entra nas estações com itens do pedido. Alto giro atrás do operador; corredor do baixo giro com 020-031 à esquerda e 015 + 043 a 032 à direita.</a:t>
             </a:r>
             <a:endParaRPr lang="en-US" dirty="0"/>
           </a:p>
@@ -1035,7 +1035,7 @@
           <a:p>
             <a:r>
               <a:rPr lang="en-US" dirty="0"/>
-              <a:t>A altura de cada endereço depende de quantos endereços o prédio tem. Estação 05: 209 endereços. 49 de alto giro (29 com display próprio + 20 nos blocos dos andares 4-5) e 160 de baixo giro em 6 zonas. O tamanho da zona é parâmetro e será ajustado no piloto.</a:t>
+              <a:t>Prateleiras alinhadas; a caixa do endereço muda de tamanho pelo tipo. Estação 05: 209 endereços. 49 de alto giro (29 com display próprio + 20 nos andares 4-5, atendidos por 4 displays E+Q) e 160 de baixo giro em 6 zonas. O tamanho da zona é parâmetro e será ajustado no piloto.</a:t>
             </a:r>
             <a:endParaRPr lang="en-US" dirty="0"/>
           </a:p>
@@ -1563,7 +1563,7 @@
           <a:p>
             <a:r>
               <a:rPr lang="en-US" dirty="0"/>
-              <a:t>Valores com instalação. 12 V × 5 V: o custo de peças fica praticamente igual (R$ 187 mil × R$ 186 mil), mas 5 V exige mais pontos de alimentação e aumenta a manutenção — por isso a recomendação é 12 V.</a:t>
+              <a:t>Valores com instalação. 12 V × 5 V: o custo de peças fica praticamente igual (R$ 199 mil × R$ 197 mil), mas 5 V exige mais pontos de alimentação e aumenta a manutenção — por isso a recomendação é 12 V.</a:t>
             </a:r>
             <a:endParaRPr lang="en-US" dirty="0"/>
           </a:p>
@@ -3928,7 +3928,7 @@
                   <a:schemeClr val="tx1"/>
                 </a:solidFill>
               </a:rPr>
-              <a:t>A bacia entra pela transferência, é separada e volta à esteira</a:t>
+              <a:t>Uma transferência atende 4 estações; a bacia volta à esteira de qualquer ponto</a:t>
             </a:r>
             <a:endParaRPr lang="en-US" sz="2600" dirty="0"/>
           </a:p>
@@ -3950,8 +3950,8 @@
         </p:blipFill>
         <p:spPr>
           <a:xfrm>
-            <a:off x="1280160" y="1143000"/>
-            <a:ext cx="9601200" cy="5120640"/>
+            <a:off x="1027497" y="1143000"/>
+            <a:ext cx="10106526" cy="5120640"/>
           </a:xfrm>
           <a:prstGeom prst="rect">
             <a:avLst/>
@@ -4060,7 +4060,7 @@
                   <a:schemeClr val="tx1"/>
                 </a:solidFill>
               </a:rPr>
-              <a:t>Andar 0 em cima; cada endereço de alto giro tem display e o baixo giro usa zonas</a:t>
+              <a:t>Andar 0 em cima; alto giro com display por endereço e baixo giro por zonas</a:t>
             </a:r>
             <a:endParaRPr lang="en-US" sz="2600" dirty="0"/>
           </a:p>
@@ -4082,8 +4082,8 @@
         </p:blipFill>
         <p:spPr>
           <a:xfrm>
-            <a:off x="457200" y="1280160"/>
-            <a:ext cx="11247120" cy="3749040"/>
+            <a:off x="492760" y="1280160"/>
+            <a:ext cx="11176000" cy="4023360"/>
           </a:xfrm>
           <a:prstGeom prst="rect">
             <a:avLst/>
@@ -4228,7 +4228,7 @@
                   <a:schemeClr val="accent6"/>
                 </a:solidFill>
               </a:rPr>
-              <a:t>2 blocos por estação (esq./dir.) com endereço + quantidade</a:t>
+              <a:t>4 displays por estação (A4 e A5 em cada lado) com endereço + quantidade</a:t>
             </a:r>
             <a:endParaRPr lang="en-US" sz="1200" dirty="0"/>
           </a:p>
@@ -6197,7 +6197,7 @@
                             <a:schemeClr val="tx2"/>
                           </a:solidFill>
                         </a:rPr>
-                        <a:t>10.443</a:t>
+                        <a:t>10.994</a:t>
                       </a:r>
                       <a:endParaRPr lang="en-US" sz="1300" dirty="0"/>
                     </a:p>
@@ -6315,7 +6315,7 @@
                             <a:schemeClr val="tx2"/>
                           </a:solidFill>
                         </a:rPr>
-                        <a:t>13.875</a:t>
+                        <a:t>14.566</a:t>
                       </a:r>
                       <a:endParaRPr lang="en-US" sz="1300" dirty="0"/>
                     </a:p>
@@ -6433,7 +6433,7 @@
                             <a:schemeClr val="tx2"/>
                           </a:solidFill>
                         </a:rPr>
-                        <a:t>15.048</a:t>
+                        <a:t>15.738</a:t>
                       </a:r>
                       <a:endParaRPr lang="en-US" sz="1300" dirty="0"/>
                     </a:p>
@@ -6551,7 +6551,7 @@
                             <a:schemeClr val="tx2"/>
                           </a:solidFill>
                         </a:rPr>
-                        <a:t>31.822</a:t>
+                        <a:t>32.808</a:t>
                       </a:r>
                       <a:endParaRPr lang="en-US" sz="1300" dirty="0"/>
                     </a:p>
@@ -6669,7 +6669,7 @@
                             <a:schemeClr val="tx2"/>
                           </a:solidFill>
                         </a:rPr>
-                        <a:t>40.650</a:t>
+                        <a:t>43.196</a:t>
                       </a:r>
                       <a:endParaRPr lang="en-US" sz="1300" dirty="0"/>
                     </a:p>
@@ -6987,7 +6987,7 @@
                   <a:schemeClr val="accent2"/>
                 </a:solidFill>
               </a:rPr>
-              <a:t>R$ 255 mil</a:t>
+              <a:t>R$ 270 mil</a:t>
             </a:r>
             <a:endParaRPr lang="en-US" sz="3000" dirty="0"/>
           </a:p>
@@ -7248,7 +7248,7 @@
                   <a:schemeClr val="accent3"/>
                 </a:solidFill>
               </a:rPr>
-              <a:t>R$ 326 mil</a:t>
+              <a:t>R$ 348 mil</a:t>
             </a:r>
             <a:endParaRPr lang="en-US" sz="3000" dirty="0"/>
           </a:p>
@@ -7509,7 +7509,7 @@
                   <a:schemeClr val="accent5"/>
                 </a:solidFill>
               </a:rPr>
-              <a:t>R$ 796 mil</a:t>
+              <a:t>R$ 852 mil</a:t>
             </a:r>
             <a:endParaRPr lang="en-US" sz="3000" dirty="0"/>
           </a:p>
@@ -9793,7 +9793,7 @@
                   <a:schemeClr val="tx1"/>
                 </a:solidFill>
               </a:rPr>
-              <a:t>Resumo: piloto de R$ 13,9 mil para validar a operação completa</a:t>
+              <a:t>Resumo: piloto de R$ 14,6 mil para validar a operação completa</a:t>
             </a:r>
             <a:endParaRPr lang="en-US" sz="2600" dirty="0"/>
           </a:p>
@@ -10135,7 +10135,7 @@
                 <a:ea typeface="Arial" pitchFamily="34" charset="-122"/>
                 <a:cs typeface="Arial" pitchFamily="34" charset="-120"/>
               </a:rPr>
-              <a:t>R$ 255 mil</a:t>
+              <a:t>R$ 270 mil</a:t>
             </a:r>
             <a:endParaRPr lang="en-US" sz="3000" dirty="0"/>
           </a:p>
@@ -10273,7 +10273,7 @@
                 <a:ea typeface="Arial" pitchFamily="34" charset="-122"/>
                 <a:cs typeface="Arial" pitchFamily="34" charset="-120"/>
               </a:rPr>
-              <a:t>R$ 13,9 mil</a:t>
+              <a:t>R$ 14,6 mil</a:t>
             </a:r>
             <a:endParaRPr lang="en-US" sz="3000" dirty="0"/>
           </a:p>
@@ -10979,7 +10979,7 @@
                   <a:srgbClr val="C9D3E0"/>
                 </a:solidFill>
               </a:rPr>
-              <a:t>1. Aprovar o piloto nas estações 05 e 27 (≈ R$ 13,9 mil)</a:t>
+              <a:t>1. Aprovar o piloto nas estações 05 e 27 (≈ R$ 14,6 mil)</a:t>
             </a:r>
             <a:endParaRPr lang="en-US" sz="2000" dirty="0"/>
           </a:p>
@@ -14200,7 +14200,7 @@
                             <a:schemeClr val="tx2"/>
                           </a:solidFill>
                         </a:rPr>
-                        <a:t>R$ 255 mil</a:t>
+                        <a:t>R$ 270 mil</a:t>
                       </a:r>
                       <a:endParaRPr lang="en-US" sz="1500" dirty="0"/>
                     </a:p>
@@ -14258,7 +14258,7 @@
                             <a:schemeClr val="tx2"/>
                           </a:solidFill>
                         </a:rPr>
-                        <a:t>R$ 278 mil</a:t>
+                        <a:t>R$ 293 mil</a:t>
                       </a:r>
                       <a:endParaRPr lang="en-US" sz="1500" dirty="0"/>
                     </a:p>

--- a/projeto/entregaveis/Apresentacao_PTL.pptx
+++ b/projeto/entregaveis/Apresentacao_PTL.pptx
@@ -127,7 +127,7 @@
   <p:extLst>
     <p:ext uri="{521415D9-36F7-43E2-AB2F-B90AF26B5E84}">
       <p14:sectionLst xmlns:p14="http://schemas.microsoft.com/office/powerpoint/2010/main">
-        <p14:section name="Abertura" id="{21b622cd-559b-16c0-3bc3-0f1ea520c719}">
+        <p14:section name="Abertura" id="{5f1fa104-00d3-1685-0bc9-d1fbdc19b617}">
           <p14:sldIdLst>
             <p14:sldId id="256"/>
             <p14:sldId id="257"/>
@@ -135,7 +135,7 @@
             <p14:sldId id="259"/>
           </p14:sldIdLst>
         </p14:section>
-        <p14:section name="Arquiteturas" id="{8fe82bec-6a1a-ebf0-ed7f-99891ddcd189}">
+        <p14:section name="Arquiteturas" id="{8b197640-b7b4-57ef-7746-b5fb3f907cf7}">
           <p14:sldIdLst>
             <p14:sldId id="260"/>
             <p14:sldId id="261"/>
@@ -143,7 +143,7 @@
             <p14:sldId id="263"/>
           </p14:sldIdLst>
         </p14:section>
-        <p14:section name="A estação" id="{a47bcbd5-cc95-b6ab-270e-29db21cb77e2}">
+        <p14:section name="A estação" id="{cf2b71bc-71b8-ee8a-4a20-199045a29033}">
           <p14:sldIdLst>
             <p14:sldId id="264"/>
             <p14:sldId id="265"/>
@@ -153,14 +153,14 @@
             <p14:sldId id="269"/>
           </p14:sldIdLst>
         </p14:section>
-        <p14:section name="Orçamento" id="{98810e4d-940d-2222-90bb-de06af1ad29d}">
+        <p14:section name="Orçamento" id="{81903010-aa68-004f-009e-6fbe50acc327}">
           <p14:sldIdLst>
             <p14:sldId id="270"/>
             <p14:sldId id="271"/>
             <p14:sldId id="272"/>
           </p14:sldIdLst>
         </p14:section>
-        <p14:section name="Próximos passos" id="{1bffa95f-2526-a345-a749-8f153bc31690}">
+        <p14:section name="Próximos passos" id="{54aae9eb-4a0a-8f1c-7a4b-ae3468b75c27}">
           <p14:sldIdLst>
             <p14:sldId id="273"/>
             <p14:sldId id="274"/>
@@ -947,7 +947,7 @@
           <a:p>
             <a:r>
               <a:rPr lang="en-US" dirty="0"/>
-              <a:t>Esteira de transporte e de separação lado a lado (≈ 20 cm). A transferência passa a bacia para a separação e o rolete direcionador manda para 2 estações à esquerda ou 2 à direita (ex.: entre 11 e 12 atende 10 a 13; na ponta, entre 3 e 4 atende 3, 4 e 5). A bacia só entra nas estações com itens do pedido. Alto giro atrás do operador; corredor do baixo giro com 020-031 à esquerda e 015 + 043 a 032 à direita.</a:t>
+              <a:t>Esteira de transporte e de separação lado a lado (≈ 20 cm). A transferência passa a bacia para a separação e o rolete direcionador manda para 2 estações à esquerda ou 2 à direita (ex.: entre 11 e 12 atende 10 a 13; na ponta, entre 3 e 4 atende 3, 4 e 5). A bacia só entra nas estações com itens do pedido. Alto giro na frente do operador, com as esteiras passando por dentro (por baixo do andar 3 e por cima do andar 4); corredor do baixo giro atrás do operador, com 020-031 à esquerda e 015 + 043 a 032 à direita.</a:t>
             </a:r>
             <a:endParaRPr lang="en-US" dirty="0"/>
           </a:p>

--- a/projeto/entregaveis/Apresentacao_PTL.pptx
+++ b/projeto/entregaveis/Apresentacao_PTL.pptx
@@ -127,7 +127,7 @@
   <p:extLst>
     <p:ext uri="{521415D9-36F7-43E2-AB2F-B90AF26B5E84}">
       <p14:sectionLst xmlns:p14="http://schemas.microsoft.com/office/powerpoint/2010/main">
-        <p14:section name="Abertura" id="{5f1fa104-00d3-1685-0bc9-d1fbdc19b617}">
+        <p14:section name="Abertura" id="{c31dbac4-77b0-3de3-7d39-04559b4fc34a}">
           <p14:sldIdLst>
             <p14:sldId id="256"/>
             <p14:sldId id="257"/>
@@ -135,7 +135,7 @@
             <p14:sldId id="259"/>
           </p14:sldIdLst>
         </p14:section>
-        <p14:section name="Arquiteturas" id="{8b197640-b7b4-57ef-7746-b5fb3f907cf7}">
+        <p14:section name="Arquiteturas" id="{4722a07c-d92f-8b07-dc3e-caa3fea251fe}">
           <p14:sldIdLst>
             <p14:sldId id="260"/>
             <p14:sldId id="261"/>
@@ -143,7 +143,7 @@
             <p14:sldId id="263"/>
           </p14:sldIdLst>
         </p14:section>
-        <p14:section name="A estação" id="{cf2b71bc-71b8-ee8a-4a20-199045a29033}">
+        <p14:section name="A estação" id="{c8ccc2e1-f1ca-33f6-7220-09f3c7f51cb9}">
           <p14:sldIdLst>
             <p14:sldId id="264"/>
             <p14:sldId id="265"/>
@@ -153,14 +153,14 @@
             <p14:sldId id="269"/>
           </p14:sldIdLst>
         </p14:section>
-        <p14:section name="Orçamento" id="{81903010-aa68-004f-009e-6fbe50acc327}">
+        <p14:section name="Orçamento" id="{6c1d7855-4790-9399-ac10-5e87b7498320}">
           <p14:sldIdLst>
             <p14:sldId id="270"/>
             <p14:sldId id="271"/>
             <p14:sldId id="272"/>
           </p14:sldIdLst>
         </p14:section>
-        <p14:section name="Próximos passos" id="{54aae9eb-4a0a-8f1c-7a4b-ae3468b75c27}">
+        <p14:section name="Próximos passos" id="{50796829-a88e-d4d8-327a-13f8cc740379}">
           <p14:sldIdLst>
             <p14:sldId id="273"/>
             <p14:sldId id="274"/>
@@ -298,22 +298,22 @@
                 <c:formatCode>General</c:formatCode>
                 <c:ptCount val="6"/>
                 <c:pt idx="0">
-                  <c:v>199</c:v>
+                  <c:v>211</c:v>
                 </c:pt>
                 <c:pt idx="1">
-                  <c:v>270</c:v>
+                  <c:v>284</c:v>
                 </c:pt>
                 <c:pt idx="2">
-                  <c:v>293</c:v>
+                  <c:v>308</c:v>
                 </c:pt>
                 <c:pt idx="3">
-                  <c:v>294</c:v>
+                  <c:v>309</c:v>
                 </c:pt>
                 <c:pt idx="4">
-                  <c:v>348</c:v>
+                  <c:v>369</c:v>
                 </c:pt>
                 <c:pt idx="5">
-                  <c:v>852</c:v>
+                  <c:v>906</c:v>
                 </c:pt>
               </c:numCache>
             </c:numRef>
@@ -947,7 +947,7 @@
           <a:p>
             <a:r>
               <a:rPr lang="en-US" dirty="0"/>
-              <a:t>Esteira de transporte e de separação lado a lado (≈ 20 cm). A transferência passa a bacia para a separação e o rolete direcionador manda para 2 estações à esquerda ou 2 à direita (ex.: entre 11 e 12 atende 10 a 13; na ponta, entre 3 e 4 atende 3, 4 e 5). A bacia só entra nas estações com itens do pedido. Alto giro na frente do operador, com as esteiras passando por dentro (por baixo do andar 3 e por cima do andar 4); corredor do baixo giro atrás do operador, com 020-031 à esquerda e 015 + 043 a 032 à direita.</a:t>
+              <a:t>Esteira de transporte e de separação lado a lado (≈ 20 cm). A transferência passa a bacia para a separação e o rolete direcionador manda para 2 estações à esquerda ou 2 à direita (ex.: entre 11 e 12 atende 10 a 13; na ponta, entre 3 e 4 atende 3, 4 e 5). A bacia só entra nas estações com itens do pedido. Alto giro na frente do operador, com a esteira de transporte passando por dentro (por baixo do andar 3 e por cima do andar 4) e a de separação aberta na frente; corredor do baixo giro atrás do operador, com 020-031 à esquerda e 015 + 043 a 032 à direita.</a:t>
             </a:r>
             <a:endParaRPr lang="en-US" dirty="0"/>
           </a:p>
@@ -1035,7 +1035,7 @@
           <a:p>
             <a:r>
               <a:rPr lang="en-US" dirty="0"/>
-              <a:t>Prateleiras alinhadas; a caixa do endereço muda de tamanho pelo tipo. Estação 05: 209 endereços. 49 de alto giro (29 com display próprio + 20 nos andares 4-5, atendidos por 4 displays E+Q) e 160 de baixo giro em 6 zonas. O tamanho da zona é parâmetro e será ajustado no piloto.</a:t>
+              <a:t>Prateleiras alinhadas; a caixa do endereço muda de tamanho pelo tipo. Estação 05: 209 endereços. 49 de alto giro (29 com display próprio + 20 nos andares 4-5, atendidos por 4 displays E+Q) e 160 de baixo giro em 8 zonas (4 por lado, displays na altura dos olhos). O tamanho da zona é parâmetro e será ajustado no piloto.</a:t>
             </a:r>
             <a:endParaRPr lang="en-US" dirty="0"/>
           </a:p>
@@ -1563,7 +1563,7 @@
           <a:p>
             <a:r>
               <a:rPr lang="en-US" dirty="0"/>
-              <a:t>Valores com instalação. 12 V × 5 V: o custo de peças fica praticamente igual (R$ 199 mil × R$ 197 mil), mas 5 V exige mais pontos de alimentação e aumenta a manutenção — por isso a recomendação é 12 V.</a:t>
+              <a:t>Valores com instalação. 12 V × 5 V: o custo de peças fica praticamente igual (R$ 211 mil × R$ 208 mil), mas 5 V exige mais pontos de alimentação e aumenta a manutenção — por isso a recomendação é 12 V.</a:t>
             </a:r>
             <a:endParaRPr lang="en-US" dirty="0"/>
           </a:p>
@@ -4300,7 +4300,7 @@
                   <a:schemeClr val="accent6"/>
                 </a:solidFill>
               </a:rPr>
-              <a:t>1 display de endereço + quantidade a cada 4 prédios (6 a 9 zonas)</a:t>
+              <a:t>4 zonas por lado do corredor, display de endereço + quantidade na altura dos olhos</a:t>
             </a:r>
             <a:endParaRPr lang="en-US" sz="1200" dirty="0"/>
           </a:p>
@@ -6197,7 +6197,7 @@
                             <a:schemeClr val="tx2"/>
                           </a:solidFill>
                         </a:rPr>
-                        <a:t>10.994</a:t>
+                        <a:t>11.668</a:t>
                       </a:r>
                       <a:endParaRPr lang="en-US" sz="1300" dirty="0"/>
                     </a:p>
@@ -6315,7 +6315,7 @@
                             <a:schemeClr val="tx2"/>
                           </a:solidFill>
                         </a:rPr>
-                        <a:t>14.566</a:t>
+                        <a:t>15.415</a:t>
                       </a:r>
                       <a:endParaRPr lang="en-US" sz="1300" dirty="0"/>
                     </a:p>
@@ -6433,7 +6433,7 @@
                             <a:schemeClr val="tx2"/>
                           </a:solidFill>
                         </a:rPr>
-                        <a:t>15.738</a:t>
+                        <a:t>16.588</a:t>
                       </a:r>
                       <a:endParaRPr lang="en-US" sz="1300" dirty="0"/>
                     </a:p>
@@ -6551,7 +6551,7 @@
                             <a:schemeClr val="tx2"/>
                           </a:solidFill>
                         </a:rPr>
-                        <a:t>32.808</a:t>
+                        <a:t>34.027</a:t>
                       </a:r>
                       <a:endParaRPr lang="en-US" sz="1300" dirty="0"/>
                     </a:p>
@@ -6669,7 +6669,7 @@
                             <a:schemeClr val="tx2"/>
                           </a:solidFill>
                         </a:rPr>
-                        <a:t>43.196</a:t>
+                        <a:t>46.363</a:t>
                       </a:r>
                       <a:endParaRPr lang="en-US" sz="1300" dirty="0"/>
                     </a:p>
@@ -6987,7 +6987,7 @@
                   <a:schemeClr val="accent2"/>
                 </a:solidFill>
               </a:rPr>
-              <a:t>R$ 270 mil</a:t>
+              <a:t>R$ 284 mil</a:t>
             </a:r>
             <a:endParaRPr lang="en-US" sz="3000" dirty="0"/>
           </a:p>
@@ -7248,7 +7248,7 @@
                   <a:schemeClr val="accent3"/>
                 </a:solidFill>
               </a:rPr>
-              <a:t>R$ 348 mil</a:t>
+              <a:t>R$ 369 mil</a:t>
             </a:r>
             <a:endParaRPr lang="en-US" sz="3000" dirty="0"/>
           </a:p>
@@ -7509,7 +7509,7 @@
                   <a:schemeClr val="accent5"/>
                 </a:solidFill>
               </a:rPr>
-              <a:t>R$ 852 mil</a:t>
+              <a:t>R$ 906 mil</a:t>
             </a:r>
             <a:endParaRPr lang="en-US" sz="3000" dirty="0"/>
           </a:p>
@@ -9793,7 +9793,7 @@
                   <a:schemeClr val="tx1"/>
                 </a:solidFill>
               </a:rPr>
-              <a:t>Resumo: piloto de R$ 14,6 mil para validar a operação completa</a:t>
+              <a:t>Resumo: piloto de R$ 15,4 mil para validar a operação completa</a:t>
             </a:r>
             <a:endParaRPr lang="en-US" sz="2600" dirty="0"/>
           </a:p>
@@ -10135,7 +10135,7 @@
                 <a:ea typeface="Arial" pitchFamily="34" charset="-122"/>
                 <a:cs typeface="Arial" pitchFamily="34" charset="-120"/>
               </a:rPr>
-              <a:t>R$ 270 mil</a:t>
+              <a:t>R$ 284 mil</a:t>
             </a:r>
             <a:endParaRPr lang="en-US" sz="3000" dirty="0"/>
           </a:p>
@@ -10273,7 +10273,7 @@
                 <a:ea typeface="Arial" pitchFamily="34" charset="-122"/>
                 <a:cs typeface="Arial" pitchFamily="34" charset="-120"/>
               </a:rPr>
-              <a:t>R$ 14,6 mil</a:t>
+              <a:t>R$ 15,4 mil</a:t>
             </a:r>
             <a:endParaRPr lang="en-US" sz="3000" dirty="0"/>
           </a:p>
@@ -10979,7 +10979,7 @@
                   <a:srgbClr val="C9D3E0"/>
                 </a:solidFill>
               </a:rPr>
-              <a:t>1. Aprovar o piloto nas estações 05 e 27 (≈ R$ 14,6 mil)</a:t>
+              <a:t>1. Aprovar o piloto nas estações 05 e 27 (≈ R$ 15,4 mil)</a:t>
             </a:r>
             <a:endParaRPr lang="en-US" sz="2000" dirty="0"/>
           </a:p>
@@ -14200,7 +14200,7 @@
                             <a:schemeClr val="tx2"/>
                           </a:solidFill>
                         </a:rPr>
-                        <a:t>R$ 270 mil</a:t>
+                        <a:t>R$ 284 mil</a:t>
                       </a:r>
                       <a:endParaRPr lang="en-US" sz="1500" dirty="0"/>
                     </a:p>
@@ -14258,7 +14258,7 @@
                             <a:schemeClr val="tx2"/>
                           </a:solidFill>
                         </a:rPr>
-                        <a:t>R$ 293 mil</a:t>
+                        <a:t>R$ 308 mil</a:t>
                       </a:r>
                       <a:endParaRPr lang="en-US" sz="1500" dirty="0"/>
                     </a:p>

--- a/projeto/entregaveis/Apresentacao_PTL.pptx
+++ b/projeto/entregaveis/Apresentacao_PTL.pptx
@@ -128,7 +128,7 @@
   <p:extLst>
     <p:ext uri="{521415D9-36F7-43E2-AB2F-B90AF26B5E84}">
       <p14:sectionLst xmlns:p14="http://schemas.microsoft.com/office/powerpoint/2010/main">
-        <p14:section name="Abertura" id="{278e3b4e-6e38-e05d-4960-ccadc24713f7}">
+        <p14:section name="Abertura" id="{9a205dbd-4fe7-90e7-257c-bfea786cf184}">
           <p14:sldIdLst>
             <p14:sldId id="256"/>
             <p14:sldId id="257"/>
@@ -136,7 +136,7 @@
             <p14:sldId id="259"/>
           </p14:sldIdLst>
         </p14:section>
-        <p14:section name="Arquiteturas" id="{ce70d762-c69b-e26e-f8e3-9e7301095ff9}">
+        <p14:section name="Arquiteturas" id="{ee748f59-f453-c202-f8cc-7133870ab634}">
           <p14:sldIdLst>
             <p14:sldId id="260"/>
             <p14:sldId id="261"/>
@@ -145,7 +145,7 @@
             <p14:sldId id="264"/>
           </p14:sldIdLst>
         </p14:section>
-        <p14:section name="A estação" id="{bbd3f541-f774-f9b1-d686-b4ad210f8063}">
+        <p14:section name="A estação" id="{3b7fb97d-3a79-a642-956b-4a3eda735223}">
           <p14:sldIdLst>
             <p14:sldId id="265"/>
             <p14:sldId id="266"/>
@@ -155,14 +155,14 @@
             <p14:sldId id="270"/>
           </p14:sldIdLst>
         </p14:section>
-        <p14:section name="Orçamento" id="{03d8e819-da12-c6e9-f4bc-084a033cb2ba}">
+        <p14:section name="Orçamento" id="{53912458-517c-0a55-f3d4-61c501c29c2e}">
           <p14:sldIdLst>
             <p14:sldId id="271"/>
             <p14:sldId id="272"/>
             <p14:sldId id="273"/>
           </p14:sldIdLst>
         </p14:section>
-        <p14:section name="Próximos passos" id="{38125a31-ca9d-c877-ddba-bb8e34f0b8d0}">
+        <p14:section name="Próximos passos" id="{5d1b2d9f-108d-d823-7a0b-5d50722e4f1b}">
           <p14:sldIdLst>
             <p14:sldId id="274"/>
             <p14:sldId id="275"/>
@@ -272,10 +272,10 @@
                 <c:ptCount val="6"/>
                 <c:lvl>
                   <c:pt idx="0">
-                    <c:v>A interna, só peças</c:v>
+                    <c:v>A interna, só materiais</c:v>
                   </c:pt>
                   <c:pt idx="1">
-                    <c:v>A interna, peças e mão de obra</c:v>
+                    <c:v>A interna, com mão de obra</c:v>
                   </c:pt>
                   <c:pt idx="2">
                     <c:v>B2, RFID com leitor fixo</c:v>
@@ -300,22 +300,22 @@
                 <c:formatCode>General</c:formatCode>
                 <c:ptCount val="6"/>
                 <c:pt idx="0">
-                  <c:v>211</c:v>
+                  <c:v>266</c:v>
                 </c:pt>
                 <c:pt idx="1">
-                  <c:v>284</c:v>
+                  <c:v>364</c:v>
                 </c:pt>
                 <c:pt idx="2">
-                  <c:v>308</c:v>
+                  <c:v>391</c:v>
                 </c:pt>
                 <c:pt idx="3">
-                  <c:v>309</c:v>
+                  <c:v>397</c:v>
                 </c:pt>
                 <c:pt idx="4">
-                  <c:v>369</c:v>
+                  <c:v>413</c:v>
                 </c:pt>
                 <c:pt idx="5">
-                  <c:v>906</c:v>
+                  <c:v>937</c:v>
                 </c:pt>
               </c:numCache>
             </c:numRef>
@@ -1565,7 +1565,7 @@
           <a:p>
             <a:r>
               <a:rPr lang="en-US" dirty="0"/>
-              <a:t>Fonte: Orcamento_PTL.xlsx. A placa própria só compensa em escala, por causa do projeto (cerca de R$ 15 mil) e da importação. Quantidades e preços podem ser alterados na planilha.</a:t>
+              <a:t>Fonte: Orcamento_PTL.xlsx. A placa própria só compensa em escala, por causa do projeto (cerca de R$ 15 mil) e da importação. Quantidades e preços podem ser alterados na planilha. Mão de obra a R$ 34,93/h (técnico) e software a R$ 103,78/h (analista de desenvolvimento), salários médios do salario.com.br com encargos. Os materiais incluem canaleta pelo layout real, alimentação dos concentradores, tomadas novas, nobreak e rack dos switches, ferramentas e frete.</a:t>
             </a:r>
             <a:endParaRPr lang="en-US" dirty="0"/>
           </a:p>
@@ -1653,7 +1653,7 @@
           <a:p>
             <a:r>
               <a:rPr lang="en-US" dirty="0"/>
-              <a:t>Valores com instalação. 12 V × 5 V: o custo de peças fica praticamente igual (R$ 211 mil × R$ 208 mil), mas o 5 V exige mais pontos de alimentação e aumenta a manutenção. Por isso a indicação é 12 V.</a:t>
+              <a:t>Valores com instalação. 12 V × 5 V: os materiais ficam praticamente iguais (R$ 266 mil × R$ 269 mil), porque o cabo de força extra do 5 V custa mais do que os reguladores economizados, e o 5 V ainda aumenta a manutenção. Por isso a indicação é 12 V.</a:t>
             </a:r>
             <a:endParaRPr lang="en-US" dirty="0"/>
           </a:p>
@@ -5780,7 +5780,7 @@
                   <a:srgbClr val="C9D3E0"/>
                 </a:solidFill>
               </a:rPr>
-              <a:t>Preços pesquisados em lojas brasileiras em 23/10/2026. Os itens estimados estão marcados na planilha.</a:t>
+              <a:t>Preços pesquisados em lojas brasileiras em 23 e 26/10/2026. Os itens estimados estão marcados na planilha.</a:t>
             </a:r>
             <a:endParaRPr lang="en-US" sz="1800" dirty="0"/>
           </a:p>
@@ -6075,7 +6075,7 @@
                             <a:schemeClr val="tx2"/>
                           </a:solidFill>
                         </a:rPr>
-                        <a:t>A interna, peças</a:t>
+                        <a:t>A interna, materiais</a:t>
                       </a:r>
                       <a:endParaRPr lang="en-US" sz="1300" dirty="0"/>
                     </a:p>
@@ -6133,7 +6133,7 @@
                             <a:schemeClr val="tx2"/>
                           </a:solidFill>
                         </a:rPr>
-                        <a:t>11.668</a:t>
+                        <a:t>16.707</a:t>
                       </a:r>
                       <a:endParaRPr lang="en-US" sz="1300" dirty="0"/>
                     </a:p>
@@ -6251,7 +6251,7 @@
                             <a:schemeClr val="tx2"/>
                           </a:solidFill>
                         </a:rPr>
-                        <a:t>15.415</a:t>
+                        <a:t>22.204</a:t>
                       </a:r>
                       <a:endParaRPr lang="en-US" sz="1300" dirty="0"/>
                     </a:p>
@@ -6369,7 +6369,7 @@
                             <a:schemeClr val="tx2"/>
                           </a:solidFill>
                         </a:rPr>
-                        <a:t>16.588</a:t>
+                        <a:t>23.542</a:t>
                       </a:r>
                       <a:endParaRPr lang="en-US" sz="1300" dirty="0"/>
                     </a:p>
@@ -6487,7 +6487,7 @@
                             <a:schemeClr val="tx2"/>
                           </a:solidFill>
                         </a:rPr>
-                        <a:t>34.027</a:t>
+                        <a:t>38.859</a:t>
                       </a:r>
                       <a:endParaRPr lang="en-US" sz="1300" dirty="0"/>
                     </a:p>
@@ -6605,7 +6605,7 @@
                             <a:schemeClr val="tx2"/>
                           </a:solidFill>
                         </a:rPr>
-                        <a:t>46.363</a:t>
+                        <a:t>50.447</a:t>
                       </a:r>
                       <a:endParaRPr lang="en-US" sz="1300" dirty="0"/>
                     </a:p>
@@ -6684,7 +6684,7 @@
                   <a:schemeClr val="accent6"/>
                 </a:solidFill>
               </a:rPr>
-              <a:t>Software interno estimado em cerca de 1.080 h (A) e 1.000 h (B). Mão de obra a R$ 34,93 por hora (salário médio de técnico com encargos).</a:t>
+              <a:t>Software interno: cerca de 1.104 h (A) e 1.024 h (B), ou R$ 115 mil e R$ 106 mil. Com 10% de contingência e o software, a Arquitetura A soma cerca de R$ 515 mil.</a:t>
             </a:r>
             <a:endParaRPr lang="en-US" sz="1200" dirty="0"/>
           </a:p>
@@ -6923,7 +6923,7 @@
                   <a:schemeClr val="accent2"/>
                 </a:solidFill>
               </a:rPr>
-              <a:t>R$ 284 mil</a:t>
+              <a:t>R$ 364 mil</a:t>
             </a:r>
             <a:endParaRPr lang="en-US" sz="3000" dirty="0"/>
           </a:p>
@@ -7184,7 +7184,7 @@
                   <a:schemeClr val="accent3"/>
                 </a:solidFill>
               </a:rPr>
-              <a:t>R$ 369 mil</a:t>
+              <a:t>R$ 413 mil</a:t>
             </a:r>
             <a:endParaRPr lang="en-US" sz="3000" dirty="0"/>
           </a:p>
@@ -7445,7 +7445,7 @@
                   <a:schemeClr val="accent5"/>
                 </a:solidFill>
               </a:rPr>
-              <a:t>R$ 906 mil</a:t>
+              <a:t>R$ 937 mil</a:t>
             </a:r>
             <a:endParaRPr lang="en-US" sz="3000" dirty="0"/>
           </a:p>
@@ -7539,7 +7539,7 @@
                   <a:schemeClr val="tx2"/>
                 </a:solidFill>
               </a:rPr>
-              <a:t>Cerca de três vezes o custo interno</a:t>
+              <a:t>Cerca de 2,5 vezes o custo interno</a:t>
             </a:r>
             <a:endParaRPr lang="en-US" sz="1400" dirty="0"/>
           </a:p>
@@ -9075,7 +9075,7 @@
                 <a:ea typeface="Arial" pitchFamily="34" charset="-122"/>
                 <a:cs typeface="Arial" pitchFamily="34" charset="-120"/>
               </a:rPr>
-              <a:t>R$ 284 mil</a:t>
+              <a:t>R$ 364 mil</a:t>
             </a:r>
             <a:endParaRPr lang="en-US" sz="3000" dirty="0"/>
           </a:p>
@@ -9213,7 +9213,7 @@
                 <a:ea typeface="Arial" pitchFamily="34" charset="-122"/>
                 <a:cs typeface="Arial" pitchFamily="34" charset="-120"/>
               </a:rPr>
-              <a:t>R$ 15,4 mil</a:t>
+              <a:t>R$ 22,2 mil</a:t>
             </a:r>
             <a:endParaRPr lang="en-US" sz="3000" dirty="0"/>
           </a:p>
@@ -10866,7 +10866,7 @@
                   <a:srgbClr val="C9D3E0"/>
                 </a:solidFill>
               </a:rPr>
-              <a:t>1. Aprovar o piloto nas estações 05 e 27 (cerca de R$ 15,4 mil)</a:t>
+              <a:t>1. Aprovar o piloto nas estações 05 e 27 (cerca de R$ 22 mil)</a:t>
             </a:r>
             <a:endParaRPr lang="en-US" sz="2000" dirty="0"/>
           </a:p>
@@ -14219,7 +14219,7 @@
                             <a:schemeClr val="tx2"/>
                           </a:solidFill>
                         </a:rPr>
-                        <a:t>R$ 284 mil</a:t>
+                        <a:t>R$ 364 mil</a:t>
                       </a:r>
                       <a:endParaRPr lang="en-US" sz="1500" dirty="0"/>
                     </a:p>
@@ -14277,7 +14277,7 @@
                             <a:schemeClr val="tx2"/>
                           </a:solidFill>
                         </a:rPr>
-                        <a:t>R$ 308 mil</a:t>
+                        <a:t>R$ 391 mil</a:t>
                       </a:r>
                       <a:endParaRPr lang="en-US" sz="1500" dirty="0"/>
                     </a:p>

--- a/projeto/entregaveis/Apresentacao_PTL.pptx
+++ b/projeto/entregaveis/Apresentacao_PTL.pptx
@@ -27,9 +27,10 @@
     <p:sldId id="275" r:id="rId21"/>
     <p:sldId id="276" r:id="rId22"/>
     <p:sldId id="277" r:id="rId23"/>
+    <p:sldId id="278" r:id="rId24"/>
   </p:sldIdLst>
   <p:notesMasterIdLst>
-    <p:notesMasterId r:id="rId24"/>
+    <p:notesMasterId r:id="rId25"/>
   </p:notesMasterIdLst>
   <p:sldSz cx="12192000" cy="6858000"/>
   <p:notesSz cx="6858000" cy="12192000"/>
@@ -128,7 +129,7 @@
   <p:extLst>
     <p:ext uri="{521415D9-36F7-43E2-AB2F-B90AF26B5E84}">
       <p14:sectionLst xmlns:p14="http://schemas.microsoft.com/office/powerpoint/2010/main">
-        <p14:section name="Abertura" id="{9a205dbd-4fe7-90e7-257c-bfea786cf184}">
+        <p14:section name="Abertura" id="{b76fe437-2aa2-88fb-1a2d-6ce287c26cfa}">
           <p14:sldIdLst>
             <p14:sldId id="256"/>
             <p14:sldId id="257"/>
@@ -136,7 +137,7 @@
             <p14:sldId id="259"/>
           </p14:sldIdLst>
         </p14:section>
-        <p14:section name="Arquiteturas" id="{ee748f59-f453-c202-f8cc-7133870ab634}">
+        <p14:section name="Arquiteturas" id="{f35eced5-b573-9560-aa7b-0b2cf7b91c67}">
           <p14:sldIdLst>
             <p14:sldId id="260"/>
             <p14:sldId id="261"/>
@@ -145,7 +146,7 @@
             <p14:sldId id="264"/>
           </p14:sldIdLst>
         </p14:section>
-        <p14:section name="A estação" id="{3b7fb97d-3a79-a642-956b-4a3eda735223}">
+        <p14:section name="A estação" id="{410ab448-d616-acac-7e81-ed5c15037c99}">
           <p14:sldIdLst>
             <p14:sldId id="265"/>
             <p14:sldId id="266"/>
@@ -153,21 +154,22 @@
             <p14:sldId id="268"/>
             <p14:sldId id="269"/>
             <p14:sldId id="270"/>
+            <p14:sldId id="271"/>
           </p14:sldIdLst>
         </p14:section>
-        <p14:section name="Orçamento" id="{53912458-517c-0a55-f3d4-61c501c29c2e}">
+        <p14:section name="Orçamento" id="{c4001bc6-1bfc-1c3e-7942-c2be93061b17}">
           <p14:sldIdLst>
-            <p14:sldId id="271"/>
             <p14:sldId id="272"/>
             <p14:sldId id="273"/>
+            <p14:sldId id="274"/>
           </p14:sldIdLst>
         </p14:section>
-        <p14:section name="Próximos passos" id="{5d1b2d9f-108d-d823-7a0b-5d50722e4f1b}">
+        <p14:section name="Próximos passos" id="{d4724606-ffe6-9a22-b298-5018c62a8e7f}">
           <p14:sldIdLst>
-            <p14:sldId id="274"/>
             <p14:sldId id="275"/>
             <p14:sldId id="276"/>
             <p14:sldId id="277"/>
+            <p14:sldId id="278"/>
           </p14:sldIdLst>
         </p14:section>
       </p14:sectionLst>
@@ -300,22 +302,22 @@
                 <c:formatCode>General</c:formatCode>
                 <c:ptCount val="6"/>
                 <c:pt idx="0">
-                  <c:v>266</c:v>
+                  <c:v>260</c:v>
                 </c:pt>
                 <c:pt idx="1">
-                  <c:v>364</c:v>
+                  <c:v>356</c:v>
                 </c:pt>
                 <c:pt idx="2">
-                  <c:v>391</c:v>
+                  <c:v>383</c:v>
                 </c:pt>
                 <c:pt idx="3">
-                  <c:v>397</c:v>
+                  <c:v>389</c:v>
                 </c:pt>
                 <c:pt idx="4">
-                  <c:v>413</c:v>
+                  <c:v>405</c:v>
                 </c:pt>
                 <c:pt idx="5">
-                  <c:v>937</c:v>
+                  <c:v>929</c:v>
                 </c:pt>
               </c:numCache>
             </c:numRef>
@@ -1037,7 +1039,7 @@
           <a:p>
             <a:r>
               <a:rPr lang="en-US" dirty="0"/>
-              <a:t>Esteira de transporte e de separação lado a lado, a uns 20 cm uma da outra. A transferência passa a bacia para a separação e o rolete direcionador manda para 2 estações à esquerda ou 2 à direita (ex.: entre 11 e 12 atende 10 a 13; na ponta, entre 3 e 4 atende 3, 4 e 5). A bacia só entra nas estações com itens do pedido. Alto giro na frente do operador, com a esteira de transporte passando por dentro (por baixo do andar 3 e por cima do andar 4) e a de separação aberta na frente; corredor do baixo giro atrás do operador, com 020-031 à esquerda e 015 + 043 a 032 à direita.</a:t>
+              <a:t>Esteira de transporte e de separação lado a lado, a uns 20 cm uma da outra. A transferência passa a bacia para a separação e o rolete direcionador manda para 2 estações à esquerda ou 2 à direita (ex.: entre 11 e 12 atende 10 a 13; na ponta, entre 3 e 4 atende 3, 4 e 5). A bacia só entra nas estações com itens do pedido. Alto giro na frente do operador, com a esteira de transporte passando por dentro (por baixo do andar 3 e por cima do andar 4) e a de separação aberta na frente; corredor do baixo giro atrás do operador, com 020-031 à esquerda e 043 a 032 à direita; o 015 fica na frente do bloco da direita, virado para a esteira. Medidas do desenho: 2,5 m de alto giro por estação, corredor de 1,2 m, prateleiras de 50 cm × 2 m. O concentrador fica atrás da estação e o barramento do baixo giro passa por cima das esteiras.</a:t>
             </a:r>
             <a:endParaRPr lang="en-US" dirty="0"/>
           </a:p>
@@ -1389,7 +1391,7 @@
           <a:p>
             <a:r>
               <a:rPr lang="en-US" dirty="0"/>
-              <a:t>Para a arquitetura de software: o serviço lê os itens por views no Sybase para não depender do modelo do WMS. Linguagem e servidor ainda serão definidos.</a:t>
+              <a:t>A interface de controle mostra o endereço no formato da etiqueta (0.05.0042.A), o módulo (nó e porta, ou endereço RS-485 do E+Q), o local e o tipo de falha. Na troca, o técnico escolhe o endereço na tela, o módulo novo pisca CAd e ele aperta o botão desse módulo para gravar o LED no endereço. Sem hardware extra dá para detectar módulo sem resposta, display desconectado, botão travado e cabo rompido; segmento queimado aparece no teste 8888 do início do turno.</a:t>
             </a:r>
             <a:endParaRPr lang="en-US" dirty="0"/>
           </a:p>
@@ -1477,7 +1479,7 @@
           <a:p>
             <a:r>
               <a:rPr lang="en-US" dirty="0"/>
-              <a:t/>
+              <a:t>Para a arquitetura de software: o serviço lê os itens por views no Sybase para não depender do modelo do WMS. Linguagem e servidor ainda serão definidos.</a:t>
             </a:r>
             <a:endParaRPr lang="en-US" dirty="0"/>
           </a:p>
@@ -1565,7 +1567,7 @@
           <a:p>
             <a:r>
               <a:rPr lang="en-US" dirty="0"/>
-              <a:t>Fonte: Orcamento_PTL.xlsx. A placa própria só compensa em escala, por causa do projeto (cerca de R$ 15 mil) e da importação. Quantidades e preços podem ser alterados na planilha. Mão de obra a R$ 34,93/h (técnico) e software a R$ 103,78/h (analista de desenvolvimento), salários médios do salario.com.br com encargos. Os materiais incluem canaleta pelo layout real, alimentação dos concentradores, tomadas novas, nobreak e rack dos switches, ferramentas e frete.</a:t>
+              <a:t/>
             </a:r>
             <a:endParaRPr lang="en-US" dirty="0"/>
           </a:p>
@@ -1653,7 +1655,7 @@
           <a:p>
             <a:r>
               <a:rPr lang="en-US" dirty="0"/>
-              <a:t>Valores com instalação. 12 V × 5 V: os materiais ficam praticamente iguais (R$ 266 mil × R$ 269 mil), porque o cabo de força extra do 5 V custa mais do que os reguladores economizados, e o 5 V ainda aumenta a manutenção. Por isso a indicação é 12 V.</a:t>
+              <a:t>Fonte: Orcamento_PTL.xlsx. A placa própria só compensa em escala, por causa do projeto (cerca de R$ 15 mil) e da importação. Quantidades e preços podem ser alterados na planilha. Mão de obra a R$ 34,93/h (técnico) e software a R$ 103,78/h (analista de desenvolvimento), salários médios do salario.com.br com encargos. Os materiais incluem canaleta pelo layout real, alimentação dos concentradores, tomadas novas, nobreak e rack dos switches, ferramentas e frete.</a:t>
             </a:r>
             <a:endParaRPr lang="en-US" dirty="0"/>
           </a:p>
@@ -1741,7 +1743,7 @@
           <a:p>
             <a:r>
               <a:rPr lang="en-US" dirty="0"/>
-              <a:t>Os prazos dependem da disponibilidade da equipe e da compra das peças.</a:t>
+              <a:t>Valores com instalação. 12 V × 5 V: os materiais ficam praticamente iguais (R$ 260 mil × R$ 263 mil), porque o cabo de força extra do 5 V custa mais do que os reguladores economizados, e o 5 V ainda aumenta a manutenção. Por isso a indicação é 12 V.</a:t>
             </a:r>
             <a:endParaRPr lang="en-US" dirty="0"/>
           </a:p>
@@ -1917,7 +1919,7 @@
           <a:p>
             <a:r>
               <a:rPr lang="en-US" dirty="0"/>
-              <a:t>Detalhes no item 14 do documento técnico.</a:t>
+              <a:t>Os prazos dependem da disponibilidade da equipe e da compra das peças.</a:t>
             </a:r>
             <a:endParaRPr lang="en-US" dirty="0"/>
           </a:p>
@@ -2005,7 +2007,7 @@
           <a:p>
             <a:r>
               <a:rPr lang="en-US" dirty="0"/>
-              <a:t>Abrir o simulador pela pasta simulador-3d do repositório picking_to_light (python iniciar_3d.py) e usar a estação 05.</a:t>
+              <a:t>Detalhes no item 14 do documento técnico.</a:t>
             </a:r>
             <a:endParaRPr lang="en-US" dirty="0"/>
           </a:p>
@@ -2093,7 +2095,7 @@
           <a:p>
             <a:r>
               <a:rPr lang="en-US" dirty="0"/>
-              <a:t>Com essas quatro decisões, o protótipo de bancada pode começar na semana seguinte.</a:t>
+              <a:t>Abrir o simulador com python iniciar.py no repositório picking_to_light (versão unificada). Abas: Estação 3D, Comunicação, Lado a lado e Controle (falhas e cadastro de LED). Usar a estação 05.</a:t>
             </a:r>
             <a:endParaRPr lang="en-US" dirty="0"/>
           </a:p>
@@ -2117,6 +2119,94 @@
             <a:fld id="{F7021451-1387-4CA6-816F-3879F97B5CBC}" type="slidenum">
               <a:rPr lang="en-US"/>
               <a:t>22</a:t>
+            </a:fld>
+            <a:endParaRPr lang="en-US"/>
+          </a:p>
+        </p:txBody>
+      </p:sp>
+    </p:spTree>
+    <p:extLst>
+      <p:ext uri="{BB962C8B-B14F-4D97-AF65-F5344CB8AC3E}">
+        <p14:creationId xmlns:p14="http://schemas.microsoft.com/office/powerpoint/2010/main" val="1024086991"/>
+      </p:ext>
+    </p:extLst>
+  </p:cSld>
+  <p:clrMapOvr>
+    <a:masterClrMapping/>
+  </p:clrMapOvr>
+</p:notes>
+</file>
+
+<file path=ppt/notesSlides/notesSlide23.xml><?xml version="1.0" encoding="utf-8"?>
+<p:notes xmlns:a="http://schemas.openxmlformats.org/drawingml/2006/main" xmlns:r="http://schemas.openxmlformats.org/officeDocument/2006/relationships" xmlns:p="http://schemas.openxmlformats.org/presentationml/2006/main">
+  <p:cSld>
+    <p:spTree>
+      <p:nvGrpSpPr>
+        <p:cNvPr id="1" name=""/>
+        <p:cNvGrpSpPr/>
+        <p:nvPr/>
+      </p:nvGrpSpPr>
+      <p:grpSpPr>
+        <a:xfrm>
+          <a:off x="0" y="0"/>
+          <a:ext cx="0" cy="0"/>
+          <a:chOff x="0" y="0"/>
+          <a:chExt cx="0" cy="0"/>
+        </a:xfrm>
+      </p:grpSpPr>
+      <p:sp>
+        <p:nvSpPr>
+          <p:cNvPr id="2" name="Slide Image Placeholder 1"/>
+          <p:cNvSpPr>
+            <a:spLocks noGrp="1" noRot="1" noChangeAspect="1"/>
+          </p:cNvSpPr>
+          <p:nvPr>
+            <p:ph type="sldImg"/>
+          </p:nvPr>
+        </p:nvSpPr>
+        <p:spPr/>
+      </p:sp>
+      <p:sp>
+        <p:nvSpPr>
+          <p:cNvPr id="3" name="Notes Placeholder 2"/>
+          <p:cNvSpPr>
+            <a:spLocks noGrp="1"/>
+          </p:cNvSpPr>
+          <p:nvPr>
+            <p:ph type="body" idx="1"/>
+          </p:nvPr>
+        </p:nvSpPr>
+        <p:spPr/>
+        <p:txBody>
+          <a:bodyPr/>
+          <a:lstStyle/>
+          <a:p>
+            <a:r>
+              <a:rPr lang="en-US" dirty="0"/>
+              <a:t>Com essas quatro decisões, o protótipo de bancada pode começar na semana seguinte.</a:t>
+            </a:r>
+            <a:endParaRPr lang="en-US" dirty="0"/>
+          </a:p>
+        </p:txBody>
+      </p:sp>
+      <p:sp>
+        <p:nvSpPr>
+          <p:cNvPr id="4" name="Slide Number Placeholder 3"/>
+          <p:cNvSpPr>
+            <a:spLocks noGrp="1"/>
+          </p:cNvSpPr>
+          <p:nvPr>
+            <p:ph type="sldNum" sz="quarter" idx="10"/>
+          </p:nvPr>
+        </p:nvSpPr>
+        <p:spPr/>
+        <p:txBody>
+          <a:bodyPr/>
+          <a:lstStyle/>
+          <a:p>
+            <a:fld id="{F7021451-1387-4CA6-816F-3879F97B5CBC}" type="slidenum">
+              <a:rPr lang="en-US"/>
+              <a:t>23</a:t>
             </a:fld>
             <a:endParaRPr lang="en-US"/>
           </a:p>
@@ -3886,8 +3976,8 @@
         </p:blipFill>
         <p:spPr>
           <a:xfrm>
-            <a:off x="1027497" y="1143000"/>
-            <a:ext cx="10106526" cy="5120640"/>
+            <a:off x="1615086" y="1143000"/>
+            <a:ext cx="8931349" cy="5120640"/>
           </a:xfrm>
           <a:prstGeom prst="rect">
             <a:avLst/>
@@ -5196,7 +5286,25 @@
                   <a:schemeClr val="tx2"/>
                 </a:solidFill>
               </a:rPr>
-              <a:t>Módulos e concentradores com falha</a:t>
+              <a:t>Qual LED falhou e onde ele fica</a:t>
+            </a:r>
+            <a:endParaRPr lang="en-US" sz="1400" dirty="0"/>
+          </a:p>
+          <a:p>
+            <a:pPr marL="342900" indent="-342900">
+              <a:spcAft>
+                <a:spcPts val="800"/>
+              </a:spcAft>
+              <a:buSzPct val="100000"/>
+              <a:buChar char="•"/>
+            </a:pPr>
+            <a:r>
+              <a:rPr lang="en-US" sz="1400" dirty="0">
+                <a:solidFill>
+                  <a:schemeClr val="tx2"/>
+                </a:solidFill>
+              </a:rPr>
+              <a:t>Cadastro de LED por endereço</a:t>
             </a:r>
             <a:endParaRPr lang="en-US" sz="1400" dirty="0"/>
           </a:p>
@@ -5322,7 +5430,7 @@
                   <a:schemeClr val="tx1"/>
                 </a:solidFill>
               </a:rPr>
-              <a:t>Integração com Sybase, BHT e concentradores</a:t>
+              <a:t>Falha de LED e cadastro por endereço</a:t>
             </a:r>
             <a:endParaRPr lang="en-US" sz="2600" dirty="0"/>
           </a:p>
@@ -5330,7 +5438,7 @@
       </p:sp>
       <p:pic>
         <p:nvPicPr>
-          <p:cNvPr id="3" name="Image 0" descr="/home/claude/ptl-projeto/diagramas/sequencia.png">    </p:cNvPr>
+          <p:cNvPr id="3" name="Image 0" descr="/home/claude/ptl-projeto/diagramas/manutencao.png">    </p:cNvPr>
           <p:cNvPicPr>
             <a:picLocks noChangeAspect="1"/>
           </p:cNvPicPr>
@@ -5345,301 +5453,13 @@
         <p:spPr>
           <a:xfrm>
             <a:off x="457200" y="1188720"/>
-            <a:ext cx="7863840" cy="4605963"/>
+            <a:ext cx="11247120" cy="4798771"/>
           </a:xfrm>
           <a:prstGeom prst="rect">
             <a:avLst/>
           </a:prstGeom>
         </p:spPr>
       </p:pic>
-      <p:sp>
-        <p:nvSpPr>
-          <p:cNvPr id="4" name="Text 1"/>
-          <p:cNvSpPr txBox="1"/>
-          <p:nvPr/>
-        </p:nvSpPr>
-        <p:spPr>
-          <a:xfrm>
-            <a:off x="8549640" y="1325880"/>
-            <a:ext cx="3108960" cy="365760"/>
-          </a:xfrm>
-          <a:prstGeom prst="rect">
-            <a:avLst/>
-          </a:prstGeom>
-          <a:noFill/>
-          <a:ln/>
-        </p:spPr>
-        <p:txBody>
-          <a:bodyPr wrap="square" lIns="0" tIns="0" rIns="0" bIns="0" rtlCol="0" anchor="ctr"/>
-          <a:lstStyle/>
-          <a:p>
-            <a:pPr indent="0" marL="0">
-              <a:buNone/>
-            </a:pPr>
-            <a:r>
-              <a:rPr lang="en-US" sz="1600" b="1" dirty="0">
-                <a:solidFill>
-                  <a:schemeClr val="tx1"/>
-                </a:solidFill>
-              </a:rPr>
-              <a:t>Sybase ASE</a:t>
-            </a:r>
-            <a:endParaRPr lang="en-US" sz="1600" dirty="0"/>
-          </a:p>
-        </p:txBody>
-      </p:sp>
-      <p:sp>
-        <p:nvSpPr>
-          <p:cNvPr id="5" name="Text 2"/>
-          <p:cNvSpPr txBox="1"/>
-          <p:nvPr/>
-        </p:nvSpPr>
-        <p:spPr>
-          <a:xfrm>
-            <a:off x="8549640" y="1691640"/>
-            <a:ext cx="3108960" cy="731520"/>
-          </a:xfrm>
-          <a:prstGeom prst="rect">
-            <a:avLst/>
-          </a:prstGeom>
-          <a:noFill/>
-          <a:ln/>
-        </p:spPr>
-        <p:txBody>
-          <a:bodyPr wrap="square" lIns="0" tIns="0" rIns="0" bIns="0" rtlCol="0" anchor="t"/>
-          <a:lstStyle/>
-          <a:p>
-            <a:pPr indent="0" marL="0">
-              <a:buNone/>
-            </a:pPr>
-            <a:r>
-              <a:rPr lang="en-US" sz="1300" dirty="0">
-                <a:solidFill>
-                  <a:schemeClr val="accent6"/>
-                </a:solidFill>
-              </a:rPr>
-              <a:t>Tabelas do PTL (sessões, eventos e mapa) e views com os itens da caixa</a:t>
-            </a:r>
-            <a:endParaRPr lang="en-US" sz="1300" dirty="0"/>
-          </a:p>
-        </p:txBody>
-      </p:sp>
-      <p:sp>
-        <p:nvSpPr>
-          <p:cNvPr id="6" name="Text 3"/>
-          <p:cNvSpPr txBox="1"/>
-          <p:nvPr/>
-        </p:nvSpPr>
-        <p:spPr>
-          <a:xfrm>
-            <a:off x="8549640" y="2514600"/>
-            <a:ext cx="3108960" cy="365760"/>
-          </a:xfrm>
-          <a:prstGeom prst="rect">
-            <a:avLst/>
-          </a:prstGeom>
-          <a:noFill/>
-          <a:ln/>
-        </p:spPr>
-        <p:txBody>
-          <a:bodyPr wrap="square" lIns="0" tIns="0" rIns="0" bIns="0" rtlCol="0" anchor="ctr"/>
-          <a:lstStyle/>
-          <a:p>
-            <a:pPr indent="0" marL="0">
-              <a:buNone/>
-            </a:pPr>
-            <a:r>
-              <a:rPr lang="en-US" sz="1600" b="1" dirty="0">
-                <a:solidFill>
-                  <a:schemeClr val="tx1"/>
-                </a:solidFill>
-              </a:rPr>
-              <a:t>API do BHT</a:t>
-            </a:r>
-            <a:endParaRPr lang="en-US" sz="1600" dirty="0"/>
-          </a:p>
-        </p:txBody>
-      </p:sp>
-      <p:sp>
-        <p:nvSpPr>
-          <p:cNvPr id="7" name="Text 4"/>
-          <p:cNvSpPr txBox="1"/>
-          <p:nvPr/>
-        </p:nvSpPr>
-        <p:spPr>
-          <a:xfrm>
-            <a:off x="8549640" y="2880360"/>
-            <a:ext cx="3108960" cy="731520"/>
-          </a:xfrm>
-          <a:prstGeom prst="rect">
-            <a:avLst/>
-          </a:prstGeom>
-          <a:noFill/>
-          <a:ln/>
-        </p:spPr>
-        <p:txBody>
-          <a:bodyPr wrap="square" lIns="0" tIns="0" rIns="0" bIns="0" rtlCol="0" anchor="t"/>
-          <a:lstStyle/>
-          <a:p>
-            <a:pPr indent="0" marL="0">
-              <a:buNone/>
-            </a:pPr>
-            <a:r>
-              <a:rPr lang="en-US" sz="1300" dirty="0">
-                <a:solidFill>
-                  <a:schemeClr val="accent6"/>
-                </a:solidFill>
-              </a:rPr>
-              <a:t>Dados da caixa. O aviso de conclusão depende do fornecedor.</a:t>
-            </a:r>
-            <a:endParaRPr lang="en-US" sz="1300" dirty="0"/>
-          </a:p>
-        </p:txBody>
-      </p:sp>
-      <p:sp>
-        <p:nvSpPr>
-          <p:cNvPr id="8" name="Text 5"/>
-          <p:cNvSpPr txBox="1"/>
-          <p:nvPr/>
-        </p:nvSpPr>
-        <p:spPr>
-          <a:xfrm>
-            <a:off x="8549640" y="3703320"/>
-            <a:ext cx="3108960" cy="365760"/>
-          </a:xfrm>
-          <a:prstGeom prst="rect">
-            <a:avLst/>
-          </a:prstGeom>
-          <a:noFill/>
-          <a:ln/>
-        </p:spPr>
-        <p:txBody>
-          <a:bodyPr wrap="square" lIns="0" tIns="0" rIns="0" bIns="0" rtlCol="0" anchor="ctr"/>
-          <a:lstStyle/>
-          <a:p>
-            <a:pPr indent="0" marL="0">
-              <a:buNone/>
-            </a:pPr>
-            <a:r>
-              <a:rPr lang="en-US" sz="1600" b="1" dirty="0">
-                <a:solidFill>
-                  <a:schemeClr val="tx1"/>
-                </a:solidFill>
-              </a:rPr>
-              <a:t>MQTT</a:t>
-            </a:r>
-            <a:endParaRPr lang="en-US" sz="1600" dirty="0"/>
-          </a:p>
-        </p:txBody>
-      </p:sp>
-      <p:sp>
-        <p:nvSpPr>
-          <p:cNvPr id="9" name="Text 6"/>
-          <p:cNvSpPr txBox="1"/>
-          <p:nvPr/>
-        </p:nvSpPr>
-        <p:spPr>
-          <a:xfrm>
-            <a:off x="8549640" y="4069080"/>
-            <a:ext cx="3108960" cy="731520"/>
-          </a:xfrm>
-          <a:prstGeom prst="rect">
-            <a:avLst/>
-          </a:prstGeom>
-          <a:noFill/>
-          <a:ln/>
-        </p:spPr>
-        <p:txBody>
-          <a:bodyPr wrap="square" lIns="0" tIns="0" rIns="0" bIns="0" rtlCol="0" anchor="t"/>
-          <a:lstStyle/>
-          <a:p>
-            <a:pPr indent="0" marL="0">
-              <a:buNone/>
-            </a:pPr>
-            <a:r>
-              <a:rPr lang="en-US" sz="1300" dirty="0">
-                <a:solidFill>
-                  <a:schemeClr val="accent6"/>
-                </a:solidFill>
-              </a:rPr>
-              <a:t>Comandos e eventos de cada estação, com usuário e permissão próprios</a:t>
-            </a:r>
-            <a:endParaRPr lang="en-US" sz="1300" dirty="0"/>
-          </a:p>
-        </p:txBody>
-      </p:sp>
-      <p:sp>
-        <p:nvSpPr>
-          <p:cNvPr id="10" name="Text 7"/>
-          <p:cNvSpPr txBox="1"/>
-          <p:nvPr/>
-        </p:nvSpPr>
-        <p:spPr>
-          <a:xfrm>
-            <a:off x="8549640" y="4892040"/>
-            <a:ext cx="3108960" cy="365760"/>
-          </a:xfrm>
-          <a:prstGeom prst="rect">
-            <a:avLst/>
-          </a:prstGeom>
-          <a:noFill/>
-          <a:ln/>
-        </p:spPr>
-        <p:txBody>
-          <a:bodyPr wrap="square" lIns="0" tIns="0" rIns="0" bIns="0" rtlCol="0" anchor="ctr"/>
-          <a:lstStyle/>
-          <a:p>
-            <a:pPr indent="0" marL="0">
-              <a:buNone/>
-            </a:pPr>
-            <a:r>
-              <a:rPr lang="en-US" sz="1600" b="1" dirty="0">
-                <a:solidFill>
-                  <a:schemeClr val="tx1"/>
-                </a:solidFill>
-              </a:rPr>
-              <a:t>Rede</a:t>
-            </a:r>
-            <a:endParaRPr lang="en-US" sz="1600" dirty="0"/>
-          </a:p>
-        </p:txBody>
-      </p:sp>
-      <p:sp>
-        <p:nvSpPr>
-          <p:cNvPr id="11" name="Text 8"/>
-          <p:cNvSpPr txBox="1"/>
-          <p:nvPr/>
-        </p:nvSpPr>
-        <p:spPr>
-          <a:xfrm>
-            <a:off x="8549640" y="5257800"/>
-            <a:ext cx="3108960" cy="731520"/>
-          </a:xfrm>
-          <a:prstGeom prst="rect">
-            <a:avLst/>
-          </a:prstGeom>
-          <a:noFill/>
-          <a:ln/>
-        </p:spPr>
-        <p:txBody>
-          <a:bodyPr wrap="square" lIns="0" tIns="0" rIns="0" bIns="0" rtlCol="0" anchor="t"/>
-          <a:lstStyle/>
-          <a:p>
-            <a:pPr indent="0" marL="0">
-              <a:buNone/>
-            </a:pPr>
-            <a:r>
-              <a:rPr lang="en-US" sz="1300" dirty="0">
-                <a:solidFill>
-                  <a:schemeClr val="accent6"/>
-                </a:solidFill>
-              </a:rPr>
-              <a:t>VLAN só do PTL. Coletores no Wi-Fi atual.</a:t>
-            </a:r>
-            <a:endParaRPr lang="en-US" sz="1300" dirty="0"/>
-          </a:p>
-        </p:txBody>
-      </p:sp>
       <p:sp>
         <p:nvSpPr>
           <p:cNvPr id="25" name="Slide Number Placeholder 0"/>
@@ -5720,8 +5540,8 @@
         </p:nvSpPr>
         <p:spPr>
           <a:xfrm>
-            <a:off x="731520" y="1737360"/>
-            <a:ext cx="10515600" cy="1828800"/>
+            <a:off x="548640" y="274320"/>
+            <a:ext cx="11064240" cy="777240"/>
           </a:xfrm>
           <a:prstGeom prst="rect">
             <a:avLst/>
@@ -5730,36 +5550,58 @@
           <a:ln/>
         </p:spPr>
         <p:txBody>
-          <a:bodyPr wrap="square" lIns="0" tIns="0" rIns="0" bIns="0" rtlCol="0" anchor="b"/>
+          <a:bodyPr wrap="square" lIns="0" tIns="0" rIns="0" bIns="0" rtlCol="0" anchor="ctr"/>
           <a:lstStyle/>
           <a:p>
             <a:pPr algn="l" indent="0" marL="0">
               <a:buNone/>
             </a:pPr>
             <a:r>
-              <a:rPr lang="en-US" sz="4000" b="1" dirty="0">
-                <a:solidFill>
-                  <a:schemeClr val="bg1"/>
-                </a:solidFill>
-              </a:rPr>
-              <a:t>Orçamento</a:t>
-            </a:r>
-            <a:endParaRPr lang="en-US" sz="4000" dirty="0"/>
-          </a:p>
-        </p:txBody>
-      </p:sp>
-      <p:sp>
-        <p:nvSpPr>
-          <p:cNvPr id="3" name="Text 0"/>
-          <p:cNvSpPr/>
-          <p:nvPr>
-            <p:ph idx="101" type="body" hasCustomPrompt="1"/>
-          </p:nvPr>
-        </p:nvSpPr>
-        <p:spPr>
-          <a:xfrm>
-            <a:off x="731520" y="3794760"/>
-            <a:ext cx="10515600" cy="822960"/>
+              <a:rPr lang="en-US" sz="2600" b="1" dirty="0">
+                <a:solidFill>
+                  <a:schemeClr val="tx1"/>
+                </a:solidFill>
+              </a:rPr>
+              <a:t>Integração com Sybase, BHT e concentradores</a:t>
+            </a:r>
+            <a:endParaRPr lang="en-US" sz="2600" dirty="0"/>
+          </a:p>
+        </p:txBody>
+      </p:sp>
+      <p:pic>
+        <p:nvPicPr>
+          <p:cNvPr id="3" name="Image 0" descr="/home/claude/ptl-projeto/diagramas/sequencia.png">    </p:cNvPr>
+          <p:cNvPicPr>
+            <a:picLocks noChangeAspect="1"/>
+          </p:cNvPicPr>
+          <p:nvPr/>
+        </p:nvPicPr>
+        <p:blipFill>
+          <a:blip r:embed="rId1"/>
+          <a:stretch>
+            <a:fillRect/>
+          </a:stretch>
+        </p:blipFill>
+        <p:spPr>
+          <a:xfrm>
+            <a:off x="457200" y="1188720"/>
+            <a:ext cx="7863840" cy="4605963"/>
+          </a:xfrm>
+          <a:prstGeom prst="rect">
+            <a:avLst/>
+          </a:prstGeom>
+        </p:spPr>
+      </p:pic>
+      <p:sp>
+        <p:nvSpPr>
+          <p:cNvPr id="4" name="Text 1"/>
+          <p:cNvSpPr txBox="1"/>
+          <p:nvPr/>
+        </p:nvSpPr>
+        <p:spPr>
+          <a:xfrm>
+            <a:off x="8549640" y="1325880"/>
+            <a:ext cx="3108960" cy="365760"/>
           </a:xfrm>
           <a:prstGeom prst="rect">
             <a:avLst/>
@@ -5768,21 +5610,273 @@
           <a:ln/>
         </p:spPr>
         <p:txBody>
+          <a:bodyPr wrap="square" lIns="0" tIns="0" rIns="0" bIns="0" rtlCol="0" anchor="ctr"/>
+          <a:lstStyle/>
+          <a:p>
+            <a:pPr indent="0" marL="0">
+              <a:buNone/>
+            </a:pPr>
+            <a:r>
+              <a:rPr lang="en-US" sz="1600" b="1" dirty="0">
+                <a:solidFill>
+                  <a:schemeClr val="tx1"/>
+                </a:solidFill>
+              </a:rPr>
+              <a:t>Sybase ASE</a:t>
+            </a:r>
+            <a:endParaRPr lang="en-US" sz="1600" dirty="0"/>
+          </a:p>
+        </p:txBody>
+      </p:sp>
+      <p:sp>
+        <p:nvSpPr>
+          <p:cNvPr id="5" name="Text 2"/>
+          <p:cNvSpPr txBox="1"/>
+          <p:nvPr/>
+        </p:nvSpPr>
+        <p:spPr>
+          <a:xfrm>
+            <a:off x="8549640" y="1691640"/>
+            <a:ext cx="3108960" cy="731520"/>
+          </a:xfrm>
+          <a:prstGeom prst="rect">
+            <a:avLst/>
+          </a:prstGeom>
+          <a:noFill/>
+          <a:ln/>
+        </p:spPr>
+        <p:txBody>
           <a:bodyPr wrap="square" lIns="0" tIns="0" rIns="0" bIns="0" rtlCol="0" anchor="t"/>
           <a:lstStyle/>
           <a:p>
-            <a:pPr algn="l" indent="0" marL="0">
+            <a:pPr indent="0" marL="0">
               <a:buNone/>
             </a:pPr>
             <a:r>
-              <a:rPr lang="en-US" sz="1800" dirty="0">
-                <a:solidFill>
-                  <a:srgbClr val="C9D3E0"/>
-                </a:solidFill>
-              </a:rPr>
-              <a:t>Preços pesquisados em lojas brasileiras em 23 e 26/10/2026. Os itens estimados estão marcados na planilha.</a:t>
-            </a:r>
-            <a:endParaRPr lang="en-US" sz="1800" dirty="0"/>
+              <a:rPr lang="en-US" sz="1300" dirty="0">
+                <a:solidFill>
+                  <a:schemeClr val="accent6"/>
+                </a:solidFill>
+              </a:rPr>
+              <a:t>Tabelas do PTL (sessões, eventos e mapa) e views com os itens da caixa</a:t>
+            </a:r>
+            <a:endParaRPr lang="en-US" sz="1300" dirty="0"/>
+          </a:p>
+        </p:txBody>
+      </p:sp>
+      <p:sp>
+        <p:nvSpPr>
+          <p:cNvPr id="6" name="Text 3"/>
+          <p:cNvSpPr txBox="1"/>
+          <p:nvPr/>
+        </p:nvSpPr>
+        <p:spPr>
+          <a:xfrm>
+            <a:off x="8549640" y="2514600"/>
+            <a:ext cx="3108960" cy="365760"/>
+          </a:xfrm>
+          <a:prstGeom prst="rect">
+            <a:avLst/>
+          </a:prstGeom>
+          <a:noFill/>
+          <a:ln/>
+        </p:spPr>
+        <p:txBody>
+          <a:bodyPr wrap="square" lIns="0" tIns="0" rIns="0" bIns="0" rtlCol="0" anchor="ctr"/>
+          <a:lstStyle/>
+          <a:p>
+            <a:pPr indent="0" marL="0">
+              <a:buNone/>
+            </a:pPr>
+            <a:r>
+              <a:rPr lang="en-US" sz="1600" b="1" dirty="0">
+                <a:solidFill>
+                  <a:schemeClr val="tx1"/>
+                </a:solidFill>
+              </a:rPr>
+              <a:t>API do BHT</a:t>
+            </a:r>
+            <a:endParaRPr lang="en-US" sz="1600" dirty="0"/>
+          </a:p>
+        </p:txBody>
+      </p:sp>
+      <p:sp>
+        <p:nvSpPr>
+          <p:cNvPr id="7" name="Text 4"/>
+          <p:cNvSpPr txBox="1"/>
+          <p:nvPr/>
+        </p:nvSpPr>
+        <p:spPr>
+          <a:xfrm>
+            <a:off x="8549640" y="2880360"/>
+            <a:ext cx="3108960" cy="731520"/>
+          </a:xfrm>
+          <a:prstGeom prst="rect">
+            <a:avLst/>
+          </a:prstGeom>
+          <a:noFill/>
+          <a:ln/>
+        </p:spPr>
+        <p:txBody>
+          <a:bodyPr wrap="square" lIns="0" tIns="0" rIns="0" bIns="0" rtlCol="0" anchor="t"/>
+          <a:lstStyle/>
+          <a:p>
+            <a:pPr indent="0" marL="0">
+              <a:buNone/>
+            </a:pPr>
+            <a:r>
+              <a:rPr lang="en-US" sz="1300" dirty="0">
+                <a:solidFill>
+                  <a:schemeClr val="accent6"/>
+                </a:solidFill>
+              </a:rPr>
+              <a:t>Dados da caixa. O aviso de conclusão depende do fornecedor.</a:t>
+            </a:r>
+            <a:endParaRPr lang="en-US" sz="1300" dirty="0"/>
+          </a:p>
+        </p:txBody>
+      </p:sp>
+      <p:sp>
+        <p:nvSpPr>
+          <p:cNvPr id="8" name="Text 5"/>
+          <p:cNvSpPr txBox="1"/>
+          <p:nvPr/>
+        </p:nvSpPr>
+        <p:spPr>
+          <a:xfrm>
+            <a:off x="8549640" y="3703320"/>
+            <a:ext cx="3108960" cy="365760"/>
+          </a:xfrm>
+          <a:prstGeom prst="rect">
+            <a:avLst/>
+          </a:prstGeom>
+          <a:noFill/>
+          <a:ln/>
+        </p:spPr>
+        <p:txBody>
+          <a:bodyPr wrap="square" lIns="0" tIns="0" rIns="0" bIns="0" rtlCol="0" anchor="ctr"/>
+          <a:lstStyle/>
+          <a:p>
+            <a:pPr indent="0" marL="0">
+              <a:buNone/>
+            </a:pPr>
+            <a:r>
+              <a:rPr lang="en-US" sz="1600" b="1" dirty="0">
+                <a:solidFill>
+                  <a:schemeClr val="tx1"/>
+                </a:solidFill>
+              </a:rPr>
+              <a:t>MQTT</a:t>
+            </a:r>
+            <a:endParaRPr lang="en-US" sz="1600" dirty="0"/>
+          </a:p>
+        </p:txBody>
+      </p:sp>
+      <p:sp>
+        <p:nvSpPr>
+          <p:cNvPr id="9" name="Text 6"/>
+          <p:cNvSpPr txBox="1"/>
+          <p:nvPr/>
+        </p:nvSpPr>
+        <p:spPr>
+          <a:xfrm>
+            <a:off x="8549640" y="4069080"/>
+            <a:ext cx="3108960" cy="731520"/>
+          </a:xfrm>
+          <a:prstGeom prst="rect">
+            <a:avLst/>
+          </a:prstGeom>
+          <a:noFill/>
+          <a:ln/>
+        </p:spPr>
+        <p:txBody>
+          <a:bodyPr wrap="square" lIns="0" tIns="0" rIns="0" bIns="0" rtlCol="0" anchor="t"/>
+          <a:lstStyle/>
+          <a:p>
+            <a:pPr indent="0" marL="0">
+              <a:buNone/>
+            </a:pPr>
+            <a:r>
+              <a:rPr lang="en-US" sz="1300" dirty="0">
+                <a:solidFill>
+                  <a:schemeClr val="accent6"/>
+                </a:solidFill>
+              </a:rPr>
+              <a:t>Comandos e eventos de cada estação, com usuário e permissão próprios</a:t>
+            </a:r>
+            <a:endParaRPr lang="en-US" sz="1300" dirty="0"/>
+          </a:p>
+        </p:txBody>
+      </p:sp>
+      <p:sp>
+        <p:nvSpPr>
+          <p:cNvPr id="10" name="Text 7"/>
+          <p:cNvSpPr txBox="1"/>
+          <p:nvPr/>
+        </p:nvSpPr>
+        <p:spPr>
+          <a:xfrm>
+            <a:off x="8549640" y="4892040"/>
+            <a:ext cx="3108960" cy="365760"/>
+          </a:xfrm>
+          <a:prstGeom prst="rect">
+            <a:avLst/>
+          </a:prstGeom>
+          <a:noFill/>
+          <a:ln/>
+        </p:spPr>
+        <p:txBody>
+          <a:bodyPr wrap="square" lIns="0" tIns="0" rIns="0" bIns="0" rtlCol="0" anchor="ctr"/>
+          <a:lstStyle/>
+          <a:p>
+            <a:pPr indent="0" marL="0">
+              <a:buNone/>
+            </a:pPr>
+            <a:r>
+              <a:rPr lang="en-US" sz="1600" b="1" dirty="0">
+                <a:solidFill>
+                  <a:schemeClr val="tx1"/>
+                </a:solidFill>
+              </a:rPr>
+              <a:t>Rede</a:t>
+            </a:r>
+            <a:endParaRPr lang="en-US" sz="1600" dirty="0"/>
+          </a:p>
+        </p:txBody>
+      </p:sp>
+      <p:sp>
+        <p:nvSpPr>
+          <p:cNvPr id="11" name="Text 8"/>
+          <p:cNvSpPr txBox="1"/>
+          <p:nvPr/>
+        </p:nvSpPr>
+        <p:spPr>
+          <a:xfrm>
+            <a:off x="8549640" y="5257800"/>
+            <a:ext cx="3108960" cy="731520"/>
+          </a:xfrm>
+          <a:prstGeom prst="rect">
+            <a:avLst/>
+          </a:prstGeom>
+          <a:noFill/>
+          <a:ln/>
+        </p:spPr>
+        <p:txBody>
+          <a:bodyPr wrap="square" lIns="0" tIns="0" rIns="0" bIns="0" rtlCol="0" anchor="t"/>
+          <a:lstStyle/>
+          <a:p>
+            <a:pPr indent="0" marL="0">
+              <a:buNone/>
+            </a:pPr>
+            <a:r>
+              <a:rPr lang="en-US" sz="1300" dirty="0">
+                <a:solidFill>
+                  <a:schemeClr val="accent6"/>
+                </a:solidFill>
+              </a:rPr>
+              <a:t>VLAN só do PTL. Coletores no Wi-Fi atual.</a:t>
+            </a:r>
+            <a:endParaRPr lang="en-US" sz="1300" dirty="0"/>
           </a:p>
         </p:txBody>
       </p:sp>
@@ -5866,6 +5960,152 @@
         </p:nvSpPr>
         <p:spPr>
           <a:xfrm>
+            <a:off x="731520" y="1737360"/>
+            <a:ext cx="10515600" cy="1828800"/>
+          </a:xfrm>
+          <a:prstGeom prst="rect">
+            <a:avLst/>
+          </a:prstGeom>
+          <a:noFill/>
+          <a:ln/>
+        </p:spPr>
+        <p:txBody>
+          <a:bodyPr wrap="square" lIns="0" tIns="0" rIns="0" bIns="0" rtlCol="0" anchor="b"/>
+          <a:lstStyle/>
+          <a:p>
+            <a:pPr algn="l" indent="0" marL="0">
+              <a:buNone/>
+            </a:pPr>
+            <a:r>
+              <a:rPr lang="en-US" sz="4000" b="1" dirty="0">
+                <a:solidFill>
+                  <a:schemeClr val="bg1"/>
+                </a:solidFill>
+              </a:rPr>
+              <a:t>Orçamento</a:t>
+            </a:r>
+            <a:endParaRPr lang="en-US" sz="4000" dirty="0"/>
+          </a:p>
+        </p:txBody>
+      </p:sp>
+      <p:sp>
+        <p:nvSpPr>
+          <p:cNvPr id="3" name="Text 0"/>
+          <p:cNvSpPr/>
+          <p:nvPr>
+            <p:ph idx="101" type="body" hasCustomPrompt="1"/>
+          </p:nvPr>
+        </p:nvSpPr>
+        <p:spPr>
+          <a:xfrm>
+            <a:off x="731520" y="3794760"/>
+            <a:ext cx="10515600" cy="822960"/>
+          </a:xfrm>
+          <a:prstGeom prst="rect">
+            <a:avLst/>
+          </a:prstGeom>
+          <a:noFill/>
+          <a:ln/>
+        </p:spPr>
+        <p:txBody>
+          <a:bodyPr wrap="square" lIns="0" tIns="0" rIns="0" bIns="0" rtlCol="0" anchor="t"/>
+          <a:lstStyle/>
+          <a:p>
+            <a:pPr algn="l" indent="0" marL="0">
+              <a:buNone/>
+            </a:pPr>
+            <a:r>
+              <a:rPr lang="en-US" sz="1800" dirty="0">
+                <a:solidFill>
+                  <a:srgbClr val="C9D3E0"/>
+                </a:solidFill>
+              </a:rPr>
+              <a:t>Preços pesquisados em lojas brasileiras em 23 e 26/10/2026. Os itens estimados estão marcados na planilha.</a:t>
+            </a:r>
+            <a:endParaRPr lang="en-US" sz="1800" dirty="0"/>
+          </a:p>
+        </p:txBody>
+      </p:sp>
+      <p:sp>
+        <p:nvSpPr>
+          <p:cNvPr id="25" name="Slide Number Placeholder 0"/>
+          <p:cNvSpPr>
+            <a:spLocks noGrp="1"/>
+          </p:cNvSpPr>
+          <p:nvPr>
+            <p:ph type="sldNum" sz="quarter" idx="4294967295"/>
+          </p:nvPr>
+        </p:nvSpPr>
+        <p:spPr>
+          <a:xfrm>
+            <a:off x="11338560" y="6355080"/>
+            <a:ext cx="548640" cy="274320"/>
+          </a:xfrm>
+          <a:prstGeom prst="rect">
+            <a:avLst/>
+          </a:prstGeom>
+          <a:extLst>
+            <a:ext uri="{C572A759-6A51-4108-AA02-DFA0A04FC94B}">
+              <ma14:wrappingTextBoxFlag xmlns:ma14="http://schemas.microsoft.com/office/mac/drawingml/2011/main" val="0"/>
+            </a:ext>
+          </a:extLst>
+        </p:spPr>
+        <p:txBody>
+          <a:bodyPr/>
+          <a:lstStyle>
+            <a:lvl1pPr>
+              <a:defRPr sz="1000">
+                <a:solidFill>
+                  <a:srgbClr val="8A97AB"/>
+                </a:solidFill>
+              </a:defRPr>
+            </a:lvl1pPr>
+          </a:lstStyle>
+          <a:p>
+            <a:pPr algn="l"/>
+            <a:fld id="{F7021451-1387-4CA6-816F-3879F97B5CBC}" type="slidenum">
+              <a:rPr b="0" lang="en-US"/>
+              <a:t>17</a:t>
+            </a:fld>
+            <a:endParaRPr lang="en-US"/>
+          </a:p>
+        </p:txBody>
+      </p:sp>
+    </p:spTree>
+  </p:cSld>
+  <p:clrMapOvr>
+    <a:masterClrMapping/>
+  </p:clrMapOvr>
+</p:sld>
+</file>
+
+<file path=ppt/slides/slide18.xml><?xml version="1.0" encoding="utf-8"?>
+<p:sld xmlns:a="http://schemas.openxmlformats.org/drawingml/2006/main" xmlns:r="http://schemas.openxmlformats.org/officeDocument/2006/relationships" xmlns:p="http://schemas.openxmlformats.org/presentationml/2006/main">
+  <p:cSld name="Slide 18">
+    <p:spTree>
+      <p:nvGrpSpPr>
+        <p:cNvPr id="1" name=""/>
+        <p:cNvGrpSpPr/>
+        <p:nvPr/>
+      </p:nvGrpSpPr>
+      <p:grpSpPr>
+        <a:xfrm>
+          <a:off x="0" y="0"/>
+          <a:ext cx="0" cy="0"/>
+          <a:chOff x="0" y="0"/>
+          <a:chExt cx="0" cy="0"/>
+        </a:xfrm>
+      </p:grpSpPr>
+      <p:sp>
+        <p:nvSpPr>
+          <p:cNvPr id="2" name="Text 0"/>
+          <p:cNvSpPr/>
+          <p:nvPr>
+            <p:ph idx="100" type="title" hasCustomPrompt="1"/>
+          </p:nvPr>
+        </p:nvSpPr>
+        <p:spPr>
+          <a:xfrm>
             <a:off x="548640" y="274320"/>
             <a:ext cx="11064240" cy="777240"/>
           </a:xfrm>
@@ -5912,7 +6152,7 @@
       </p:graphicFrame>
       <p:graphicFrame>
         <p:nvGraphicFramePr>
-          <p:cNvPr id="18" name="Table 0"/>
+          <p:cNvPr id="19" name="Table 0"/>
           <p:cNvGraphicFramePr>
             <a:graphicFrameLocks noGrp="1"/>
           </p:cNvGraphicFramePr>
@@ -6133,7 +6373,7 @@
                             <a:schemeClr val="tx2"/>
                           </a:solidFill>
                         </a:rPr>
-                        <a:t>16.707</a:t>
+                        <a:t>16.431</a:t>
                       </a:r>
                       <a:endParaRPr lang="en-US" sz="1300" dirty="0"/>
                     </a:p>
@@ -6251,7 +6491,7 @@
                             <a:schemeClr val="tx2"/>
                           </a:solidFill>
                         </a:rPr>
-                        <a:t>22.204</a:t>
+                        <a:t>21.806</a:t>
                       </a:r>
                       <a:endParaRPr lang="en-US" sz="1300" dirty="0"/>
                     </a:p>
@@ -6369,7 +6609,7 @@
                             <a:schemeClr val="tx2"/>
                           </a:solidFill>
                         </a:rPr>
-                        <a:t>23.542</a:t>
+                        <a:t>23.144</a:t>
                       </a:r>
                       <a:endParaRPr lang="en-US" sz="1300" dirty="0"/>
                     </a:p>
@@ -6487,7 +6727,7 @@
                             <a:schemeClr val="tx2"/>
                           </a:solidFill>
                         </a:rPr>
-                        <a:t>38.859</a:t>
+                        <a:t>38.473</a:t>
                       </a:r>
                       <a:endParaRPr lang="en-US" sz="1300" dirty="0"/>
                     </a:p>
@@ -6605,7 +6845,7 @@
                             <a:schemeClr val="tx2"/>
                           </a:solidFill>
                         </a:rPr>
-                        <a:t>50.447</a:t>
+                        <a:t>50.062</a:t>
                       </a:r>
                       <a:endParaRPr lang="en-US" sz="1300" dirty="0"/>
                     </a:p>
@@ -6684,900 +6924,9 @@
                   <a:schemeClr val="accent6"/>
                 </a:solidFill>
               </a:rPr>
-              <a:t>Software interno: cerca de 1.104 h (A) e 1.024 h (B), ou R$ 115 mil e R$ 106 mil. Com 10% de contingência e o software, a Arquitetura A soma cerca de R$ 515 mil.</a:t>
+              <a:t>Software interno: cerca de 1.144 h (A) e 1.064 h (B), ou R$ 119 mil e R$ 110 mil. Com 10% de contingência e o software, a Arquitetura A soma cerca de R$ 510 mil.</a:t>
             </a:r>
             <a:endParaRPr lang="en-US" sz="1200" dirty="0"/>
-          </a:p>
-        </p:txBody>
-      </p:sp>
-      <p:sp>
-        <p:nvSpPr>
-          <p:cNvPr id="25" name="Slide Number Placeholder 0"/>
-          <p:cNvSpPr>
-            <a:spLocks noGrp="1"/>
-          </p:cNvSpPr>
-          <p:nvPr>
-            <p:ph type="sldNum" sz="quarter" idx="4294967295"/>
-          </p:nvPr>
-        </p:nvSpPr>
-        <p:spPr>
-          <a:xfrm>
-            <a:off x="11338560" y="6355080"/>
-            <a:ext cx="548640" cy="274320"/>
-          </a:xfrm>
-          <a:prstGeom prst="rect">
-            <a:avLst/>
-          </a:prstGeom>
-          <a:extLst>
-            <a:ext uri="{C572A759-6A51-4108-AA02-DFA0A04FC94B}">
-              <ma14:wrappingTextBoxFlag xmlns:ma14="http://schemas.microsoft.com/office/mac/drawingml/2011/main" val="0"/>
-            </a:ext>
-          </a:extLst>
-        </p:spPr>
-        <p:txBody>
-          <a:bodyPr/>
-          <a:lstStyle>
-            <a:lvl1pPr>
-              <a:defRPr sz="1000">
-                <a:solidFill>
-                  <a:srgbClr val="8A97AB"/>
-                </a:solidFill>
-              </a:defRPr>
-            </a:lvl1pPr>
-          </a:lstStyle>
-          <a:p>
-            <a:pPr algn="l"/>
-            <a:fld id="{F7021451-1387-4CA6-816F-3879F97B5CBC}" type="slidenum">
-              <a:rPr b="0" lang="en-US"/>
-              <a:t>17</a:t>
-            </a:fld>
-            <a:endParaRPr lang="en-US"/>
-          </a:p>
-        </p:txBody>
-      </p:sp>
-    </p:spTree>
-  </p:cSld>
-  <p:clrMapOvr>
-    <a:masterClrMapping/>
-  </p:clrMapOvr>
-</p:sld>
-</file>
-
-<file path=ppt/slides/slide18.xml><?xml version="1.0" encoding="utf-8"?>
-<p:sld xmlns:a="http://schemas.openxmlformats.org/drawingml/2006/main" xmlns:r="http://schemas.openxmlformats.org/officeDocument/2006/relationships" xmlns:p="http://schemas.openxmlformats.org/presentationml/2006/main">
-  <p:cSld name="Slide 18">
-    <p:spTree>
-      <p:nvGrpSpPr>
-        <p:cNvPr id="1" name=""/>
-        <p:cNvGrpSpPr/>
-        <p:nvPr/>
-      </p:nvGrpSpPr>
-      <p:grpSpPr>
-        <a:xfrm>
-          <a:off x="0" y="0"/>
-          <a:ext cx="0" cy="0"/>
-          <a:chOff x="0" y="0"/>
-          <a:chExt cx="0" cy="0"/>
-        </a:xfrm>
-      </p:grpSpPr>
-      <p:sp>
-        <p:nvSpPr>
-          <p:cNvPr id="2" name="Text 0"/>
-          <p:cNvSpPr/>
-          <p:nvPr>
-            <p:ph idx="100" type="title" hasCustomPrompt="1"/>
-          </p:nvPr>
-        </p:nvSpPr>
-        <p:spPr>
-          <a:xfrm>
-            <a:off x="548640" y="274320"/>
-            <a:ext cx="11064240" cy="777240"/>
-          </a:xfrm>
-          <a:prstGeom prst="rect">
-            <a:avLst/>
-          </a:prstGeom>
-          <a:noFill/>
-          <a:ln/>
-        </p:spPr>
-        <p:txBody>
-          <a:bodyPr wrap="square" lIns="0" tIns="0" rIns="0" bIns="0" rtlCol="0" anchor="ctr"/>
-          <a:lstStyle/>
-          <a:p>
-            <a:pPr algn="l" indent="0" marL="0">
-              <a:buNone/>
-            </a:pPr>
-            <a:r>
-              <a:rPr lang="en-US" sz="2600" b="1" dirty="0">
-                <a:solidFill>
-                  <a:schemeClr val="tx1"/>
-                </a:solidFill>
-              </a:rPr>
-              <a:t>Fazer internamente ou comprar</a:t>
-            </a:r>
-            <a:endParaRPr lang="en-US" sz="2600" dirty="0"/>
-          </a:p>
-        </p:txBody>
-      </p:sp>
-      <p:sp>
-        <p:nvSpPr>
-          <p:cNvPr id="3" name="Shape 1"/>
-          <p:cNvSpPr/>
-          <p:nvPr/>
-        </p:nvSpPr>
-        <p:spPr>
-          <a:xfrm>
-            <a:off x="548640" y="1371600"/>
-            <a:ext cx="3520440" cy="4389120"/>
-          </a:xfrm>
-          <a:prstGeom prst="roundRect">
-            <a:avLst>
-              <a:gd name="adj" fmla="val 2597"/>
-            </a:avLst>
-          </a:prstGeom>
-          <a:solidFill>
-            <a:schemeClr val="bg1"/>
-          </a:solidFill>
-          <a:ln w="12700">
-            <a:solidFill>
-              <a:srgbClr val="D5DBE3"/>
-            </a:solidFill>
-            <a:prstDash val="solid"/>
-          </a:ln>
-          <a:effectLst>
-            <a:outerShdw sx="100000" sy="100000" kx="0" ky="0" algn="bl" rotWithShape="0" blurRad="76200" dist="25400" dir="5400000">
-              <a:srgbClr val="000000">
-                <a:alpha val="12000"/>
-              </a:srgbClr>
-            </a:outerShdw>
-          </a:effectLst>
-        </p:spPr>
-      </p:sp>
-      <p:sp>
-        <p:nvSpPr>
-          <p:cNvPr id="4" name="Shape 2"/>
-          <p:cNvSpPr/>
-          <p:nvPr/>
-        </p:nvSpPr>
-        <p:spPr>
-          <a:xfrm>
-            <a:off x="822960" y="1645920"/>
-            <a:ext cx="292608" cy="292608"/>
-          </a:xfrm>
-          <a:prstGeom prst="ellipse">
-            <a:avLst/>
-          </a:prstGeom>
-          <a:solidFill>
-            <a:schemeClr val="accent2"/>
-          </a:solidFill>
-          <a:ln w="12700">
-            <a:solidFill>
-              <a:schemeClr val="accent2"/>
-            </a:solidFill>
-            <a:prstDash val="solid"/>
-          </a:ln>
-        </p:spPr>
-      </p:sp>
-      <p:sp>
-        <p:nvSpPr>
-          <p:cNvPr id="5" name="Text 3"/>
-          <p:cNvSpPr txBox="1"/>
-          <p:nvPr/>
-        </p:nvSpPr>
-        <p:spPr>
-          <a:xfrm>
-            <a:off x="1234440" y="1572768"/>
-            <a:ext cx="2651760" cy="457200"/>
-          </a:xfrm>
-          <a:prstGeom prst="rect">
-            <a:avLst/>
-          </a:prstGeom>
-          <a:noFill/>
-          <a:ln/>
-        </p:spPr>
-        <p:txBody>
-          <a:bodyPr wrap="square" lIns="0" tIns="0" rIns="0" bIns="0" rtlCol="0" anchor="ctr"/>
-          <a:lstStyle/>
-          <a:p>
-            <a:pPr indent="0" marL="0">
-              <a:buNone/>
-            </a:pPr>
-            <a:r>
-              <a:rPr lang="en-US" sz="1800" b="1" dirty="0">
-                <a:solidFill>
-                  <a:schemeClr val="tx1"/>
-                </a:solidFill>
-              </a:rPr>
-              <a:t>Produção interna</a:t>
-            </a:r>
-            <a:endParaRPr lang="en-US" sz="1800" dirty="0"/>
-          </a:p>
-        </p:txBody>
-      </p:sp>
-      <p:sp>
-        <p:nvSpPr>
-          <p:cNvPr id="6" name="Text 4"/>
-          <p:cNvSpPr txBox="1"/>
-          <p:nvPr/>
-        </p:nvSpPr>
-        <p:spPr>
-          <a:xfrm>
-            <a:off x="822960" y="2148840"/>
-            <a:ext cx="3017520" cy="731520"/>
-          </a:xfrm>
-          <a:prstGeom prst="rect">
-            <a:avLst/>
-          </a:prstGeom>
-          <a:noFill/>
-          <a:ln/>
-        </p:spPr>
-        <p:txBody>
-          <a:bodyPr wrap="square" lIns="0" tIns="0" rIns="0" bIns="0" rtlCol="0" anchor="ctr"/>
-          <a:lstStyle/>
-          <a:p>
-            <a:pPr indent="0" marL="0">
-              <a:buNone/>
-            </a:pPr>
-            <a:r>
-              <a:rPr lang="en-US" sz="3000" b="1" dirty="0">
-                <a:solidFill>
-                  <a:schemeClr val="accent2"/>
-                </a:solidFill>
-              </a:rPr>
-              <a:t>R$ 364 mil</a:t>
-            </a:r>
-            <a:endParaRPr lang="en-US" sz="3000" dirty="0"/>
-          </a:p>
-        </p:txBody>
-      </p:sp>
-      <p:sp>
-        <p:nvSpPr>
-          <p:cNvPr id="7" name="Text 5"/>
-          <p:cNvSpPr txBox="1"/>
-          <p:nvPr/>
-        </p:nvSpPr>
-        <p:spPr>
-          <a:xfrm>
-            <a:off x="822960" y="2834640"/>
-            <a:ext cx="3017520" cy="320040"/>
-          </a:xfrm>
-          <a:prstGeom prst="rect">
-            <a:avLst/>
-          </a:prstGeom>
-          <a:noFill/>
-          <a:ln/>
-        </p:spPr>
-        <p:txBody>
-          <a:bodyPr wrap="square" lIns="0" tIns="0" rIns="0" bIns="0" rtlCol="0" anchor="ctr"/>
-          <a:lstStyle/>
-          <a:p>
-            <a:pPr indent="0" marL="0">
-              <a:buNone/>
-            </a:pPr>
-            <a:r>
-              <a:rPr lang="en-US" sz="1200" dirty="0">
-                <a:solidFill>
-                  <a:schemeClr val="accent6"/>
-                </a:solidFill>
-              </a:rPr>
-              <a:t>operação completa</a:t>
-            </a:r>
-            <a:endParaRPr lang="en-US" sz="1200" dirty="0"/>
-          </a:p>
-        </p:txBody>
-      </p:sp>
-      <p:sp>
-        <p:nvSpPr>
-          <p:cNvPr id="8" name="Text 6"/>
-          <p:cNvSpPr txBox="1"/>
-          <p:nvPr/>
-        </p:nvSpPr>
-        <p:spPr>
-          <a:xfrm>
-            <a:off x="822960" y="3291840"/>
-            <a:ext cx="3063240" cy="2286000"/>
-          </a:xfrm>
-          <a:prstGeom prst="rect">
-            <a:avLst/>
-          </a:prstGeom>
-          <a:noFill/>
-          <a:ln/>
-        </p:spPr>
-        <p:txBody>
-          <a:bodyPr wrap="square" rtlCol="0" anchor="t"/>
-          <a:lstStyle/>
-          <a:p>
-            <a:pPr marL="342900" indent="-342900">
-              <a:spcAft>
-                <a:spcPts val="600"/>
-              </a:spcAft>
-              <a:buSzPct val="100000"/>
-              <a:buChar char="•"/>
-            </a:pPr>
-            <a:r>
-              <a:rPr lang="en-US" sz="1400" dirty="0">
-                <a:solidFill>
-                  <a:schemeClr val="tx2"/>
-                </a:solidFill>
-              </a:rPr>
-              <a:t>Displays e placas comprados no Brasil</a:t>
-            </a:r>
-            <a:endParaRPr lang="en-US" sz="1400" dirty="0"/>
-          </a:p>
-          <a:p>
-            <a:pPr marL="342900" indent="-342900">
-              <a:spcAft>
-                <a:spcPts val="600"/>
-              </a:spcAft>
-              <a:buSzPct val="100000"/>
-              <a:buChar char="•"/>
-            </a:pPr>
-            <a:r>
-              <a:rPr lang="en-US" sz="1400" dirty="0">
-                <a:solidFill>
-                  <a:schemeClr val="tx2"/>
-                </a:solidFill>
-              </a:rPr>
-              <a:t>Montagem e manutenção pela equipe</a:t>
-            </a:r>
-            <a:endParaRPr lang="en-US" sz="1400" dirty="0"/>
-          </a:p>
-          <a:p>
-            <a:pPr marL="342900" indent="-342900">
-              <a:spcAft>
-                <a:spcPts val="600"/>
-              </a:spcAft>
-              <a:buSzPct val="100000"/>
-              <a:buChar char="•"/>
-            </a:pPr>
-            <a:r>
-              <a:rPr lang="en-US" sz="1400" dirty="0">
-                <a:solidFill>
-                  <a:schemeClr val="tx2"/>
-                </a:solidFill>
-              </a:rPr>
-              <a:t>Reposição imediata</a:t>
-            </a:r>
-            <a:endParaRPr lang="en-US" sz="1400" dirty="0"/>
-          </a:p>
-          <a:p>
-            <a:pPr marL="342900" indent="-342900">
-              <a:spcAft>
-                <a:spcPts val="600"/>
-              </a:spcAft>
-              <a:buSzPct val="100000"/>
-              <a:buChar char="•"/>
-            </a:pPr>
-            <a:r>
-              <a:rPr lang="en-US" sz="1400" dirty="0">
-                <a:solidFill>
-                  <a:schemeClr val="tx2"/>
-                </a:solidFill>
-              </a:rPr>
-              <a:t>Precisa de técnico de eletrônica</a:t>
-            </a:r>
-            <a:endParaRPr lang="en-US" sz="1400" dirty="0"/>
-          </a:p>
-        </p:txBody>
-      </p:sp>
-      <p:sp>
-        <p:nvSpPr>
-          <p:cNvPr id="9" name="Shape 7"/>
-          <p:cNvSpPr/>
-          <p:nvPr/>
-        </p:nvSpPr>
-        <p:spPr>
-          <a:xfrm>
-            <a:off x="4297680" y="1371600"/>
-            <a:ext cx="3520440" cy="4389120"/>
-          </a:xfrm>
-          <a:prstGeom prst="roundRect">
-            <a:avLst>
-              <a:gd name="adj" fmla="val 2597"/>
-            </a:avLst>
-          </a:prstGeom>
-          <a:solidFill>
-            <a:schemeClr val="bg1"/>
-          </a:solidFill>
-          <a:ln w="12700">
-            <a:solidFill>
-              <a:srgbClr val="D5DBE3"/>
-            </a:solidFill>
-            <a:prstDash val="solid"/>
-          </a:ln>
-          <a:effectLst>
-            <a:outerShdw sx="100000" sy="100000" kx="0" ky="0" algn="bl" rotWithShape="0" blurRad="76200" dist="25400" dir="5400000">
-              <a:srgbClr val="000000">
-                <a:alpha val="12000"/>
-              </a:srgbClr>
-            </a:outerShdw>
-          </a:effectLst>
-        </p:spPr>
-      </p:sp>
-      <p:sp>
-        <p:nvSpPr>
-          <p:cNvPr id="10" name="Shape 8"/>
-          <p:cNvSpPr/>
-          <p:nvPr/>
-        </p:nvSpPr>
-        <p:spPr>
-          <a:xfrm>
-            <a:off x="4572000" y="1645920"/>
-            <a:ext cx="292608" cy="292608"/>
-          </a:xfrm>
-          <a:prstGeom prst="ellipse">
-            <a:avLst/>
-          </a:prstGeom>
-          <a:solidFill>
-            <a:schemeClr val="accent3"/>
-          </a:solidFill>
-          <a:ln w="12700">
-            <a:solidFill>
-              <a:schemeClr val="accent3"/>
-            </a:solidFill>
-            <a:prstDash val="solid"/>
-          </a:ln>
-        </p:spPr>
-      </p:sp>
-      <p:sp>
-        <p:nvSpPr>
-          <p:cNvPr id="11" name="Text 9"/>
-          <p:cNvSpPr txBox="1"/>
-          <p:nvPr/>
-        </p:nvSpPr>
-        <p:spPr>
-          <a:xfrm>
-            <a:off x="4983480" y="1572768"/>
-            <a:ext cx="2651760" cy="457200"/>
-          </a:xfrm>
-          <a:prstGeom prst="rect">
-            <a:avLst/>
-          </a:prstGeom>
-          <a:noFill/>
-          <a:ln/>
-        </p:spPr>
-        <p:txBody>
-          <a:bodyPr wrap="square" lIns="0" tIns="0" rIns="0" bIns="0" rtlCol="0" anchor="ctr"/>
-          <a:lstStyle/>
-          <a:p>
-            <a:pPr indent="0" marL="0">
-              <a:buNone/>
-            </a:pPr>
-            <a:r>
-              <a:rPr lang="en-US" sz="1800" b="1" dirty="0">
-                <a:solidFill>
-                  <a:schemeClr val="tx1"/>
-                </a:solidFill>
-              </a:rPr>
-              <a:t>Placa própria (EMS)</a:t>
-            </a:r>
-            <a:endParaRPr lang="en-US" sz="1800" dirty="0"/>
-          </a:p>
-        </p:txBody>
-      </p:sp>
-      <p:sp>
-        <p:nvSpPr>
-          <p:cNvPr id="12" name="Text 10"/>
-          <p:cNvSpPr txBox="1"/>
-          <p:nvPr/>
-        </p:nvSpPr>
-        <p:spPr>
-          <a:xfrm>
-            <a:off x="4572000" y="2148840"/>
-            <a:ext cx="3017520" cy="731520"/>
-          </a:xfrm>
-          <a:prstGeom prst="rect">
-            <a:avLst/>
-          </a:prstGeom>
-          <a:noFill/>
-          <a:ln/>
-        </p:spPr>
-        <p:txBody>
-          <a:bodyPr wrap="square" lIns="0" tIns="0" rIns="0" bIns="0" rtlCol="0" anchor="ctr"/>
-          <a:lstStyle/>
-          <a:p>
-            <a:pPr indent="0" marL="0">
-              <a:buNone/>
-            </a:pPr>
-            <a:r>
-              <a:rPr lang="en-US" sz="3000" b="1" dirty="0">
-                <a:solidFill>
-                  <a:schemeClr val="accent3"/>
-                </a:solidFill>
-              </a:rPr>
-              <a:t>R$ 413 mil</a:t>
-            </a:r>
-            <a:endParaRPr lang="en-US" sz="3000" dirty="0"/>
-          </a:p>
-        </p:txBody>
-      </p:sp>
-      <p:sp>
-        <p:nvSpPr>
-          <p:cNvPr id="13" name="Text 11"/>
-          <p:cNvSpPr txBox="1"/>
-          <p:nvPr/>
-        </p:nvSpPr>
-        <p:spPr>
-          <a:xfrm>
-            <a:off x="4572000" y="2834640"/>
-            <a:ext cx="3017520" cy="320040"/>
-          </a:xfrm>
-          <a:prstGeom prst="rect">
-            <a:avLst/>
-          </a:prstGeom>
-          <a:noFill/>
-          <a:ln/>
-        </p:spPr>
-        <p:txBody>
-          <a:bodyPr wrap="square" lIns="0" tIns="0" rIns="0" bIns="0" rtlCol="0" anchor="ctr"/>
-          <a:lstStyle/>
-          <a:p>
-            <a:pPr indent="0" marL="0">
-              <a:buNone/>
-            </a:pPr>
-            <a:r>
-              <a:rPr lang="en-US" sz="1200" dirty="0">
-                <a:solidFill>
-                  <a:schemeClr val="accent6"/>
-                </a:solidFill>
-              </a:rPr>
-              <a:t>operação completa</a:t>
-            </a:r>
-            <a:endParaRPr lang="en-US" sz="1200" dirty="0"/>
-          </a:p>
-        </p:txBody>
-      </p:sp>
-      <p:sp>
-        <p:nvSpPr>
-          <p:cNvPr id="14" name="Text 12"/>
-          <p:cNvSpPr txBox="1"/>
-          <p:nvPr/>
-        </p:nvSpPr>
-        <p:spPr>
-          <a:xfrm>
-            <a:off x="4572000" y="3291840"/>
-            <a:ext cx="3063240" cy="2286000"/>
-          </a:xfrm>
-          <a:prstGeom prst="rect">
-            <a:avLst/>
-          </a:prstGeom>
-          <a:noFill/>
-          <a:ln/>
-        </p:spPr>
-        <p:txBody>
-          <a:bodyPr wrap="square" rtlCol="0" anchor="t"/>
-          <a:lstStyle/>
-          <a:p>
-            <a:pPr marL="342900" indent="-342900">
-              <a:spcAft>
-                <a:spcPts val="600"/>
-              </a:spcAft>
-              <a:buSzPct val="100000"/>
-              <a:buChar char="•"/>
-            </a:pPr>
-            <a:r>
-              <a:rPr lang="en-US" sz="1400" dirty="0">
-                <a:solidFill>
-                  <a:schemeClr val="tx2"/>
-                </a:solidFill>
-              </a:rPr>
-              <a:t>Projeto da placa, cerca de R$ 15 mil</a:t>
-            </a:r>
-            <a:endParaRPr lang="en-US" sz="1400" dirty="0"/>
-          </a:p>
-          <a:p>
-            <a:pPr marL="342900" indent="-342900">
-              <a:spcAft>
-                <a:spcPts val="600"/>
-              </a:spcAft>
-              <a:buSzPct val="100000"/>
-              <a:buChar char="•"/>
-            </a:pPr>
-            <a:r>
-              <a:rPr lang="en-US" sz="1400" dirty="0">
-                <a:solidFill>
-                  <a:schemeClr val="tx2"/>
-                </a:solidFill>
-              </a:rPr>
-              <a:t>Fabricação e montagem industrial</a:t>
-            </a:r>
-            <a:endParaRPr lang="en-US" sz="1400" dirty="0"/>
-          </a:p>
-          <a:p>
-            <a:pPr marL="342900" indent="-342900">
-              <a:spcAft>
-                <a:spcPts val="600"/>
-              </a:spcAft>
-              <a:buSzPct val="100000"/>
-              <a:buChar char="•"/>
-            </a:pPr>
-            <a:r>
-              <a:rPr lang="en-US" sz="1400" dirty="0">
-                <a:solidFill>
-                  <a:schemeClr val="tx2"/>
-                </a:solidFill>
-              </a:rPr>
-              <a:t>Peças sempre iguais</a:t>
-            </a:r>
-            <a:endParaRPr lang="en-US" sz="1400" dirty="0"/>
-          </a:p>
-          <a:p>
-            <a:pPr marL="342900" indent="-342900">
-              <a:spcAft>
-                <a:spcPts val="600"/>
-              </a:spcAft>
-              <a:buSzPct val="100000"/>
-              <a:buChar char="•"/>
-            </a:pPr>
-            <a:r>
-              <a:rPr lang="en-US" sz="1400" dirty="0">
-                <a:solidFill>
-                  <a:schemeClr val="tx2"/>
-                </a:solidFill>
-              </a:rPr>
-              <a:t>Importação e prazo maiores</a:t>
-            </a:r>
-            <a:endParaRPr lang="en-US" sz="1400" dirty="0"/>
-          </a:p>
-        </p:txBody>
-      </p:sp>
-      <p:sp>
-        <p:nvSpPr>
-          <p:cNvPr id="15" name="Shape 13"/>
-          <p:cNvSpPr/>
-          <p:nvPr/>
-        </p:nvSpPr>
-        <p:spPr>
-          <a:xfrm>
-            <a:off x="8046720" y="1371600"/>
-            <a:ext cx="3520440" cy="4389120"/>
-          </a:xfrm>
-          <a:prstGeom prst="roundRect">
-            <a:avLst>
-              <a:gd name="adj" fmla="val 2597"/>
-            </a:avLst>
-          </a:prstGeom>
-          <a:solidFill>
-            <a:schemeClr val="bg1"/>
-          </a:solidFill>
-          <a:ln w="12700">
-            <a:solidFill>
-              <a:srgbClr val="D5DBE3"/>
-            </a:solidFill>
-            <a:prstDash val="solid"/>
-          </a:ln>
-          <a:effectLst>
-            <a:outerShdw sx="100000" sy="100000" kx="0" ky="0" algn="bl" rotWithShape="0" blurRad="76200" dist="25400" dir="5400000">
-              <a:srgbClr val="000000">
-                <a:alpha val="12000"/>
-              </a:srgbClr>
-            </a:outerShdw>
-          </a:effectLst>
-        </p:spPr>
-      </p:sp>
-      <p:sp>
-        <p:nvSpPr>
-          <p:cNvPr id="16" name="Shape 14"/>
-          <p:cNvSpPr/>
-          <p:nvPr/>
-        </p:nvSpPr>
-        <p:spPr>
-          <a:xfrm>
-            <a:off x="8321040" y="1645920"/>
-            <a:ext cx="292608" cy="292608"/>
-          </a:xfrm>
-          <a:prstGeom prst="ellipse">
-            <a:avLst/>
-          </a:prstGeom>
-          <a:solidFill>
-            <a:schemeClr val="accent5"/>
-          </a:solidFill>
-          <a:ln w="12700">
-            <a:solidFill>
-              <a:schemeClr val="accent5"/>
-            </a:solidFill>
-            <a:prstDash val="solid"/>
-          </a:ln>
-        </p:spPr>
-      </p:sp>
-      <p:sp>
-        <p:nvSpPr>
-          <p:cNvPr id="17" name="Text 15"/>
-          <p:cNvSpPr txBox="1"/>
-          <p:nvPr/>
-        </p:nvSpPr>
-        <p:spPr>
-          <a:xfrm>
-            <a:off x="8732520" y="1572768"/>
-            <a:ext cx="2651760" cy="457200"/>
-          </a:xfrm>
-          <a:prstGeom prst="rect">
-            <a:avLst/>
-          </a:prstGeom>
-          <a:noFill/>
-          <a:ln/>
-        </p:spPr>
-        <p:txBody>
-          <a:bodyPr wrap="square" lIns="0" tIns="0" rIns="0" bIns="0" rtlCol="0" anchor="ctr"/>
-          <a:lstStyle/>
-          <a:p>
-            <a:pPr indent="0" marL="0">
-              <a:buNone/>
-            </a:pPr>
-            <a:r>
-              <a:rPr lang="en-US" sz="1800" b="1" dirty="0">
-                <a:solidFill>
-                  <a:schemeClr val="tx1"/>
-                </a:solidFill>
-              </a:rPr>
-              <a:t>PTL comercial</a:t>
-            </a:r>
-            <a:endParaRPr lang="en-US" sz="1800" dirty="0"/>
-          </a:p>
-        </p:txBody>
-      </p:sp>
-      <p:sp>
-        <p:nvSpPr>
-          <p:cNvPr id="18" name="Text 16"/>
-          <p:cNvSpPr txBox="1"/>
-          <p:nvPr/>
-        </p:nvSpPr>
-        <p:spPr>
-          <a:xfrm>
-            <a:off x="8321040" y="2148840"/>
-            <a:ext cx="3017520" cy="731520"/>
-          </a:xfrm>
-          <a:prstGeom prst="rect">
-            <a:avLst/>
-          </a:prstGeom>
-          <a:noFill/>
-          <a:ln/>
-        </p:spPr>
-        <p:txBody>
-          <a:bodyPr wrap="square" lIns="0" tIns="0" rIns="0" bIns="0" rtlCol="0" anchor="ctr"/>
-          <a:lstStyle/>
-          <a:p>
-            <a:pPr indent="0" marL="0">
-              <a:buNone/>
-            </a:pPr>
-            <a:r>
-              <a:rPr lang="en-US" sz="3000" b="1" dirty="0">
-                <a:solidFill>
-                  <a:schemeClr val="accent5"/>
-                </a:solidFill>
-              </a:rPr>
-              <a:t>R$ 937 mil</a:t>
-            </a:r>
-            <a:endParaRPr lang="en-US" sz="3000" dirty="0"/>
-          </a:p>
-        </p:txBody>
-      </p:sp>
-      <p:sp>
-        <p:nvSpPr>
-          <p:cNvPr id="19" name="Text 17"/>
-          <p:cNvSpPr txBox="1"/>
-          <p:nvPr/>
-        </p:nvSpPr>
-        <p:spPr>
-          <a:xfrm>
-            <a:off x="8321040" y="2834640"/>
-            <a:ext cx="3017520" cy="320040"/>
-          </a:xfrm>
-          <a:prstGeom prst="rect">
-            <a:avLst/>
-          </a:prstGeom>
-          <a:noFill/>
-          <a:ln/>
-        </p:spPr>
-        <p:txBody>
-          <a:bodyPr wrap="square" lIns="0" tIns="0" rIns="0" bIns="0" rtlCol="0" anchor="ctr"/>
-          <a:lstStyle/>
-          <a:p>
-            <a:pPr indent="0" marL="0">
-              <a:buNone/>
-            </a:pPr>
-            <a:r>
-              <a:rPr lang="en-US" sz="1200" dirty="0">
-                <a:solidFill>
-                  <a:schemeClr val="accent6"/>
-                </a:solidFill>
-              </a:rPr>
-              <a:t>operação completa</a:t>
-            </a:r>
-            <a:endParaRPr lang="en-US" sz="1200" dirty="0"/>
-          </a:p>
-        </p:txBody>
-      </p:sp>
-      <p:sp>
-        <p:nvSpPr>
-          <p:cNvPr id="20" name="Text 18"/>
-          <p:cNvSpPr txBox="1"/>
-          <p:nvPr/>
-        </p:nvSpPr>
-        <p:spPr>
-          <a:xfrm>
-            <a:off x="8321040" y="3291840"/>
-            <a:ext cx="3063240" cy="2286000"/>
-          </a:xfrm>
-          <a:prstGeom prst="rect">
-            <a:avLst/>
-          </a:prstGeom>
-          <a:noFill/>
-          <a:ln/>
-        </p:spPr>
-        <p:txBody>
-          <a:bodyPr wrap="square" rtlCol="0" anchor="t"/>
-          <a:lstStyle/>
-          <a:p>
-            <a:pPr marL="342900" indent="-342900">
-              <a:spcAft>
-                <a:spcPts val="600"/>
-              </a:spcAft>
-              <a:buSzPct val="100000"/>
-              <a:buChar char="•"/>
-            </a:pPr>
-            <a:r>
-              <a:rPr lang="en-US" sz="1400" dirty="0">
-                <a:solidFill>
-                  <a:schemeClr val="tx2"/>
-                </a:solidFill>
-              </a:rPr>
-              <a:t>Produto pronto e com garantia</a:t>
-            </a:r>
-            <a:endParaRPr lang="en-US" sz="1400" dirty="0"/>
-          </a:p>
-          <a:p>
-            <a:pPr marL="342900" indent="-342900">
-              <a:spcAft>
-                <a:spcPts val="600"/>
-              </a:spcAft>
-              <a:buSzPct val="100000"/>
-              <a:buChar char="•"/>
-            </a:pPr>
-            <a:r>
-              <a:rPr lang="en-US" sz="1400" dirty="0">
-                <a:solidFill>
-                  <a:schemeClr val="tx2"/>
-                </a:solidFill>
-              </a:rPr>
-              <a:t>Cerca de 2,5 vezes o custo interno</a:t>
-            </a:r>
-            <a:endParaRPr lang="en-US" sz="1400" dirty="0"/>
-          </a:p>
-          <a:p>
-            <a:pPr marL="342900" indent="-342900">
-              <a:spcAft>
-                <a:spcPts val="600"/>
-              </a:spcAft>
-              <a:buSzPct val="100000"/>
-              <a:buChar char="•"/>
-            </a:pPr>
-            <a:r>
-              <a:rPr lang="en-US" sz="1400" dirty="0">
-                <a:solidFill>
-                  <a:schemeClr val="tx2"/>
-                </a:solidFill>
-              </a:rPr>
-              <a:t>Dependência do fornecedor</a:t>
-            </a:r>
-            <a:endParaRPr lang="en-US" sz="1400" dirty="0"/>
-          </a:p>
-          <a:p>
-            <a:pPr marL="342900" indent="-342900">
-              <a:spcAft>
-                <a:spcPts val="600"/>
-              </a:spcAft>
-              <a:buSzPct val="100000"/>
-              <a:buChar char="•"/>
-            </a:pPr>
-            <a:r>
-              <a:rPr lang="en-US" sz="1400" dirty="0">
-                <a:solidFill>
-                  <a:schemeClr val="tx2"/>
-                </a:solidFill>
-              </a:rPr>
-              <a:t>Precisa de cotação formal</a:t>
-            </a:r>
-            <a:endParaRPr lang="en-US" sz="1400" dirty="0"/>
           </a:p>
         </p:txBody>
       </p:sp>
@@ -7683,7 +7032,7 @@
                   <a:schemeClr val="tx1"/>
                 </a:solidFill>
               </a:rPr>
-              <a:t>Cronograma</a:t>
+              <a:t>Fazer internamente ou comprar</a:t>
             </a:r>
             <a:endParaRPr lang="en-US" sz="2600" dirty="0"/>
           </a:p>
@@ -7697,19 +7046,30 @@
         </p:nvSpPr>
         <p:spPr>
           <a:xfrm>
-            <a:off x="822960" y="2331720"/>
-            <a:ext cx="10607040" cy="0"/>
-          </a:xfrm>
-          <a:prstGeom prst="line">
-            <a:avLst/>
-          </a:prstGeom>
-          <a:noFill/>
-          <a:ln w="38100">
+            <a:off x="548640" y="1371600"/>
+            <a:ext cx="3520440" cy="4389120"/>
+          </a:xfrm>
+          <a:prstGeom prst="roundRect">
+            <a:avLst>
+              <a:gd name="adj" fmla="val 2597"/>
+            </a:avLst>
+          </a:prstGeom>
+          <a:solidFill>
+            <a:schemeClr val="bg1"/>
+          </a:solidFill>
+          <a:ln w="12700">
             <a:solidFill>
-              <a:srgbClr val="C9D1DC"/>
+              <a:srgbClr val="D5DBE3"/>
             </a:solidFill>
             <a:prstDash val="solid"/>
           </a:ln>
+          <a:effectLst>
+            <a:outerShdw sx="100000" sy="100000" kx="0" ky="0" algn="bl" rotWithShape="0" blurRad="76200" dist="25400" dir="5400000">
+              <a:srgbClr val="000000">
+                <a:alpha val="12000"/>
+              </a:srgbClr>
+            </a:outerShdw>
+          </a:effectLst>
         </p:spPr>
       </p:sp>
       <p:sp>
@@ -7720,18 +7080,18 @@
         </p:nvSpPr>
         <p:spPr>
           <a:xfrm>
-            <a:off x="685800" y="2130552"/>
-            <a:ext cx="402336" cy="402336"/>
+            <a:off x="822960" y="1645920"/>
+            <a:ext cx="292608" cy="292608"/>
           </a:xfrm>
           <a:prstGeom prst="ellipse">
             <a:avLst/>
           </a:prstGeom>
           <a:solidFill>
-            <a:schemeClr val="tx1"/>
+            <a:schemeClr val="accent2"/>
           </a:solidFill>
-          <a:ln w="25400">
+          <a:ln w="12700">
             <a:solidFill>
-              <a:schemeClr val="bg1"/>
+              <a:schemeClr val="accent2"/>
             </a:solidFill>
             <a:prstDash val="solid"/>
           </a:ln>
@@ -7745,8 +7105,8 @@
         </p:nvSpPr>
         <p:spPr>
           <a:xfrm>
-            <a:off x="685800" y="2130552"/>
-            <a:ext cx="402336" cy="402336"/>
+            <a:off x="1234440" y="1572768"/>
+            <a:ext cx="2651760" cy="457200"/>
           </a:xfrm>
           <a:prstGeom prst="rect">
             <a:avLst/>
@@ -7758,18 +7118,18 @@
           <a:bodyPr wrap="square" lIns="0" tIns="0" rIns="0" bIns="0" rtlCol="0" anchor="ctr"/>
           <a:lstStyle/>
           <a:p>
-            <a:pPr algn="ctr" indent="0" marL="0">
+            <a:pPr indent="0" marL="0">
               <a:buNone/>
             </a:pPr>
             <a:r>
-              <a:rPr lang="en-US" sz="1400" b="1" dirty="0">
-                <a:solidFill>
-                  <a:schemeClr val="bg1"/>
-                </a:solidFill>
-              </a:rPr>
-              <a:t>1</a:t>
-            </a:r>
-            <a:endParaRPr lang="en-US" sz="1400" dirty="0"/>
+              <a:rPr lang="en-US" sz="1800" b="1" dirty="0">
+                <a:solidFill>
+                  <a:schemeClr val="tx1"/>
+                </a:solidFill>
+              </a:rPr>
+              <a:t>Produção interna</a:t>
+            </a:r>
+            <a:endParaRPr lang="en-US" sz="1800" dirty="0"/>
           </a:p>
         </p:txBody>
       </p:sp>
@@ -7781,8 +7141,8 @@
         </p:nvSpPr>
         <p:spPr>
           <a:xfrm>
-            <a:off x="548640" y="1508760"/>
-            <a:ext cx="2103120" cy="411480"/>
+            <a:off x="822960" y="2148840"/>
+            <a:ext cx="3017520" cy="731520"/>
           </a:xfrm>
           <a:prstGeom prst="rect">
             <a:avLst/>
@@ -7798,14 +7158,14 @@
               <a:buNone/>
             </a:pPr>
             <a:r>
-              <a:rPr lang="en-US" sz="1400" b="1" dirty="0">
-                <a:solidFill>
-                  <a:schemeClr val="accent6"/>
-                </a:solidFill>
-              </a:rPr>
-              <a:t>3 a 4 sem.</a:t>
-            </a:r>
-            <a:endParaRPr lang="en-US" sz="1400" dirty="0"/>
+              <a:rPr lang="en-US" sz="3000" b="1" dirty="0">
+                <a:solidFill>
+                  <a:schemeClr val="accent2"/>
+                </a:solidFill>
+              </a:rPr>
+              <a:t>R$ 356 mil</a:t>
+            </a:r>
+            <a:endParaRPr lang="en-US" sz="3000" dirty="0"/>
           </a:p>
         </p:txBody>
       </p:sp>
@@ -7817,8 +7177,8 @@
         </p:nvSpPr>
         <p:spPr>
           <a:xfrm>
-            <a:off x="548640" y="2743200"/>
-            <a:ext cx="2103120" cy="457200"/>
+            <a:off x="822960" y="2834640"/>
+            <a:ext cx="3017520" cy="320040"/>
           </a:xfrm>
           <a:prstGeom prst="rect">
             <a:avLst/>
@@ -7834,14 +7194,14 @@
               <a:buNone/>
             </a:pPr>
             <a:r>
-              <a:rPr lang="en-US" sz="1700" b="1" dirty="0">
-                <a:solidFill>
-                  <a:schemeClr val="tx1"/>
-                </a:solidFill>
-              </a:rPr>
-              <a:t>Protótipo de bancada</a:t>
-            </a:r>
-            <a:endParaRPr lang="en-US" sz="1700" dirty="0"/>
+              <a:rPr lang="en-US" sz="1200" dirty="0">
+                <a:solidFill>
+                  <a:schemeClr val="accent6"/>
+                </a:solidFill>
+              </a:rPr>
+              <a:t>operação completa</a:t>
+            </a:r>
+            <a:endParaRPr lang="en-US" sz="1200" dirty="0"/>
           </a:p>
         </p:txBody>
       </p:sp>
@@ -7853,8 +7213,8 @@
         </p:nvSpPr>
         <p:spPr>
           <a:xfrm>
-            <a:off x="548640" y="3200400"/>
-            <a:ext cx="2057400" cy="1463040"/>
+            <a:off x="822960" y="3291840"/>
+            <a:ext cx="3063240" cy="2286000"/>
           </a:xfrm>
           <a:prstGeom prst="rect">
             <a:avLst/>
@@ -7863,21 +7223,79 @@
           <a:ln/>
         </p:spPr>
         <p:txBody>
-          <a:bodyPr wrap="square" lIns="0" tIns="0" rIns="0" bIns="0" rtlCol="0" anchor="t"/>
-          <a:lstStyle/>
-          <a:p>
-            <a:pPr indent="0" marL="0">
-              <a:buNone/>
-            </a:pPr>
-            <a:r>
-              <a:rPr lang="en-US" sz="1300" dirty="0">
-                <a:solidFill>
-                  <a:schemeClr val="accent6"/>
-                </a:solidFill>
-              </a:rPr>
-              <a:t>Um concentrador, um nó, displays e versão mínima do Serviço PTL</a:t>
-            </a:r>
-            <a:endParaRPr lang="en-US" sz="1300" dirty="0"/>
+          <a:bodyPr wrap="square" rtlCol="0" anchor="t"/>
+          <a:lstStyle/>
+          <a:p>
+            <a:pPr marL="342900" indent="-342900">
+              <a:spcAft>
+                <a:spcPts val="600"/>
+              </a:spcAft>
+              <a:buSzPct val="100000"/>
+              <a:buChar char="•"/>
+            </a:pPr>
+            <a:r>
+              <a:rPr lang="en-US" sz="1400" dirty="0">
+                <a:solidFill>
+                  <a:schemeClr val="tx2"/>
+                </a:solidFill>
+              </a:rPr>
+              <a:t>Displays e placas comprados no Brasil</a:t>
+            </a:r>
+            <a:endParaRPr lang="en-US" sz="1400" dirty="0"/>
+          </a:p>
+          <a:p>
+            <a:pPr marL="342900" indent="-342900">
+              <a:spcAft>
+                <a:spcPts val="600"/>
+              </a:spcAft>
+              <a:buSzPct val="100000"/>
+              <a:buChar char="•"/>
+            </a:pPr>
+            <a:r>
+              <a:rPr lang="en-US" sz="1400" dirty="0">
+                <a:solidFill>
+                  <a:schemeClr val="tx2"/>
+                </a:solidFill>
+              </a:rPr>
+              <a:t>Montagem e manutenção pela equipe</a:t>
+            </a:r>
+            <a:endParaRPr lang="en-US" sz="1400" dirty="0"/>
+          </a:p>
+          <a:p>
+            <a:pPr marL="342900" indent="-342900">
+              <a:spcAft>
+                <a:spcPts val="600"/>
+              </a:spcAft>
+              <a:buSzPct val="100000"/>
+              <a:buChar char="•"/>
+            </a:pPr>
+            <a:r>
+              <a:rPr lang="en-US" sz="1400" dirty="0">
+                <a:solidFill>
+                  <a:schemeClr val="tx2"/>
+                </a:solidFill>
+              </a:rPr>
+              <a:t>Reposição imediata</a:t>
+            </a:r>
+            <a:endParaRPr lang="en-US" sz="1400" dirty="0"/>
+          </a:p>
+          <a:p>
+            <a:pPr marL="342900" indent="-342900">
+              <a:spcAft>
+                <a:spcPts val="600"/>
+              </a:spcAft>
+              <a:buSzPct val="100000"/>
+              <a:buChar char="•"/>
+            </a:pPr>
+            <a:r>
+              <a:rPr lang="en-US" sz="1400" dirty="0">
+                <a:solidFill>
+                  <a:schemeClr val="tx2"/>
+                </a:solidFill>
+              </a:rPr>
+              <a:t>Precisa de técnico de eletrônica</a:t>
+            </a:r>
+            <a:endParaRPr lang="en-US" sz="1400" dirty="0"/>
           </a:p>
         </p:txBody>
       </p:sp>
@@ -7889,187 +7307,52 @@
         </p:nvSpPr>
         <p:spPr>
           <a:xfrm>
-            <a:off x="2926080" y="2130552"/>
-            <a:ext cx="402336" cy="402336"/>
-          </a:xfrm>
-          <a:prstGeom prst="ellipse">
-            <a:avLst/>
+            <a:off x="4297680" y="1371600"/>
+            <a:ext cx="3520440" cy="4389120"/>
+          </a:xfrm>
+          <a:prstGeom prst="roundRect">
+            <a:avLst>
+              <a:gd name="adj" fmla="val 2597"/>
+            </a:avLst>
           </a:prstGeom>
           <a:solidFill>
-            <a:schemeClr val="accent1"/>
+            <a:schemeClr val="bg1"/>
           </a:solidFill>
-          <a:ln w="25400">
+          <a:ln w="12700">
             <a:solidFill>
-              <a:schemeClr val="bg1"/>
+              <a:srgbClr val="D5DBE3"/>
             </a:solidFill>
             <a:prstDash val="solid"/>
           </a:ln>
-        </p:spPr>
-      </p:sp>
-      <p:sp>
-        <p:nvSpPr>
-          <p:cNvPr id="10" name="Text 8"/>
-          <p:cNvSpPr txBox="1"/>
-          <p:nvPr/>
-        </p:nvSpPr>
-        <p:spPr>
-          <a:xfrm>
-            <a:off x="2926080" y="2130552"/>
-            <a:ext cx="402336" cy="402336"/>
-          </a:xfrm>
-          <a:prstGeom prst="rect">
-            <a:avLst/>
-          </a:prstGeom>
-          <a:noFill/>
-          <a:ln/>
-        </p:spPr>
-        <p:txBody>
-          <a:bodyPr wrap="square" lIns="0" tIns="0" rIns="0" bIns="0" rtlCol="0" anchor="ctr"/>
-          <a:lstStyle/>
-          <a:p>
-            <a:pPr algn="ctr" indent="0" marL="0">
-              <a:buNone/>
-            </a:pPr>
-            <a:r>
-              <a:rPr lang="en-US" sz="1400" b="1" dirty="0">
-                <a:solidFill>
-                  <a:schemeClr val="bg1"/>
-                </a:solidFill>
-              </a:rPr>
-              <a:t>2</a:t>
-            </a:r>
-            <a:endParaRPr lang="en-US" sz="1400" dirty="0"/>
-          </a:p>
-        </p:txBody>
-      </p:sp>
-      <p:sp>
-        <p:nvSpPr>
-          <p:cNvPr id="11" name="Text 9"/>
-          <p:cNvSpPr txBox="1"/>
-          <p:nvPr/>
-        </p:nvSpPr>
-        <p:spPr>
-          <a:xfrm>
-            <a:off x="2788920" y="1508760"/>
-            <a:ext cx="2103120" cy="411480"/>
-          </a:xfrm>
-          <a:prstGeom prst="rect">
-            <a:avLst/>
-          </a:prstGeom>
-          <a:noFill/>
-          <a:ln/>
-        </p:spPr>
-        <p:txBody>
-          <a:bodyPr wrap="square" lIns="0" tIns="0" rIns="0" bIns="0" rtlCol="0" anchor="ctr"/>
-          <a:lstStyle/>
-          <a:p>
-            <a:pPr indent="0" marL="0">
-              <a:buNone/>
-            </a:pPr>
-            <a:r>
-              <a:rPr lang="en-US" sz="1400" b="1" dirty="0">
-                <a:solidFill>
-                  <a:schemeClr val="accent1"/>
-                </a:solidFill>
-              </a:rPr>
-              <a:t>6 a 8 sem.</a:t>
-            </a:r>
-            <a:endParaRPr lang="en-US" sz="1400" dirty="0"/>
-          </a:p>
-        </p:txBody>
-      </p:sp>
-      <p:sp>
-        <p:nvSpPr>
-          <p:cNvPr id="12" name="Text 10"/>
-          <p:cNvSpPr txBox="1"/>
-          <p:nvPr/>
-        </p:nvSpPr>
-        <p:spPr>
-          <a:xfrm>
-            <a:off x="2788920" y="2743200"/>
-            <a:ext cx="2103120" cy="457200"/>
-          </a:xfrm>
-          <a:prstGeom prst="rect">
-            <a:avLst/>
-          </a:prstGeom>
-          <a:noFill/>
-          <a:ln/>
-        </p:spPr>
-        <p:txBody>
-          <a:bodyPr wrap="square" lIns="0" tIns="0" rIns="0" bIns="0" rtlCol="0" anchor="ctr"/>
-          <a:lstStyle/>
-          <a:p>
-            <a:pPr indent="0" marL="0">
-              <a:buNone/>
-            </a:pPr>
-            <a:r>
-              <a:rPr lang="en-US" sz="1700" b="1" dirty="0">
-                <a:solidFill>
-                  <a:schemeClr val="tx1"/>
-                </a:solidFill>
-              </a:rPr>
-              <a:t>Piloto 05 e 27</a:t>
-            </a:r>
-            <a:endParaRPr lang="en-US" sz="1700" dirty="0"/>
-          </a:p>
-        </p:txBody>
-      </p:sp>
-      <p:sp>
-        <p:nvSpPr>
-          <p:cNvPr id="13" name="Text 11"/>
-          <p:cNvSpPr txBox="1"/>
-          <p:nvPr/>
-        </p:nvSpPr>
-        <p:spPr>
-          <a:xfrm>
-            <a:off x="2788920" y="3200400"/>
-            <a:ext cx="2057400" cy="1463040"/>
-          </a:xfrm>
-          <a:prstGeom prst="rect">
-            <a:avLst/>
-          </a:prstGeom>
-          <a:noFill/>
-          <a:ln/>
-        </p:spPr>
-        <p:txBody>
-          <a:bodyPr wrap="square" lIns="0" tIns="0" rIns="0" bIns="0" rtlCol="0" anchor="t"/>
-          <a:lstStyle/>
-          <a:p>
-            <a:pPr indent="0" marL="0">
-              <a:buNone/>
-            </a:pPr>
-            <a:r>
-              <a:rPr lang="en-US" sz="1300" dirty="0">
-                <a:solidFill>
-                  <a:schemeClr val="accent6"/>
-                </a:solidFill>
-              </a:rPr>
-              <a:t>Estações completas, app do coletor, painel e medição antes e depois</a:t>
-            </a:r>
-            <a:endParaRPr lang="en-US" sz="1300" dirty="0"/>
-          </a:p>
-        </p:txBody>
-      </p:sp>
-      <p:sp>
-        <p:nvSpPr>
-          <p:cNvPr id="14" name="Shape 12"/>
+          <a:effectLst>
+            <a:outerShdw sx="100000" sy="100000" kx="0" ky="0" algn="bl" rotWithShape="0" blurRad="76200" dist="25400" dir="5400000">
+              <a:srgbClr val="000000">
+                <a:alpha val="12000"/>
+              </a:srgbClr>
+            </a:outerShdw>
+          </a:effectLst>
+        </p:spPr>
+      </p:sp>
+      <p:sp>
+        <p:nvSpPr>
+          <p:cNvPr id="10" name="Shape 8"/>
           <p:cNvSpPr/>
           <p:nvPr/>
         </p:nvSpPr>
         <p:spPr>
           <a:xfrm>
-            <a:off x="5166360" y="2130552"/>
-            <a:ext cx="402336" cy="402336"/>
+            <a:off x="4572000" y="1645920"/>
+            <a:ext cx="292608" cy="292608"/>
           </a:xfrm>
           <a:prstGeom prst="ellipse">
             <a:avLst/>
           </a:prstGeom>
           <a:solidFill>
-            <a:schemeClr val="tx1"/>
+            <a:schemeClr val="accent3"/>
           </a:solidFill>
-          <a:ln w="25400">
+          <a:ln w="12700">
             <a:solidFill>
-              <a:schemeClr val="bg1"/>
+              <a:schemeClr val="accent3"/>
             </a:solidFill>
             <a:prstDash val="solid"/>
           </a:ln>
@@ -8077,14 +7360,14 @@
       </p:sp>
       <p:sp>
         <p:nvSpPr>
-          <p:cNvPr id="15" name="Text 13"/>
+          <p:cNvPr id="11" name="Text 9"/>
           <p:cNvSpPr txBox="1"/>
           <p:nvPr/>
         </p:nvSpPr>
         <p:spPr>
           <a:xfrm>
-            <a:off x="5166360" y="2130552"/>
-            <a:ext cx="402336" cy="402336"/>
+            <a:off x="4983480" y="1572768"/>
+            <a:ext cx="2651760" cy="457200"/>
           </a:xfrm>
           <a:prstGeom prst="rect">
             <a:avLst/>
@@ -8096,31 +7379,31 @@
           <a:bodyPr wrap="square" lIns="0" tIns="0" rIns="0" bIns="0" rtlCol="0" anchor="ctr"/>
           <a:lstStyle/>
           <a:p>
-            <a:pPr algn="ctr" indent="0" marL="0">
+            <a:pPr indent="0" marL="0">
               <a:buNone/>
             </a:pPr>
             <a:r>
-              <a:rPr lang="en-US" sz="1400" b="1" dirty="0">
-                <a:solidFill>
-                  <a:schemeClr val="bg1"/>
-                </a:solidFill>
-              </a:rPr>
-              <a:t>3</a:t>
-            </a:r>
-            <a:endParaRPr lang="en-US" sz="1400" dirty="0"/>
-          </a:p>
-        </p:txBody>
-      </p:sp>
-      <p:sp>
-        <p:nvSpPr>
-          <p:cNvPr id="16" name="Text 14"/>
+              <a:rPr lang="en-US" sz="1800" b="1" dirty="0">
+                <a:solidFill>
+                  <a:schemeClr val="tx1"/>
+                </a:solidFill>
+              </a:rPr>
+              <a:t>Placa própria (EMS)</a:t>
+            </a:r>
+            <a:endParaRPr lang="en-US" sz="1800" dirty="0"/>
+          </a:p>
+        </p:txBody>
+      </p:sp>
+      <p:sp>
+        <p:nvSpPr>
+          <p:cNvPr id="12" name="Text 10"/>
           <p:cNvSpPr txBox="1"/>
           <p:nvPr/>
         </p:nvSpPr>
         <p:spPr>
           <a:xfrm>
-            <a:off x="5029200" y="1508760"/>
-            <a:ext cx="2103120" cy="411480"/>
+            <a:off x="4572000" y="2148840"/>
+            <a:ext cx="3017520" cy="731520"/>
           </a:xfrm>
           <a:prstGeom prst="rect">
             <a:avLst/>
@@ -8136,27 +7419,27 @@
               <a:buNone/>
             </a:pPr>
             <a:r>
-              <a:rPr lang="en-US" sz="1400" b="1" dirty="0">
-                <a:solidFill>
-                  <a:schemeClr val="accent6"/>
-                </a:solidFill>
-              </a:rPr>
-              <a:t>2 sem.</a:t>
-            </a:r>
-            <a:endParaRPr lang="en-US" sz="1400" dirty="0"/>
-          </a:p>
-        </p:txBody>
-      </p:sp>
-      <p:sp>
-        <p:nvSpPr>
-          <p:cNvPr id="17" name="Text 15"/>
+              <a:rPr lang="en-US" sz="3000" b="1" dirty="0">
+                <a:solidFill>
+                  <a:schemeClr val="accent3"/>
+                </a:solidFill>
+              </a:rPr>
+              <a:t>R$ 405 mil</a:t>
+            </a:r>
+            <a:endParaRPr lang="en-US" sz="3000" dirty="0"/>
+          </a:p>
+        </p:txBody>
+      </p:sp>
+      <p:sp>
+        <p:nvSpPr>
+          <p:cNvPr id="13" name="Text 11"/>
           <p:cNvSpPr txBox="1"/>
           <p:nvPr/>
         </p:nvSpPr>
         <p:spPr>
           <a:xfrm>
-            <a:off x="5029200" y="2743200"/>
-            <a:ext cx="2103120" cy="457200"/>
+            <a:off x="4572000" y="2834640"/>
+            <a:ext cx="3017520" cy="320040"/>
           </a:xfrm>
           <a:prstGeom prst="rect">
             <a:avLst/>
@@ -8172,27 +7455,27 @@
               <a:buNone/>
             </a:pPr>
             <a:r>
-              <a:rPr lang="en-US" sz="1700" b="1" dirty="0">
-                <a:solidFill>
-                  <a:schemeClr val="tx1"/>
-                </a:solidFill>
-              </a:rPr>
-              <a:t>Avaliação</a:t>
-            </a:r>
-            <a:endParaRPr lang="en-US" sz="1700" dirty="0"/>
-          </a:p>
-        </p:txBody>
-      </p:sp>
-      <p:sp>
-        <p:nvSpPr>
-          <p:cNvPr id="18" name="Text 16"/>
+              <a:rPr lang="en-US" sz="1200" dirty="0">
+                <a:solidFill>
+                  <a:schemeClr val="accent6"/>
+                </a:solidFill>
+              </a:rPr>
+              <a:t>operação completa</a:t>
+            </a:r>
+            <a:endParaRPr lang="en-US" sz="1200" dirty="0"/>
+          </a:p>
+        </p:txBody>
+      </p:sp>
+      <p:sp>
+        <p:nvSpPr>
+          <p:cNvPr id="14" name="Text 12"/>
           <p:cNvSpPr txBox="1"/>
           <p:nvPr/>
         </p:nvSpPr>
         <p:spPr>
           <a:xfrm>
-            <a:off x="5029200" y="3200400"/>
-            <a:ext cx="2057400" cy="1463040"/>
+            <a:off x="4572000" y="3291840"/>
+            <a:ext cx="3063240" cy="2286000"/>
           </a:xfrm>
           <a:prstGeom prst="rect">
             <a:avLst/>
@@ -8201,213 +7484,136 @@
           <a:ln/>
         </p:spPr>
         <p:txBody>
-          <a:bodyPr wrap="square" lIns="0" tIns="0" rIns="0" bIns="0" rtlCol="0" anchor="t"/>
-          <a:lstStyle/>
-          <a:p>
-            <a:pPr indent="0" marL="0">
-              <a:buNone/>
-            </a:pPr>
-            <a:r>
-              <a:rPr lang="en-US" sz="1300" dirty="0">
-                <a:solidFill>
-                  <a:schemeClr val="accent6"/>
-                </a:solidFill>
-              </a:rPr>
-              <a:t>Resultados, ajuste das zonas e decisão entre A e B</a:t>
-            </a:r>
-            <a:endParaRPr lang="en-US" sz="1300" dirty="0"/>
-          </a:p>
-        </p:txBody>
-      </p:sp>
-      <p:sp>
-        <p:nvSpPr>
-          <p:cNvPr id="19" name="Shape 17"/>
+          <a:bodyPr wrap="square" rtlCol="0" anchor="t"/>
+          <a:lstStyle/>
+          <a:p>
+            <a:pPr marL="342900" indent="-342900">
+              <a:spcAft>
+                <a:spcPts val="600"/>
+              </a:spcAft>
+              <a:buSzPct val="100000"/>
+              <a:buChar char="•"/>
+            </a:pPr>
+            <a:r>
+              <a:rPr lang="en-US" sz="1400" dirty="0">
+                <a:solidFill>
+                  <a:schemeClr val="tx2"/>
+                </a:solidFill>
+              </a:rPr>
+              <a:t>Projeto da placa, cerca de R$ 15 mil</a:t>
+            </a:r>
+            <a:endParaRPr lang="en-US" sz="1400" dirty="0"/>
+          </a:p>
+          <a:p>
+            <a:pPr marL="342900" indent="-342900">
+              <a:spcAft>
+                <a:spcPts val="600"/>
+              </a:spcAft>
+              <a:buSzPct val="100000"/>
+              <a:buChar char="•"/>
+            </a:pPr>
+            <a:r>
+              <a:rPr lang="en-US" sz="1400" dirty="0">
+                <a:solidFill>
+                  <a:schemeClr val="tx2"/>
+                </a:solidFill>
+              </a:rPr>
+              <a:t>Fabricação e montagem industrial</a:t>
+            </a:r>
+            <a:endParaRPr lang="en-US" sz="1400" dirty="0"/>
+          </a:p>
+          <a:p>
+            <a:pPr marL="342900" indent="-342900">
+              <a:spcAft>
+                <a:spcPts val="600"/>
+              </a:spcAft>
+              <a:buSzPct val="100000"/>
+              <a:buChar char="•"/>
+            </a:pPr>
+            <a:r>
+              <a:rPr lang="en-US" sz="1400" dirty="0">
+                <a:solidFill>
+                  <a:schemeClr val="tx2"/>
+                </a:solidFill>
+              </a:rPr>
+              <a:t>Peças sempre iguais</a:t>
+            </a:r>
+            <a:endParaRPr lang="en-US" sz="1400" dirty="0"/>
+          </a:p>
+          <a:p>
+            <a:pPr marL="342900" indent="-342900">
+              <a:spcAft>
+                <a:spcPts val="600"/>
+              </a:spcAft>
+              <a:buSzPct val="100000"/>
+              <a:buChar char="•"/>
+            </a:pPr>
+            <a:r>
+              <a:rPr lang="en-US" sz="1400" dirty="0">
+                <a:solidFill>
+                  <a:schemeClr val="tx2"/>
+                </a:solidFill>
+              </a:rPr>
+              <a:t>Importação e prazo maiores</a:t>
+            </a:r>
+            <a:endParaRPr lang="en-US" sz="1400" dirty="0"/>
+          </a:p>
+        </p:txBody>
+      </p:sp>
+      <p:sp>
+        <p:nvSpPr>
+          <p:cNvPr id="15" name="Shape 13"/>
           <p:cNvSpPr/>
           <p:nvPr/>
         </p:nvSpPr>
         <p:spPr>
           <a:xfrm>
-            <a:off x="7406640" y="2130552"/>
-            <a:ext cx="402336" cy="402336"/>
-          </a:xfrm>
-          <a:prstGeom prst="ellipse">
-            <a:avLst/>
+            <a:off x="8046720" y="1371600"/>
+            <a:ext cx="3520440" cy="4389120"/>
+          </a:xfrm>
+          <a:prstGeom prst="roundRect">
+            <a:avLst>
+              <a:gd name="adj" fmla="val 2597"/>
+            </a:avLst>
           </a:prstGeom>
           <a:solidFill>
-            <a:schemeClr val="tx1"/>
+            <a:schemeClr val="bg1"/>
           </a:solidFill>
-          <a:ln w="25400">
+          <a:ln w="12700">
             <a:solidFill>
-              <a:schemeClr val="bg1"/>
+              <a:srgbClr val="D5DBE3"/>
             </a:solidFill>
             <a:prstDash val="solid"/>
           </a:ln>
-        </p:spPr>
-      </p:sp>
-      <p:sp>
-        <p:nvSpPr>
-          <p:cNvPr id="20" name="Text 18"/>
-          <p:cNvSpPr txBox="1"/>
-          <p:nvPr/>
-        </p:nvSpPr>
-        <p:spPr>
-          <a:xfrm>
-            <a:off x="7406640" y="2130552"/>
-            <a:ext cx="402336" cy="402336"/>
-          </a:xfrm>
-          <a:prstGeom prst="rect">
-            <a:avLst/>
-          </a:prstGeom>
-          <a:noFill/>
-          <a:ln/>
-        </p:spPr>
-        <p:txBody>
-          <a:bodyPr wrap="square" lIns="0" tIns="0" rIns="0" bIns="0" rtlCol="0" anchor="ctr"/>
-          <a:lstStyle/>
-          <a:p>
-            <a:pPr algn="ctr" indent="0" marL="0">
-              <a:buNone/>
-            </a:pPr>
-            <a:r>
-              <a:rPr lang="en-US" sz="1400" b="1" dirty="0">
-                <a:solidFill>
-                  <a:schemeClr val="bg1"/>
-                </a:solidFill>
-              </a:rPr>
-              <a:t>4</a:t>
-            </a:r>
-            <a:endParaRPr lang="en-US" sz="1400" dirty="0"/>
-          </a:p>
-        </p:txBody>
-      </p:sp>
-      <p:sp>
-        <p:nvSpPr>
-          <p:cNvPr id="21" name="Text 19"/>
-          <p:cNvSpPr txBox="1"/>
-          <p:nvPr/>
-        </p:nvSpPr>
-        <p:spPr>
-          <a:xfrm>
-            <a:off x="7269480" y="1508760"/>
-            <a:ext cx="2103120" cy="411480"/>
-          </a:xfrm>
-          <a:prstGeom prst="rect">
-            <a:avLst/>
-          </a:prstGeom>
-          <a:noFill/>
-          <a:ln/>
-        </p:spPr>
-        <p:txBody>
-          <a:bodyPr wrap="square" lIns="0" tIns="0" rIns="0" bIns="0" rtlCol="0" anchor="ctr"/>
-          <a:lstStyle/>
-          <a:p>
-            <a:pPr indent="0" marL="0">
-              <a:buNone/>
-            </a:pPr>
-            <a:r>
-              <a:rPr lang="en-US" sz="1400" b="1" dirty="0">
-                <a:solidFill>
-                  <a:schemeClr val="accent6"/>
-                </a:solidFill>
-              </a:rPr>
-              <a:t>10 a 14 sem.</a:t>
-            </a:r>
-            <a:endParaRPr lang="en-US" sz="1400" dirty="0"/>
-          </a:p>
-        </p:txBody>
-      </p:sp>
-      <p:sp>
-        <p:nvSpPr>
-          <p:cNvPr id="22" name="Text 20"/>
-          <p:cNvSpPr txBox="1"/>
-          <p:nvPr/>
-        </p:nvSpPr>
-        <p:spPr>
-          <a:xfrm>
-            <a:off x="7269480" y="2743200"/>
-            <a:ext cx="2103120" cy="457200"/>
-          </a:xfrm>
-          <a:prstGeom prst="rect">
-            <a:avLst/>
-          </a:prstGeom>
-          <a:noFill/>
-          <a:ln/>
-        </p:spPr>
-        <p:txBody>
-          <a:bodyPr wrap="square" lIns="0" tIns="0" rIns="0" bIns="0" rtlCol="0" anchor="ctr"/>
-          <a:lstStyle/>
-          <a:p>
-            <a:pPr indent="0" marL="0">
-              <a:buNone/>
-            </a:pPr>
-            <a:r>
-              <a:rPr lang="en-US" sz="1700" b="1" dirty="0">
-                <a:solidFill>
-                  <a:schemeClr val="tx1"/>
-                </a:solidFill>
-              </a:rPr>
-              <a:t>Expansão</a:t>
-            </a:r>
-            <a:endParaRPr lang="en-US" sz="1700" dirty="0"/>
-          </a:p>
-        </p:txBody>
-      </p:sp>
-      <p:sp>
-        <p:nvSpPr>
-          <p:cNvPr id="23" name="Text 21"/>
-          <p:cNvSpPr txBox="1"/>
-          <p:nvPr/>
-        </p:nvSpPr>
-        <p:spPr>
-          <a:xfrm>
-            <a:off x="7269480" y="3200400"/>
-            <a:ext cx="2057400" cy="1463040"/>
-          </a:xfrm>
-          <a:prstGeom prst="rect">
-            <a:avLst/>
-          </a:prstGeom>
-          <a:noFill/>
-          <a:ln/>
-        </p:spPr>
-        <p:txBody>
-          <a:bodyPr wrap="square" lIns="0" tIns="0" rIns="0" bIns="0" rtlCol="0" anchor="t"/>
-          <a:lstStyle/>
-          <a:p>
-            <a:pPr indent="0" marL="0">
-              <a:buNone/>
-            </a:pPr>
-            <a:r>
-              <a:rPr lang="en-US" sz="1300" dirty="0">
-                <a:solidFill>
-                  <a:schemeClr val="accent6"/>
-                </a:solidFill>
-              </a:rPr>
-              <a:t>Medicamento e depois Perfumaria, de cinco em cinco estações</a:t>
-            </a:r>
-            <a:endParaRPr lang="en-US" sz="1300" dirty="0"/>
-          </a:p>
-        </p:txBody>
-      </p:sp>
-      <p:sp>
-        <p:nvSpPr>
-          <p:cNvPr id="24" name="Shape 22"/>
+          <a:effectLst>
+            <a:outerShdw sx="100000" sy="100000" kx="0" ky="0" algn="bl" rotWithShape="0" blurRad="76200" dist="25400" dir="5400000">
+              <a:srgbClr val="000000">
+                <a:alpha val="12000"/>
+              </a:srgbClr>
+            </a:outerShdw>
+          </a:effectLst>
+        </p:spPr>
+      </p:sp>
+      <p:sp>
+        <p:nvSpPr>
+          <p:cNvPr id="16" name="Shape 14"/>
           <p:cNvSpPr/>
           <p:nvPr/>
         </p:nvSpPr>
         <p:spPr>
           <a:xfrm>
-            <a:off x="9646920" y="2130552"/>
-            <a:ext cx="402336" cy="402336"/>
+            <a:off x="8321040" y="1645920"/>
+            <a:ext cx="292608" cy="292608"/>
           </a:xfrm>
           <a:prstGeom prst="ellipse">
             <a:avLst/>
           </a:prstGeom>
           <a:solidFill>
-            <a:schemeClr val="tx1"/>
+            <a:schemeClr val="accent5"/>
           </a:solidFill>
-          <a:ln w="25400">
+          <a:ln w="12700">
             <a:solidFill>
-              <a:schemeClr val="bg1"/>
+              <a:schemeClr val="accent5"/>
             </a:solidFill>
             <a:prstDash val="solid"/>
           </a:ln>
@@ -8415,14 +7621,14 @@
       </p:sp>
       <p:sp>
         <p:nvSpPr>
-          <p:cNvPr id="25" name="Text 23"/>
+          <p:cNvPr id="17" name="Text 15"/>
           <p:cNvSpPr txBox="1"/>
           <p:nvPr/>
         </p:nvSpPr>
         <p:spPr>
           <a:xfrm>
-            <a:off x="9646920" y="2130552"/>
-            <a:ext cx="402336" cy="402336"/>
+            <a:off x="8732520" y="1572768"/>
+            <a:ext cx="2651760" cy="457200"/>
           </a:xfrm>
           <a:prstGeom prst="rect">
             <a:avLst/>
@@ -8434,31 +7640,31 @@
           <a:bodyPr wrap="square" lIns="0" tIns="0" rIns="0" bIns="0" rtlCol="0" anchor="ctr"/>
           <a:lstStyle/>
           <a:p>
-            <a:pPr algn="ctr" indent="0" marL="0">
+            <a:pPr indent="0" marL="0">
               <a:buNone/>
             </a:pPr>
             <a:r>
-              <a:rPr lang="en-US" sz="1400" b="1" dirty="0">
-                <a:solidFill>
-                  <a:schemeClr val="bg1"/>
-                </a:solidFill>
-              </a:rPr>
-              <a:t>5</a:t>
-            </a:r>
-            <a:endParaRPr lang="en-US" sz="1400" dirty="0"/>
-          </a:p>
-        </p:txBody>
-      </p:sp>
-      <p:sp>
-        <p:nvSpPr>
-          <p:cNvPr id="26" name="Text 24"/>
+              <a:rPr lang="en-US" sz="1800" b="1" dirty="0">
+                <a:solidFill>
+                  <a:schemeClr val="tx1"/>
+                </a:solidFill>
+              </a:rPr>
+              <a:t>PTL comercial</a:t>
+            </a:r>
+            <a:endParaRPr lang="en-US" sz="1800" dirty="0"/>
+          </a:p>
+        </p:txBody>
+      </p:sp>
+      <p:sp>
+        <p:nvSpPr>
+          <p:cNvPr id="18" name="Text 16"/>
           <p:cNvSpPr txBox="1"/>
           <p:nvPr/>
         </p:nvSpPr>
         <p:spPr>
           <a:xfrm>
-            <a:off x="9509760" y="1508760"/>
-            <a:ext cx="2103120" cy="411480"/>
+            <a:off x="8321040" y="2148840"/>
+            <a:ext cx="3017520" cy="731520"/>
           </a:xfrm>
           <a:prstGeom prst="rect">
             <a:avLst/>
@@ -8474,27 +7680,27 @@
               <a:buNone/>
             </a:pPr>
             <a:r>
-              <a:rPr lang="en-US" sz="1400" b="1" dirty="0">
-                <a:solidFill>
-                  <a:schemeClr val="accent6"/>
-                </a:solidFill>
-              </a:rPr>
-              <a:t>4 sem.</a:t>
-            </a:r>
-            <a:endParaRPr lang="en-US" sz="1400" dirty="0"/>
-          </a:p>
-        </p:txBody>
-      </p:sp>
-      <p:sp>
-        <p:nvSpPr>
-          <p:cNvPr id="27" name="Text 25"/>
+              <a:rPr lang="en-US" sz="3000" b="1" dirty="0">
+                <a:solidFill>
+                  <a:schemeClr val="accent5"/>
+                </a:solidFill>
+              </a:rPr>
+              <a:t>R$ 929 mil</a:t>
+            </a:r>
+            <a:endParaRPr lang="en-US" sz="3000" dirty="0"/>
+          </a:p>
+        </p:txBody>
+      </p:sp>
+      <p:sp>
+        <p:nvSpPr>
+          <p:cNvPr id="19" name="Text 17"/>
           <p:cNvSpPr txBox="1"/>
           <p:nvPr/>
         </p:nvSpPr>
         <p:spPr>
           <a:xfrm>
-            <a:off x="9509760" y="2743200"/>
-            <a:ext cx="2103120" cy="457200"/>
+            <a:off x="8321040" y="2834640"/>
+            <a:ext cx="3017520" cy="320040"/>
           </a:xfrm>
           <a:prstGeom prst="rect">
             <a:avLst/>
@@ -8510,27 +7716,27 @@
               <a:buNone/>
             </a:pPr>
             <a:r>
-              <a:rPr lang="en-US" sz="1700" b="1" dirty="0">
-                <a:solidFill>
-                  <a:schemeClr val="tx1"/>
-                </a:solidFill>
-              </a:rPr>
-              <a:t>Estabilização</a:t>
-            </a:r>
-            <a:endParaRPr lang="en-US" sz="1700" dirty="0"/>
-          </a:p>
-        </p:txBody>
-      </p:sp>
-      <p:sp>
-        <p:nvSpPr>
-          <p:cNvPr id="28" name="Text 26"/>
+              <a:rPr lang="en-US" sz="1200" dirty="0">
+                <a:solidFill>
+                  <a:schemeClr val="accent6"/>
+                </a:solidFill>
+              </a:rPr>
+              <a:t>operação completa</a:t>
+            </a:r>
+            <a:endParaRPr lang="en-US" sz="1200" dirty="0"/>
+          </a:p>
+        </p:txBody>
+      </p:sp>
+      <p:sp>
+        <p:nvSpPr>
+          <p:cNvPr id="20" name="Text 18"/>
           <p:cNvSpPr txBox="1"/>
           <p:nvPr/>
         </p:nvSpPr>
         <p:spPr>
           <a:xfrm>
-            <a:off x="9509760" y="3200400"/>
-            <a:ext cx="2057400" cy="1463040"/>
+            <a:off x="8321040" y="3291840"/>
+            <a:ext cx="3063240" cy="2286000"/>
           </a:xfrm>
           <a:prstGeom prst="rect">
             <a:avLst/>
@@ -8539,95 +7745,79 @@
           <a:ln/>
         </p:spPr>
         <p:txBody>
-          <a:bodyPr wrap="square" lIns="0" tIns="0" rIns="0" bIns="0" rtlCol="0" anchor="t"/>
-          <a:lstStyle/>
-          <a:p>
-            <a:pPr indent="0" marL="0">
-              <a:buNone/>
-            </a:pPr>
-            <a:r>
-              <a:rPr lang="en-US" sz="1300" dirty="0">
-                <a:solidFill>
-                  <a:schemeClr val="accent6"/>
-                </a:solidFill>
-              </a:rPr>
-              <a:t>Ajustes finais e entrega para a sustentação</a:t>
-            </a:r>
-            <a:endParaRPr lang="en-US" sz="1300" dirty="0"/>
-          </a:p>
-        </p:txBody>
-      </p:sp>
-      <p:sp>
-        <p:nvSpPr>
-          <p:cNvPr id="29" name="Shape 27"/>
-          <p:cNvSpPr/>
-          <p:nvPr/>
-        </p:nvSpPr>
-        <p:spPr>
-          <a:xfrm>
-            <a:off x="548640" y="4892040"/>
-            <a:ext cx="11064240" cy="1051560"/>
-          </a:xfrm>
-          <a:prstGeom prst="roundRect">
-            <a:avLst>
-              <a:gd name="adj" fmla="val 6957"/>
-            </a:avLst>
-          </a:prstGeom>
-          <a:solidFill>
-            <a:schemeClr val="bg2"/>
-          </a:solidFill>
-          <a:ln w="12700">
-            <a:solidFill>
-              <a:schemeClr val="bg2"/>
-            </a:solidFill>
-            <a:prstDash val="solid"/>
-          </a:ln>
-        </p:spPr>
-      </p:sp>
-      <p:sp>
-        <p:nvSpPr>
-          <p:cNvPr id="30" name="Text 28"/>
-          <p:cNvSpPr txBox="1"/>
-          <p:nvPr/>
-        </p:nvSpPr>
-        <p:spPr>
-          <a:xfrm>
-            <a:off x="777240" y="4983480"/>
-            <a:ext cx="10607040" cy="868680"/>
-          </a:xfrm>
-          <a:prstGeom prst="rect">
-            <a:avLst/>
-          </a:prstGeom>
-          <a:noFill/>
-          <a:ln/>
-        </p:spPr>
-        <p:txBody>
-          <a:bodyPr wrap="square" lIns="0" tIns="0" rIns="0" bIns="0" rtlCol="0" anchor="ctr"/>
-          <a:lstStyle/>
-          <a:p>
-            <a:pPr indent="0" marL="0">
-              <a:buNone/>
-            </a:pPr>
-            <a:r>
-              <a:rPr lang="en-US" sz="1500" b="1" dirty="0">
-                <a:solidFill>
-                  <a:schemeClr val="tx1"/>
-                </a:solidFill>
-              </a:rPr>
-              <a:t>Precisamos para começar: </a:t>
-            </a:r>
-            <a:pPr indent="0" marL="0">
-              <a:buNone/>
-            </a:pPr>
-            <a:r>
-              <a:rPr lang="en-US" sz="1500" dirty="0">
+          <a:bodyPr wrap="square" rtlCol="0" anchor="t"/>
+          <a:lstStyle/>
+          <a:p>
+            <a:pPr marL="342900" indent="-342900">
+              <a:spcAft>
+                <a:spcPts val="600"/>
+              </a:spcAft>
+              <a:buSzPct val="100000"/>
+              <a:buChar char="•"/>
+            </a:pPr>
+            <a:r>
+              <a:rPr lang="en-US" sz="1400" dirty="0">
                 <a:solidFill>
                   <a:schemeClr val="tx2"/>
                 </a:solidFill>
               </a:rPr>
-              <a:t>medidas das estações, média de itens por caixa, acesso à API do BHT e às tabelas de pedido no Sybase e a linguagem do Serviço PTL.</a:t>
-            </a:r>
-            <a:endParaRPr lang="en-US" sz="1500" dirty="0"/>
+              <a:t>Produto pronto e com garantia</a:t>
+            </a:r>
+            <a:endParaRPr lang="en-US" sz="1400" dirty="0"/>
+          </a:p>
+          <a:p>
+            <a:pPr marL="342900" indent="-342900">
+              <a:spcAft>
+                <a:spcPts val="600"/>
+              </a:spcAft>
+              <a:buSzPct val="100000"/>
+              <a:buChar char="•"/>
+            </a:pPr>
+            <a:r>
+              <a:rPr lang="en-US" sz="1400" dirty="0">
+                <a:solidFill>
+                  <a:schemeClr val="tx2"/>
+                </a:solidFill>
+              </a:rPr>
+              <a:t>Cerca de 2,5 vezes o custo interno</a:t>
+            </a:r>
+            <a:endParaRPr lang="en-US" sz="1400" dirty="0"/>
+          </a:p>
+          <a:p>
+            <a:pPr marL="342900" indent="-342900">
+              <a:spcAft>
+                <a:spcPts val="600"/>
+              </a:spcAft>
+              <a:buSzPct val="100000"/>
+              <a:buChar char="•"/>
+            </a:pPr>
+            <a:r>
+              <a:rPr lang="en-US" sz="1400" dirty="0">
+                <a:solidFill>
+                  <a:schemeClr val="tx2"/>
+                </a:solidFill>
+              </a:rPr>
+              <a:t>Dependência do fornecedor</a:t>
+            </a:r>
+            <a:endParaRPr lang="en-US" sz="1400" dirty="0"/>
+          </a:p>
+          <a:p>
+            <a:pPr marL="342900" indent="-342900">
+              <a:spcAft>
+                <a:spcPts val="600"/>
+              </a:spcAft>
+              <a:buSzPct val="100000"/>
+              <a:buChar char="•"/>
+            </a:pPr>
+            <a:r>
+              <a:rPr lang="en-US" sz="1400" dirty="0">
+                <a:solidFill>
+                  <a:schemeClr val="tx2"/>
+                </a:solidFill>
+              </a:rPr>
+              <a:t>Precisa de cotação formal</a:t>
+            </a:r>
+            <a:endParaRPr lang="en-US" sz="1400" dirty="0"/>
           </a:p>
         </p:txBody>
       </p:sp>
@@ -9075,7 +8265,7 @@
                 <a:ea typeface="Arial" pitchFamily="34" charset="-122"/>
                 <a:cs typeface="Arial" pitchFamily="34" charset="-120"/>
               </a:rPr>
-              <a:t>R$ 364 mil</a:t>
+              <a:t>R$ 356 mil</a:t>
             </a:r>
             <a:endParaRPr lang="en-US" sz="3000" dirty="0"/>
           </a:p>
@@ -9213,7 +8403,7 @@
                 <a:ea typeface="Arial" pitchFamily="34" charset="-122"/>
                 <a:cs typeface="Arial" pitchFamily="34" charset="-120"/>
               </a:rPr>
-              <a:t>R$ 22,2 mil</a:t>
+              <a:t>R$ 21,8 mil</a:t>
             </a:r>
             <a:endParaRPr lang="en-US" sz="3000" dirty="0"/>
           </a:p>
@@ -9476,7 +8666,7 @@
                   <a:schemeClr val="tx1"/>
                 </a:solidFill>
               </a:rPr>
-              <a:t>Riscos e como tratar</a:t>
+              <a:t>Cronograma</a:t>
             </a:r>
             <a:endParaRPr lang="en-US" sz="2600" dirty="0"/>
           </a:p>
@@ -9490,12 +8680,880 @@
         </p:nvSpPr>
         <p:spPr>
           <a:xfrm>
-            <a:off x="548640" y="1325880"/>
-            <a:ext cx="5440680" cy="1325880"/>
+            <a:off x="822960" y="2331720"/>
+            <a:ext cx="10607040" cy="0"/>
+          </a:xfrm>
+          <a:prstGeom prst="line">
+            <a:avLst/>
+          </a:prstGeom>
+          <a:noFill/>
+          <a:ln w="38100">
+            <a:solidFill>
+              <a:srgbClr val="C9D1DC"/>
+            </a:solidFill>
+            <a:prstDash val="solid"/>
+          </a:ln>
+        </p:spPr>
+      </p:sp>
+      <p:sp>
+        <p:nvSpPr>
+          <p:cNvPr id="4" name="Shape 2"/>
+          <p:cNvSpPr/>
+          <p:nvPr/>
+        </p:nvSpPr>
+        <p:spPr>
+          <a:xfrm>
+            <a:off x="685800" y="2130552"/>
+            <a:ext cx="402336" cy="402336"/>
+          </a:xfrm>
+          <a:prstGeom prst="ellipse">
+            <a:avLst/>
+          </a:prstGeom>
+          <a:solidFill>
+            <a:schemeClr val="tx1"/>
+          </a:solidFill>
+          <a:ln w="25400">
+            <a:solidFill>
+              <a:schemeClr val="bg1"/>
+            </a:solidFill>
+            <a:prstDash val="solid"/>
+          </a:ln>
+        </p:spPr>
+      </p:sp>
+      <p:sp>
+        <p:nvSpPr>
+          <p:cNvPr id="5" name="Text 3"/>
+          <p:cNvSpPr txBox="1"/>
+          <p:nvPr/>
+        </p:nvSpPr>
+        <p:spPr>
+          <a:xfrm>
+            <a:off x="685800" y="2130552"/>
+            <a:ext cx="402336" cy="402336"/>
+          </a:xfrm>
+          <a:prstGeom prst="rect">
+            <a:avLst/>
+          </a:prstGeom>
+          <a:noFill/>
+          <a:ln/>
+        </p:spPr>
+        <p:txBody>
+          <a:bodyPr wrap="square" lIns="0" tIns="0" rIns="0" bIns="0" rtlCol="0" anchor="ctr"/>
+          <a:lstStyle/>
+          <a:p>
+            <a:pPr algn="ctr" indent="0" marL="0">
+              <a:buNone/>
+            </a:pPr>
+            <a:r>
+              <a:rPr lang="en-US" sz="1400" b="1" dirty="0">
+                <a:solidFill>
+                  <a:schemeClr val="bg1"/>
+                </a:solidFill>
+              </a:rPr>
+              <a:t>1</a:t>
+            </a:r>
+            <a:endParaRPr lang="en-US" sz="1400" dirty="0"/>
+          </a:p>
+        </p:txBody>
+      </p:sp>
+      <p:sp>
+        <p:nvSpPr>
+          <p:cNvPr id="6" name="Text 4"/>
+          <p:cNvSpPr txBox="1"/>
+          <p:nvPr/>
+        </p:nvSpPr>
+        <p:spPr>
+          <a:xfrm>
+            <a:off x="548640" y="1508760"/>
+            <a:ext cx="2103120" cy="411480"/>
+          </a:xfrm>
+          <a:prstGeom prst="rect">
+            <a:avLst/>
+          </a:prstGeom>
+          <a:noFill/>
+          <a:ln/>
+        </p:spPr>
+        <p:txBody>
+          <a:bodyPr wrap="square" lIns="0" tIns="0" rIns="0" bIns="0" rtlCol="0" anchor="ctr"/>
+          <a:lstStyle/>
+          <a:p>
+            <a:pPr indent="0" marL="0">
+              <a:buNone/>
+            </a:pPr>
+            <a:r>
+              <a:rPr lang="en-US" sz="1400" b="1" dirty="0">
+                <a:solidFill>
+                  <a:schemeClr val="accent6"/>
+                </a:solidFill>
+              </a:rPr>
+              <a:t>3 a 4 sem.</a:t>
+            </a:r>
+            <a:endParaRPr lang="en-US" sz="1400" dirty="0"/>
+          </a:p>
+        </p:txBody>
+      </p:sp>
+      <p:sp>
+        <p:nvSpPr>
+          <p:cNvPr id="7" name="Text 5"/>
+          <p:cNvSpPr txBox="1"/>
+          <p:nvPr/>
+        </p:nvSpPr>
+        <p:spPr>
+          <a:xfrm>
+            <a:off x="548640" y="2743200"/>
+            <a:ext cx="2103120" cy="457200"/>
+          </a:xfrm>
+          <a:prstGeom prst="rect">
+            <a:avLst/>
+          </a:prstGeom>
+          <a:noFill/>
+          <a:ln/>
+        </p:spPr>
+        <p:txBody>
+          <a:bodyPr wrap="square" lIns="0" tIns="0" rIns="0" bIns="0" rtlCol="0" anchor="ctr"/>
+          <a:lstStyle/>
+          <a:p>
+            <a:pPr indent="0" marL="0">
+              <a:buNone/>
+            </a:pPr>
+            <a:r>
+              <a:rPr lang="en-US" sz="1700" b="1" dirty="0">
+                <a:solidFill>
+                  <a:schemeClr val="tx1"/>
+                </a:solidFill>
+              </a:rPr>
+              <a:t>Protótipo de bancada</a:t>
+            </a:r>
+            <a:endParaRPr lang="en-US" sz="1700" dirty="0"/>
+          </a:p>
+        </p:txBody>
+      </p:sp>
+      <p:sp>
+        <p:nvSpPr>
+          <p:cNvPr id="8" name="Text 6"/>
+          <p:cNvSpPr txBox="1"/>
+          <p:nvPr/>
+        </p:nvSpPr>
+        <p:spPr>
+          <a:xfrm>
+            <a:off x="548640" y="3200400"/>
+            <a:ext cx="2057400" cy="1463040"/>
+          </a:xfrm>
+          <a:prstGeom prst="rect">
+            <a:avLst/>
+          </a:prstGeom>
+          <a:noFill/>
+          <a:ln/>
+        </p:spPr>
+        <p:txBody>
+          <a:bodyPr wrap="square" lIns="0" tIns="0" rIns="0" bIns="0" rtlCol="0" anchor="t"/>
+          <a:lstStyle/>
+          <a:p>
+            <a:pPr indent="0" marL="0">
+              <a:buNone/>
+            </a:pPr>
+            <a:r>
+              <a:rPr lang="en-US" sz="1300" dirty="0">
+                <a:solidFill>
+                  <a:schemeClr val="accent6"/>
+                </a:solidFill>
+              </a:rPr>
+              <a:t>Um concentrador, um nó, displays e versão mínima do Serviço PTL</a:t>
+            </a:r>
+            <a:endParaRPr lang="en-US" sz="1300" dirty="0"/>
+          </a:p>
+        </p:txBody>
+      </p:sp>
+      <p:sp>
+        <p:nvSpPr>
+          <p:cNvPr id="9" name="Shape 7"/>
+          <p:cNvSpPr/>
+          <p:nvPr/>
+        </p:nvSpPr>
+        <p:spPr>
+          <a:xfrm>
+            <a:off x="2926080" y="2130552"/>
+            <a:ext cx="402336" cy="402336"/>
+          </a:xfrm>
+          <a:prstGeom prst="ellipse">
+            <a:avLst/>
+          </a:prstGeom>
+          <a:solidFill>
+            <a:schemeClr val="accent1"/>
+          </a:solidFill>
+          <a:ln w="25400">
+            <a:solidFill>
+              <a:schemeClr val="bg1"/>
+            </a:solidFill>
+            <a:prstDash val="solid"/>
+          </a:ln>
+        </p:spPr>
+      </p:sp>
+      <p:sp>
+        <p:nvSpPr>
+          <p:cNvPr id="10" name="Text 8"/>
+          <p:cNvSpPr txBox="1"/>
+          <p:nvPr/>
+        </p:nvSpPr>
+        <p:spPr>
+          <a:xfrm>
+            <a:off x="2926080" y="2130552"/>
+            <a:ext cx="402336" cy="402336"/>
+          </a:xfrm>
+          <a:prstGeom prst="rect">
+            <a:avLst/>
+          </a:prstGeom>
+          <a:noFill/>
+          <a:ln/>
+        </p:spPr>
+        <p:txBody>
+          <a:bodyPr wrap="square" lIns="0" tIns="0" rIns="0" bIns="0" rtlCol="0" anchor="ctr"/>
+          <a:lstStyle/>
+          <a:p>
+            <a:pPr algn="ctr" indent="0" marL="0">
+              <a:buNone/>
+            </a:pPr>
+            <a:r>
+              <a:rPr lang="en-US" sz="1400" b="1" dirty="0">
+                <a:solidFill>
+                  <a:schemeClr val="bg1"/>
+                </a:solidFill>
+              </a:rPr>
+              <a:t>2</a:t>
+            </a:r>
+            <a:endParaRPr lang="en-US" sz="1400" dirty="0"/>
+          </a:p>
+        </p:txBody>
+      </p:sp>
+      <p:sp>
+        <p:nvSpPr>
+          <p:cNvPr id="11" name="Text 9"/>
+          <p:cNvSpPr txBox="1"/>
+          <p:nvPr/>
+        </p:nvSpPr>
+        <p:spPr>
+          <a:xfrm>
+            <a:off x="2788920" y="1508760"/>
+            <a:ext cx="2103120" cy="411480"/>
+          </a:xfrm>
+          <a:prstGeom prst="rect">
+            <a:avLst/>
+          </a:prstGeom>
+          <a:noFill/>
+          <a:ln/>
+        </p:spPr>
+        <p:txBody>
+          <a:bodyPr wrap="square" lIns="0" tIns="0" rIns="0" bIns="0" rtlCol="0" anchor="ctr"/>
+          <a:lstStyle/>
+          <a:p>
+            <a:pPr indent="0" marL="0">
+              <a:buNone/>
+            </a:pPr>
+            <a:r>
+              <a:rPr lang="en-US" sz="1400" b="1" dirty="0">
+                <a:solidFill>
+                  <a:schemeClr val="accent1"/>
+                </a:solidFill>
+              </a:rPr>
+              <a:t>6 a 8 sem.</a:t>
+            </a:r>
+            <a:endParaRPr lang="en-US" sz="1400" dirty="0"/>
+          </a:p>
+        </p:txBody>
+      </p:sp>
+      <p:sp>
+        <p:nvSpPr>
+          <p:cNvPr id="12" name="Text 10"/>
+          <p:cNvSpPr txBox="1"/>
+          <p:nvPr/>
+        </p:nvSpPr>
+        <p:spPr>
+          <a:xfrm>
+            <a:off x="2788920" y="2743200"/>
+            <a:ext cx="2103120" cy="457200"/>
+          </a:xfrm>
+          <a:prstGeom prst="rect">
+            <a:avLst/>
+          </a:prstGeom>
+          <a:noFill/>
+          <a:ln/>
+        </p:spPr>
+        <p:txBody>
+          <a:bodyPr wrap="square" lIns="0" tIns="0" rIns="0" bIns="0" rtlCol="0" anchor="ctr"/>
+          <a:lstStyle/>
+          <a:p>
+            <a:pPr indent="0" marL="0">
+              <a:buNone/>
+            </a:pPr>
+            <a:r>
+              <a:rPr lang="en-US" sz="1700" b="1" dirty="0">
+                <a:solidFill>
+                  <a:schemeClr val="tx1"/>
+                </a:solidFill>
+              </a:rPr>
+              <a:t>Piloto 05 e 27</a:t>
+            </a:r>
+            <a:endParaRPr lang="en-US" sz="1700" dirty="0"/>
+          </a:p>
+        </p:txBody>
+      </p:sp>
+      <p:sp>
+        <p:nvSpPr>
+          <p:cNvPr id="13" name="Text 11"/>
+          <p:cNvSpPr txBox="1"/>
+          <p:nvPr/>
+        </p:nvSpPr>
+        <p:spPr>
+          <a:xfrm>
+            <a:off x="2788920" y="3200400"/>
+            <a:ext cx="2057400" cy="1463040"/>
+          </a:xfrm>
+          <a:prstGeom prst="rect">
+            <a:avLst/>
+          </a:prstGeom>
+          <a:noFill/>
+          <a:ln/>
+        </p:spPr>
+        <p:txBody>
+          <a:bodyPr wrap="square" lIns="0" tIns="0" rIns="0" bIns="0" rtlCol="0" anchor="t"/>
+          <a:lstStyle/>
+          <a:p>
+            <a:pPr indent="0" marL="0">
+              <a:buNone/>
+            </a:pPr>
+            <a:r>
+              <a:rPr lang="en-US" sz="1300" dirty="0">
+                <a:solidFill>
+                  <a:schemeClr val="accent6"/>
+                </a:solidFill>
+              </a:rPr>
+              <a:t>Estações completas, app do coletor, painel e medição antes e depois</a:t>
+            </a:r>
+            <a:endParaRPr lang="en-US" sz="1300" dirty="0"/>
+          </a:p>
+        </p:txBody>
+      </p:sp>
+      <p:sp>
+        <p:nvSpPr>
+          <p:cNvPr id="14" name="Shape 12"/>
+          <p:cNvSpPr/>
+          <p:nvPr/>
+        </p:nvSpPr>
+        <p:spPr>
+          <a:xfrm>
+            <a:off x="5166360" y="2130552"/>
+            <a:ext cx="402336" cy="402336"/>
+          </a:xfrm>
+          <a:prstGeom prst="ellipse">
+            <a:avLst/>
+          </a:prstGeom>
+          <a:solidFill>
+            <a:schemeClr val="tx1"/>
+          </a:solidFill>
+          <a:ln w="25400">
+            <a:solidFill>
+              <a:schemeClr val="bg1"/>
+            </a:solidFill>
+            <a:prstDash val="solid"/>
+          </a:ln>
+        </p:spPr>
+      </p:sp>
+      <p:sp>
+        <p:nvSpPr>
+          <p:cNvPr id="15" name="Text 13"/>
+          <p:cNvSpPr txBox="1"/>
+          <p:nvPr/>
+        </p:nvSpPr>
+        <p:spPr>
+          <a:xfrm>
+            <a:off x="5166360" y="2130552"/>
+            <a:ext cx="402336" cy="402336"/>
+          </a:xfrm>
+          <a:prstGeom prst="rect">
+            <a:avLst/>
+          </a:prstGeom>
+          <a:noFill/>
+          <a:ln/>
+        </p:spPr>
+        <p:txBody>
+          <a:bodyPr wrap="square" lIns="0" tIns="0" rIns="0" bIns="0" rtlCol="0" anchor="ctr"/>
+          <a:lstStyle/>
+          <a:p>
+            <a:pPr algn="ctr" indent="0" marL="0">
+              <a:buNone/>
+            </a:pPr>
+            <a:r>
+              <a:rPr lang="en-US" sz="1400" b="1" dirty="0">
+                <a:solidFill>
+                  <a:schemeClr val="bg1"/>
+                </a:solidFill>
+              </a:rPr>
+              <a:t>3</a:t>
+            </a:r>
+            <a:endParaRPr lang="en-US" sz="1400" dirty="0"/>
+          </a:p>
+        </p:txBody>
+      </p:sp>
+      <p:sp>
+        <p:nvSpPr>
+          <p:cNvPr id="16" name="Text 14"/>
+          <p:cNvSpPr txBox="1"/>
+          <p:nvPr/>
+        </p:nvSpPr>
+        <p:spPr>
+          <a:xfrm>
+            <a:off x="5029200" y="1508760"/>
+            <a:ext cx="2103120" cy="411480"/>
+          </a:xfrm>
+          <a:prstGeom prst="rect">
+            <a:avLst/>
+          </a:prstGeom>
+          <a:noFill/>
+          <a:ln/>
+        </p:spPr>
+        <p:txBody>
+          <a:bodyPr wrap="square" lIns="0" tIns="0" rIns="0" bIns="0" rtlCol="0" anchor="ctr"/>
+          <a:lstStyle/>
+          <a:p>
+            <a:pPr indent="0" marL="0">
+              <a:buNone/>
+            </a:pPr>
+            <a:r>
+              <a:rPr lang="en-US" sz="1400" b="1" dirty="0">
+                <a:solidFill>
+                  <a:schemeClr val="accent6"/>
+                </a:solidFill>
+              </a:rPr>
+              <a:t>2 sem.</a:t>
+            </a:r>
+            <a:endParaRPr lang="en-US" sz="1400" dirty="0"/>
+          </a:p>
+        </p:txBody>
+      </p:sp>
+      <p:sp>
+        <p:nvSpPr>
+          <p:cNvPr id="17" name="Text 15"/>
+          <p:cNvSpPr txBox="1"/>
+          <p:nvPr/>
+        </p:nvSpPr>
+        <p:spPr>
+          <a:xfrm>
+            <a:off x="5029200" y="2743200"/>
+            <a:ext cx="2103120" cy="457200"/>
+          </a:xfrm>
+          <a:prstGeom prst="rect">
+            <a:avLst/>
+          </a:prstGeom>
+          <a:noFill/>
+          <a:ln/>
+        </p:spPr>
+        <p:txBody>
+          <a:bodyPr wrap="square" lIns="0" tIns="0" rIns="0" bIns="0" rtlCol="0" anchor="ctr"/>
+          <a:lstStyle/>
+          <a:p>
+            <a:pPr indent="0" marL="0">
+              <a:buNone/>
+            </a:pPr>
+            <a:r>
+              <a:rPr lang="en-US" sz="1700" b="1" dirty="0">
+                <a:solidFill>
+                  <a:schemeClr val="tx1"/>
+                </a:solidFill>
+              </a:rPr>
+              <a:t>Avaliação</a:t>
+            </a:r>
+            <a:endParaRPr lang="en-US" sz="1700" dirty="0"/>
+          </a:p>
+        </p:txBody>
+      </p:sp>
+      <p:sp>
+        <p:nvSpPr>
+          <p:cNvPr id="18" name="Text 16"/>
+          <p:cNvSpPr txBox="1"/>
+          <p:nvPr/>
+        </p:nvSpPr>
+        <p:spPr>
+          <a:xfrm>
+            <a:off x="5029200" y="3200400"/>
+            <a:ext cx="2057400" cy="1463040"/>
+          </a:xfrm>
+          <a:prstGeom prst="rect">
+            <a:avLst/>
+          </a:prstGeom>
+          <a:noFill/>
+          <a:ln/>
+        </p:spPr>
+        <p:txBody>
+          <a:bodyPr wrap="square" lIns="0" tIns="0" rIns="0" bIns="0" rtlCol="0" anchor="t"/>
+          <a:lstStyle/>
+          <a:p>
+            <a:pPr indent="0" marL="0">
+              <a:buNone/>
+            </a:pPr>
+            <a:r>
+              <a:rPr lang="en-US" sz="1300" dirty="0">
+                <a:solidFill>
+                  <a:schemeClr val="accent6"/>
+                </a:solidFill>
+              </a:rPr>
+              <a:t>Resultados, ajuste das zonas e decisão entre A e B</a:t>
+            </a:r>
+            <a:endParaRPr lang="en-US" sz="1300" dirty="0"/>
+          </a:p>
+        </p:txBody>
+      </p:sp>
+      <p:sp>
+        <p:nvSpPr>
+          <p:cNvPr id="19" name="Shape 17"/>
+          <p:cNvSpPr/>
+          <p:nvPr/>
+        </p:nvSpPr>
+        <p:spPr>
+          <a:xfrm>
+            <a:off x="7406640" y="2130552"/>
+            <a:ext cx="402336" cy="402336"/>
+          </a:xfrm>
+          <a:prstGeom prst="ellipse">
+            <a:avLst/>
+          </a:prstGeom>
+          <a:solidFill>
+            <a:schemeClr val="tx1"/>
+          </a:solidFill>
+          <a:ln w="25400">
+            <a:solidFill>
+              <a:schemeClr val="bg1"/>
+            </a:solidFill>
+            <a:prstDash val="solid"/>
+          </a:ln>
+        </p:spPr>
+      </p:sp>
+      <p:sp>
+        <p:nvSpPr>
+          <p:cNvPr id="20" name="Text 18"/>
+          <p:cNvSpPr txBox="1"/>
+          <p:nvPr/>
+        </p:nvSpPr>
+        <p:spPr>
+          <a:xfrm>
+            <a:off x="7406640" y="2130552"/>
+            <a:ext cx="402336" cy="402336"/>
+          </a:xfrm>
+          <a:prstGeom prst="rect">
+            <a:avLst/>
+          </a:prstGeom>
+          <a:noFill/>
+          <a:ln/>
+        </p:spPr>
+        <p:txBody>
+          <a:bodyPr wrap="square" lIns="0" tIns="0" rIns="0" bIns="0" rtlCol="0" anchor="ctr"/>
+          <a:lstStyle/>
+          <a:p>
+            <a:pPr algn="ctr" indent="0" marL="0">
+              <a:buNone/>
+            </a:pPr>
+            <a:r>
+              <a:rPr lang="en-US" sz="1400" b="1" dirty="0">
+                <a:solidFill>
+                  <a:schemeClr val="bg1"/>
+                </a:solidFill>
+              </a:rPr>
+              <a:t>4</a:t>
+            </a:r>
+            <a:endParaRPr lang="en-US" sz="1400" dirty="0"/>
+          </a:p>
+        </p:txBody>
+      </p:sp>
+      <p:sp>
+        <p:nvSpPr>
+          <p:cNvPr id="21" name="Text 19"/>
+          <p:cNvSpPr txBox="1"/>
+          <p:nvPr/>
+        </p:nvSpPr>
+        <p:spPr>
+          <a:xfrm>
+            <a:off x="7269480" y="1508760"/>
+            <a:ext cx="2103120" cy="411480"/>
+          </a:xfrm>
+          <a:prstGeom prst="rect">
+            <a:avLst/>
+          </a:prstGeom>
+          <a:noFill/>
+          <a:ln/>
+        </p:spPr>
+        <p:txBody>
+          <a:bodyPr wrap="square" lIns="0" tIns="0" rIns="0" bIns="0" rtlCol="0" anchor="ctr"/>
+          <a:lstStyle/>
+          <a:p>
+            <a:pPr indent="0" marL="0">
+              <a:buNone/>
+            </a:pPr>
+            <a:r>
+              <a:rPr lang="en-US" sz="1400" b="1" dirty="0">
+                <a:solidFill>
+                  <a:schemeClr val="accent6"/>
+                </a:solidFill>
+              </a:rPr>
+              <a:t>10 a 14 sem.</a:t>
+            </a:r>
+            <a:endParaRPr lang="en-US" sz="1400" dirty="0"/>
+          </a:p>
+        </p:txBody>
+      </p:sp>
+      <p:sp>
+        <p:nvSpPr>
+          <p:cNvPr id="22" name="Text 20"/>
+          <p:cNvSpPr txBox="1"/>
+          <p:nvPr/>
+        </p:nvSpPr>
+        <p:spPr>
+          <a:xfrm>
+            <a:off x="7269480" y="2743200"/>
+            <a:ext cx="2103120" cy="457200"/>
+          </a:xfrm>
+          <a:prstGeom prst="rect">
+            <a:avLst/>
+          </a:prstGeom>
+          <a:noFill/>
+          <a:ln/>
+        </p:spPr>
+        <p:txBody>
+          <a:bodyPr wrap="square" lIns="0" tIns="0" rIns="0" bIns="0" rtlCol="0" anchor="ctr"/>
+          <a:lstStyle/>
+          <a:p>
+            <a:pPr indent="0" marL="0">
+              <a:buNone/>
+            </a:pPr>
+            <a:r>
+              <a:rPr lang="en-US" sz="1700" b="1" dirty="0">
+                <a:solidFill>
+                  <a:schemeClr val="tx1"/>
+                </a:solidFill>
+              </a:rPr>
+              <a:t>Expansão</a:t>
+            </a:r>
+            <a:endParaRPr lang="en-US" sz="1700" dirty="0"/>
+          </a:p>
+        </p:txBody>
+      </p:sp>
+      <p:sp>
+        <p:nvSpPr>
+          <p:cNvPr id="23" name="Text 21"/>
+          <p:cNvSpPr txBox="1"/>
+          <p:nvPr/>
+        </p:nvSpPr>
+        <p:spPr>
+          <a:xfrm>
+            <a:off x="7269480" y="3200400"/>
+            <a:ext cx="2057400" cy="1463040"/>
+          </a:xfrm>
+          <a:prstGeom prst="rect">
+            <a:avLst/>
+          </a:prstGeom>
+          <a:noFill/>
+          <a:ln/>
+        </p:spPr>
+        <p:txBody>
+          <a:bodyPr wrap="square" lIns="0" tIns="0" rIns="0" bIns="0" rtlCol="0" anchor="t"/>
+          <a:lstStyle/>
+          <a:p>
+            <a:pPr indent="0" marL="0">
+              <a:buNone/>
+            </a:pPr>
+            <a:r>
+              <a:rPr lang="en-US" sz="1300" dirty="0">
+                <a:solidFill>
+                  <a:schemeClr val="accent6"/>
+                </a:solidFill>
+              </a:rPr>
+              <a:t>Medicamento e depois Perfumaria, de cinco em cinco estações</a:t>
+            </a:r>
+            <a:endParaRPr lang="en-US" sz="1300" dirty="0"/>
+          </a:p>
+        </p:txBody>
+      </p:sp>
+      <p:sp>
+        <p:nvSpPr>
+          <p:cNvPr id="24" name="Shape 22"/>
+          <p:cNvSpPr/>
+          <p:nvPr/>
+        </p:nvSpPr>
+        <p:spPr>
+          <a:xfrm>
+            <a:off x="9646920" y="2130552"/>
+            <a:ext cx="402336" cy="402336"/>
+          </a:xfrm>
+          <a:prstGeom prst="ellipse">
+            <a:avLst/>
+          </a:prstGeom>
+          <a:solidFill>
+            <a:schemeClr val="tx1"/>
+          </a:solidFill>
+          <a:ln w="25400">
+            <a:solidFill>
+              <a:schemeClr val="bg1"/>
+            </a:solidFill>
+            <a:prstDash val="solid"/>
+          </a:ln>
+        </p:spPr>
+      </p:sp>
+      <p:sp>
+        <p:nvSpPr>
+          <p:cNvPr id="25" name="Text 23"/>
+          <p:cNvSpPr txBox="1"/>
+          <p:nvPr/>
+        </p:nvSpPr>
+        <p:spPr>
+          <a:xfrm>
+            <a:off x="9646920" y="2130552"/>
+            <a:ext cx="402336" cy="402336"/>
+          </a:xfrm>
+          <a:prstGeom prst="rect">
+            <a:avLst/>
+          </a:prstGeom>
+          <a:noFill/>
+          <a:ln/>
+        </p:spPr>
+        <p:txBody>
+          <a:bodyPr wrap="square" lIns="0" tIns="0" rIns="0" bIns="0" rtlCol="0" anchor="ctr"/>
+          <a:lstStyle/>
+          <a:p>
+            <a:pPr algn="ctr" indent="0" marL="0">
+              <a:buNone/>
+            </a:pPr>
+            <a:r>
+              <a:rPr lang="en-US" sz="1400" b="1" dirty="0">
+                <a:solidFill>
+                  <a:schemeClr val="bg1"/>
+                </a:solidFill>
+              </a:rPr>
+              <a:t>5</a:t>
+            </a:r>
+            <a:endParaRPr lang="en-US" sz="1400" dirty="0"/>
+          </a:p>
+        </p:txBody>
+      </p:sp>
+      <p:sp>
+        <p:nvSpPr>
+          <p:cNvPr id="26" name="Text 24"/>
+          <p:cNvSpPr txBox="1"/>
+          <p:nvPr/>
+        </p:nvSpPr>
+        <p:spPr>
+          <a:xfrm>
+            <a:off x="9509760" y="1508760"/>
+            <a:ext cx="2103120" cy="411480"/>
+          </a:xfrm>
+          <a:prstGeom prst="rect">
+            <a:avLst/>
+          </a:prstGeom>
+          <a:noFill/>
+          <a:ln/>
+        </p:spPr>
+        <p:txBody>
+          <a:bodyPr wrap="square" lIns="0" tIns="0" rIns="0" bIns="0" rtlCol="0" anchor="ctr"/>
+          <a:lstStyle/>
+          <a:p>
+            <a:pPr indent="0" marL="0">
+              <a:buNone/>
+            </a:pPr>
+            <a:r>
+              <a:rPr lang="en-US" sz="1400" b="1" dirty="0">
+                <a:solidFill>
+                  <a:schemeClr val="accent6"/>
+                </a:solidFill>
+              </a:rPr>
+              <a:t>4 sem.</a:t>
+            </a:r>
+            <a:endParaRPr lang="en-US" sz="1400" dirty="0"/>
+          </a:p>
+        </p:txBody>
+      </p:sp>
+      <p:sp>
+        <p:nvSpPr>
+          <p:cNvPr id="27" name="Text 25"/>
+          <p:cNvSpPr txBox="1"/>
+          <p:nvPr/>
+        </p:nvSpPr>
+        <p:spPr>
+          <a:xfrm>
+            <a:off x="9509760" y="2743200"/>
+            <a:ext cx="2103120" cy="457200"/>
+          </a:xfrm>
+          <a:prstGeom prst="rect">
+            <a:avLst/>
+          </a:prstGeom>
+          <a:noFill/>
+          <a:ln/>
+        </p:spPr>
+        <p:txBody>
+          <a:bodyPr wrap="square" lIns="0" tIns="0" rIns="0" bIns="0" rtlCol="0" anchor="ctr"/>
+          <a:lstStyle/>
+          <a:p>
+            <a:pPr indent="0" marL="0">
+              <a:buNone/>
+            </a:pPr>
+            <a:r>
+              <a:rPr lang="en-US" sz="1700" b="1" dirty="0">
+                <a:solidFill>
+                  <a:schemeClr val="tx1"/>
+                </a:solidFill>
+              </a:rPr>
+              <a:t>Estabilização</a:t>
+            </a:r>
+            <a:endParaRPr lang="en-US" sz="1700" dirty="0"/>
+          </a:p>
+        </p:txBody>
+      </p:sp>
+      <p:sp>
+        <p:nvSpPr>
+          <p:cNvPr id="28" name="Text 26"/>
+          <p:cNvSpPr txBox="1"/>
+          <p:nvPr/>
+        </p:nvSpPr>
+        <p:spPr>
+          <a:xfrm>
+            <a:off x="9509760" y="3200400"/>
+            <a:ext cx="2057400" cy="1463040"/>
+          </a:xfrm>
+          <a:prstGeom prst="rect">
+            <a:avLst/>
+          </a:prstGeom>
+          <a:noFill/>
+          <a:ln/>
+        </p:spPr>
+        <p:txBody>
+          <a:bodyPr wrap="square" lIns="0" tIns="0" rIns="0" bIns="0" rtlCol="0" anchor="t"/>
+          <a:lstStyle/>
+          <a:p>
+            <a:pPr indent="0" marL="0">
+              <a:buNone/>
+            </a:pPr>
+            <a:r>
+              <a:rPr lang="en-US" sz="1300" dirty="0">
+                <a:solidFill>
+                  <a:schemeClr val="accent6"/>
+                </a:solidFill>
+              </a:rPr>
+              <a:t>Ajustes finais e entrega para a sustentação</a:t>
+            </a:r>
+            <a:endParaRPr lang="en-US" sz="1300" dirty="0"/>
+          </a:p>
+        </p:txBody>
+      </p:sp>
+      <p:sp>
+        <p:nvSpPr>
+          <p:cNvPr id="29" name="Shape 27"/>
+          <p:cNvSpPr/>
+          <p:nvPr/>
+        </p:nvSpPr>
+        <p:spPr>
+          <a:xfrm>
+            <a:off x="548640" y="4892040"/>
+            <a:ext cx="11064240" cy="1051560"/>
           </a:xfrm>
           <a:prstGeom prst="roundRect">
             <a:avLst>
-              <a:gd name="adj" fmla="val 5517"/>
+              <a:gd name="adj" fmla="val 6957"/>
             </a:avLst>
           </a:prstGeom>
           <a:solidFill>
@@ -9511,63 +9569,14 @@
       </p:sp>
       <p:sp>
         <p:nvSpPr>
-          <p:cNvPr id="4" name="Shape 2"/>
-          <p:cNvSpPr/>
-          <p:nvPr/>
-        </p:nvSpPr>
-        <p:spPr>
-          <a:xfrm>
-            <a:off x="777240" y="1554480"/>
-            <a:ext cx="502920" cy="502920"/>
-          </a:xfrm>
-          <a:prstGeom prst="ellipse">
-            <a:avLst/>
-          </a:prstGeom>
-          <a:solidFill>
-            <a:schemeClr val="accent1"/>
-          </a:solidFill>
-          <a:ln w="12700">
-            <a:solidFill>
-              <a:schemeClr val="accent1"/>
-            </a:solidFill>
-            <a:prstDash val="solid"/>
-          </a:ln>
-        </p:spPr>
-      </p:sp>
-      <p:pic>
-        <p:nvPicPr>
-          <p:cNvPr id="5" name="Image 0" descr="preencoded.png">    </p:cNvPr>
-          <p:cNvPicPr>
-            <a:picLocks noChangeAspect="1"/>
-          </p:cNvPicPr>
-          <p:nvPr/>
-        </p:nvPicPr>
-        <p:blipFill>
-          <a:blip r:embed="rId1"/>
-          <a:stretch>
-            <a:fillRect/>
-          </a:stretch>
-        </p:blipFill>
-        <p:spPr>
-          <a:xfrm>
-            <a:off x="897941" y="1675181"/>
-            <a:ext cx="261518" cy="261518"/>
-          </a:xfrm>
-          <a:prstGeom prst="rect">
-            <a:avLst/>
-          </a:prstGeom>
-        </p:spPr>
-      </p:pic>
-      <p:sp>
-        <p:nvSpPr>
-          <p:cNvPr id="6" name="Text 3"/>
+          <p:cNvPr id="30" name="Text 28"/>
           <p:cNvSpPr txBox="1"/>
           <p:nvPr/>
         </p:nvSpPr>
         <p:spPr>
           <a:xfrm>
-            <a:off x="1463040" y="1490472"/>
-            <a:ext cx="4343400" cy="411480"/>
+            <a:off x="777240" y="4983480"/>
+            <a:ext cx="10607040" cy="868680"/>
           </a:xfrm>
           <a:prstGeom prst="rect">
             <a:avLst/>
@@ -9583,790 +9592,25 @@
               <a:buNone/>
             </a:pPr>
             <a:r>
-              <a:rPr lang="en-US" sz="1600" b="1" dirty="0">
+              <a:rPr lang="en-US" sz="1500" b="1" dirty="0">
                 <a:solidFill>
                   <a:schemeClr val="tx1"/>
                 </a:solidFill>
               </a:rPr>
-              <a:t>Dados da caixa na API do BHT</a:t>
-            </a:r>
-            <a:endParaRPr lang="en-US" sz="1600" dirty="0"/>
-          </a:p>
-        </p:txBody>
-      </p:sp>
-      <p:sp>
-        <p:nvSpPr>
-          <p:cNvPr id="7" name="Text 4"/>
-          <p:cNvSpPr txBox="1"/>
-          <p:nvPr/>
-        </p:nvSpPr>
-        <p:spPr>
-          <a:xfrm>
-            <a:off x="1463040" y="1892808"/>
-            <a:ext cx="4343400" cy="640080"/>
-          </a:xfrm>
-          <a:prstGeom prst="rect">
-            <a:avLst/>
-          </a:prstGeom>
-          <a:noFill/>
-          <a:ln/>
-        </p:spPr>
-        <p:txBody>
-          <a:bodyPr wrap="square" lIns="0" tIns="0" rIns="0" bIns="0" rtlCol="0" anchor="t"/>
-          <a:lstStyle/>
-          <a:p>
+              <a:t>Precisamos para começar: </a:t>
+            </a:r>
             <a:pPr indent="0" marL="0">
               <a:buNone/>
             </a:pPr>
             <a:r>
-              <a:rPr lang="en-US" sz="1300" dirty="0">
-                <a:solidFill>
-                  <a:schemeClr val="accent6"/>
-                </a:solidFill>
-              </a:rPr>
-              <a:t>Validar no protótipo; alternativa por views no Sybase</a:t>
-            </a:r>
-            <a:endParaRPr lang="en-US" sz="1300" dirty="0"/>
-          </a:p>
-        </p:txBody>
-      </p:sp>
-      <p:sp>
-        <p:nvSpPr>
-          <p:cNvPr id="8" name="Shape 5"/>
-          <p:cNvSpPr/>
-          <p:nvPr/>
-        </p:nvSpPr>
-        <p:spPr>
-          <a:xfrm>
-            <a:off x="6172200" y="1325880"/>
-            <a:ext cx="5440680" cy="1325880"/>
-          </a:xfrm>
-          <a:prstGeom prst="roundRect">
-            <a:avLst>
-              <a:gd name="adj" fmla="val 5517"/>
-            </a:avLst>
-          </a:prstGeom>
-          <a:solidFill>
-            <a:schemeClr val="bg2"/>
-          </a:solidFill>
-          <a:ln w="12700">
-            <a:solidFill>
-              <a:schemeClr val="bg2"/>
-            </a:solidFill>
-            <a:prstDash val="solid"/>
-          </a:ln>
-        </p:spPr>
-      </p:sp>
-      <p:sp>
-        <p:nvSpPr>
-          <p:cNvPr id="9" name="Shape 6"/>
-          <p:cNvSpPr/>
-          <p:nvPr/>
-        </p:nvSpPr>
-        <p:spPr>
-          <a:xfrm>
-            <a:off x="6400800" y="1554480"/>
-            <a:ext cx="502920" cy="502920"/>
-          </a:xfrm>
-          <a:prstGeom prst="ellipse">
-            <a:avLst/>
-          </a:prstGeom>
-          <a:solidFill>
-            <a:schemeClr val="accent1"/>
-          </a:solidFill>
-          <a:ln w="12700">
-            <a:solidFill>
-              <a:schemeClr val="accent1"/>
-            </a:solidFill>
-            <a:prstDash val="solid"/>
-          </a:ln>
-        </p:spPr>
-      </p:sp>
-      <p:pic>
-        <p:nvPicPr>
-          <p:cNvPr id="10" name="Image 1" descr="preencoded.png">    </p:cNvPr>
-          <p:cNvPicPr>
-            <a:picLocks noChangeAspect="1"/>
-          </p:cNvPicPr>
-          <p:nvPr/>
-        </p:nvPicPr>
-        <p:blipFill>
-          <a:blip r:embed="rId2"/>
-          <a:stretch>
-            <a:fillRect/>
-          </a:stretch>
-        </p:blipFill>
-        <p:spPr>
-          <a:xfrm>
-            <a:off x="6521501" y="1675181"/>
-            <a:ext cx="261518" cy="261518"/>
-          </a:xfrm>
-          <a:prstGeom prst="rect">
-            <a:avLst/>
-          </a:prstGeom>
-        </p:spPr>
-      </p:pic>
-      <p:sp>
-        <p:nvSpPr>
-          <p:cNvPr id="11" name="Text 7"/>
-          <p:cNvSpPr txBox="1"/>
-          <p:nvPr/>
-        </p:nvSpPr>
-        <p:spPr>
-          <a:xfrm>
-            <a:off x="7086600" y="1490472"/>
-            <a:ext cx="4343400" cy="411480"/>
-          </a:xfrm>
-          <a:prstGeom prst="rect">
-            <a:avLst/>
-          </a:prstGeom>
-          <a:noFill/>
-          <a:ln/>
-        </p:spPr>
-        <p:txBody>
-          <a:bodyPr wrap="square" lIns="0" tIns="0" rIns="0" bIns="0" rtlCol="0" anchor="ctr"/>
-          <a:lstStyle/>
-          <a:p>
-            <a:pPr indent="0" marL="0">
-              <a:buNone/>
-            </a:pPr>
-            <a:r>
-              <a:rPr lang="en-US" sz="1600" b="1" dirty="0">
-                <a:solidFill>
-                  <a:schemeClr val="tx1"/>
-                </a:solidFill>
-              </a:rPr>
-              <a:t>Manutenção alta, como no sistema anterior</a:t>
-            </a:r>
-            <a:endParaRPr lang="en-US" sz="1600" dirty="0"/>
-          </a:p>
-        </p:txBody>
-      </p:sp>
-      <p:sp>
-        <p:nvSpPr>
-          <p:cNvPr id="12" name="Text 8"/>
-          <p:cNvSpPr txBox="1"/>
-          <p:nvPr/>
-        </p:nvSpPr>
-        <p:spPr>
-          <a:xfrm>
-            <a:off x="7086600" y="1892808"/>
-            <a:ext cx="4343400" cy="640080"/>
-          </a:xfrm>
-          <a:prstGeom prst="rect">
-            <a:avLst/>
-          </a:prstGeom>
-          <a:noFill/>
-          <a:ln/>
-        </p:spPr>
-        <p:txBody>
-          <a:bodyPr wrap="square" lIns="0" tIns="0" rIns="0" bIns="0" rtlCol="0" anchor="t"/>
-          <a:lstStyle/>
-          <a:p>
-            <a:pPr indent="0" marL="0">
-              <a:buNone/>
-            </a:pPr>
-            <a:r>
-              <a:rPr lang="en-US" sz="1300" dirty="0">
-                <a:solidFill>
-                  <a:schemeClr val="accent6"/>
-                </a:solidFill>
-              </a:rPr>
-              <a:t>RJ45 em todos os trechos, módulos de troca rápida e teste a cada turno</a:t>
-            </a:r>
-            <a:endParaRPr lang="en-US" sz="1300" dirty="0"/>
-          </a:p>
-        </p:txBody>
-      </p:sp>
-      <p:sp>
-        <p:nvSpPr>
-          <p:cNvPr id="13" name="Shape 9"/>
-          <p:cNvSpPr/>
-          <p:nvPr/>
-        </p:nvSpPr>
-        <p:spPr>
-          <a:xfrm>
-            <a:off x="548640" y="2834640"/>
-            <a:ext cx="5440680" cy="1325880"/>
-          </a:xfrm>
-          <a:prstGeom prst="roundRect">
-            <a:avLst>
-              <a:gd name="adj" fmla="val 5517"/>
-            </a:avLst>
-          </a:prstGeom>
-          <a:solidFill>
-            <a:schemeClr val="bg2"/>
-          </a:solidFill>
-          <a:ln w="12700">
-            <a:solidFill>
-              <a:schemeClr val="bg2"/>
-            </a:solidFill>
-            <a:prstDash val="solid"/>
-          </a:ln>
-        </p:spPr>
-      </p:sp>
-      <p:sp>
-        <p:nvSpPr>
-          <p:cNvPr id="14" name="Shape 10"/>
-          <p:cNvSpPr/>
-          <p:nvPr/>
-        </p:nvSpPr>
-        <p:spPr>
-          <a:xfrm>
-            <a:off x="777240" y="3063240"/>
-            <a:ext cx="502920" cy="502920"/>
-          </a:xfrm>
-          <a:prstGeom prst="ellipse">
-            <a:avLst/>
-          </a:prstGeom>
-          <a:solidFill>
-            <a:schemeClr val="accent1"/>
-          </a:solidFill>
-          <a:ln w="12700">
-            <a:solidFill>
-              <a:schemeClr val="accent1"/>
-            </a:solidFill>
-            <a:prstDash val="solid"/>
-          </a:ln>
-        </p:spPr>
-      </p:sp>
-      <p:pic>
-        <p:nvPicPr>
-          <p:cNvPr id="15" name="Image 2" descr="preencoded.png">    </p:cNvPr>
-          <p:cNvPicPr>
-            <a:picLocks noChangeAspect="1"/>
-          </p:cNvPicPr>
-          <p:nvPr/>
-        </p:nvPicPr>
-        <p:blipFill>
-          <a:blip r:embed="rId3"/>
-          <a:stretch>
-            <a:fillRect/>
-          </a:stretch>
-        </p:blipFill>
-        <p:spPr>
-          <a:xfrm>
-            <a:off x="897941" y="3183941"/>
-            <a:ext cx="261518" cy="261518"/>
-          </a:xfrm>
-          <a:prstGeom prst="rect">
-            <a:avLst/>
-          </a:prstGeom>
-        </p:spPr>
-      </p:pic>
-      <p:sp>
-        <p:nvSpPr>
-          <p:cNvPr id="16" name="Text 11"/>
-          <p:cNvSpPr txBox="1"/>
-          <p:nvPr/>
-        </p:nvSpPr>
-        <p:spPr>
-          <a:xfrm>
-            <a:off x="1463040" y="2999232"/>
-            <a:ext cx="4343400" cy="411480"/>
-          </a:xfrm>
-          <a:prstGeom prst="rect">
-            <a:avLst/>
-          </a:prstGeom>
-          <a:noFill/>
-          <a:ln/>
-        </p:spPr>
-        <p:txBody>
-          <a:bodyPr wrap="square" lIns="0" tIns="0" rIns="0" bIns="0" rtlCol="0" anchor="ctr"/>
-          <a:lstStyle/>
-          <a:p>
-            <a:pPr indent="0" marL="0">
-              <a:buNone/>
-            </a:pPr>
-            <a:r>
-              <a:rPr lang="en-US" sz="1600" b="1" dirty="0">
-                <a:solidFill>
-                  <a:schemeClr val="tx1"/>
-                </a:solidFill>
-              </a:rPr>
-              <a:t>Poeira e calor</a:t>
-            </a:r>
-            <a:endParaRPr lang="en-US" sz="1600" dirty="0"/>
-          </a:p>
-        </p:txBody>
-      </p:sp>
-      <p:sp>
-        <p:nvSpPr>
-          <p:cNvPr id="17" name="Text 12"/>
-          <p:cNvSpPr txBox="1"/>
-          <p:nvPr/>
-        </p:nvSpPr>
-        <p:spPr>
-          <a:xfrm>
-            <a:off x="1463040" y="3401568"/>
-            <a:ext cx="4343400" cy="640080"/>
-          </a:xfrm>
-          <a:prstGeom prst="rect">
-            <a:avLst/>
-          </a:prstGeom>
-          <a:noFill/>
-          <a:ln/>
-        </p:spPr>
-        <p:txBody>
-          <a:bodyPr wrap="square" lIns="0" tIns="0" rIns="0" bIns="0" rtlCol="0" anchor="t"/>
-          <a:lstStyle/>
-          <a:p>
-            <a:pPr indent="0" marL="0">
-              <a:buNone/>
-            </a:pPr>
-            <a:r>
-              <a:rPr lang="en-US" sz="1300" dirty="0">
-                <a:solidFill>
-                  <a:schemeClr val="accent6"/>
-                </a:solidFill>
-              </a:rPr>
-              <a:t>Gabinete com filtro e cooler e componentes para 0 a 50 °C</a:t>
-            </a:r>
-            <a:endParaRPr lang="en-US" sz="1300" dirty="0"/>
-          </a:p>
-        </p:txBody>
-      </p:sp>
-      <p:sp>
-        <p:nvSpPr>
-          <p:cNvPr id="18" name="Shape 13"/>
-          <p:cNvSpPr/>
-          <p:nvPr/>
-        </p:nvSpPr>
-        <p:spPr>
-          <a:xfrm>
-            <a:off x="6172200" y="2834640"/>
-            <a:ext cx="5440680" cy="1325880"/>
-          </a:xfrm>
-          <a:prstGeom prst="roundRect">
-            <a:avLst>
-              <a:gd name="adj" fmla="val 5517"/>
-            </a:avLst>
-          </a:prstGeom>
-          <a:solidFill>
-            <a:schemeClr val="bg2"/>
-          </a:solidFill>
-          <a:ln w="12700">
-            <a:solidFill>
-              <a:schemeClr val="bg2"/>
-            </a:solidFill>
-            <a:prstDash val="solid"/>
-          </a:ln>
-        </p:spPr>
-      </p:sp>
-      <p:sp>
-        <p:nvSpPr>
-          <p:cNvPr id="19" name="Shape 14"/>
-          <p:cNvSpPr/>
-          <p:nvPr/>
-        </p:nvSpPr>
-        <p:spPr>
-          <a:xfrm>
-            <a:off x="6400800" y="3063240"/>
-            <a:ext cx="502920" cy="502920"/>
-          </a:xfrm>
-          <a:prstGeom prst="ellipse">
-            <a:avLst/>
-          </a:prstGeom>
-          <a:solidFill>
-            <a:schemeClr val="accent1"/>
-          </a:solidFill>
-          <a:ln w="12700">
-            <a:solidFill>
-              <a:schemeClr val="accent1"/>
-            </a:solidFill>
-            <a:prstDash val="solid"/>
-          </a:ln>
-        </p:spPr>
-      </p:sp>
-      <p:pic>
-        <p:nvPicPr>
-          <p:cNvPr id="20" name="Image 3" descr="preencoded.png">    </p:cNvPr>
-          <p:cNvPicPr>
-            <a:picLocks noChangeAspect="1"/>
-          </p:cNvPicPr>
-          <p:nvPr/>
-        </p:nvPicPr>
-        <p:blipFill>
-          <a:blip r:embed="rId4"/>
-          <a:stretch>
-            <a:fillRect/>
-          </a:stretch>
-        </p:blipFill>
-        <p:spPr>
-          <a:xfrm>
-            <a:off x="6521501" y="3183941"/>
-            <a:ext cx="261518" cy="261518"/>
-          </a:xfrm>
-          <a:prstGeom prst="rect">
-            <a:avLst/>
-          </a:prstGeom>
-        </p:spPr>
-      </p:pic>
-      <p:sp>
-        <p:nvSpPr>
-          <p:cNvPr id="21" name="Text 15"/>
-          <p:cNvSpPr txBox="1"/>
-          <p:nvPr/>
-        </p:nvSpPr>
-        <p:spPr>
-          <a:xfrm>
-            <a:off x="7086600" y="2999232"/>
-            <a:ext cx="4343400" cy="411480"/>
-          </a:xfrm>
-          <a:prstGeom prst="rect">
-            <a:avLst/>
-          </a:prstGeom>
-          <a:noFill/>
-          <a:ln/>
-        </p:spPr>
-        <p:txBody>
-          <a:bodyPr wrap="square" lIns="0" tIns="0" rIns="0" bIns="0" rtlCol="0" anchor="ctr"/>
-          <a:lstStyle/>
-          <a:p>
-            <a:pPr indent="0" marL="0">
-              <a:buNone/>
-            </a:pPr>
-            <a:r>
-              <a:rPr lang="en-US" sz="1600" b="1" dirty="0">
-                <a:solidFill>
-                  <a:schemeClr val="tx1"/>
-                </a:solidFill>
-              </a:rPr>
-              <a:t>Itens por caixa fora do esperado</a:t>
-            </a:r>
-            <a:endParaRPr lang="en-US" sz="1600" dirty="0"/>
-          </a:p>
-        </p:txBody>
-      </p:sp>
-      <p:sp>
-        <p:nvSpPr>
-          <p:cNvPr id="22" name="Text 16"/>
-          <p:cNvSpPr txBox="1"/>
-          <p:nvPr/>
-        </p:nvSpPr>
-        <p:spPr>
-          <a:xfrm>
-            <a:off x="7086600" y="3401568"/>
-            <a:ext cx="4343400" cy="640080"/>
-          </a:xfrm>
-          <a:prstGeom prst="rect">
-            <a:avLst/>
-          </a:prstGeom>
-          <a:noFill/>
-          <a:ln/>
-        </p:spPr>
-        <p:txBody>
-          <a:bodyPr wrap="square" lIns="0" tIns="0" rIns="0" bIns="0" rtlCol="0" anchor="t"/>
-          <a:lstStyle/>
-          <a:p>
-            <a:pPr indent="0" marL="0">
-              <a:buNone/>
-            </a:pPr>
-            <a:r>
-              <a:rPr lang="en-US" sz="1300" dirty="0">
-                <a:solidFill>
-                  <a:schemeClr val="accent6"/>
-                </a:solidFill>
-              </a:rPr>
-              <a:t>Medir no piloto e ajustar o tamanho das zonas</a:t>
-            </a:r>
-            <a:endParaRPr lang="en-US" sz="1300" dirty="0"/>
-          </a:p>
-        </p:txBody>
-      </p:sp>
-      <p:sp>
-        <p:nvSpPr>
-          <p:cNvPr id="23" name="Shape 17"/>
-          <p:cNvSpPr/>
-          <p:nvPr/>
-        </p:nvSpPr>
-        <p:spPr>
-          <a:xfrm>
-            <a:off x="548640" y="4343400"/>
-            <a:ext cx="5440680" cy="1325880"/>
-          </a:xfrm>
-          <a:prstGeom prst="roundRect">
-            <a:avLst>
-              <a:gd name="adj" fmla="val 5517"/>
-            </a:avLst>
-          </a:prstGeom>
-          <a:solidFill>
-            <a:schemeClr val="bg2"/>
-          </a:solidFill>
-          <a:ln w="12700">
-            <a:solidFill>
-              <a:schemeClr val="bg2"/>
-            </a:solidFill>
-            <a:prstDash val="solid"/>
-          </a:ln>
-        </p:spPr>
-      </p:sp>
-      <p:sp>
-        <p:nvSpPr>
-          <p:cNvPr id="24" name="Shape 18"/>
-          <p:cNvSpPr/>
-          <p:nvPr/>
-        </p:nvSpPr>
-        <p:spPr>
-          <a:xfrm>
-            <a:off x="777240" y="4572000"/>
-            <a:ext cx="502920" cy="502920"/>
-          </a:xfrm>
-          <a:prstGeom prst="ellipse">
-            <a:avLst/>
-          </a:prstGeom>
-          <a:solidFill>
-            <a:schemeClr val="accent1"/>
-          </a:solidFill>
-          <a:ln w="12700">
-            <a:solidFill>
-              <a:schemeClr val="accent1"/>
-            </a:solidFill>
-            <a:prstDash val="solid"/>
-          </a:ln>
-        </p:spPr>
-      </p:sp>
-      <p:pic>
-        <p:nvPicPr>
-          <p:cNvPr id="25" name="Image 4" descr="preencoded.png">    </p:cNvPr>
-          <p:cNvPicPr>
-            <a:picLocks noChangeAspect="1"/>
-          </p:cNvPicPr>
-          <p:nvPr/>
-        </p:nvPicPr>
-        <p:blipFill>
-          <a:blip r:embed="rId5"/>
-          <a:stretch>
-            <a:fillRect/>
-          </a:stretch>
-        </p:blipFill>
-        <p:spPr>
-          <a:xfrm>
-            <a:off x="897941" y="4692701"/>
-            <a:ext cx="261518" cy="261518"/>
-          </a:xfrm>
-          <a:prstGeom prst="rect">
-            <a:avLst/>
-          </a:prstGeom>
-        </p:spPr>
-      </p:pic>
-      <p:sp>
-        <p:nvSpPr>
-          <p:cNvPr id="26" name="Text 19"/>
-          <p:cNvSpPr txBox="1"/>
-          <p:nvPr/>
-        </p:nvSpPr>
-        <p:spPr>
-          <a:xfrm>
-            <a:off x="1463040" y="4507992"/>
-            <a:ext cx="4343400" cy="411480"/>
-          </a:xfrm>
-          <a:prstGeom prst="rect">
-            <a:avLst/>
-          </a:prstGeom>
-          <a:noFill/>
-          <a:ln/>
-        </p:spPr>
-        <p:txBody>
-          <a:bodyPr wrap="square" lIns="0" tIns="0" rIns="0" bIns="0" rtlCol="0" anchor="ctr"/>
-          <a:lstStyle/>
-          <a:p>
-            <a:pPr indent="0" marL="0">
-              <a:buNone/>
-            </a:pPr>
-            <a:r>
-              <a:rPr lang="en-US" sz="1600" b="1" dirty="0">
-                <a:solidFill>
-                  <a:schemeClr val="tx1"/>
-                </a:solidFill>
-              </a:rPr>
-              <a:t>Depender de um único técnico</a:t>
-            </a:r>
-            <a:endParaRPr lang="en-US" sz="1600" dirty="0"/>
-          </a:p>
-        </p:txBody>
-      </p:sp>
-      <p:sp>
-        <p:nvSpPr>
-          <p:cNvPr id="27" name="Text 20"/>
-          <p:cNvSpPr txBox="1"/>
-          <p:nvPr/>
-        </p:nvSpPr>
-        <p:spPr>
-          <a:xfrm>
-            <a:off x="1463040" y="4910328"/>
-            <a:ext cx="4343400" cy="640080"/>
-          </a:xfrm>
-          <a:prstGeom prst="rect">
-            <a:avLst/>
-          </a:prstGeom>
-          <a:noFill/>
-          <a:ln/>
-        </p:spPr>
-        <p:txBody>
-          <a:bodyPr wrap="square" lIns="0" tIns="0" rIns="0" bIns="0" rtlCol="0" anchor="t"/>
-          <a:lstStyle/>
-          <a:p>
-            <a:pPr indent="0" marL="0">
-              <a:buNone/>
-            </a:pPr>
-            <a:r>
-              <a:rPr lang="en-US" sz="1300" dirty="0">
-                <a:solidFill>
-                  <a:schemeClr val="accent6"/>
-                </a:solidFill>
-              </a:rPr>
-              <a:t>Documentação, kits de reserva e, se necessário, placa própria</a:t>
-            </a:r>
-            <a:endParaRPr lang="en-US" sz="1300" dirty="0"/>
-          </a:p>
-        </p:txBody>
-      </p:sp>
-      <p:sp>
-        <p:nvSpPr>
-          <p:cNvPr id="28" name="Shape 21"/>
-          <p:cNvSpPr/>
-          <p:nvPr/>
-        </p:nvSpPr>
-        <p:spPr>
-          <a:xfrm>
-            <a:off x="6172200" y="4343400"/>
-            <a:ext cx="5440680" cy="1325880"/>
-          </a:xfrm>
-          <a:prstGeom prst="roundRect">
-            <a:avLst>
-              <a:gd name="adj" fmla="val 5517"/>
-            </a:avLst>
-          </a:prstGeom>
-          <a:solidFill>
-            <a:schemeClr val="bg2"/>
-          </a:solidFill>
-          <a:ln w="12700">
-            <a:solidFill>
-              <a:schemeClr val="bg2"/>
-            </a:solidFill>
-            <a:prstDash val="solid"/>
-          </a:ln>
-        </p:spPr>
-      </p:sp>
-      <p:sp>
-        <p:nvSpPr>
-          <p:cNvPr id="29" name="Shape 22"/>
-          <p:cNvSpPr/>
-          <p:nvPr/>
-        </p:nvSpPr>
-        <p:spPr>
-          <a:xfrm>
-            <a:off x="6400800" y="4572000"/>
-            <a:ext cx="502920" cy="502920"/>
-          </a:xfrm>
-          <a:prstGeom prst="ellipse">
-            <a:avLst/>
-          </a:prstGeom>
-          <a:solidFill>
-            <a:schemeClr val="accent1"/>
-          </a:solidFill>
-          <a:ln w="12700">
-            <a:solidFill>
-              <a:schemeClr val="accent1"/>
-            </a:solidFill>
-            <a:prstDash val="solid"/>
-          </a:ln>
-        </p:spPr>
-      </p:sp>
-      <p:pic>
-        <p:nvPicPr>
-          <p:cNvPr id="30" name="Image 5" descr="preencoded.png">    </p:cNvPr>
-          <p:cNvPicPr>
-            <a:picLocks noChangeAspect="1"/>
-          </p:cNvPicPr>
-          <p:nvPr/>
-        </p:nvPicPr>
-        <p:blipFill>
-          <a:blip r:embed="rId6"/>
-          <a:stretch>
-            <a:fillRect/>
-          </a:stretch>
-        </p:blipFill>
-        <p:spPr>
-          <a:xfrm>
-            <a:off x="6521501" y="4692701"/>
-            <a:ext cx="261518" cy="261518"/>
-          </a:xfrm>
-          <a:prstGeom prst="rect">
-            <a:avLst/>
-          </a:prstGeom>
-        </p:spPr>
-      </p:pic>
-      <p:sp>
-        <p:nvSpPr>
-          <p:cNvPr id="31" name="Text 23"/>
-          <p:cNvSpPr txBox="1"/>
-          <p:nvPr/>
-        </p:nvSpPr>
-        <p:spPr>
-          <a:xfrm>
-            <a:off x="7086600" y="4507992"/>
-            <a:ext cx="4343400" cy="411480"/>
-          </a:xfrm>
-          <a:prstGeom prst="rect">
-            <a:avLst/>
-          </a:prstGeom>
-          <a:noFill/>
-          <a:ln/>
-        </p:spPr>
-        <p:txBody>
-          <a:bodyPr wrap="square" lIns="0" tIns="0" rIns="0" bIns="0" rtlCol="0" anchor="ctr"/>
-          <a:lstStyle/>
-          <a:p>
-            <a:pPr indent="0" marL="0">
-              <a:buNone/>
-            </a:pPr>
-            <a:r>
-              <a:rPr lang="en-US" sz="1600" b="1" dirty="0">
-                <a:solidFill>
-                  <a:schemeClr val="tx1"/>
-                </a:solidFill>
-              </a:rPr>
-              <a:t>Resistência dos operadores</a:t>
-            </a:r>
-            <a:endParaRPr lang="en-US" sz="1600" dirty="0"/>
-          </a:p>
-        </p:txBody>
-      </p:sp>
-      <p:sp>
-        <p:nvSpPr>
-          <p:cNvPr id="32" name="Text 24"/>
-          <p:cNvSpPr txBox="1"/>
-          <p:nvPr/>
-        </p:nvSpPr>
-        <p:spPr>
-          <a:xfrm>
-            <a:off x="7086600" y="4910328"/>
-            <a:ext cx="4343400" cy="640080"/>
-          </a:xfrm>
-          <a:prstGeom prst="rect">
-            <a:avLst/>
-          </a:prstGeom>
-          <a:noFill/>
-          <a:ln/>
-        </p:spPr>
-        <p:txBody>
-          <a:bodyPr wrap="square" lIns="0" tIns="0" rIns="0" bIns="0" rtlCol="0" anchor="t"/>
-          <a:lstStyle/>
-          <a:p>
-            <a:pPr indent="0" marL="0">
-              <a:buNone/>
-            </a:pPr>
-            <a:r>
-              <a:rPr lang="en-US" sz="1300" dirty="0">
-                <a:solidFill>
-                  <a:schemeClr val="accent6"/>
-                </a:solidFill>
-              </a:rPr>
-              <a:t>Piloto com operadores experientes e treinamento de 30 min</a:t>
-            </a:r>
-            <a:endParaRPr lang="en-US" sz="1300" dirty="0"/>
+              <a:rPr lang="en-US" sz="1500" dirty="0">
+                <a:solidFill>
+                  <a:schemeClr val="tx2"/>
+                </a:solidFill>
+              </a:rPr>
+              <a:t>medidas das estações, média de itens por caixa, acesso à API do BHT e às tabelas de pedido no Sybase e a linguagem do Serviço PTL.</a:t>
+            </a:r>
+            <a:endParaRPr lang="en-US" sz="1500" dirty="0"/>
           </a:p>
         </p:txBody>
       </p:sp>
@@ -10472,46 +9716,49 @@
                   <a:schemeClr val="tx1"/>
                 </a:solidFill>
               </a:rPr>
-              <a:t>Demonstração no simulador 3D</a:t>
+              <a:t>Riscos e como tratar</a:t>
             </a:r>
             <a:endParaRPr lang="en-US" sz="2600" dirty="0"/>
           </a:p>
         </p:txBody>
       </p:sp>
-      <p:pic>
-        <p:nvPicPr>
-          <p:cNvPr id="3" name="Image 0" descr="/home/claude/ptl-projeto/diagramas/simulador_3d.png">    </p:cNvPr>
-          <p:cNvPicPr>
-            <a:picLocks noChangeAspect="1"/>
-          </p:cNvPicPr>
-          <p:nvPr/>
-        </p:nvPicPr>
-        <p:blipFill>
-          <a:blip r:embed="rId1"/>
-          <a:stretch>
-            <a:fillRect/>
-          </a:stretch>
-        </p:blipFill>
-        <p:spPr>
-          <a:xfrm>
-            <a:off x="457200" y="1188720"/>
-            <a:ext cx="7863840" cy="4423410"/>
-          </a:xfrm>
-          <a:prstGeom prst="rect">
-            <a:avLst/>
-          </a:prstGeom>
-        </p:spPr>
-      </p:pic>
-      <p:sp>
-        <p:nvSpPr>
-          <p:cNvPr id="4" name="Shape 1"/>
+      <p:sp>
+        <p:nvSpPr>
+          <p:cNvPr id="3" name="Shape 1"/>
           <p:cNvSpPr/>
           <p:nvPr/>
         </p:nvSpPr>
         <p:spPr>
           <a:xfrm>
-            <a:off x="8595360" y="1280160"/>
-            <a:ext cx="548640" cy="548640"/>
+            <a:off x="548640" y="1325880"/>
+            <a:ext cx="5440680" cy="1325880"/>
+          </a:xfrm>
+          <a:prstGeom prst="roundRect">
+            <a:avLst>
+              <a:gd name="adj" fmla="val 5517"/>
+            </a:avLst>
+          </a:prstGeom>
+          <a:solidFill>
+            <a:schemeClr val="bg2"/>
+          </a:solidFill>
+          <a:ln w="12700">
+            <a:solidFill>
+              <a:schemeClr val="bg2"/>
+            </a:solidFill>
+            <a:prstDash val="solid"/>
+          </a:ln>
+        </p:spPr>
+      </p:sp>
+      <p:sp>
+        <p:nvSpPr>
+          <p:cNvPr id="4" name="Shape 2"/>
+          <p:cNvSpPr/>
+          <p:nvPr/>
+        </p:nvSpPr>
+        <p:spPr>
+          <a:xfrm>
+            <a:off x="777240" y="1554480"/>
+            <a:ext cx="502920" cy="502920"/>
           </a:xfrm>
           <a:prstGeom prst="ellipse">
             <a:avLst/>
@@ -10529,7 +9776,155 @@
       </p:sp>
       <p:pic>
         <p:nvPicPr>
-          <p:cNvPr id="5" name="Image 1" descr="preencoded.png">    </p:cNvPr>
+          <p:cNvPr id="5" name="Image 0" descr="preencoded.png">    </p:cNvPr>
+          <p:cNvPicPr>
+            <a:picLocks noChangeAspect="1"/>
+          </p:cNvPicPr>
+          <p:nvPr/>
+        </p:nvPicPr>
+        <p:blipFill>
+          <a:blip r:embed="rId1"/>
+          <a:stretch>
+            <a:fillRect/>
+          </a:stretch>
+        </p:blipFill>
+        <p:spPr>
+          <a:xfrm>
+            <a:off x="897941" y="1675181"/>
+            <a:ext cx="261518" cy="261518"/>
+          </a:xfrm>
+          <a:prstGeom prst="rect">
+            <a:avLst/>
+          </a:prstGeom>
+        </p:spPr>
+      </p:pic>
+      <p:sp>
+        <p:nvSpPr>
+          <p:cNvPr id="6" name="Text 3"/>
+          <p:cNvSpPr txBox="1"/>
+          <p:nvPr/>
+        </p:nvSpPr>
+        <p:spPr>
+          <a:xfrm>
+            <a:off x="1463040" y="1490472"/>
+            <a:ext cx="4343400" cy="411480"/>
+          </a:xfrm>
+          <a:prstGeom prst="rect">
+            <a:avLst/>
+          </a:prstGeom>
+          <a:noFill/>
+          <a:ln/>
+        </p:spPr>
+        <p:txBody>
+          <a:bodyPr wrap="square" lIns="0" tIns="0" rIns="0" bIns="0" rtlCol="0" anchor="ctr"/>
+          <a:lstStyle/>
+          <a:p>
+            <a:pPr indent="0" marL="0">
+              <a:buNone/>
+            </a:pPr>
+            <a:r>
+              <a:rPr lang="en-US" sz="1600" b="1" dirty="0">
+                <a:solidFill>
+                  <a:schemeClr val="tx1"/>
+                </a:solidFill>
+              </a:rPr>
+              <a:t>Dados da caixa na API do BHT</a:t>
+            </a:r>
+            <a:endParaRPr lang="en-US" sz="1600" dirty="0"/>
+          </a:p>
+        </p:txBody>
+      </p:sp>
+      <p:sp>
+        <p:nvSpPr>
+          <p:cNvPr id="7" name="Text 4"/>
+          <p:cNvSpPr txBox="1"/>
+          <p:nvPr/>
+        </p:nvSpPr>
+        <p:spPr>
+          <a:xfrm>
+            <a:off x="1463040" y="1892808"/>
+            <a:ext cx="4343400" cy="640080"/>
+          </a:xfrm>
+          <a:prstGeom prst="rect">
+            <a:avLst/>
+          </a:prstGeom>
+          <a:noFill/>
+          <a:ln/>
+        </p:spPr>
+        <p:txBody>
+          <a:bodyPr wrap="square" lIns="0" tIns="0" rIns="0" bIns="0" rtlCol="0" anchor="t"/>
+          <a:lstStyle/>
+          <a:p>
+            <a:pPr indent="0" marL="0">
+              <a:buNone/>
+            </a:pPr>
+            <a:r>
+              <a:rPr lang="en-US" sz="1300" dirty="0">
+                <a:solidFill>
+                  <a:schemeClr val="accent6"/>
+                </a:solidFill>
+              </a:rPr>
+              <a:t>Validar no protótipo; alternativa por views no Sybase</a:t>
+            </a:r>
+            <a:endParaRPr lang="en-US" sz="1300" dirty="0"/>
+          </a:p>
+        </p:txBody>
+      </p:sp>
+      <p:sp>
+        <p:nvSpPr>
+          <p:cNvPr id="8" name="Shape 5"/>
+          <p:cNvSpPr/>
+          <p:nvPr/>
+        </p:nvSpPr>
+        <p:spPr>
+          <a:xfrm>
+            <a:off x="6172200" y="1325880"/>
+            <a:ext cx="5440680" cy="1325880"/>
+          </a:xfrm>
+          <a:prstGeom prst="roundRect">
+            <a:avLst>
+              <a:gd name="adj" fmla="val 5517"/>
+            </a:avLst>
+          </a:prstGeom>
+          <a:solidFill>
+            <a:schemeClr val="bg2"/>
+          </a:solidFill>
+          <a:ln w="12700">
+            <a:solidFill>
+              <a:schemeClr val="bg2"/>
+            </a:solidFill>
+            <a:prstDash val="solid"/>
+          </a:ln>
+        </p:spPr>
+      </p:sp>
+      <p:sp>
+        <p:nvSpPr>
+          <p:cNvPr id="9" name="Shape 6"/>
+          <p:cNvSpPr/>
+          <p:nvPr/>
+        </p:nvSpPr>
+        <p:spPr>
+          <a:xfrm>
+            <a:off x="6400800" y="1554480"/>
+            <a:ext cx="502920" cy="502920"/>
+          </a:xfrm>
+          <a:prstGeom prst="ellipse">
+            <a:avLst/>
+          </a:prstGeom>
+          <a:solidFill>
+            <a:schemeClr val="accent1"/>
+          </a:solidFill>
+          <a:ln w="12700">
+            <a:solidFill>
+              <a:schemeClr val="accent1"/>
+            </a:solidFill>
+            <a:prstDash val="solid"/>
+          </a:ln>
+        </p:spPr>
+      </p:sp>
+      <p:pic>
+        <p:nvPicPr>
+          <p:cNvPr id="10" name="Image 1" descr="preencoded.png">    </p:cNvPr>
           <p:cNvPicPr>
             <a:picLocks noChangeAspect="1"/>
           </p:cNvPicPr>
@@ -10543,8 +9938,8 @@
         </p:blipFill>
         <p:spPr>
           <a:xfrm>
-            <a:off x="8727034" y="1411834"/>
-            <a:ext cx="285293" cy="285293"/>
+            <a:off x="6521501" y="1675181"/>
+            <a:ext cx="261518" cy="261518"/>
           </a:xfrm>
           <a:prstGeom prst="rect">
             <a:avLst/>
@@ -10553,14 +9948,14 @@
       </p:pic>
       <p:sp>
         <p:nvSpPr>
-          <p:cNvPr id="6" name="Text 2"/>
+          <p:cNvPr id="11" name="Text 7"/>
           <p:cNvSpPr txBox="1"/>
           <p:nvPr/>
         </p:nvSpPr>
         <p:spPr>
           <a:xfrm>
-            <a:off x="9235440" y="1325880"/>
-            <a:ext cx="2377440" cy="457200"/>
+            <a:off x="7086600" y="1490472"/>
+            <a:ext cx="4343400" cy="411480"/>
           </a:xfrm>
           <a:prstGeom prst="rect">
             <a:avLst/>
@@ -10581,7 +9976,7 @@
                   <a:schemeClr val="tx1"/>
                 </a:solidFill>
               </a:rPr>
-              <a:t>Roteiro (5 minutos)</a:t>
+              <a:t>Manutenção alta, como no sistema anterior</a:t>
             </a:r>
             <a:endParaRPr lang="en-US" sz="1600" dirty="0"/>
           </a:p>
@@ -10589,14 +9984,14 @@
       </p:sp>
       <p:sp>
         <p:nvSpPr>
-          <p:cNvPr id="7" name="Text 3"/>
+          <p:cNvPr id="12" name="Text 8"/>
           <p:cNvSpPr txBox="1"/>
           <p:nvPr/>
         </p:nvSpPr>
         <p:spPr>
           <a:xfrm>
-            <a:off x="8595360" y="2011680"/>
-            <a:ext cx="3108960" cy="3840480"/>
+            <a:off x="7086600" y="1892808"/>
+            <a:ext cx="4343400" cy="640080"/>
           </a:xfrm>
           <a:prstGeom prst="rect">
             <a:avLst/>
@@ -10605,121 +10000,613 @@
           <a:ln/>
         </p:spPr>
         <p:txBody>
-          <a:bodyPr wrap="square" rtlCol="0" anchor="t"/>
-          <a:lstStyle/>
-          <a:p>
-            <a:pPr marL="342900" indent="-342900">
-              <a:spcAft>
-                <a:spcPts val="800"/>
-              </a:spcAft>
-              <a:buSzPct val="100000"/>
-              <a:buFont typeface="+mj-lt"/>
-              <a:buAutoNum type="arabicPeriod" startAt="1"/>
-            </a:pPr>
-            <a:r>
-              <a:rPr lang="en-US" sz="1400" dirty="0">
-                <a:solidFill>
-                  <a:schemeClr val="tx2"/>
-                </a:solidFill>
-              </a:rPr>
-              <a:t>A caixa entra pela transferência</a:t>
-            </a:r>
-            <a:endParaRPr lang="en-US" sz="1400" dirty="0"/>
-          </a:p>
-          <a:p>
-            <a:pPr marL="342900" indent="-342900">
-              <a:spcAft>
-                <a:spcPts val="800"/>
-              </a:spcAft>
-              <a:buSzPct val="100000"/>
-              <a:buFont typeface="+mj-lt"/>
-              <a:buAutoNum type="arabicPeriod" startAt="1"/>
-            </a:pPr>
-            <a:r>
-              <a:rPr lang="en-US" sz="1400" dirty="0">
-                <a:solidFill>
-                  <a:schemeClr val="tx2"/>
-                </a:solidFill>
-              </a:rPr>
-              <a:t>Leitura no coletor virtual ou por RFID</a:t>
-            </a:r>
-            <a:endParaRPr lang="en-US" sz="1400" dirty="0"/>
-          </a:p>
-          <a:p>
-            <a:pPr marL="342900" indent="-342900">
-              <a:spcAft>
-                <a:spcPts val="800"/>
-              </a:spcAft>
-              <a:buSzPct val="100000"/>
-              <a:buFont typeface="+mj-lt"/>
-              <a:buAutoNum type="arabicPeriod" startAt="1"/>
-            </a:pPr>
-            <a:r>
-              <a:rPr lang="en-US" sz="1400" dirty="0">
-                <a:solidFill>
-                  <a:schemeClr val="tx2"/>
-                </a:solidFill>
-              </a:rPr>
-              <a:t>Alto giro e zonas acendem com os endereços da tabela</a:t>
-            </a:r>
-            <a:endParaRPr lang="en-US" sz="1400" dirty="0"/>
-          </a:p>
-          <a:p>
-            <a:pPr marL="342900" indent="-342900">
-              <a:spcAft>
-                <a:spcPts val="800"/>
-              </a:spcAft>
-              <a:buSzPct val="100000"/>
-              <a:buFont typeface="+mj-lt"/>
-              <a:buAutoNum type="arabicPeriod" startAt="1"/>
-            </a:pPr>
-            <a:r>
-              <a:rPr lang="en-US" sz="1400" dirty="0">
-                <a:solidFill>
-                  <a:schemeClr val="tx2"/>
-                </a:solidFill>
-              </a:rPr>
-              <a:t>Confirmação nos botões</a:t>
-            </a:r>
-            <a:endParaRPr lang="en-US" sz="1400" dirty="0"/>
-          </a:p>
-          <a:p>
-            <a:pPr marL="342900" indent="-342900">
-              <a:spcAft>
-                <a:spcPts val="800"/>
-              </a:spcAft>
-              <a:buSzPct val="100000"/>
-              <a:buFont typeface="+mj-lt"/>
-              <a:buAutoNum type="arabicPeriod" startAt="1"/>
-            </a:pPr>
-            <a:r>
-              <a:rPr lang="en-US" sz="1400" dirty="0">
-                <a:solidFill>
-                  <a:schemeClr val="tx2"/>
-                </a:solidFill>
-              </a:rPr>
-              <a:t>Nova leitura fecha e a caixa volta à esteira</a:t>
-            </a:r>
-            <a:endParaRPr lang="en-US" sz="1400" dirty="0"/>
-          </a:p>
-          <a:p>
-            <a:pPr marL="342900" indent="-342900">
-              <a:spcAft>
-                <a:spcPts val="800"/>
-              </a:spcAft>
-              <a:buSzPct val="100000"/>
-              <a:buFont typeface="+mj-lt"/>
-              <a:buAutoNum type="arabicPeriod" startAt="1"/>
-            </a:pPr>
-            <a:r>
-              <a:rPr lang="en-US" sz="1400" dirty="0">
-                <a:solidFill>
-                  <a:schemeClr val="tx2"/>
-                </a:solidFill>
-              </a:rPr>
-              <a:t>Painel com tempo e produtividade</a:t>
-            </a:r>
-            <a:endParaRPr lang="en-US" sz="1400" dirty="0"/>
+          <a:bodyPr wrap="square" lIns="0" tIns="0" rIns="0" bIns="0" rtlCol="0" anchor="t"/>
+          <a:lstStyle/>
+          <a:p>
+            <a:pPr indent="0" marL="0">
+              <a:buNone/>
+            </a:pPr>
+            <a:r>
+              <a:rPr lang="en-US" sz="1300" dirty="0">
+                <a:solidFill>
+                  <a:schemeClr val="accent6"/>
+                </a:solidFill>
+              </a:rPr>
+              <a:t>RJ45 em todos os trechos, módulos de troca rápida e teste a cada turno</a:t>
+            </a:r>
+            <a:endParaRPr lang="en-US" sz="1300" dirty="0"/>
+          </a:p>
+        </p:txBody>
+      </p:sp>
+      <p:sp>
+        <p:nvSpPr>
+          <p:cNvPr id="13" name="Shape 9"/>
+          <p:cNvSpPr/>
+          <p:nvPr/>
+        </p:nvSpPr>
+        <p:spPr>
+          <a:xfrm>
+            <a:off x="548640" y="2834640"/>
+            <a:ext cx="5440680" cy="1325880"/>
+          </a:xfrm>
+          <a:prstGeom prst="roundRect">
+            <a:avLst>
+              <a:gd name="adj" fmla="val 5517"/>
+            </a:avLst>
+          </a:prstGeom>
+          <a:solidFill>
+            <a:schemeClr val="bg2"/>
+          </a:solidFill>
+          <a:ln w="12700">
+            <a:solidFill>
+              <a:schemeClr val="bg2"/>
+            </a:solidFill>
+            <a:prstDash val="solid"/>
+          </a:ln>
+        </p:spPr>
+      </p:sp>
+      <p:sp>
+        <p:nvSpPr>
+          <p:cNvPr id="14" name="Shape 10"/>
+          <p:cNvSpPr/>
+          <p:nvPr/>
+        </p:nvSpPr>
+        <p:spPr>
+          <a:xfrm>
+            <a:off x="777240" y="3063240"/>
+            <a:ext cx="502920" cy="502920"/>
+          </a:xfrm>
+          <a:prstGeom prst="ellipse">
+            <a:avLst/>
+          </a:prstGeom>
+          <a:solidFill>
+            <a:schemeClr val="accent1"/>
+          </a:solidFill>
+          <a:ln w="12700">
+            <a:solidFill>
+              <a:schemeClr val="accent1"/>
+            </a:solidFill>
+            <a:prstDash val="solid"/>
+          </a:ln>
+        </p:spPr>
+      </p:sp>
+      <p:pic>
+        <p:nvPicPr>
+          <p:cNvPr id="15" name="Image 2" descr="preencoded.png">    </p:cNvPr>
+          <p:cNvPicPr>
+            <a:picLocks noChangeAspect="1"/>
+          </p:cNvPicPr>
+          <p:nvPr/>
+        </p:nvPicPr>
+        <p:blipFill>
+          <a:blip r:embed="rId3"/>
+          <a:stretch>
+            <a:fillRect/>
+          </a:stretch>
+        </p:blipFill>
+        <p:spPr>
+          <a:xfrm>
+            <a:off x="897941" y="3183941"/>
+            <a:ext cx="261518" cy="261518"/>
+          </a:xfrm>
+          <a:prstGeom prst="rect">
+            <a:avLst/>
+          </a:prstGeom>
+        </p:spPr>
+      </p:pic>
+      <p:sp>
+        <p:nvSpPr>
+          <p:cNvPr id="16" name="Text 11"/>
+          <p:cNvSpPr txBox="1"/>
+          <p:nvPr/>
+        </p:nvSpPr>
+        <p:spPr>
+          <a:xfrm>
+            <a:off x="1463040" y="2999232"/>
+            <a:ext cx="4343400" cy="411480"/>
+          </a:xfrm>
+          <a:prstGeom prst="rect">
+            <a:avLst/>
+          </a:prstGeom>
+          <a:noFill/>
+          <a:ln/>
+        </p:spPr>
+        <p:txBody>
+          <a:bodyPr wrap="square" lIns="0" tIns="0" rIns="0" bIns="0" rtlCol="0" anchor="ctr"/>
+          <a:lstStyle/>
+          <a:p>
+            <a:pPr indent="0" marL="0">
+              <a:buNone/>
+            </a:pPr>
+            <a:r>
+              <a:rPr lang="en-US" sz="1600" b="1" dirty="0">
+                <a:solidFill>
+                  <a:schemeClr val="tx1"/>
+                </a:solidFill>
+              </a:rPr>
+              <a:t>Poeira e calor</a:t>
+            </a:r>
+            <a:endParaRPr lang="en-US" sz="1600" dirty="0"/>
+          </a:p>
+        </p:txBody>
+      </p:sp>
+      <p:sp>
+        <p:nvSpPr>
+          <p:cNvPr id="17" name="Text 12"/>
+          <p:cNvSpPr txBox="1"/>
+          <p:nvPr/>
+        </p:nvSpPr>
+        <p:spPr>
+          <a:xfrm>
+            <a:off x="1463040" y="3401568"/>
+            <a:ext cx="4343400" cy="640080"/>
+          </a:xfrm>
+          <a:prstGeom prst="rect">
+            <a:avLst/>
+          </a:prstGeom>
+          <a:noFill/>
+          <a:ln/>
+        </p:spPr>
+        <p:txBody>
+          <a:bodyPr wrap="square" lIns="0" tIns="0" rIns="0" bIns="0" rtlCol="0" anchor="t"/>
+          <a:lstStyle/>
+          <a:p>
+            <a:pPr indent="0" marL="0">
+              <a:buNone/>
+            </a:pPr>
+            <a:r>
+              <a:rPr lang="en-US" sz="1300" dirty="0">
+                <a:solidFill>
+                  <a:schemeClr val="accent6"/>
+                </a:solidFill>
+              </a:rPr>
+              <a:t>Gabinete com filtro e cooler e componentes para 0 a 50 °C</a:t>
+            </a:r>
+            <a:endParaRPr lang="en-US" sz="1300" dirty="0"/>
+          </a:p>
+        </p:txBody>
+      </p:sp>
+      <p:sp>
+        <p:nvSpPr>
+          <p:cNvPr id="18" name="Shape 13"/>
+          <p:cNvSpPr/>
+          <p:nvPr/>
+        </p:nvSpPr>
+        <p:spPr>
+          <a:xfrm>
+            <a:off x="6172200" y="2834640"/>
+            <a:ext cx="5440680" cy="1325880"/>
+          </a:xfrm>
+          <a:prstGeom prst="roundRect">
+            <a:avLst>
+              <a:gd name="adj" fmla="val 5517"/>
+            </a:avLst>
+          </a:prstGeom>
+          <a:solidFill>
+            <a:schemeClr val="bg2"/>
+          </a:solidFill>
+          <a:ln w="12700">
+            <a:solidFill>
+              <a:schemeClr val="bg2"/>
+            </a:solidFill>
+            <a:prstDash val="solid"/>
+          </a:ln>
+        </p:spPr>
+      </p:sp>
+      <p:sp>
+        <p:nvSpPr>
+          <p:cNvPr id="19" name="Shape 14"/>
+          <p:cNvSpPr/>
+          <p:nvPr/>
+        </p:nvSpPr>
+        <p:spPr>
+          <a:xfrm>
+            <a:off x="6400800" y="3063240"/>
+            <a:ext cx="502920" cy="502920"/>
+          </a:xfrm>
+          <a:prstGeom prst="ellipse">
+            <a:avLst/>
+          </a:prstGeom>
+          <a:solidFill>
+            <a:schemeClr val="accent1"/>
+          </a:solidFill>
+          <a:ln w="12700">
+            <a:solidFill>
+              <a:schemeClr val="accent1"/>
+            </a:solidFill>
+            <a:prstDash val="solid"/>
+          </a:ln>
+        </p:spPr>
+      </p:sp>
+      <p:pic>
+        <p:nvPicPr>
+          <p:cNvPr id="20" name="Image 3" descr="preencoded.png">    </p:cNvPr>
+          <p:cNvPicPr>
+            <a:picLocks noChangeAspect="1"/>
+          </p:cNvPicPr>
+          <p:nvPr/>
+        </p:nvPicPr>
+        <p:blipFill>
+          <a:blip r:embed="rId4"/>
+          <a:stretch>
+            <a:fillRect/>
+          </a:stretch>
+        </p:blipFill>
+        <p:spPr>
+          <a:xfrm>
+            <a:off x="6521501" y="3183941"/>
+            <a:ext cx="261518" cy="261518"/>
+          </a:xfrm>
+          <a:prstGeom prst="rect">
+            <a:avLst/>
+          </a:prstGeom>
+        </p:spPr>
+      </p:pic>
+      <p:sp>
+        <p:nvSpPr>
+          <p:cNvPr id="21" name="Text 15"/>
+          <p:cNvSpPr txBox="1"/>
+          <p:nvPr/>
+        </p:nvSpPr>
+        <p:spPr>
+          <a:xfrm>
+            <a:off x="7086600" y="2999232"/>
+            <a:ext cx="4343400" cy="411480"/>
+          </a:xfrm>
+          <a:prstGeom prst="rect">
+            <a:avLst/>
+          </a:prstGeom>
+          <a:noFill/>
+          <a:ln/>
+        </p:spPr>
+        <p:txBody>
+          <a:bodyPr wrap="square" lIns="0" tIns="0" rIns="0" bIns="0" rtlCol="0" anchor="ctr"/>
+          <a:lstStyle/>
+          <a:p>
+            <a:pPr indent="0" marL="0">
+              <a:buNone/>
+            </a:pPr>
+            <a:r>
+              <a:rPr lang="en-US" sz="1600" b="1" dirty="0">
+                <a:solidFill>
+                  <a:schemeClr val="tx1"/>
+                </a:solidFill>
+              </a:rPr>
+              <a:t>Itens por caixa fora do esperado</a:t>
+            </a:r>
+            <a:endParaRPr lang="en-US" sz="1600" dirty="0"/>
+          </a:p>
+        </p:txBody>
+      </p:sp>
+      <p:sp>
+        <p:nvSpPr>
+          <p:cNvPr id="22" name="Text 16"/>
+          <p:cNvSpPr txBox="1"/>
+          <p:nvPr/>
+        </p:nvSpPr>
+        <p:spPr>
+          <a:xfrm>
+            <a:off x="7086600" y="3401568"/>
+            <a:ext cx="4343400" cy="640080"/>
+          </a:xfrm>
+          <a:prstGeom prst="rect">
+            <a:avLst/>
+          </a:prstGeom>
+          <a:noFill/>
+          <a:ln/>
+        </p:spPr>
+        <p:txBody>
+          <a:bodyPr wrap="square" lIns="0" tIns="0" rIns="0" bIns="0" rtlCol="0" anchor="t"/>
+          <a:lstStyle/>
+          <a:p>
+            <a:pPr indent="0" marL="0">
+              <a:buNone/>
+            </a:pPr>
+            <a:r>
+              <a:rPr lang="en-US" sz="1300" dirty="0">
+                <a:solidFill>
+                  <a:schemeClr val="accent6"/>
+                </a:solidFill>
+              </a:rPr>
+              <a:t>Medir no piloto e ajustar o tamanho das zonas</a:t>
+            </a:r>
+            <a:endParaRPr lang="en-US" sz="1300" dirty="0"/>
+          </a:p>
+        </p:txBody>
+      </p:sp>
+      <p:sp>
+        <p:nvSpPr>
+          <p:cNvPr id="23" name="Shape 17"/>
+          <p:cNvSpPr/>
+          <p:nvPr/>
+        </p:nvSpPr>
+        <p:spPr>
+          <a:xfrm>
+            <a:off x="548640" y="4343400"/>
+            <a:ext cx="5440680" cy="1325880"/>
+          </a:xfrm>
+          <a:prstGeom prst="roundRect">
+            <a:avLst>
+              <a:gd name="adj" fmla="val 5517"/>
+            </a:avLst>
+          </a:prstGeom>
+          <a:solidFill>
+            <a:schemeClr val="bg2"/>
+          </a:solidFill>
+          <a:ln w="12700">
+            <a:solidFill>
+              <a:schemeClr val="bg2"/>
+            </a:solidFill>
+            <a:prstDash val="solid"/>
+          </a:ln>
+        </p:spPr>
+      </p:sp>
+      <p:sp>
+        <p:nvSpPr>
+          <p:cNvPr id="24" name="Shape 18"/>
+          <p:cNvSpPr/>
+          <p:nvPr/>
+        </p:nvSpPr>
+        <p:spPr>
+          <a:xfrm>
+            <a:off x="777240" y="4572000"/>
+            <a:ext cx="502920" cy="502920"/>
+          </a:xfrm>
+          <a:prstGeom prst="ellipse">
+            <a:avLst/>
+          </a:prstGeom>
+          <a:solidFill>
+            <a:schemeClr val="accent1"/>
+          </a:solidFill>
+          <a:ln w="12700">
+            <a:solidFill>
+              <a:schemeClr val="accent1"/>
+            </a:solidFill>
+            <a:prstDash val="solid"/>
+          </a:ln>
+        </p:spPr>
+      </p:sp>
+      <p:pic>
+        <p:nvPicPr>
+          <p:cNvPr id="25" name="Image 4" descr="preencoded.png">    </p:cNvPr>
+          <p:cNvPicPr>
+            <a:picLocks noChangeAspect="1"/>
+          </p:cNvPicPr>
+          <p:nvPr/>
+        </p:nvPicPr>
+        <p:blipFill>
+          <a:blip r:embed="rId5"/>
+          <a:stretch>
+            <a:fillRect/>
+          </a:stretch>
+        </p:blipFill>
+        <p:spPr>
+          <a:xfrm>
+            <a:off x="897941" y="4692701"/>
+            <a:ext cx="261518" cy="261518"/>
+          </a:xfrm>
+          <a:prstGeom prst="rect">
+            <a:avLst/>
+          </a:prstGeom>
+        </p:spPr>
+      </p:pic>
+      <p:sp>
+        <p:nvSpPr>
+          <p:cNvPr id="26" name="Text 19"/>
+          <p:cNvSpPr txBox="1"/>
+          <p:nvPr/>
+        </p:nvSpPr>
+        <p:spPr>
+          <a:xfrm>
+            <a:off x="1463040" y="4507992"/>
+            <a:ext cx="4343400" cy="411480"/>
+          </a:xfrm>
+          <a:prstGeom prst="rect">
+            <a:avLst/>
+          </a:prstGeom>
+          <a:noFill/>
+          <a:ln/>
+        </p:spPr>
+        <p:txBody>
+          <a:bodyPr wrap="square" lIns="0" tIns="0" rIns="0" bIns="0" rtlCol="0" anchor="ctr"/>
+          <a:lstStyle/>
+          <a:p>
+            <a:pPr indent="0" marL="0">
+              <a:buNone/>
+            </a:pPr>
+            <a:r>
+              <a:rPr lang="en-US" sz="1600" b="1" dirty="0">
+                <a:solidFill>
+                  <a:schemeClr val="tx1"/>
+                </a:solidFill>
+              </a:rPr>
+              <a:t>Depender de um único técnico</a:t>
+            </a:r>
+            <a:endParaRPr lang="en-US" sz="1600" dirty="0"/>
+          </a:p>
+        </p:txBody>
+      </p:sp>
+      <p:sp>
+        <p:nvSpPr>
+          <p:cNvPr id="27" name="Text 20"/>
+          <p:cNvSpPr txBox="1"/>
+          <p:nvPr/>
+        </p:nvSpPr>
+        <p:spPr>
+          <a:xfrm>
+            <a:off x="1463040" y="4910328"/>
+            <a:ext cx="4343400" cy="640080"/>
+          </a:xfrm>
+          <a:prstGeom prst="rect">
+            <a:avLst/>
+          </a:prstGeom>
+          <a:noFill/>
+          <a:ln/>
+        </p:spPr>
+        <p:txBody>
+          <a:bodyPr wrap="square" lIns="0" tIns="0" rIns="0" bIns="0" rtlCol="0" anchor="t"/>
+          <a:lstStyle/>
+          <a:p>
+            <a:pPr indent="0" marL="0">
+              <a:buNone/>
+            </a:pPr>
+            <a:r>
+              <a:rPr lang="en-US" sz="1300" dirty="0">
+                <a:solidFill>
+                  <a:schemeClr val="accent6"/>
+                </a:solidFill>
+              </a:rPr>
+              <a:t>Documentação, kits de reserva e, se necessário, placa própria</a:t>
+            </a:r>
+            <a:endParaRPr lang="en-US" sz="1300" dirty="0"/>
+          </a:p>
+        </p:txBody>
+      </p:sp>
+      <p:sp>
+        <p:nvSpPr>
+          <p:cNvPr id="28" name="Shape 21"/>
+          <p:cNvSpPr/>
+          <p:nvPr/>
+        </p:nvSpPr>
+        <p:spPr>
+          <a:xfrm>
+            <a:off x="6172200" y="4343400"/>
+            <a:ext cx="5440680" cy="1325880"/>
+          </a:xfrm>
+          <a:prstGeom prst="roundRect">
+            <a:avLst>
+              <a:gd name="adj" fmla="val 5517"/>
+            </a:avLst>
+          </a:prstGeom>
+          <a:solidFill>
+            <a:schemeClr val="bg2"/>
+          </a:solidFill>
+          <a:ln w="12700">
+            <a:solidFill>
+              <a:schemeClr val="bg2"/>
+            </a:solidFill>
+            <a:prstDash val="solid"/>
+          </a:ln>
+        </p:spPr>
+      </p:sp>
+      <p:sp>
+        <p:nvSpPr>
+          <p:cNvPr id="29" name="Shape 22"/>
+          <p:cNvSpPr/>
+          <p:nvPr/>
+        </p:nvSpPr>
+        <p:spPr>
+          <a:xfrm>
+            <a:off x="6400800" y="4572000"/>
+            <a:ext cx="502920" cy="502920"/>
+          </a:xfrm>
+          <a:prstGeom prst="ellipse">
+            <a:avLst/>
+          </a:prstGeom>
+          <a:solidFill>
+            <a:schemeClr val="accent1"/>
+          </a:solidFill>
+          <a:ln w="12700">
+            <a:solidFill>
+              <a:schemeClr val="accent1"/>
+            </a:solidFill>
+            <a:prstDash val="solid"/>
+          </a:ln>
+        </p:spPr>
+      </p:sp>
+      <p:pic>
+        <p:nvPicPr>
+          <p:cNvPr id="30" name="Image 5" descr="preencoded.png">    </p:cNvPr>
+          <p:cNvPicPr>
+            <a:picLocks noChangeAspect="1"/>
+          </p:cNvPicPr>
+          <p:nvPr/>
+        </p:nvPicPr>
+        <p:blipFill>
+          <a:blip r:embed="rId6"/>
+          <a:stretch>
+            <a:fillRect/>
+          </a:stretch>
+        </p:blipFill>
+        <p:spPr>
+          <a:xfrm>
+            <a:off x="6521501" y="4692701"/>
+            <a:ext cx="261518" cy="261518"/>
+          </a:xfrm>
+          <a:prstGeom prst="rect">
+            <a:avLst/>
+          </a:prstGeom>
+        </p:spPr>
+      </p:pic>
+      <p:sp>
+        <p:nvSpPr>
+          <p:cNvPr id="31" name="Text 23"/>
+          <p:cNvSpPr txBox="1"/>
+          <p:nvPr/>
+        </p:nvSpPr>
+        <p:spPr>
+          <a:xfrm>
+            <a:off x="7086600" y="4507992"/>
+            <a:ext cx="4343400" cy="411480"/>
+          </a:xfrm>
+          <a:prstGeom prst="rect">
+            <a:avLst/>
+          </a:prstGeom>
+          <a:noFill/>
+          <a:ln/>
+        </p:spPr>
+        <p:txBody>
+          <a:bodyPr wrap="square" lIns="0" tIns="0" rIns="0" bIns="0" rtlCol="0" anchor="ctr"/>
+          <a:lstStyle/>
+          <a:p>
+            <a:pPr indent="0" marL="0">
+              <a:buNone/>
+            </a:pPr>
+            <a:r>
+              <a:rPr lang="en-US" sz="1600" b="1" dirty="0">
+                <a:solidFill>
+                  <a:schemeClr val="tx1"/>
+                </a:solidFill>
+              </a:rPr>
+              <a:t>Resistência dos operadores</a:t>
+            </a:r>
+            <a:endParaRPr lang="en-US" sz="1600" dirty="0"/>
+          </a:p>
+        </p:txBody>
+      </p:sp>
+      <p:sp>
+        <p:nvSpPr>
+          <p:cNvPr id="32" name="Text 24"/>
+          <p:cNvSpPr txBox="1"/>
+          <p:nvPr/>
+        </p:nvSpPr>
+        <p:spPr>
+          <a:xfrm>
+            <a:off x="7086600" y="4910328"/>
+            <a:ext cx="4343400" cy="640080"/>
+          </a:xfrm>
+          <a:prstGeom prst="rect">
+            <a:avLst/>
+          </a:prstGeom>
+          <a:noFill/>
+          <a:ln/>
+        </p:spPr>
+        <p:txBody>
+          <a:bodyPr wrap="square" lIns="0" tIns="0" rIns="0" bIns="0" rtlCol="0" anchor="t"/>
+          <a:lstStyle/>
+          <a:p>
+            <a:pPr indent="0" marL="0">
+              <a:buNone/>
+            </a:pPr>
+            <a:r>
+              <a:rPr lang="en-US" sz="1300" dirty="0">
+                <a:solidFill>
+                  <a:schemeClr val="accent6"/>
+                </a:solidFill>
+              </a:rPr>
+              <a:t>Piloto com operadores experientes e treinamento de 30 min</a:t>
+            </a:r>
+            <a:endParaRPr lang="en-US" sz="1300" dirty="0"/>
           </a:p>
         </p:txBody>
       </p:sp>
@@ -10779,6 +10666,359 @@
 <file path=ppt/slides/slide22.xml><?xml version="1.0" encoding="utf-8"?>
 <p:sld xmlns:a="http://schemas.openxmlformats.org/drawingml/2006/main" xmlns:r="http://schemas.openxmlformats.org/officeDocument/2006/relationships" xmlns:p="http://schemas.openxmlformats.org/presentationml/2006/main">
   <p:cSld name="Slide 22">
+    <p:spTree>
+      <p:nvGrpSpPr>
+        <p:cNvPr id="1" name=""/>
+        <p:cNvGrpSpPr/>
+        <p:nvPr/>
+      </p:nvGrpSpPr>
+      <p:grpSpPr>
+        <a:xfrm>
+          <a:off x="0" y="0"/>
+          <a:ext cx="0" cy="0"/>
+          <a:chOff x="0" y="0"/>
+          <a:chExt cx="0" cy="0"/>
+        </a:xfrm>
+      </p:grpSpPr>
+      <p:sp>
+        <p:nvSpPr>
+          <p:cNvPr id="2" name="Text 0"/>
+          <p:cNvSpPr/>
+          <p:nvPr>
+            <p:ph idx="100" type="title" hasCustomPrompt="1"/>
+          </p:nvPr>
+        </p:nvSpPr>
+        <p:spPr>
+          <a:xfrm>
+            <a:off x="548640" y="274320"/>
+            <a:ext cx="11064240" cy="777240"/>
+          </a:xfrm>
+          <a:prstGeom prst="rect">
+            <a:avLst/>
+          </a:prstGeom>
+          <a:noFill/>
+          <a:ln/>
+        </p:spPr>
+        <p:txBody>
+          <a:bodyPr wrap="square" lIns="0" tIns="0" rIns="0" bIns="0" rtlCol="0" anchor="ctr"/>
+          <a:lstStyle/>
+          <a:p>
+            <a:pPr algn="l" indent="0" marL="0">
+              <a:buNone/>
+            </a:pPr>
+            <a:r>
+              <a:rPr lang="en-US" sz="2600" b="1" dirty="0">
+                <a:solidFill>
+                  <a:schemeClr val="tx1"/>
+                </a:solidFill>
+              </a:rPr>
+              <a:t>Demonstração no simulador 3D</a:t>
+            </a:r>
+            <a:endParaRPr lang="en-US" sz="2600" dirty="0"/>
+          </a:p>
+        </p:txBody>
+      </p:sp>
+      <p:pic>
+        <p:nvPicPr>
+          <p:cNvPr id="3" name="Image 0" descr="/home/claude/ptl-projeto/diagramas/simulador_3d.png">    </p:cNvPr>
+          <p:cNvPicPr>
+            <a:picLocks noChangeAspect="1"/>
+          </p:cNvPicPr>
+          <p:nvPr/>
+        </p:nvPicPr>
+        <p:blipFill>
+          <a:blip r:embed="rId1"/>
+          <a:stretch>
+            <a:fillRect/>
+          </a:stretch>
+        </p:blipFill>
+        <p:spPr>
+          <a:xfrm>
+            <a:off x="457200" y="1188720"/>
+            <a:ext cx="7863840" cy="4423410"/>
+          </a:xfrm>
+          <a:prstGeom prst="rect">
+            <a:avLst/>
+          </a:prstGeom>
+        </p:spPr>
+      </p:pic>
+      <p:sp>
+        <p:nvSpPr>
+          <p:cNvPr id="4" name="Shape 1"/>
+          <p:cNvSpPr/>
+          <p:nvPr/>
+        </p:nvSpPr>
+        <p:spPr>
+          <a:xfrm>
+            <a:off x="8595360" y="1280160"/>
+            <a:ext cx="548640" cy="548640"/>
+          </a:xfrm>
+          <a:prstGeom prst="ellipse">
+            <a:avLst/>
+          </a:prstGeom>
+          <a:solidFill>
+            <a:schemeClr val="accent1"/>
+          </a:solidFill>
+          <a:ln w="12700">
+            <a:solidFill>
+              <a:schemeClr val="accent1"/>
+            </a:solidFill>
+            <a:prstDash val="solid"/>
+          </a:ln>
+        </p:spPr>
+      </p:sp>
+      <p:pic>
+        <p:nvPicPr>
+          <p:cNvPr id="5" name="Image 1" descr="preencoded.png">    </p:cNvPr>
+          <p:cNvPicPr>
+            <a:picLocks noChangeAspect="1"/>
+          </p:cNvPicPr>
+          <p:nvPr/>
+        </p:nvPicPr>
+        <p:blipFill>
+          <a:blip r:embed="rId2"/>
+          <a:stretch>
+            <a:fillRect/>
+          </a:stretch>
+        </p:blipFill>
+        <p:spPr>
+          <a:xfrm>
+            <a:off x="8727034" y="1411834"/>
+            <a:ext cx="285293" cy="285293"/>
+          </a:xfrm>
+          <a:prstGeom prst="rect">
+            <a:avLst/>
+          </a:prstGeom>
+        </p:spPr>
+      </p:pic>
+      <p:sp>
+        <p:nvSpPr>
+          <p:cNvPr id="6" name="Text 2"/>
+          <p:cNvSpPr txBox="1"/>
+          <p:nvPr/>
+        </p:nvSpPr>
+        <p:spPr>
+          <a:xfrm>
+            <a:off x="9235440" y="1325880"/>
+            <a:ext cx="2377440" cy="457200"/>
+          </a:xfrm>
+          <a:prstGeom prst="rect">
+            <a:avLst/>
+          </a:prstGeom>
+          <a:noFill/>
+          <a:ln/>
+        </p:spPr>
+        <p:txBody>
+          <a:bodyPr wrap="square" lIns="0" tIns="0" rIns="0" bIns="0" rtlCol="0" anchor="ctr"/>
+          <a:lstStyle/>
+          <a:p>
+            <a:pPr indent="0" marL="0">
+              <a:buNone/>
+            </a:pPr>
+            <a:r>
+              <a:rPr lang="en-US" sz="1600" b="1" dirty="0">
+                <a:solidFill>
+                  <a:schemeClr val="tx1"/>
+                </a:solidFill>
+              </a:rPr>
+              <a:t>Roteiro (5 minutos)</a:t>
+            </a:r>
+            <a:endParaRPr lang="en-US" sz="1600" dirty="0"/>
+          </a:p>
+        </p:txBody>
+      </p:sp>
+      <p:sp>
+        <p:nvSpPr>
+          <p:cNvPr id="7" name="Text 3"/>
+          <p:cNvSpPr txBox="1"/>
+          <p:nvPr/>
+        </p:nvSpPr>
+        <p:spPr>
+          <a:xfrm>
+            <a:off x="8595360" y="2011680"/>
+            <a:ext cx="3108960" cy="3840480"/>
+          </a:xfrm>
+          <a:prstGeom prst="rect">
+            <a:avLst/>
+          </a:prstGeom>
+          <a:noFill/>
+          <a:ln/>
+        </p:spPr>
+        <p:txBody>
+          <a:bodyPr wrap="square" rtlCol="0" anchor="t"/>
+          <a:lstStyle/>
+          <a:p>
+            <a:pPr marL="342900" indent="-342900">
+              <a:spcAft>
+                <a:spcPts val="800"/>
+              </a:spcAft>
+              <a:buSzPct val="100000"/>
+              <a:buFont typeface="+mj-lt"/>
+              <a:buAutoNum type="arabicPeriod" startAt="1"/>
+            </a:pPr>
+            <a:r>
+              <a:rPr lang="en-US" sz="1400" dirty="0">
+                <a:solidFill>
+                  <a:schemeClr val="tx2"/>
+                </a:solidFill>
+              </a:rPr>
+              <a:t>A caixa entra pela transferência</a:t>
+            </a:r>
+            <a:endParaRPr lang="en-US" sz="1400" dirty="0"/>
+          </a:p>
+          <a:p>
+            <a:pPr marL="342900" indent="-342900">
+              <a:spcAft>
+                <a:spcPts val="800"/>
+              </a:spcAft>
+              <a:buSzPct val="100000"/>
+              <a:buFont typeface="+mj-lt"/>
+              <a:buAutoNum type="arabicPeriod" startAt="1"/>
+            </a:pPr>
+            <a:r>
+              <a:rPr lang="en-US" sz="1400" dirty="0">
+                <a:solidFill>
+                  <a:schemeClr val="tx2"/>
+                </a:solidFill>
+              </a:rPr>
+              <a:t>Leitura no coletor virtual ou por RFID</a:t>
+            </a:r>
+            <a:endParaRPr lang="en-US" sz="1400" dirty="0"/>
+          </a:p>
+          <a:p>
+            <a:pPr marL="342900" indent="-342900">
+              <a:spcAft>
+                <a:spcPts val="800"/>
+              </a:spcAft>
+              <a:buSzPct val="100000"/>
+              <a:buFont typeface="+mj-lt"/>
+              <a:buAutoNum type="arabicPeriod" startAt="1"/>
+            </a:pPr>
+            <a:r>
+              <a:rPr lang="en-US" sz="1400" dirty="0">
+                <a:solidFill>
+                  <a:schemeClr val="tx2"/>
+                </a:solidFill>
+              </a:rPr>
+              <a:t>Alto giro e zonas acendem com os endereços da tabela</a:t>
+            </a:r>
+            <a:endParaRPr lang="en-US" sz="1400" dirty="0"/>
+          </a:p>
+          <a:p>
+            <a:pPr marL="342900" indent="-342900">
+              <a:spcAft>
+                <a:spcPts val="800"/>
+              </a:spcAft>
+              <a:buSzPct val="100000"/>
+              <a:buFont typeface="+mj-lt"/>
+              <a:buAutoNum type="arabicPeriod" startAt="1"/>
+            </a:pPr>
+            <a:r>
+              <a:rPr lang="en-US" sz="1400" dirty="0">
+                <a:solidFill>
+                  <a:schemeClr val="tx2"/>
+                </a:solidFill>
+              </a:rPr>
+              <a:t>Confirmação nos botões</a:t>
+            </a:r>
+            <a:endParaRPr lang="en-US" sz="1400" dirty="0"/>
+          </a:p>
+          <a:p>
+            <a:pPr marL="342900" indent="-342900">
+              <a:spcAft>
+                <a:spcPts val="800"/>
+              </a:spcAft>
+              <a:buSzPct val="100000"/>
+              <a:buFont typeface="+mj-lt"/>
+              <a:buAutoNum type="arabicPeriod" startAt="1"/>
+            </a:pPr>
+            <a:r>
+              <a:rPr lang="en-US" sz="1400" dirty="0">
+                <a:solidFill>
+                  <a:schemeClr val="tx2"/>
+                </a:solidFill>
+              </a:rPr>
+              <a:t>Nova leitura fecha e a caixa volta à esteira</a:t>
+            </a:r>
+            <a:endParaRPr lang="en-US" sz="1400" dirty="0"/>
+          </a:p>
+          <a:p>
+            <a:pPr marL="342900" indent="-342900">
+              <a:spcAft>
+                <a:spcPts val="800"/>
+              </a:spcAft>
+              <a:buSzPct val="100000"/>
+              <a:buFont typeface="+mj-lt"/>
+              <a:buAutoNum type="arabicPeriod" startAt="1"/>
+            </a:pPr>
+            <a:r>
+              <a:rPr lang="en-US" sz="1400" dirty="0">
+                <a:solidFill>
+                  <a:schemeClr val="tx2"/>
+                </a:solidFill>
+              </a:rPr>
+              <a:t>Falha de LED: aviso na interface de controle e cadastro do módulo novo com o botão</a:t>
+            </a:r>
+            <a:endParaRPr lang="en-US" sz="1400" dirty="0"/>
+          </a:p>
+        </p:txBody>
+      </p:sp>
+      <p:sp>
+        <p:nvSpPr>
+          <p:cNvPr id="25" name="Slide Number Placeholder 0"/>
+          <p:cNvSpPr>
+            <a:spLocks noGrp="1"/>
+          </p:cNvSpPr>
+          <p:nvPr>
+            <p:ph type="sldNum" sz="quarter" idx="4294967295"/>
+          </p:nvPr>
+        </p:nvSpPr>
+        <p:spPr>
+          <a:xfrm>
+            <a:off x="11338560" y="6355080"/>
+            <a:ext cx="548640" cy="274320"/>
+          </a:xfrm>
+          <a:prstGeom prst="rect">
+            <a:avLst/>
+          </a:prstGeom>
+          <a:extLst>
+            <a:ext uri="{C572A759-6A51-4108-AA02-DFA0A04FC94B}">
+              <ma14:wrappingTextBoxFlag xmlns:ma14="http://schemas.microsoft.com/office/mac/drawingml/2011/main" val="0"/>
+            </a:ext>
+          </a:extLst>
+        </p:spPr>
+        <p:txBody>
+          <a:bodyPr/>
+          <a:lstStyle>
+            <a:lvl1pPr>
+              <a:defRPr sz="1000">
+                <a:solidFill>
+                  <a:srgbClr val="8A97AB"/>
+                </a:solidFill>
+              </a:defRPr>
+            </a:lvl1pPr>
+          </a:lstStyle>
+          <a:p>
+            <a:pPr algn="l"/>
+            <a:fld id="{F7021451-1387-4CA6-816F-3879F97B5CBC}" type="slidenum">
+              <a:rPr b="0" lang="en-US"/>
+              <a:t>22</a:t>
+            </a:fld>
+            <a:endParaRPr lang="en-US"/>
+          </a:p>
+        </p:txBody>
+      </p:sp>
+    </p:spTree>
+  </p:cSld>
+  <p:clrMapOvr>
+    <a:masterClrMapping/>
+  </p:clrMapOvr>
+</p:sld>
+</file>
+
+<file path=ppt/slides/slide23.xml><?xml version="1.0" encoding="utf-8"?>
+<p:sld xmlns:a="http://schemas.openxmlformats.org/drawingml/2006/main" xmlns:r="http://schemas.openxmlformats.org/officeDocument/2006/relationships" xmlns:p="http://schemas.openxmlformats.org/presentationml/2006/main">
+  <p:cSld name="Slide 23">
     <p:spTree>
       <p:nvGrpSpPr>
         <p:cNvPr id="1" name=""/>
@@ -14219,7 +14459,7 @@
                             <a:schemeClr val="tx2"/>
                           </a:solidFill>
                         </a:rPr>
-                        <a:t>R$ 364 mil</a:t>
+                        <a:t>R$ 356 mil</a:t>
                       </a:r>
                       <a:endParaRPr lang="en-US" sz="1500" dirty="0"/>
                     </a:p>
@@ -14277,7 +14517,7 @@
                             <a:schemeClr val="tx2"/>
                           </a:solidFill>
                         </a:rPr>
-                        <a:t>R$ 391 mil</a:t>
+                        <a:t>R$ 383 mil</a:t>
                       </a:r>
                       <a:endParaRPr lang="en-US" sz="1500" dirty="0"/>
                     </a:p>

--- a/projeto/entregaveis/Apresentacao_PTL.pptx
+++ b/projeto/entregaveis/Apresentacao_PTL.pptx
@@ -129,7 +129,7 @@
   <p:extLst>
     <p:ext uri="{521415D9-36F7-43E2-AB2F-B90AF26B5E84}">
       <p14:sectionLst xmlns:p14="http://schemas.microsoft.com/office/powerpoint/2010/main">
-        <p14:section name="Abertura" id="{b76fe437-2aa2-88fb-1a2d-6ce287c26cfa}">
+        <p14:section name="Abertura" id="{16fe3566-2506-e7a6-62e1-c2946519f2ab}">
           <p14:sldIdLst>
             <p14:sldId id="256"/>
             <p14:sldId id="257"/>
@@ -137,7 +137,7 @@
             <p14:sldId id="259"/>
           </p14:sldIdLst>
         </p14:section>
-        <p14:section name="Arquiteturas" id="{f35eced5-b573-9560-aa7b-0b2cf7b91c67}">
+        <p14:section name="Arquiteturas" id="{a2d957e9-5dd5-1461-2b74-ad2cbf67cfef}">
           <p14:sldIdLst>
             <p14:sldId id="260"/>
             <p14:sldId id="261"/>
@@ -146,7 +146,7 @@
             <p14:sldId id="264"/>
           </p14:sldIdLst>
         </p14:section>
-        <p14:section name="A estação" id="{410ab448-d616-acac-7e81-ed5c15037c99}">
+        <p14:section name="A estação" id="{d73a367a-b3dc-252f-4911-d13ff0281f3c}">
           <p14:sldIdLst>
             <p14:sldId id="265"/>
             <p14:sldId id="266"/>
@@ -157,14 +157,14 @@
             <p14:sldId id="271"/>
           </p14:sldIdLst>
         </p14:section>
-        <p14:section name="Orçamento" id="{c4001bc6-1bfc-1c3e-7942-c2be93061b17}">
+        <p14:section name="Orçamento" id="{518e11f1-00a7-819f-9bb1-f14842831c46}">
           <p14:sldIdLst>
             <p14:sldId id="272"/>
             <p14:sldId id="273"/>
             <p14:sldId id="274"/>
           </p14:sldIdLst>
         </p14:section>
-        <p14:section name="Próximos passos" id="{d4724606-ffe6-9a22-b298-5018c62a8e7f}">
+        <p14:section name="Próximos passos" id="{63dcb5a7-7c57-2d68-bae4-e9ca7d6715b0}">
           <p14:sldIdLst>
             <p14:sldId id="275"/>
             <p14:sldId id="276"/>
@@ -283,10 +283,10 @@
                     <c:v>B2, RFID com leitor fixo</c:v>
                   </c:pt>
                   <c:pt idx="3">
-                    <c:v>B1, RFID com pulseira</c:v>
+                    <c:v>A com placa própria (EMS)</c:v>
                   </c:pt>
                   <c:pt idx="4">
-                    <c:v>A com placa própria (EMS)</c:v>
+                    <c:v>B1, RFID com pulseira</c:v>
                   </c:pt>
                   <c:pt idx="5">
                     <c:v>A com PTL comercial</c:v>
@@ -302,22 +302,22 @@
                 <c:formatCode>General</c:formatCode>
                 <c:ptCount val="6"/>
                 <c:pt idx="0">
-                  <c:v>260</c:v>
+                  <c:v>222</c:v>
                 </c:pt>
                 <c:pt idx="1">
-                  <c:v>356</c:v>
+                  <c:v>305</c:v>
                 </c:pt>
                 <c:pt idx="2">
-                  <c:v>383</c:v>
+                  <c:v>332</c:v>
                 </c:pt>
                 <c:pt idx="3">
-                  <c:v>389</c:v>
+                  <c:v>335</c:v>
                 </c:pt>
                 <c:pt idx="4">
-                  <c:v>405</c:v>
+                  <c:v>338</c:v>
                 </c:pt>
                 <c:pt idx="5">
-                  <c:v>929</c:v>
+                  <c:v>763</c:v>
                 </c:pt>
               </c:numCache>
             </c:numRef>
@@ -1039,7 +1039,7 @@
           <a:p>
             <a:r>
               <a:rPr lang="en-US" dirty="0"/>
-              <a:t>Esteira de transporte e de separação lado a lado, a uns 20 cm uma da outra. A transferência passa a bacia para a separação e o rolete direcionador manda para 2 estações à esquerda ou 2 à direita (ex.: entre 11 e 12 atende 10 a 13; na ponta, entre 3 e 4 atende 3, 4 e 5). A bacia só entra nas estações com itens do pedido. Alto giro na frente do operador, com a esteira de transporte passando por dentro (por baixo do andar 3 e por cima do andar 4) e a de separação aberta na frente; corredor do baixo giro atrás do operador, com 020-031 à esquerda e 043 a 032 à direita; o 015 fica na frente do bloco da direita, virado para a esteira. Medidas do desenho: 2,5 m de alto giro por estação, corredor de 1,2 m, prateleiras de 50 cm × 2 m. O concentrador fica atrás da estação e o barramento do baixo giro passa por cima das esteiras.</a:t>
+              <a:t>Esteira de transporte e de separação lado a lado, a uns 20 cm uma da outra. A transferência passa a bacia para a separação e o rolete direcionador manda para 2 estações à esquerda ou 2 à direita (ex.: entre 11 e 12 atende 10 a 13; na ponta, entre 3 e 4 atende 3, 4 e 5). A bacia só entra nas estações com itens do pedido. Alto giro na frente do operador, com a esteira de transporte passando por dentro (por baixo do andar 3 e por cima do andar 4) e a de separação aberta na frente; corredor do baixo giro atrás do operador, com 020-031 à esquerda e 043 a 032 à direita; o 015 ocupa a frente do bloco inteiro (1 m), virado para a esteira. Andares 4 e 5 do alto giro por baixo da esteira de separação. Medidas do desenho: 2,5 m de alto giro por estação, blocos de 1 m (2 prateleiras de 50 cm × 2 m) e corredor de cerca de 1,5 m. A barra âmbar na frente do alto giro avisa que a caixa tem itens no baixo giro. O concentrador fica atrás da estação e o barramento do baixo giro passa por cima das esteiras.</a:t>
             </a:r>
             <a:endParaRPr lang="en-US" dirty="0"/>
           </a:p>
@@ -1127,7 +1127,7 @@
           <a:p>
             <a:r>
               <a:rPr lang="en-US" dirty="0"/>
-              <a:t>Prateleiras alinhadas; a caixa do endereço muda de tamanho pelo tipo. Estação 05: 209 endereços. 49 de alto giro (29 com display próprio e 20 nos andares 4 e 5, atendidos por quatro displays) e 160 de baixo giro em 8 zonas (4 por lado, displays na altura dos olhos). O tamanho da zona é parâmetro e será ajustado no piloto.</a:t>
+              <a:t>Prateleiras alinhadas; a caixa do endereço muda de tamanho pelo tipo. Estação 05: 209 endereços. 49 de alto giro (29 com display próprio e 20 nos andares 4 e 5, atendidos por dois displays) e 160 de baixo giro em 4 zonas (2 por lado, displays na altura dos olhos). O tamanho da zona é parâmetro e será ajustado no piloto.</a:t>
             </a:r>
             <a:endParaRPr lang="en-US" dirty="0"/>
           </a:p>
@@ -1743,7 +1743,7 @@
           <a:p>
             <a:r>
               <a:rPr lang="en-US" dirty="0"/>
-              <a:t>Valores com instalação. 12 V × 5 V: os materiais ficam praticamente iguais (R$ 260 mil × R$ 263 mil), porque o cabo de força extra do 5 V custa mais do que os reguladores economizados, e o 5 V ainda aumenta a manutenção. Por isso a indicação é 12 V.</a:t>
+              <a:t>Valores com instalação. 12 V × 5 V: os materiais ficam praticamente iguais (R$ 222 mil × R$ 227 mil), porque o cabo de força extra do 5 V custa mais do que os reguladores economizados, e o 5 V ainda aumenta a manutenção. Por isso a indicação é 12 V.</a:t>
             </a:r>
             <a:endParaRPr lang="en-US" dirty="0"/>
           </a:p>
@@ -4254,7 +4254,7 @@
                   <a:schemeClr val="accent6"/>
                 </a:solidFill>
               </a:rPr>
-              <a:t>quatro displays de endereço e quantidade (A4 e A5 em cada lado)</a:t>
+              <a:t>duas zonas, cada uma com um display de endereço e quantidade, por baixo da esteira de separação</a:t>
             </a:r>
             <a:endParaRPr lang="en-US" sz="1200" dirty="0"/>
           </a:p>
@@ -4326,7 +4326,7 @@
                   <a:schemeClr val="accent6"/>
                 </a:solidFill>
               </a:rPr>
-              <a:t>quatro zonas por lado, com display na altura dos olhos</a:t>
+              <a:t>duas zonas por lado, com display na altura dos olhos, e sinal luminoso na frente do operador</a:t>
             </a:r>
             <a:endParaRPr lang="en-US" sz="1200" dirty="0"/>
           </a:p>
@@ -6373,7 +6373,7 @@
                             <a:schemeClr val="tx2"/>
                           </a:solidFill>
                         </a:rPr>
-                        <a:t>16.431</a:t>
+                        <a:t>14.511</a:t>
                       </a:r>
                       <a:endParaRPr lang="en-US" sz="1300" dirty="0"/>
                     </a:p>
@@ -6491,7 +6491,7 @@
                             <a:schemeClr val="tx2"/>
                           </a:solidFill>
                         </a:rPr>
-                        <a:t>21.806</a:t>
+                        <a:t>19.211</a:t>
                       </a:r>
                       <a:endParaRPr lang="en-US" sz="1300" dirty="0"/>
                     </a:p>
@@ -6609,7 +6609,7 @@
                             <a:schemeClr val="tx2"/>
                           </a:solidFill>
                         </a:rPr>
-                        <a:t>23.144</a:t>
+                        <a:t>20.550</a:t>
                       </a:r>
                       <a:endParaRPr lang="en-US" sz="1300" dirty="0"/>
                     </a:p>
@@ -6727,7 +6727,7 @@
                             <a:schemeClr val="tx2"/>
                           </a:solidFill>
                         </a:rPr>
-                        <a:t>38.473</a:t>
+                        <a:t>34.967</a:t>
                       </a:r>
                       <a:endParaRPr lang="en-US" sz="1300" dirty="0"/>
                     </a:p>
@@ -6845,7 +6845,7 @@
                             <a:schemeClr val="tx2"/>
                           </a:solidFill>
                         </a:rPr>
-                        <a:t>50.062</a:t>
+                        <a:t>41.681</a:t>
                       </a:r>
                       <a:endParaRPr lang="en-US" sz="1300" dirty="0"/>
                     </a:p>
@@ -6924,7 +6924,7 @@
                   <a:schemeClr val="accent6"/>
                 </a:solidFill>
               </a:rPr>
-              <a:t>Software interno: cerca de 1.144 h (A) e 1.064 h (B), ou R$ 119 mil e R$ 110 mil. Com 10% de contingência e o software, a Arquitetura A soma cerca de R$ 510 mil.</a:t>
+              <a:t>Software interno: cerca de 1.144 h (A) e 1.064 h (B), ou R$ 119 mil e R$ 110 mil. Com 10% de contingência e o software, a Arquitetura A soma cerca de R$ 454 mil.</a:t>
             </a:r>
             <a:endParaRPr lang="en-US" sz="1200" dirty="0"/>
           </a:p>
@@ -7163,7 +7163,7 @@
                   <a:schemeClr val="accent2"/>
                 </a:solidFill>
               </a:rPr>
-              <a:t>R$ 356 mil</a:t>
+              <a:t>R$ 305 mil</a:t>
             </a:r>
             <a:endParaRPr lang="en-US" sz="3000" dirty="0"/>
           </a:p>
@@ -7424,7 +7424,7 @@
                   <a:schemeClr val="accent3"/>
                 </a:solidFill>
               </a:rPr>
-              <a:t>R$ 405 mil</a:t>
+              <a:t>R$ 335 mil</a:t>
             </a:r>
             <a:endParaRPr lang="en-US" sz="3000" dirty="0"/>
           </a:p>
@@ -7685,7 +7685,7 @@
                   <a:schemeClr val="accent5"/>
                 </a:solidFill>
               </a:rPr>
-              <a:t>R$ 929 mil</a:t>
+              <a:t>R$ 763 mil</a:t>
             </a:r>
             <a:endParaRPr lang="en-US" sz="3000" dirty="0"/>
           </a:p>
@@ -8265,7 +8265,7 @@
                 <a:ea typeface="Arial" pitchFamily="34" charset="-122"/>
                 <a:cs typeface="Arial" pitchFamily="34" charset="-120"/>
               </a:rPr>
-              <a:t>R$ 356 mil</a:t>
+              <a:t>R$ 305 mil</a:t>
             </a:r>
             <a:endParaRPr lang="en-US" sz="3000" dirty="0"/>
           </a:p>
@@ -8403,7 +8403,7 @@
                 <a:ea typeface="Arial" pitchFamily="34" charset="-122"/>
                 <a:cs typeface="Arial" pitchFamily="34" charset="-120"/>
               </a:rPr>
-              <a:t>R$ 21,8 mil</a:t>
+              <a:t>R$ 19,2 mil</a:t>
             </a:r>
             <a:endParaRPr lang="en-US" sz="3000" dirty="0"/>
           </a:p>
@@ -11106,7 +11106,7 @@
                   <a:srgbClr val="C9D3E0"/>
                 </a:solidFill>
               </a:rPr>
-              <a:t>1. Aprovar o piloto nas estações 05 e 27 (cerca de R$ 22 mil)</a:t>
+              <a:t>1. Aprovar o piloto nas estações 05 e 27 (cerca de R$ 19 mil)</a:t>
             </a:r>
             <a:endParaRPr lang="en-US" sz="2000" dirty="0"/>
           </a:p>
@@ -14459,7 +14459,7 @@
                             <a:schemeClr val="tx2"/>
                           </a:solidFill>
                         </a:rPr>
-                        <a:t>R$ 356 mil</a:t>
+                        <a:t>R$ 305 mil</a:t>
                       </a:r>
                       <a:endParaRPr lang="en-US" sz="1500" dirty="0"/>
                     </a:p>
@@ -14517,7 +14517,7 @@
                             <a:schemeClr val="tx2"/>
                           </a:solidFill>
                         </a:rPr>
-                        <a:t>R$ 383 mil</a:t>
+                        <a:t>R$ 332 mil</a:t>
                       </a:r>
                       <a:endParaRPr lang="en-US" sz="1500" dirty="0"/>
                     </a:p>

--- a/projeto/entregaveis/Apresentacao_PTL.pptx
+++ b/projeto/entregaveis/Apresentacao_PTL.pptx
@@ -129,7 +129,7 @@
   <p:extLst>
     <p:ext uri="{521415D9-36F7-43E2-AB2F-B90AF26B5E84}">
       <p14:sectionLst xmlns:p14="http://schemas.microsoft.com/office/powerpoint/2010/main">
-        <p14:section name="Abertura" id="{16fe3566-2506-e7a6-62e1-c2946519f2ab}">
+        <p14:section name="Abertura" id="{71a9784f-919e-75ce-81e2-fcb83afc3b7e}">
           <p14:sldIdLst>
             <p14:sldId id="256"/>
             <p14:sldId id="257"/>
@@ -137,7 +137,7 @@
             <p14:sldId id="259"/>
           </p14:sldIdLst>
         </p14:section>
-        <p14:section name="Arquiteturas" id="{a2d957e9-5dd5-1461-2b74-ad2cbf67cfef}">
+        <p14:section name="Arquiteturas" id="{fdfb8c43-6ded-fdef-2c7e-bcab0c2cb790}">
           <p14:sldIdLst>
             <p14:sldId id="260"/>
             <p14:sldId id="261"/>
@@ -146,7 +146,7 @@
             <p14:sldId id="264"/>
           </p14:sldIdLst>
         </p14:section>
-        <p14:section name="A estação" id="{d73a367a-b3dc-252f-4911-d13ff0281f3c}">
+        <p14:section name="A estação" id="{3950bc72-394c-a112-0bd4-585b1cb1c116}">
           <p14:sldIdLst>
             <p14:sldId id="265"/>
             <p14:sldId id="266"/>
@@ -157,14 +157,14 @@
             <p14:sldId id="271"/>
           </p14:sldIdLst>
         </p14:section>
-        <p14:section name="Orçamento" id="{518e11f1-00a7-819f-9bb1-f14842831c46}">
+        <p14:section name="Orçamento" id="{9c628e52-82b1-96f5-9da2-e3fd2018c072}">
           <p14:sldIdLst>
             <p14:sldId id="272"/>
             <p14:sldId id="273"/>
             <p14:sldId id="274"/>
           </p14:sldIdLst>
         </p14:section>
-        <p14:section name="Próximos passos" id="{63dcb5a7-7c57-2d68-bae4-e9ca7d6715b0}">
+        <p14:section name="Próximos passos" id="{797216b1-7c55-5844-87ba-96ab7d9a9607}">
           <p14:sldIdLst>
             <p14:sldId id="275"/>
             <p14:sldId id="276"/>
@@ -6191,7 +6191,7 @@
                             <a:schemeClr val="bg1"/>
                           </a:solidFill>
                         </a:rPr>
-                        <a:t>Piloto 05 e 27</a:t>
+                        <a:t>Piloto 04 e 27</a:t>
                       </a:r>
                       <a:endParaRPr lang="en-US" sz="1300" dirty="0"/>
                     </a:p>
@@ -8403,7 +8403,7 @@
                 <a:ea typeface="Arial" pitchFamily="34" charset="-122"/>
                 <a:cs typeface="Arial" pitchFamily="34" charset="-120"/>
               </a:rPr>
-              <a:t>R$ 19,2 mil</a:t>
+              <a:t>R$ 22,5 mil</a:t>
             </a:r>
             <a:endParaRPr lang="en-US" sz="3000" dirty="0"/>
           </a:p>
@@ -8439,7 +8439,7 @@
                   <a:schemeClr val="tx2"/>
                 </a:solidFill>
               </a:rPr>
-              <a:t>piloto</a:t>
+              <a:t>POC</a:t>
             </a:r>
             <a:endParaRPr lang="en-US" sz="1600" dirty="0"/>
           </a:p>
@@ -8475,7 +8475,7 @@
                   <a:schemeClr val="accent6"/>
                 </a:solidFill>
               </a:rPr>
-              <a:t>estações 05 e 27</a:t>
+              <a:t>bancada + estações 04 e 27</a:t>
             </a:r>
             <a:endParaRPr lang="en-US" sz="1300" dirty="0"/>
           </a:p>
@@ -8522,7 +8522,7 @@
                   <a:schemeClr val="tx2"/>
                 </a:solidFill>
               </a:rPr>
-              <a:t>começar pela Arquitetura A, que usa os coletores MovFast que já temos, com os módulos montados internamente e alimentação em 12 V. O piloto seria nas estações 05 e 27. A Arquitetura B (RFID) pode vir depois, aproveitando os mesmos displays.</a:t>
+              <a:t>começar pela Arquitetura A, que usa os coletores MovFast que já temos, com os módulos montados internamente e alimentação em 12 V. O piloto seria nas estações 04 e 27. A Arquitetura B (RFID) pode vir depois, aproveitando os mesmos displays.</a:t>
             </a:r>
             <a:endParaRPr lang="en-US" sz="1700" dirty="0"/>
           </a:p>
@@ -8955,7 +8955,7 @@
                   <a:schemeClr val="accent1"/>
                 </a:solidFill>
               </a:rPr>
-              <a:t>6 a 8 sem.</a:t>
+              <a:t>~10 sem.</a:t>
             </a:r>
             <a:endParaRPr lang="en-US" sz="1400" dirty="0"/>
           </a:p>
@@ -8991,7 +8991,7 @@
                   <a:schemeClr val="tx1"/>
                 </a:solidFill>
               </a:rPr>
-              <a:t>Piloto 05 e 27</a:t>
+              <a:t>POC 04 e 27</a:t>
             </a:r>
             <a:endParaRPr lang="en-US" sz="1700" dirty="0"/>
           </a:p>
@@ -9027,7 +9027,7 @@
                   <a:schemeClr val="accent6"/>
                 </a:solidFill>
               </a:rPr>
-              <a:t>Estações completas, app do coletor, painel e medição antes e depois</a:t>
+              <a:t>Bancada, depois as 2 estações completas, app do coletor e medição antes e depois</a:t>
             </a:r>
             <a:endParaRPr lang="en-US" sz="1300" dirty="0"/>
           </a:p>
@@ -11106,7 +11106,7 @@
                   <a:srgbClr val="C9D3E0"/>
                 </a:solidFill>
               </a:rPr>
-              <a:t>1. Aprovar o piloto nas estações 05 e 27 (cerca de R$ 19 mil)</a:t>
+              <a:t>1. Aprovar a POC: bancada + estações 04 e 27 (cerca de R$ 22,5 mil)</a:t>
             </a:r>
             <a:endParaRPr lang="en-US" sz="2000" dirty="0"/>
           </a:p>

--- a/projeto/entregaveis/Apresentacao_PTL.pptx
+++ b/projeto/entregaveis/Apresentacao_PTL.pptx
@@ -129,7 +129,7 @@
   <p:extLst>
     <p:ext uri="{521415D9-36F7-43E2-AB2F-B90AF26B5E84}">
       <p14:sectionLst xmlns:p14="http://schemas.microsoft.com/office/powerpoint/2010/main">
-        <p14:section name="Abertura" id="{71a9784f-919e-75ce-81e2-fcb83afc3b7e}">
+        <p14:section name="Abertura" id="{d979ba18-9091-21b9-4ac6-c97afe29dea9}">
           <p14:sldIdLst>
             <p14:sldId id="256"/>
             <p14:sldId id="257"/>
@@ -137,7 +137,7 @@
             <p14:sldId id="259"/>
           </p14:sldIdLst>
         </p14:section>
-        <p14:section name="Arquiteturas" id="{fdfb8c43-6ded-fdef-2c7e-bcab0c2cb790}">
+        <p14:section name="Arquiteturas" id="{8c635f28-556c-797e-436f-8f2a6d476606}">
           <p14:sldIdLst>
             <p14:sldId id="260"/>
             <p14:sldId id="261"/>
@@ -146,7 +146,7 @@
             <p14:sldId id="264"/>
           </p14:sldIdLst>
         </p14:section>
-        <p14:section name="A estação" id="{3950bc72-394c-a112-0bd4-585b1cb1c116}">
+        <p14:section name="A estação" id="{5f311888-c59b-eaa9-ff89-2ce66ff61c3b}">
           <p14:sldIdLst>
             <p14:sldId id="265"/>
             <p14:sldId id="266"/>
@@ -157,14 +157,14 @@
             <p14:sldId id="271"/>
           </p14:sldIdLst>
         </p14:section>
-        <p14:section name="Orçamento" id="{9c628e52-82b1-96f5-9da2-e3fd2018c072}">
+        <p14:section name="Orçamento" id="{c923354d-0549-af86-3d9a-846e006732b6}">
           <p14:sldIdLst>
             <p14:sldId id="272"/>
             <p14:sldId id="273"/>
             <p14:sldId id="274"/>
           </p14:sldIdLst>
         </p14:section>
-        <p14:section name="Próximos passos" id="{797216b1-7c55-5844-87ba-96ab7d9a9607}">
+        <p14:section name="Próximos passos" id="{db961531-1a75-ac23-d499-25a64629ff2d}">
           <p14:sldIdLst>
             <p14:sldId id="275"/>
             <p14:sldId id="276"/>
@@ -269,9 +269,9 @@
           </c:dLbls>
           <c:cat>
             <c:multiLvlStrRef>
-              <c:f>Sheet1!$A$2:$A$7</c:f>
+              <c:f>Sheet1!$A$2:$A$5</c:f>
               <c:multiLvlStrCache>
-                <c:ptCount val="6"/>
+                <c:ptCount val="4"/>
                 <c:lvl>
                   <c:pt idx="0">
                     <c:v>A interna, só materiais</c:v>
@@ -280,15 +280,9 @@
                     <c:v>A interna, com mão de obra</c:v>
                   </c:pt>
                   <c:pt idx="2">
-                    <c:v>B2, RFID com leitor fixo</c:v>
+                    <c:v>A com placa própria (EMS)</c:v>
                   </c:pt>
                   <c:pt idx="3">
-                    <c:v>A com placa própria (EMS)</c:v>
-                  </c:pt>
-                  <c:pt idx="4">
-                    <c:v>B1, RFID com pulseira</c:v>
-                  </c:pt>
-                  <c:pt idx="5">
                     <c:v>A com PTL comercial</c:v>
                   </c:pt>
                 </c:lvl>
@@ -297,10 +291,10 @@
           </c:cat>
           <c:val>
             <c:numRef>
-              <c:f>Sheet1!$B$2:$B$7</c:f>
+              <c:f>Sheet1!$B$2:$B$5</c:f>
               <c:numCache>
                 <c:formatCode>General</c:formatCode>
-                <c:ptCount val="6"/>
+                <c:ptCount val="4"/>
                 <c:pt idx="0">
                   <c:v>222</c:v>
                 </c:pt>
@@ -308,15 +302,9 @@
                   <c:v>305</c:v>
                 </c:pt>
                 <c:pt idx="2">
-                  <c:v>332</c:v>
+                  <c:v>335</c:v>
                 </c:pt>
                 <c:pt idx="3">
-                  <c:v>335</c:v>
-                </c:pt>
-                <c:pt idx="4">
-                  <c:v>338</c:v>
-                </c:pt>
-                <c:pt idx="5">
                   <c:v>763</c:v>
                 </c:pt>
               </c:numCache>
@@ -2623,7 +2611,7 @@
           <a:p>
             <a:r>
               <a:rPr lang="en-US" dirty="0"/>
-              <a:t>Azul: software novo (Serviço PTL). Verde: hardware novo em cada estação. Marrom: sistemas que já existem. Tracejado: opcional ou só na Arquitetura B. O serviço fala com o Sybase por SQL, com o BHT por HTTP e com os 40 concentradores por MQTT na rede cabeada; cada concentrador comanda dois barramentos RS-485.</a:t>
+              <a:t>Azul: software novo (Serviço PTL). Verde: hardware novo em cada estação. Marrom: sistemas que já existem. Tracejado: opcional ou melhoria futura (RFID com pulseira). O serviço fala com o Sybase por SQL, com o BHT por HTTP e com os 40 concentradores por MQTT na rede cabeada; cada concentrador comanda dois barramentos RS-485.</a:t>
             </a:r>
             <a:endParaRPr lang="en-US" dirty="0"/>
           </a:p>
@@ -2799,7 +2787,7 @@
           <a:p>
             <a:r>
               <a:rPr lang="en-US" dirty="0"/>
-              <a:t>Valores com mão de obra interna. A B usa toda a parte de displays da A, então começar pela A não desperdiça investimento.</a:t>
+              <a:t>Valores com mão de obra interna. O RFID usa toda a parte de displays da A, então começar pelo coletor não desperdiça investimento.</a:t>
             </a:r>
             <a:endParaRPr lang="en-US" dirty="0"/>
           </a:p>
@@ -6551,7 +6539,7 @@
                             <a:schemeClr val="tx2"/>
                           </a:solidFill>
                         </a:rPr>
-                        <a:t>B2, leitor fixo</a:t>
+                        <a:t>POC com contingência</a:t>
                       </a:r>
                       <a:endParaRPr lang="en-US" sz="1300" dirty="0"/>
                     </a:p>
@@ -6609,7 +6597,7 @@
                             <a:schemeClr val="tx2"/>
                           </a:solidFill>
                         </a:rPr>
-                        <a:t>20.550</a:t>
+                        <a:t>22.469</a:t>
                       </a:r>
                       <a:endParaRPr lang="en-US" sz="1300" dirty="0"/>
                     </a:p>
@@ -6924,7 +6912,7 @@
                   <a:schemeClr val="accent6"/>
                 </a:solidFill>
               </a:rPr>
-              <a:t>Software interno: cerca de 1.144 h (A) e 1.064 h (B), ou R$ 119 mil e R$ 110 mil. Com 10% de contingência e o software, a Arquitetura A soma cerca de R$ 454 mil.</a:t>
+              <a:t>Software interno: cerca de 1.144 h, ou R$ 119 mil. RFID futuro: + R$ 33 mil e 80 h. Com 10% de contingência e o software, a Arquitetura A soma cerca de R$ 454 mil.</a:t>
             </a:r>
             <a:endParaRPr lang="en-US" sz="1200" dirty="0"/>
           </a:p>
@@ -8522,7 +8510,7 @@
                   <a:schemeClr val="tx2"/>
                 </a:solidFill>
               </a:rPr>
-              <a:t>começar pela Arquitetura A, que usa os coletores MovFast que já temos, com os módulos montados internamente e alimentação em 12 V. O piloto seria nas estações 04 e 27. A Arquitetura B (RFID) pode vir depois, aproveitando os mesmos displays.</a:t>
+              <a:t>começar pela Arquitetura A, que usa os coletores MovFast que já temos, com os módulos montados internamente e alimentação em 12 V. O piloto seria nas estações 04 e 27. O RFID com pulseira fica como melhoria futura, aproveitando os mesmos displays.</a:t>
             </a:r>
             <a:endParaRPr lang="en-US" sz="1700" dirty="0"/>
           </a:p>
@@ -10881,7 +10869,7 @@
                   <a:schemeClr val="tx2"/>
                 </a:solidFill>
               </a:rPr>
-              <a:t>Leitura no coletor virtual ou por RFID</a:t>
+              <a:t>Leitura da caixa no coletor virtual</a:t>
             </a:r>
             <a:endParaRPr lang="en-US" sz="1400" dirty="0"/>
           </a:p>
@@ -12558,7 +12546,7 @@
                   <a:schemeClr val="accent4"/>
                 </a:solidFill>
               </a:rPr>
-              <a:t>Na Arquitetura B, os passos 1 e 4 são feitos pela leitura da tag RFID fixa na caixa.</a:t>
+              <a:t>No futuro, com RFID, os passos 1 e 4 passam a ser feitos encostando a pulseira na tag da caixa.</a:t>
             </a:r>
             <a:endParaRPr lang="en-US" sz="1400" dirty="0"/>
           </a:p>
@@ -12704,7 +12692,7 @@
                   <a:srgbClr val="C9D3E0"/>
                 </a:solidFill>
               </a:rPr>
-              <a:t>As duas usam os mesmos displays. Muda apenas como a caixa é identificada: pelo coletor (A) ou por RFID (B).</a:t>
+              <a:t>A POC e a implantação usam o coletor que já temos. O RFID com pulseira usa os mesmos displays e fica como melhoria futura.</a:t>
             </a:r>
             <a:endParaRPr lang="en-US" sz="1800" dirty="0"/>
           </a:p>
@@ -13387,7 +13375,7 @@
                   <a:schemeClr val="tx1"/>
                 </a:solidFill>
               </a:rPr>
-              <a:t>Arquitetura B: RFID na caixa</a:t>
+              <a:t>Melhoria futura: RFID com pulseira</a:t>
             </a:r>
             <a:endParaRPr lang="en-US" sz="2600" dirty="0"/>
           </a:p>
@@ -13474,7 +13462,7 @@
                   <a:schemeClr val="accent4"/>
                 </a:solidFill>
               </a:rPr>
-              <a:t>B2: leitor fixo (indicado)</a:t>
+              <a:t>Depois da POC</a:t>
             </a:r>
             <a:endParaRPr lang="en-US" sz="1500" dirty="0"/>
           </a:p>
@@ -13510,7 +13498,7 @@
                   <a:schemeClr val="accent6"/>
                 </a:solidFill>
               </a:rPr>
-              <a:t>Leitor NFC no ponto onde a caixa para e painel LCD. O operador não carrega nada.</a:t>
+              <a:t>A POC e a implantação usam o coletor. O leitor fixo saiu do projeto.</a:t>
             </a:r>
             <a:endParaRPr lang="en-US" sz="1300" dirty="0"/>
           </a:p>
@@ -13573,7 +13561,7 @@
                   <a:schemeClr val="accent4"/>
                 </a:solidFill>
               </a:rPr>
-              <a:t>B1: pulseira NFC</a:t>
+              <a:t>Pulseira NFC</a:t>
             </a:r>
             <a:endParaRPr lang="en-US" sz="1500" dirty="0"/>
           </a:p>
@@ -13609,7 +13597,7 @@
                   <a:schemeClr val="accent6"/>
                 </a:solidFill>
               </a:rPr>
-              <a:t>Cerca de R$ 130 por unidade, mãos livres. Bateria e conforto preocupam.</a:t>
+              <a:t>Cerca de R$ 130 por unidade, mãos livres. Acréscimo de ~R$ 36 mil para as 40 estações.</a:t>
             </a:r>
             <a:endParaRPr lang="en-US" sz="1300" dirty="0"/>
           </a:p>
@@ -13816,7 +13804,7 @@
                   <a:schemeClr val="tx1"/>
                 </a:solidFill>
               </a:rPr>
-              <a:t>Comparação entre A e B</a:t>
+              <a:t>Coletor hoje, RFID depois</a:t>
             </a:r>
             <a:endParaRPr lang="en-US" sz="2600" dirty="0"/>
           </a:p>
@@ -13925,7 +13913,7 @@
                             <a:schemeClr val="bg1"/>
                           </a:solidFill>
                         </a:rPr>
-                        <a:t>A: coletor</a:t>
+                        <a:t>Coletor (POC e implantação)</a:t>
                       </a:r>
                       <a:endParaRPr lang="en-US" sz="1500" dirty="0"/>
                     </a:p>
@@ -13986,7 +13974,7 @@
                             <a:schemeClr val="bg1"/>
                           </a:solidFill>
                         </a:rPr>
-                        <a:t>B2: RFID com leitor fixo</a:t>
+                        <a:t>RFID com pulseira (futuro)</a:t>
                       </a:r>
                       <a:endParaRPr lang="en-US" sz="1500" dirty="0"/>
                     </a:p>
@@ -14165,7 +14153,7 @@
                             <a:schemeClr val="tx2"/>
                           </a:solidFill>
                         </a:rPr>
-                        <a:t>Tag em cada caixa e leitor em cada estação</a:t>
+                        <a:t>Tag em cada caixa e pulseira no operador</a:t>
                       </a:r>
                       <a:endParaRPr lang="en-US" sz="1500" dirty="0"/>
                     </a:p>
@@ -14341,7 +14329,7 @@
                             <a:schemeClr val="tx2"/>
                           </a:solidFill>
                         </a:rPr>
-                        <a:t>Posiciona a caixa (abre) e lê de novo (fecha)</a:t>
+                        <a:t>Encosta o pulso na tag para abrir e fechar</a:t>
                       </a:r>
                       <a:endParaRPr lang="en-US" sz="1500" dirty="0"/>
                     </a:p>
@@ -14517,7 +14505,7 @@
                             <a:schemeClr val="tx2"/>
                           </a:solidFill>
                         </a:rPr>
-                        <a:t>R$ 332 mil</a:t>
+                        <a:t>+ R$ 33 mil sobre o coletor</a:t>
                       </a:r>
                       <a:endParaRPr lang="en-US" sz="1500" dirty="0"/>
                     </a:p>
@@ -14811,7 +14799,7 @@
                             <a:schemeClr val="tx2"/>
                           </a:solidFill>
                         </a:rPr>
-                        <a:t>Cerca de 1.080 h</a:t>
+                        <a:t>Cerca de 1.144 h</a:t>
                       </a:r>
                       <a:endParaRPr lang="en-US" sz="1500" dirty="0"/>
                     </a:p>
@@ -14869,7 +14857,7 @@
                             <a:schemeClr val="tx2"/>
                           </a:solidFill>
                         </a:rPr>
-                        <a:t>Cerca de 1.000 h, mais o cadastro das tags</a:t>
+                        <a:t>+ 80 h e o cadastro das tags</a:t>
                       </a:r>
                       <a:endParaRPr lang="en-US" sz="1500" dirty="0"/>
                     </a:p>
@@ -15045,7 +15033,7 @@
                             <a:schemeClr val="tx2"/>
                           </a:solidFill>
                         </a:rPr>
-                        <a:t>Posição de leitura na esteira; frota de tags</a:t>
+                        <a:t>Conforto e bateria da pulseira; frota de tags</a:t>
                       </a:r>
                       <a:endParaRPr lang="en-US" sz="1500" dirty="0"/>
                     </a:p>
@@ -15163,7 +15151,7 @@
                             <a:schemeClr val="tx2"/>
                           </a:solidFill>
                         </a:rPr>
-                        <a:t>Menor</a:t>
+                        <a:t>POC em ~10 semanas</a:t>
                       </a:r>
                       <a:endParaRPr lang="en-US" sz="1500" dirty="0"/>
                     </a:p>
@@ -15221,7 +15209,7 @@
                             <a:schemeClr val="tx2"/>
                           </a:solidFill>
                         </a:rPr>
-                        <a:t>Maior, por causa das tags, do cadastro e da instalação</a:t>
+                        <a:t>Depois da POC</a:t>
                       </a:r>
                       <a:endParaRPr lang="en-US" sz="1500" dirty="0"/>
                     </a:p>

--- a/projeto/entregaveis/Apresentacao_PTL.pptx
+++ b/projeto/entregaveis/Apresentacao_PTL.pptx
@@ -129,7 +129,7 @@
   <p:extLst>
     <p:ext uri="{521415D9-36F7-43E2-AB2F-B90AF26B5E84}">
       <p14:sectionLst xmlns:p14="http://schemas.microsoft.com/office/powerpoint/2010/main">
-        <p14:section name="Abertura" id="{d979ba18-9091-21b9-4ac6-c97afe29dea9}">
+        <p14:section name="Abertura" id="{27d3931a-97a2-78cc-7020-26a63fa108e4}">
           <p14:sldIdLst>
             <p14:sldId id="256"/>
             <p14:sldId id="257"/>
@@ -137,7 +137,7 @@
             <p14:sldId id="259"/>
           </p14:sldIdLst>
         </p14:section>
-        <p14:section name="Arquiteturas" id="{8c635f28-556c-797e-436f-8f2a6d476606}">
+        <p14:section name="Arquiteturas" id="{a4639e5c-ec6b-2bfb-6c76-d75b7e8bfbcb}">
           <p14:sldIdLst>
             <p14:sldId id="260"/>
             <p14:sldId id="261"/>
@@ -146,7 +146,7 @@
             <p14:sldId id="264"/>
           </p14:sldIdLst>
         </p14:section>
-        <p14:section name="A estação" id="{5f311888-c59b-eaa9-ff89-2ce66ff61c3b}">
+        <p14:section name="A estação" id="{2e95718c-474f-e830-d488-f80e8af74993}">
           <p14:sldIdLst>
             <p14:sldId id="265"/>
             <p14:sldId id="266"/>
@@ -157,14 +157,14 @@
             <p14:sldId id="271"/>
           </p14:sldIdLst>
         </p14:section>
-        <p14:section name="Orçamento" id="{c923354d-0549-af86-3d9a-846e006732b6}">
+        <p14:section name="Orçamento" id="{93a97ab9-e0b8-85e1-31f0-7c3ee2af3598}">
           <p14:sldIdLst>
             <p14:sldId id="272"/>
             <p14:sldId id="273"/>
             <p14:sldId id="274"/>
           </p14:sldIdLst>
         </p14:section>
-        <p14:section name="Próximos passos" id="{db961531-1a75-ac23-d499-25a64629ff2d}">
+        <p14:section name="Próximos passos" id="{edb41b84-0f12-70d9-cf50-b28c4553ebb2}">
           <p14:sldIdLst>
             <p14:sldId id="275"/>
             <p14:sldId id="276"/>
@@ -296,16 +296,16 @@
                 <c:formatCode>General</c:formatCode>
                 <c:ptCount val="4"/>
                 <c:pt idx="0">
-                  <c:v>222</c:v>
+                  <c:v>244</c:v>
                 </c:pt>
                 <c:pt idx="1">
-                  <c:v>305</c:v>
+                  <c:v>326</c:v>
                 </c:pt>
                 <c:pt idx="2">
-                  <c:v>335</c:v>
+                  <c:v>342</c:v>
                 </c:pt>
                 <c:pt idx="3">
-                  <c:v>763</c:v>
+                  <c:v>754</c:v>
                 </c:pt>
               </c:numCache>
             </c:numRef>
@@ -1731,7 +1731,7 @@
           <a:p>
             <a:r>
               <a:rPr lang="en-US" dirty="0"/>
-              <a:t>Valores com instalação. 12 V × 5 V: os materiais ficam praticamente iguais (R$ 222 mil × R$ 227 mil), porque o cabo de força extra do 5 V custa mais do que os reguladores economizados, e o 5 V ainda aumenta a manutenção. Por isso a indicação é 12 V.</a:t>
+              <a:t>Valores com instalação. 12 V × 5 V: o 5 V fica mais caro (R$ 244 mil × R$ 264 mil em materiais), porque a fonte de 5 V e o cabo de força extra custam mais do que os reguladores economizados, e o 5 V ainda aumenta a manutenção. Por isso a indicação é 12 V.</a:t>
             </a:r>
             <a:endParaRPr lang="en-US" dirty="0"/>
           </a:p>
@@ -6008,7 +6008,7 @@
                   <a:srgbClr val="C9D3E0"/>
                 </a:solidFill>
               </a:rPr>
-              <a:t>Preços pesquisados em lojas brasileiras em 23 e 26/10/2026. Os itens estimados estão marcados na planilha.</a:t>
+              <a:t>Preços de lojas on-line consultados em 27/10/2026, cada um com o link na planilha (aba Fontes).</a:t>
             </a:r>
             <a:endParaRPr lang="en-US" sz="1800" dirty="0"/>
           </a:p>
@@ -6361,7 +6361,7 @@
                             <a:schemeClr val="tx2"/>
                           </a:solidFill>
                         </a:rPr>
-                        <a:t>14.511</a:t>
+                        <a:t>15.479</a:t>
                       </a:r>
                       <a:endParaRPr lang="en-US" sz="1300" dirty="0"/>
                     </a:p>
@@ -6479,7 +6479,7 @@
                             <a:schemeClr val="tx2"/>
                           </a:solidFill>
                         </a:rPr>
-                        <a:t>19.211</a:t>
+                        <a:t>20.180</a:t>
                       </a:r>
                       <a:endParaRPr lang="en-US" sz="1300" dirty="0"/>
                     </a:p>
@@ -6597,7 +6597,7 @@
                             <a:schemeClr val="tx2"/>
                           </a:solidFill>
                         </a:rPr>
-                        <a:t>22.469</a:t>
+                        <a:t>23.397</a:t>
                       </a:r>
                       <a:endParaRPr lang="en-US" sz="1300" dirty="0"/>
                     </a:p>
@@ -6715,7 +6715,7 @@
                             <a:schemeClr val="tx2"/>
                           </a:solidFill>
                         </a:rPr>
-                        <a:t>34.967</a:t>
+                        <a:t>35.194</a:t>
                       </a:r>
                       <a:endParaRPr lang="en-US" sz="1300" dirty="0"/>
                     </a:p>
@@ -6833,7 +6833,7 @@
                             <a:schemeClr val="tx2"/>
                           </a:solidFill>
                         </a:rPr>
-                        <a:t>41.681</a:t>
+                        <a:t>41.047</a:t>
                       </a:r>
                       <a:endParaRPr lang="en-US" sz="1300" dirty="0"/>
                     </a:p>
@@ -6912,7 +6912,7 @@
                   <a:schemeClr val="accent6"/>
                 </a:solidFill>
               </a:rPr>
-              <a:t>Software interno: cerca de 1.144 h, ou R$ 119 mil. RFID futuro: + R$ 33 mil e 80 h. Com 10% de contingência e o software, a Arquitetura A soma cerca de R$ 454 mil.</a:t>
+              <a:t>Software interno: cerca de 1.144 h, ou R$ 119 mil. RFID futuro: + R$ 29 mil e 80 h. Com 10% de contingência e o software, a Arquitetura A soma cerca de R$ 477 mil.</a:t>
             </a:r>
             <a:endParaRPr lang="en-US" sz="1200" dirty="0"/>
           </a:p>
@@ -7151,7 +7151,7 @@
                   <a:schemeClr val="accent2"/>
                 </a:solidFill>
               </a:rPr>
-              <a:t>R$ 305 mil</a:t>
+              <a:t>R$ 326 mil</a:t>
             </a:r>
             <a:endParaRPr lang="en-US" sz="3000" dirty="0"/>
           </a:p>
@@ -7412,7 +7412,7 @@
                   <a:schemeClr val="accent3"/>
                 </a:solidFill>
               </a:rPr>
-              <a:t>R$ 335 mil</a:t>
+              <a:t>R$ 342 mil</a:t>
             </a:r>
             <a:endParaRPr lang="en-US" sz="3000" dirty="0"/>
           </a:p>
@@ -7673,7 +7673,7 @@
                   <a:schemeClr val="accent5"/>
                 </a:solidFill>
               </a:rPr>
-              <a:t>R$ 763 mil</a:t>
+              <a:t>R$ 754 mil</a:t>
             </a:r>
             <a:endParaRPr lang="en-US" sz="3000" dirty="0"/>
           </a:p>
@@ -7767,7 +7767,7 @@
                   <a:schemeClr val="tx2"/>
                 </a:solidFill>
               </a:rPr>
-              <a:t>Cerca de 2,5 vezes o custo interno</a:t>
+              <a:t>Cerca de 2,3 vezes o custo interno</a:t>
             </a:r>
             <a:endParaRPr lang="en-US" sz="1400" dirty="0"/>
           </a:p>
@@ -8253,7 +8253,7 @@
                 <a:ea typeface="Arial" pitchFamily="34" charset="-122"/>
                 <a:cs typeface="Arial" pitchFamily="34" charset="-120"/>
               </a:rPr>
-              <a:t>R$ 305 mil</a:t>
+              <a:t>R$ 326 mil</a:t>
             </a:r>
             <a:endParaRPr lang="en-US" sz="3000" dirty="0"/>
           </a:p>
@@ -8391,7 +8391,7 @@
                 <a:ea typeface="Arial" pitchFamily="34" charset="-122"/>
                 <a:cs typeface="Arial" pitchFamily="34" charset="-120"/>
               </a:rPr>
-              <a:t>R$ 22,5 mil</a:t>
+              <a:t>R$ 23,4 mil</a:t>
             </a:r>
             <a:endParaRPr lang="en-US" sz="3000" dirty="0"/>
           </a:p>
@@ -11094,7 +11094,7 @@
                   <a:srgbClr val="C9D3E0"/>
                 </a:solidFill>
               </a:rPr>
-              <a:t>1. Aprovar a POC: bancada + estações 04 e 27 (cerca de R$ 22,5 mil)</a:t>
+              <a:t>1. Aprovar a POC: bancada + estações 04 e 27 (cerca de R$ 23,4 mil)</a:t>
             </a:r>
             <a:endParaRPr lang="en-US" sz="2000" dirty="0"/>
           </a:p>
@@ -13597,7 +13597,7 @@
                   <a:schemeClr val="accent6"/>
                 </a:solidFill>
               </a:rPr>
-              <a:t>Cerca de R$ 130 por unidade, mãos livres. Acréscimo de ~R$ 36 mil para as 40 estações.</a:t>
+              <a:t>Cerca de R$ 113 por unidade, mãos livres. Acréscimo de ~R$ 32 mil para as 40 estações.</a:t>
             </a:r>
             <a:endParaRPr lang="en-US" sz="1300" dirty="0"/>
           </a:p>
@@ -14447,7 +14447,7 @@
                             <a:schemeClr val="tx2"/>
                           </a:solidFill>
                         </a:rPr>
-                        <a:t>R$ 305 mil</a:t>
+                        <a:t>R$ 326 mil</a:t>
                       </a:r>
                       <a:endParaRPr lang="en-US" sz="1500" dirty="0"/>
                     </a:p>
@@ -14505,7 +14505,7 @@
                             <a:schemeClr val="tx2"/>
                           </a:solidFill>
                         </a:rPr>
-                        <a:t>+ R$ 33 mil sobre o coletor</a:t>
+                        <a:t>+ R$ 29 mil sobre o coletor</a:t>
                       </a:r>
                       <a:endParaRPr lang="en-US" sz="1500" dirty="0"/>
                     </a:p>

--- a/projeto/entregaveis/Apresentacao_PTL.pptx
+++ b/projeto/entregaveis/Apresentacao_PTL.pptx
@@ -129,7 +129,7 @@
   <p:extLst>
     <p:ext uri="{521415D9-36F7-43E2-AB2F-B90AF26B5E84}">
       <p14:sectionLst xmlns:p14="http://schemas.microsoft.com/office/powerpoint/2010/main">
-        <p14:section name="Abertura" id="{27d3931a-97a2-78cc-7020-26a63fa108e4}">
+        <p14:section name="Abertura" id="{bc0ec5f1-db94-7833-f109-df3c812ca87a}">
           <p14:sldIdLst>
             <p14:sldId id="256"/>
             <p14:sldId id="257"/>
@@ -137,7 +137,7 @@
             <p14:sldId id="259"/>
           </p14:sldIdLst>
         </p14:section>
-        <p14:section name="Arquiteturas" id="{a4639e5c-ec6b-2bfb-6c76-d75b7e8bfbcb}">
+        <p14:section name="Arquiteturas" id="{d76b9581-3941-bdc5-3041-d9bc55a280aa}">
           <p14:sldIdLst>
             <p14:sldId id="260"/>
             <p14:sldId id="261"/>
@@ -146,7 +146,7 @@
             <p14:sldId id="264"/>
           </p14:sldIdLst>
         </p14:section>
-        <p14:section name="A estação" id="{2e95718c-474f-e830-d488-f80e8af74993}">
+        <p14:section name="A estação" id="{bd610f43-c7d3-3455-4588-e9ef0a38b815}">
           <p14:sldIdLst>
             <p14:sldId id="265"/>
             <p14:sldId id="266"/>
@@ -157,14 +157,14 @@
             <p14:sldId id="271"/>
           </p14:sldIdLst>
         </p14:section>
-        <p14:section name="Orçamento" id="{93a97ab9-e0b8-85e1-31f0-7c3ee2af3598}">
+        <p14:section name="Orçamento" id="{af852851-8a76-d3fb-bf79-18c3748e1eee}">
           <p14:sldIdLst>
             <p14:sldId id="272"/>
             <p14:sldId id="273"/>
             <p14:sldId id="274"/>
           </p14:sldIdLst>
         </p14:section>
-        <p14:section name="Próximos passos" id="{edb41b84-0f12-70d9-cf50-b28c4553ebb2}">
+        <p14:section name="Próximos passos" id="{4848c3cc-1d8f-6123-cec5-f2c39ee11f9a}">
           <p14:sldIdLst>
             <p14:sldId id="275"/>
             <p14:sldId id="276"/>
@@ -296,13 +296,13 @@
                 <c:formatCode>General</c:formatCode>
                 <c:ptCount val="4"/>
                 <c:pt idx="0">
-                  <c:v>244</c:v>
+                  <c:v>223</c:v>
                 </c:pt>
                 <c:pt idx="1">
-                  <c:v>326</c:v>
+                  <c:v>305</c:v>
                 </c:pt>
                 <c:pt idx="2">
-                  <c:v>342</c:v>
+                  <c:v>328</c:v>
                 </c:pt>
                 <c:pt idx="3">
                   <c:v>754</c:v>
@@ -1731,7 +1731,7 @@
           <a:p>
             <a:r>
               <a:rPr lang="en-US" dirty="0"/>
-              <a:t>Valores com instalação. 12 V × 5 V: o 5 V fica mais caro (R$ 244 mil × R$ 264 mil em materiais), porque a fonte de 5 V e o cabo de força extra custam mais do que os reguladores economizados, e o 5 V ainda aumenta a manutenção. Por isso a indicação é 12 V.</a:t>
+              <a:t>Valores com instalação. 12 V × 5 V: o 5 V fica mais caro (R$ 223 mil × R$ 243 mil em materiais), porque a fonte de 5 V e o cabo de força extra custam mais do que os reguladores economizados, e o 5 V ainda aumenta a manutenção. Por isso a indicação é 12 V.</a:t>
             </a:r>
             <a:endParaRPr lang="en-US" dirty="0"/>
           </a:p>
@@ -6361,7 +6361,7 @@
                             <a:schemeClr val="tx2"/>
                           </a:solidFill>
                         </a:rPr>
-                        <a:t>15.479</a:t>
+                        <a:t>14.434</a:t>
                       </a:r>
                       <a:endParaRPr lang="en-US" sz="1300" dirty="0"/>
                     </a:p>
@@ -6479,7 +6479,7 @@
                             <a:schemeClr val="tx2"/>
                           </a:solidFill>
                         </a:rPr>
-                        <a:t>20.180</a:t>
+                        <a:t>19.135</a:t>
                       </a:r>
                       <a:endParaRPr lang="en-US" sz="1300" dirty="0"/>
                     </a:p>
@@ -6597,7 +6597,7 @@
                             <a:schemeClr val="tx2"/>
                           </a:solidFill>
                         </a:rPr>
-                        <a:t>23.397</a:t>
+                        <a:t>22.244</a:t>
                       </a:r>
                       <a:endParaRPr lang="en-US" sz="1300" dirty="0"/>
                     </a:p>
@@ -6715,7 +6715,7 @@
                             <a:schemeClr val="tx2"/>
                           </a:solidFill>
                         </a:rPr>
-                        <a:t>35.194</a:t>
+                        <a:t>34.489</a:t>
                       </a:r>
                       <a:endParaRPr lang="en-US" sz="1300" dirty="0"/>
                     </a:p>
@@ -6912,7 +6912,7 @@
                   <a:schemeClr val="accent6"/>
                 </a:solidFill>
               </a:rPr>
-              <a:t>Software interno: cerca de 1.144 h, ou R$ 119 mil. RFID futuro: + R$ 29 mil e 80 h. Com 10% de contingência e o software, a Arquitetura A soma cerca de R$ 477 mil.</a:t>
+              <a:t>Software interno: cerca de 1.144 h, ou R$ 119 mil. RFID futuro: + R$ 29 mil e 80 h. Com 10% de contingência e o software, a Arquitetura A soma cerca de R$ 455 mil.</a:t>
             </a:r>
             <a:endParaRPr lang="en-US" sz="1200" dirty="0"/>
           </a:p>
@@ -7151,7 +7151,7 @@
                   <a:schemeClr val="accent2"/>
                 </a:solidFill>
               </a:rPr>
-              <a:t>R$ 326 mil</a:t>
+              <a:t>R$ 305 mil</a:t>
             </a:r>
             <a:endParaRPr lang="en-US" sz="3000" dirty="0"/>
           </a:p>
@@ -7412,7 +7412,7 @@
                   <a:schemeClr val="accent3"/>
                 </a:solidFill>
               </a:rPr>
-              <a:t>R$ 342 mil</a:t>
+              <a:t>R$ 328 mil</a:t>
             </a:r>
             <a:endParaRPr lang="en-US" sz="3000" dirty="0"/>
           </a:p>
@@ -7767,7 +7767,7 @@
                   <a:schemeClr val="tx2"/>
                 </a:solidFill>
               </a:rPr>
-              <a:t>Cerca de 2,3 vezes o custo interno</a:t>
+              <a:t>Cerca de 2,5 vezes o custo interno</a:t>
             </a:r>
             <a:endParaRPr lang="en-US" sz="1400" dirty="0"/>
           </a:p>
@@ -8253,7 +8253,7 @@
                 <a:ea typeface="Arial" pitchFamily="34" charset="-122"/>
                 <a:cs typeface="Arial" pitchFamily="34" charset="-120"/>
               </a:rPr>
-              <a:t>R$ 326 mil</a:t>
+              <a:t>R$ 305 mil</a:t>
             </a:r>
             <a:endParaRPr lang="en-US" sz="3000" dirty="0"/>
           </a:p>
@@ -8391,7 +8391,7 @@
                 <a:ea typeface="Arial" pitchFamily="34" charset="-122"/>
                 <a:cs typeface="Arial" pitchFamily="34" charset="-120"/>
               </a:rPr>
-              <a:t>R$ 23,4 mil</a:t>
+              <a:t>R$ 22,2 mil</a:t>
             </a:r>
             <a:endParaRPr lang="en-US" sz="3000" dirty="0"/>
           </a:p>
@@ -11094,7 +11094,7 @@
                   <a:srgbClr val="C9D3E0"/>
                 </a:solidFill>
               </a:rPr>
-              <a:t>1. Aprovar a POC: bancada + estações 04 e 27 (cerca de R$ 23,4 mil)</a:t>
+              <a:t>1. Aprovar a POC: bancada + estações 04 e 27 (cerca de R$ 22,2 mil)</a:t>
             </a:r>
             <a:endParaRPr lang="en-US" sz="2000" dirty="0"/>
           </a:p>
@@ -14447,7 +14447,7 @@
                             <a:schemeClr val="tx2"/>
                           </a:solidFill>
                         </a:rPr>
-                        <a:t>R$ 326 mil</a:t>
+                        <a:t>R$ 305 mil</a:t>
                       </a:r>
                       <a:endParaRPr lang="en-US" sz="1500" dirty="0"/>
                     </a:p>
